--- a/BPL_Presentation.pptx
+++ b/BPL_Presentation.pptx
@@ -3111,7 +3111,7 @@
       <p:grpSpPr/>
       <p:pic>
         <p:nvPicPr>
-          <p:cNvPr id="2" name="Picture 1" descr="slide1_background.png"/>
+          <p:cNvPr id="2" name="Picture 1" descr="user_split_image.jpg"/>
           <p:cNvPicPr>
             <a:picLocks noChangeAspect="1"/>
           </p:cNvPicPr>
@@ -3149,7 +3149,7 @@
           </a:prstGeom>
           <a:solidFill>
             <a:srgbClr val="0a0e1a">
-              <a:alpha val="85000"/>
+              <a:alpha val="80000"/>
             </a:srgbClr>
           </a:solidFill>
           <a:ln>

--- a/BPL_Presentation.pptx
+++ b/BPL_Presentation.pptx
@@ -3109,49 +3109,31 @@
         <p:nvPr/>
       </p:nvGrpSpPr>
       <p:grpSpPr/>
-      <p:pic>
-        <p:nvPicPr>
-          <p:cNvPr id="2" name="Picture 1" descr="user_split_image.jpg"/>
-          <p:cNvPicPr>
-            <a:picLocks noChangeAspect="1"/>
-          </p:cNvPicPr>
-          <p:nvPr/>
-        </p:nvPicPr>
-        <p:blipFill>
-          <a:blip r:embed="rId2"/>
-          <a:stretch>
-            <a:fillRect/>
-          </a:stretch>
-        </p:blipFill>
+      <p:sp>
+        <p:nvSpPr>
+          <p:cNvPr id="2" name="Rectangle 1"/>
+          <p:cNvSpPr/>
+          <p:nvPr/>
+        </p:nvSpPr>
         <p:spPr>
           <a:xfrm>
             <a:off x="0" y="0"/>
-            <a:ext cx="12188952" cy="6858000"/>
-          </a:xfrm>
-          <a:prstGeom prst="rect">
-            <a:avLst/>
-          </a:prstGeom>
-        </p:spPr>
-      </p:pic>
-      <p:sp>
-        <p:nvSpPr>
-          <p:cNvPr id="3" name="Rectangle 2"/>
-          <p:cNvSpPr/>
-          <p:nvPr/>
-        </p:nvSpPr>
-        <p:spPr>
-          <a:xfrm>
-            <a:off x="0" y="0"/>
-            <a:ext cx="12188952" cy="6858000"/>
-          </a:xfrm>
-          <a:prstGeom prst="rect">
-            <a:avLst/>
-          </a:prstGeom>
-          <a:solidFill>
-            <a:srgbClr val="0a0e1a">
-              <a:alpha val="80000"/>
-            </a:srgbClr>
-          </a:solidFill>
+            <a:ext cx="5943600" cy="6858000"/>
+          </a:xfrm>
+          <a:prstGeom prst="rect">
+            <a:avLst/>
+          </a:prstGeom>
+          <a:gradFill rotWithShape="1">
+            <a:gsLst>
+              <a:gs pos="0">
+                <a:srgbClr val="0a0e1a"/>
+              </a:gs>
+              <a:gs pos="100000">
+                <a:srgbClr val="10182e"/>
+              </a:gs>
+            </a:gsLst>
+            <a:lin ang="5400000" scaled="0"/>
+          </a:gradFill>
           <a:ln>
             <a:noFill/>
           </a:ln>
@@ -3180,7 +3162,7 @@
       </p:sp>
       <p:sp>
         <p:nvSpPr>
-          <p:cNvPr id="4" name="Rectangle 3"/>
+          <p:cNvPr id="3" name="Rectangle 2"/>
           <p:cNvSpPr/>
           <p:nvPr/>
         </p:nvSpPr>
@@ -3272,7 +3254,7 @@
         </p:nvSpPr>
         <p:spPr>
           <a:xfrm>
-            <a:off x="274320" y="274320"/>
+            <a:off x="548640" y="365760"/>
             <a:ext cx="2743200" cy="731520"/>
           </a:xfrm>
           <a:prstGeom prst="rect">
@@ -3307,8 +3289,8 @@
         </p:nvSpPr>
         <p:spPr>
           <a:xfrm>
-            <a:off x="457200" y="1005840"/>
-            <a:ext cx="11247120" cy="1097280"/>
+            <a:off x="548640" y="1097280"/>
+            <a:ext cx="5303520" cy="1463040"/>
           </a:xfrm>
           <a:prstGeom prst="rect">
             <a:avLst/>
@@ -3321,9 +3303,9 @@
           </a:bodyPr>
           <a:lstStyle/>
           <a:p>
-            <a:pPr algn="ctr"/>
-            <a:r>
-              <a:rPr sz="3800" b="1" i="0">
+            <a:pPr algn="l"/>
+            <a:r>
+              <a:rPr sz="3200" b="1" i="0">
                 <a:solidFill>
                   <a:srgbClr val="FFFFFF"/>
                 </a:solidFill>
@@ -3342,8 +3324,8 @@
         </p:nvSpPr>
         <p:spPr>
           <a:xfrm>
-            <a:off x="457200" y="2011680"/>
-            <a:ext cx="11247120" cy="914400"/>
+            <a:off x="548640" y="2468880"/>
+            <a:ext cx="5303520" cy="731520"/>
           </a:xfrm>
           <a:prstGeom prst="rect">
             <a:avLst/>
@@ -3356,9 +3338,9 @@
           </a:bodyPr>
           <a:lstStyle/>
           <a:p>
-            <a:pPr algn="ctr"/>
-            <a:r>
-              <a:rPr sz="3800" b="1" i="0">
+            <a:pPr algn="l"/>
+            <a:r>
+              <a:rPr sz="3200" b="1" i="0">
                 <a:solidFill>
                   <a:srgbClr val="00C853"/>
                 </a:solidFill>
@@ -3377,8 +3359,8 @@
         </p:nvSpPr>
         <p:spPr>
           <a:xfrm>
-            <a:off x="3200400" y="3017520"/>
-            <a:ext cx="5788152" cy="45720"/>
+            <a:off x="548640" y="3291840"/>
+            <a:ext cx="4572000" cy="45720"/>
           </a:xfrm>
           <a:prstGeom prst="rect">
             <a:avLst/>
@@ -3420,8 +3402,8 @@
         </p:nvSpPr>
         <p:spPr>
           <a:xfrm>
-            <a:off x="457200" y="3200400"/>
-            <a:ext cx="11247120" cy="548640"/>
+            <a:off x="548640" y="3474720"/>
+            <a:ext cx="5303520" cy="731520"/>
           </a:xfrm>
           <a:prstGeom prst="rect">
             <a:avLst/>
@@ -3434,9 +3416,9 @@
           </a:bodyPr>
           <a:lstStyle/>
           <a:p>
-            <a:pPr algn="ctr"/>
-            <a:r>
-              <a:rPr sz="1500" b="0" i="1">
+            <a:pPr algn="l"/>
+            <a:r>
+              <a:rPr sz="1400" b="0" i="1">
                 <a:solidFill>
                   <a:srgbClr val="CCD6E8"/>
                 </a:solidFill>
@@ -3455,8 +3437,8 @@
         </p:nvSpPr>
         <p:spPr>
           <a:xfrm>
-            <a:off x="3474720" y="3931920"/>
-            <a:ext cx="5212080" cy="2286000"/>
+            <a:off x="548640" y="4206240"/>
+            <a:ext cx="5029200" cy="2194560"/>
           </a:xfrm>
           <a:prstGeom prst="rect">
             <a:avLst/>
@@ -3500,8 +3482,8 @@
         </p:nvSpPr>
         <p:spPr>
           <a:xfrm>
-            <a:off x="3474720" y="3931920"/>
-            <a:ext cx="5212080" cy="411480"/>
+            <a:off x="548640" y="4206240"/>
+            <a:ext cx="5029200" cy="411480"/>
           </a:xfrm>
           <a:prstGeom prst="rect">
             <a:avLst/>
@@ -3535,8 +3517,8 @@
         </p:nvSpPr>
         <p:spPr>
           <a:xfrm>
-            <a:off x="3749039" y="4343400"/>
-            <a:ext cx="4663440" cy="320040"/>
+            <a:off x="822960" y="4617720"/>
+            <a:ext cx="4480560" cy="320040"/>
           </a:xfrm>
           <a:prstGeom prst="rect">
             <a:avLst/>
@@ -3570,8 +3552,8 @@
         </p:nvSpPr>
         <p:spPr>
           <a:xfrm>
-            <a:off x="3749039" y="4654296"/>
-            <a:ext cx="4663440" cy="320040"/>
+            <a:off x="822960" y="4928616"/>
+            <a:ext cx="4480560" cy="320040"/>
           </a:xfrm>
           <a:prstGeom prst="rect">
             <a:avLst/>
@@ -3605,8 +3587,8 @@
         </p:nvSpPr>
         <p:spPr>
           <a:xfrm>
-            <a:off x="3749039" y="4965192"/>
-            <a:ext cx="4663440" cy="320040"/>
+            <a:off x="822960" y="5239512"/>
+            <a:ext cx="4480560" cy="320040"/>
           </a:xfrm>
           <a:prstGeom prst="rect">
             <a:avLst/>
@@ -3640,8 +3622,8 @@
         </p:nvSpPr>
         <p:spPr>
           <a:xfrm>
-            <a:off x="3749039" y="5276088"/>
-            <a:ext cx="4663440" cy="320040"/>
+            <a:off x="822960" y="5550408"/>
+            <a:ext cx="4480560" cy="320040"/>
           </a:xfrm>
           <a:prstGeom prst="rect">
             <a:avLst/>
@@ -3675,8 +3657,8 @@
         </p:nvSpPr>
         <p:spPr>
           <a:xfrm>
-            <a:off x="3749039" y="5586984"/>
-            <a:ext cx="4663440" cy="320040"/>
+            <a:off x="822960" y="5861304"/>
+            <a:ext cx="4480560" cy="320040"/>
           </a:xfrm>
           <a:prstGeom prst="rect">
             <a:avLst/>
@@ -3705,6 +3687,73 @@
       <p:sp>
         <p:nvSpPr>
           <p:cNvPr id="31" name="Rectangle 30"/>
+          <p:cNvSpPr/>
+          <p:nvPr/>
+        </p:nvSpPr>
+        <p:spPr>
+          <a:xfrm>
+            <a:off x="6217920" y="822960"/>
+            <a:ext cx="5212080" cy="5212080"/>
+          </a:xfrm>
+          <a:prstGeom prst="rect">
+            <a:avLst/>
+          </a:prstGeom>
+          <a:noFill/>
+          <a:ln w="31750">
+            <a:solidFill>
+              <a:srgbClr val="FFD700"/>
+            </a:solidFill>
+          </a:ln>
+        </p:spPr>
+        <p:style>
+          <a:lnRef idx="1">
+            <a:schemeClr val="accent1"/>
+          </a:lnRef>
+          <a:fillRef idx="3">
+            <a:schemeClr val="accent1"/>
+          </a:fillRef>
+          <a:effectRef idx="2">
+            <a:schemeClr val="accent1"/>
+          </a:effectRef>
+          <a:fontRef idx="minor">
+            <a:schemeClr val="lt1"/>
+          </a:fontRef>
+        </p:style>
+        <p:txBody>
+          <a:bodyPr rtlCol="0" anchor="ctr"/>
+          <a:lstStyle/>
+          <a:p>
+            <a:pPr algn="ctr"/>
+          </a:p>
+        </p:txBody>
+      </p:sp>
+      <p:pic>
+        <p:nvPicPr>
+          <p:cNvPr id="33" name="Picture 32" descr="user_split_image.jpg"/>
+          <p:cNvPicPr>
+            <a:picLocks noChangeAspect="1"/>
+          </p:cNvPicPr>
+          <p:nvPr/>
+        </p:nvPicPr>
+        <p:blipFill>
+          <a:blip r:embed="rId2"/>
+          <a:stretch>
+            <a:fillRect/>
+          </a:stretch>
+        </p:blipFill>
+        <p:spPr>
+          <a:xfrm>
+            <a:off x="6263640" y="868680"/>
+            <a:ext cx="5120640" cy="5120640"/>
+          </a:xfrm>
+          <a:prstGeom prst="rect">
+            <a:avLst/>
+          </a:prstGeom>
+        </p:spPr>
+      </p:pic>
+      <p:sp>
+        <p:nvSpPr>
+          <p:cNvPr id="35" name="Rectangle 34"/>
           <p:cNvSpPr/>
           <p:nvPr/>
         </p:nvSpPr>
@@ -3747,7 +3796,7 @@
       </p:sp>
       <p:sp>
         <p:nvSpPr>
-          <p:cNvPr id="33" name="TextBox 32"/>
+          <p:cNvPr id="37" name="TextBox 36"/>
           <p:cNvSpPr txBox="1"/>
           <p:nvPr/>
         </p:nvSpPr>
@@ -3799,7 +3848,7 @@
                             <p:cBhvr>
                               <p:cTn id="4" dur="700" fill="hold"/>
                               <p:tgtEl>
-                                <p:spTgt spid="4"/>
+                                <p:spTgt spid="3"/>
                               </p:tgtEl>
                             </p:cBhvr>
                           </p:animEffect>
@@ -4028,33 +4077,67 @@
                       </p:cTn>
                     </p:par>
                     <p:par>
-                      <p:cTn id="31" presetID="10" presetClass="entr" presetSubtype="0" fill="hold" grpId="0" nodeType="clickEffect">
+                      <p:cTn id="31" presetID="22" presetClass="entr" presetSubtype="0" fill="hold" grpId="0" nodeType="clickEffect">
+                        <p:stCondLst>
+                          <p:cond delay="600"/>
+                        </p:stCondLst>
+                        <p:childTnLst>
+                          <p:animEffect transition="in" filter="zoom">
+                            <p:cBhvr>
+                              <p:cTn id="32" dur="500" fill="hold"/>
+                              <p:tgtEl>
+                                <p:spTgt spid="31"/>
+                              </p:tgtEl>
+                            </p:cBhvr>
+                          </p:animEffect>
+                        </p:childTnLst>
+                      </p:cTn>
+                    </p:par>
+                    <p:par>
+                      <p:cTn id="33" presetID="22" presetClass="entr" presetSubtype="0" fill="hold" grpId="0" nodeType="clickEffect">
+                        <p:stCondLst>
+                          <p:cond delay="700"/>
+                        </p:stCondLst>
+                        <p:childTnLst>
+                          <p:animEffect transition="in" filter="zoom">
+                            <p:cBhvr>
+                              <p:cTn id="34" dur="500" fill="hold"/>
+                              <p:tgtEl>
+                                <p:spTgt spid="33"/>
+                              </p:tgtEl>
+                            </p:cBhvr>
+                          </p:animEffect>
+                        </p:childTnLst>
+                      </p:cTn>
+                    </p:par>
+                    <p:par>
+                      <p:cTn id="35" presetID="10" presetClass="entr" presetSubtype="0" fill="hold" grpId="0" nodeType="clickEffect">
                         <p:stCondLst>
                           <p:cond delay="0"/>
                         </p:stCondLst>
                         <p:childTnLst>
                           <p:animEffect transition="in" filter="fade">
                             <p:cBhvr>
-                              <p:cTn id="32" dur="700" fill="hold"/>
-                              <p:tgtEl>
-                                <p:spTgt spid="31"/>
-                              </p:tgtEl>
-                            </p:cBhvr>
-                          </p:animEffect>
-                        </p:childTnLst>
-                      </p:cTn>
-                    </p:par>
-                    <p:par>
-                      <p:cTn id="33" presetID="10" presetClass="entr" presetSubtype="0" fill="hold" grpId="0" nodeType="clickEffect">
+                              <p:cTn id="36" dur="700" fill="hold"/>
+                              <p:tgtEl>
+                                <p:spTgt spid="35"/>
+                              </p:tgtEl>
+                            </p:cBhvr>
+                          </p:animEffect>
+                        </p:childTnLst>
+                      </p:cTn>
+                    </p:par>
+                    <p:par>
+                      <p:cTn id="37" presetID="10" presetClass="entr" presetSubtype="0" fill="hold" grpId="0" nodeType="clickEffect">
                         <p:stCondLst>
                           <p:cond delay="0"/>
                         </p:stCondLst>
                         <p:childTnLst>
                           <p:animEffect transition="in" filter="fade">
                             <p:cBhvr>
-                              <p:cTn id="34" dur="700" fill="hold"/>
-                              <p:tgtEl>
-                                <p:spTgt spid="33"/>
+                              <p:cTn id="38" dur="700" fill="hold"/>
+                              <p:tgtEl>
+                                <p:spTgt spid="37"/>
                               </p:tgtEl>
                             </p:cBhvr>
                           </p:animEffect>
@@ -4223,7 +4306,7 @@
       </p:sp>
       <p:sp>
         <p:nvSpPr>
-          <p:cNvPr id="291" name="Rectangle 290"/>
+          <p:cNvPr id="295" name="Rectangle 294"/>
           <p:cNvSpPr/>
           <p:nvPr/>
         </p:nvSpPr>
@@ -4268,7 +4351,7 @@
       </p:sp>
       <p:sp>
         <p:nvSpPr>
-          <p:cNvPr id="293" name="TextBox 292"/>
+          <p:cNvPr id="297" name="TextBox 296"/>
           <p:cNvSpPr txBox="1"/>
           <p:nvPr/>
         </p:nvSpPr>
@@ -4303,7 +4386,7 @@
       </p:sp>
       <p:sp>
         <p:nvSpPr>
-          <p:cNvPr id="295" name="TextBox 294"/>
+          <p:cNvPr id="299" name="TextBox 298"/>
           <p:cNvSpPr txBox="1"/>
           <p:nvPr/>
         </p:nvSpPr>
@@ -4338,7 +4421,7 @@
       </p:sp>
       <p:sp>
         <p:nvSpPr>
-          <p:cNvPr id="297" name="TextBox 296"/>
+          <p:cNvPr id="301" name="TextBox 300"/>
           <p:cNvSpPr txBox="1"/>
           <p:nvPr/>
         </p:nvSpPr>
@@ -4373,7 +4456,7 @@
       </p:sp>
       <p:sp>
         <p:nvSpPr>
-          <p:cNvPr id="299" name="Rectangle 298"/>
+          <p:cNvPr id="303" name="Rectangle 302"/>
           <p:cNvSpPr/>
           <p:nvPr/>
         </p:nvSpPr>
@@ -4418,7 +4501,7 @@
       </p:sp>
       <p:sp>
         <p:nvSpPr>
-          <p:cNvPr id="301" name="TextBox 300"/>
+          <p:cNvPr id="305" name="TextBox 304"/>
           <p:cNvSpPr txBox="1"/>
           <p:nvPr/>
         </p:nvSpPr>
@@ -4453,7 +4536,7 @@
       </p:sp>
       <p:sp>
         <p:nvSpPr>
-          <p:cNvPr id="303" name="TextBox 302"/>
+          <p:cNvPr id="307" name="TextBox 306"/>
           <p:cNvSpPr txBox="1"/>
           <p:nvPr/>
         </p:nvSpPr>
@@ -4488,7 +4571,7 @@
       </p:sp>
       <p:sp>
         <p:nvSpPr>
-          <p:cNvPr id="305" name="TextBox 304"/>
+          <p:cNvPr id="309" name="TextBox 308"/>
           <p:cNvSpPr txBox="1"/>
           <p:nvPr/>
         </p:nvSpPr>
@@ -4523,7 +4606,7 @@
       </p:sp>
       <p:sp>
         <p:nvSpPr>
-          <p:cNvPr id="307" name="Rectangle 306"/>
+          <p:cNvPr id="311" name="Rectangle 310"/>
           <p:cNvSpPr/>
           <p:nvPr/>
         </p:nvSpPr>
@@ -4568,7 +4651,7 @@
       </p:sp>
       <p:sp>
         <p:nvSpPr>
-          <p:cNvPr id="309" name="TextBox 308"/>
+          <p:cNvPr id="313" name="TextBox 312"/>
           <p:cNvSpPr txBox="1"/>
           <p:nvPr/>
         </p:nvSpPr>
@@ -4603,7 +4686,7 @@
       </p:sp>
       <p:sp>
         <p:nvSpPr>
-          <p:cNvPr id="311" name="TextBox 310"/>
+          <p:cNvPr id="315" name="TextBox 314"/>
           <p:cNvSpPr txBox="1"/>
           <p:nvPr/>
         </p:nvSpPr>
@@ -4638,7 +4721,7 @@
       </p:sp>
       <p:sp>
         <p:nvSpPr>
-          <p:cNvPr id="313" name="TextBox 312"/>
+          <p:cNvPr id="317" name="TextBox 316"/>
           <p:cNvSpPr txBox="1"/>
           <p:nvPr/>
         </p:nvSpPr>
@@ -4673,7 +4756,7 @@
       </p:sp>
       <p:sp>
         <p:nvSpPr>
-          <p:cNvPr id="315" name="Rectangle 314"/>
+          <p:cNvPr id="319" name="Rectangle 318"/>
           <p:cNvSpPr/>
           <p:nvPr/>
         </p:nvSpPr>
@@ -4718,7 +4801,7 @@
       </p:sp>
       <p:sp>
         <p:nvSpPr>
-          <p:cNvPr id="317" name="TextBox 316"/>
+          <p:cNvPr id="321" name="TextBox 320"/>
           <p:cNvSpPr txBox="1"/>
           <p:nvPr/>
         </p:nvSpPr>
@@ -4753,7 +4836,7 @@
       </p:sp>
       <p:sp>
         <p:nvSpPr>
-          <p:cNvPr id="319" name="TextBox 318"/>
+          <p:cNvPr id="323" name="TextBox 322"/>
           <p:cNvSpPr txBox="1"/>
           <p:nvPr/>
         </p:nvSpPr>
@@ -4788,7 +4871,7 @@
       </p:sp>
       <p:sp>
         <p:nvSpPr>
-          <p:cNvPr id="321" name="TextBox 320"/>
+          <p:cNvPr id="325" name="TextBox 324"/>
           <p:cNvSpPr txBox="1"/>
           <p:nvPr/>
         </p:nvSpPr>
@@ -4823,7 +4906,7 @@
       </p:sp>
       <p:sp>
         <p:nvSpPr>
-          <p:cNvPr id="323" name="Rectangle 322"/>
+          <p:cNvPr id="327" name="Rectangle 326"/>
           <p:cNvSpPr/>
           <p:nvPr/>
         </p:nvSpPr>
@@ -4868,7 +4951,7 @@
       </p:sp>
       <p:sp>
         <p:nvSpPr>
-          <p:cNvPr id="325" name="TextBox 324"/>
+          <p:cNvPr id="329" name="TextBox 328"/>
           <p:cNvSpPr txBox="1"/>
           <p:nvPr/>
         </p:nvSpPr>
@@ -4903,7 +4986,7 @@
       </p:sp>
       <p:sp>
         <p:nvSpPr>
-          <p:cNvPr id="327" name="TextBox 326"/>
+          <p:cNvPr id="331" name="TextBox 330"/>
           <p:cNvSpPr txBox="1"/>
           <p:nvPr/>
         </p:nvSpPr>
@@ -4938,7 +5021,7 @@
       </p:sp>
       <p:sp>
         <p:nvSpPr>
-          <p:cNvPr id="329" name="TextBox 328"/>
+          <p:cNvPr id="333" name="TextBox 332"/>
           <p:cNvSpPr txBox="1"/>
           <p:nvPr/>
         </p:nvSpPr>
@@ -4973,7 +5056,7 @@
       </p:sp>
       <p:sp>
         <p:nvSpPr>
-          <p:cNvPr id="331" name="Rectangle 330"/>
+          <p:cNvPr id="335" name="Rectangle 334"/>
           <p:cNvSpPr/>
           <p:nvPr/>
         </p:nvSpPr>
@@ -5018,7 +5101,7 @@
       </p:sp>
       <p:sp>
         <p:nvSpPr>
-          <p:cNvPr id="333" name="TextBox 332"/>
+          <p:cNvPr id="337" name="TextBox 336"/>
           <p:cNvSpPr txBox="1"/>
           <p:nvPr/>
         </p:nvSpPr>
@@ -5053,7 +5136,7 @@
       </p:sp>
       <p:sp>
         <p:nvSpPr>
-          <p:cNvPr id="335" name="TextBox 334"/>
+          <p:cNvPr id="339" name="TextBox 338"/>
           <p:cNvSpPr txBox="1"/>
           <p:nvPr/>
         </p:nvSpPr>
@@ -5088,7 +5171,7 @@
       </p:sp>
       <p:sp>
         <p:nvSpPr>
-          <p:cNvPr id="337" name="TextBox 336"/>
+          <p:cNvPr id="341" name="TextBox 340"/>
           <p:cNvSpPr txBox="1"/>
           <p:nvPr/>
         </p:nvSpPr>
@@ -5131,14 +5214,14 @@
                 <p:cTn id="2" dur="indefinite" nodeType="mainSeq">
                   <p:childTnLst>
                     <p:par>
-                      <p:cTn id="289" presetID="2" presetClass="entr" presetSubtype="8" fill="hold" grpId="0" nodeType="clickEffect">
+                      <p:cTn id="293" presetID="2" presetClass="entr" presetSubtype="8" fill="hold" grpId="0" nodeType="clickEffect">
                         <p:stCondLst>
                           <p:cond delay="0"/>
                         </p:stCondLst>
                         <p:childTnLst>
                           <p:animEffect transition="in" filter="fly">
                             <p:cBhvr>
-                              <p:cTn id="290" dur="600" fill="hold"/>
+                              <p:cTn id="294" dur="600" fill="hold"/>
                               <p:tgtEl>
                                 <p:spTgt spid="4"/>
                               </p:tgtEl>
@@ -5148,407 +5231,407 @@
                       </p:cTn>
                     </p:par>
                     <p:par>
-                      <p:cTn id="291" presetID="22" presetClass="entr" presetSubtype="0" fill="hold" grpId="0" nodeType="clickEffect">
+                      <p:cTn id="295" presetID="22" presetClass="entr" presetSubtype="0" fill="hold" grpId="0" nodeType="clickEffect">
                         <p:stCondLst>
                           <p:cond delay="200"/>
                         </p:stCondLst>
                         <p:childTnLst>
                           <p:animEffect transition="in" filter="zoom">
                             <p:cBhvr>
-                              <p:cTn id="292" dur="500" fill="hold"/>
-                              <p:tgtEl>
-                                <p:spTgt spid="291"/>
-                              </p:tgtEl>
-                            </p:cBhvr>
-                          </p:animEffect>
-                        </p:childTnLst>
-                      </p:cTn>
-                    </p:par>
-                    <p:par>
-                      <p:cTn id="293" presetID="10" presetClass="entr" presetSubtype="0" fill="hold" grpId="0" nodeType="clickEffect">
+                              <p:cTn id="296" dur="500" fill="hold"/>
+                              <p:tgtEl>
+                                <p:spTgt spid="295"/>
+                              </p:tgtEl>
+                            </p:cBhvr>
+                          </p:animEffect>
+                        </p:childTnLst>
+                      </p:cTn>
+                    </p:par>
+                    <p:par>
+                      <p:cTn id="297" presetID="10" presetClass="entr" presetSubtype="0" fill="hold" grpId="0" nodeType="clickEffect">
                         <p:stCondLst>
                           <p:cond delay="300"/>
                         </p:stCondLst>
                         <p:childTnLst>
                           <p:animEffect transition="in" filter="fade">
                             <p:cBhvr>
-                              <p:cTn id="294" dur="700" fill="hold"/>
-                              <p:tgtEl>
-                                <p:spTgt spid="293"/>
-                              </p:tgtEl>
-                            </p:cBhvr>
-                          </p:animEffect>
-                        </p:childTnLst>
-                      </p:cTn>
-                    </p:par>
-                    <p:par>
-                      <p:cTn id="295" presetID="10" presetClass="entr" presetSubtype="0" fill="hold" grpId="0" nodeType="clickEffect">
+                              <p:cTn id="298" dur="700" fill="hold"/>
+                              <p:tgtEl>
+                                <p:spTgt spid="297"/>
+                              </p:tgtEl>
+                            </p:cBhvr>
+                          </p:animEffect>
+                        </p:childTnLst>
+                      </p:cTn>
+                    </p:par>
+                    <p:par>
+                      <p:cTn id="299" presetID="10" presetClass="entr" presetSubtype="0" fill="hold" grpId="0" nodeType="clickEffect">
                         <p:stCondLst>
                           <p:cond delay="400"/>
                         </p:stCondLst>
                         <p:childTnLst>
                           <p:animEffect transition="in" filter="fade">
                             <p:cBhvr>
-                              <p:cTn id="296" dur="700" fill="hold"/>
-                              <p:tgtEl>
-                                <p:spTgt spid="295"/>
-                              </p:tgtEl>
-                            </p:cBhvr>
-                          </p:animEffect>
-                        </p:childTnLst>
-                      </p:cTn>
-                    </p:par>
-                    <p:par>
-                      <p:cTn id="297" presetID="10" presetClass="entr" presetSubtype="0" fill="hold" grpId="0" nodeType="clickEffect">
+                              <p:cTn id="300" dur="700" fill="hold"/>
+                              <p:tgtEl>
+                                <p:spTgt spid="299"/>
+                              </p:tgtEl>
+                            </p:cBhvr>
+                          </p:animEffect>
+                        </p:childTnLst>
+                      </p:cTn>
+                    </p:par>
+                    <p:par>
+                      <p:cTn id="301" presetID="10" presetClass="entr" presetSubtype="0" fill="hold" grpId="0" nodeType="clickEffect">
                         <p:stCondLst>
                           <p:cond delay="500"/>
                         </p:stCondLst>
                         <p:childTnLst>
                           <p:animEffect transition="in" filter="fade">
                             <p:cBhvr>
-                              <p:cTn id="298" dur="700" fill="hold"/>
-                              <p:tgtEl>
-                                <p:spTgt spid="297"/>
-                              </p:tgtEl>
-                            </p:cBhvr>
-                          </p:animEffect>
-                        </p:childTnLst>
-                      </p:cTn>
-                    </p:par>
-                    <p:par>
-                      <p:cTn id="299" presetID="22" presetClass="entr" presetSubtype="0" fill="hold" grpId="0" nodeType="clickEffect">
+                              <p:cTn id="302" dur="700" fill="hold"/>
+                              <p:tgtEl>
+                                <p:spTgt spid="301"/>
+                              </p:tgtEl>
+                            </p:cBhvr>
+                          </p:animEffect>
+                        </p:childTnLst>
+                      </p:cTn>
+                    </p:par>
+                    <p:par>
+                      <p:cTn id="303" presetID="22" presetClass="entr" presetSubtype="0" fill="hold" grpId="0" nodeType="clickEffect">
                         <p:stCondLst>
                           <p:cond delay="450"/>
                         </p:stCondLst>
                         <p:childTnLst>
                           <p:animEffect transition="in" filter="zoom">
                             <p:cBhvr>
-                              <p:cTn id="300" dur="500" fill="hold"/>
-                              <p:tgtEl>
-                                <p:spTgt spid="299"/>
-                              </p:tgtEl>
-                            </p:cBhvr>
-                          </p:animEffect>
-                        </p:childTnLst>
-                      </p:cTn>
-                    </p:par>
-                    <p:par>
-                      <p:cTn id="301" presetID="10" presetClass="entr" presetSubtype="0" fill="hold" grpId="0" nodeType="clickEffect">
+                              <p:cTn id="304" dur="500" fill="hold"/>
+                              <p:tgtEl>
+                                <p:spTgt spid="303"/>
+                              </p:tgtEl>
+                            </p:cBhvr>
+                          </p:animEffect>
+                        </p:childTnLst>
+                      </p:cTn>
+                    </p:par>
+                    <p:par>
+                      <p:cTn id="305" presetID="10" presetClass="entr" presetSubtype="0" fill="hold" grpId="0" nodeType="clickEffect">
                         <p:stCondLst>
                           <p:cond delay="550"/>
                         </p:stCondLst>
                         <p:childTnLst>
                           <p:animEffect transition="in" filter="fade">
                             <p:cBhvr>
-                              <p:cTn id="302" dur="700" fill="hold"/>
-                              <p:tgtEl>
-                                <p:spTgt spid="301"/>
-                              </p:tgtEl>
-                            </p:cBhvr>
-                          </p:animEffect>
-                        </p:childTnLst>
-                      </p:cTn>
-                    </p:par>
-                    <p:par>
-                      <p:cTn id="303" presetID="10" presetClass="entr" presetSubtype="0" fill="hold" grpId="0" nodeType="clickEffect">
+                              <p:cTn id="306" dur="700" fill="hold"/>
+                              <p:tgtEl>
+                                <p:spTgt spid="305"/>
+                              </p:tgtEl>
+                            </p:cBhvr>
+                          </p:animEffect>
+                        </p:childTnLst>
+                      </p:cTn>
+                    </p:par>
+                    <p:par>
+                      <p:cTn id="307" presetID="10" presetClass="entr" presetSubtype="0" fill="hold" grpId="0" nodeType="clickEffect">
                         <p:stCondLst>
                           <p:cond delay="650"/>
                         </p:stCondLst>
                         <p:childTnLst>
                           <p:animEffect transition="in" filter="fade">
                             <p:cBhvr>
-                              <p:cTn id="304" dur="700" fill="hold"/>
-                              <p:tgtEl>
-                                <p:spTgt spid="303"/>
-                              </p:tgtEl>
-                            </p:cBhvr>
-                          </p:animEffect>
-                        </p:childTnLst>
-                      </p:cTn>
-                    </p:par>
-                    <p:par>
-                      <p:cTn id="305" presetID="10" presetClass="entr" presetSubtype="0" fill="hold" grpId="0" nodeType="clickEffect">
+                              <p:cTn id="308" dur="700" fill="hold"/>
+                              <p:tgtEl>
+                                <p:spTgt spid="307"/>
+                              </p:tgtEl>
+                            </p:cBhvr>
+                          </p:animEffect>
+                        </p:childTnLst>
+                      </p:cTn>
+                    </p:par>
+                    <p:par>
+                      <p:cTn id="309" presetID="10" presetClass="entr" presetSubtype="0" fill="hold" grpId="0" nodeType="clickEffect">
                         <p:stCondLst>
                           <p:cond delay="750"/>
                         </p:stCondLst>
                         <p:childTnLst>
                           <p:animEffect transition="in" filter="fade">
                             <p:cBhvr>
-                              <p:cTn id="306" dur="700" fill="hold"/>
-                              <p:tgtEl>
-                                <p:spTgt spid="305"/>
-                              </p:tgtEl>
-                            </p:cBhvr>
-                          </p:animEffect>
-                        </p:childTnLst>
-                      </p:cTn>
-                    </p:par>
-                    <p:par>
-                      <p:cTn id="307" presetID="22" presetClass="entr" presetSubtype="0" fill="hold" grpId="0" nodeType="clickEffect">
+                              <p:cTn id="310" dur="700" fill="hold"/>
+                              <p:tgtEl>
+                                <p:spTgt spid="309"/>
+                              </p:tgtEl>
+                            </p:cBhvr>
+                          </p:animEffect>
+                        </p:childTnLst>
+                      </p:cTn>
+                    </p:par>
+                    <p:par>
+                      <p:cTn id="311" presetID="22" presetClass="entr" presetSubtype="0" fill="hold" grpId="0" nodeType="clickEffect">
                         <p:stCondLst>
                           <p:cond delay="700"/>
                         </p:stCondLst>
                         <p:childTnLst>
                           <p:animEffect transition="in" filter="zoom">
                             <p:cBhvr>
-                              <p:cTn id="308" dur="500" fill="hold"/>
-                              <p:tgtEl>
-                                <p:spTgt spid="307"/>
-                              </p:tgtEl>
-                            </p:cBhvr>
-                          </p:animEffect>
-                        </p:childTnLst>
-                      </p:cTn>
-                    </p:par>
-                    <p:par>
-                      <p:cTn id="309" presetID="10" presetClass="entr" presetSubtype="0" fill="hold" grpId="0" nodeType="clickEffect">
+                              <p:cTn id="312" dur="500" fill="hold"/>
+                              <p:tgtEl>
+                                <p:spTgt spid="311"/>
+                              </p:tgtEl>
+                            </p:cBhvr>
+                          </p:animEffect>
+                        </p:childTnLst>
+                      </p:cTn>
+                    </p:par>
+                    <p:par>
+                      <p:cTn id="313" presetID="10" presetClass="entr" presetSubtype="0" fill="hold" grpId="0" nodeType="clickEffect">
                         <p:stCondLst>
                           <p:cond delay="800"/>
                         </p:stCondLst>
                         <p:childTnLst>
                           <p:animEffect transition="in" filter="fade">
                             <p:cBhvr>
-                              <p:cTn id="310" dur="700" fill="hold"/>
-                              <p:tgtEl>
-                                <p:spTgt spid="309"/>
-                              </p:tgtEl>
-                            </p:cBhvr>
-                          </p:animEffect>
-                        </p:childTnLst>
-                      </p:cTn>
-                    </p:par>
-                    <p:par>
-                      <p:cTn id="311" presetID="10" presetClass="entr" presetSubtype="0" fill="hold" grpId="0" nodeType="clickEffect">
+                              <p:cTn id="314" dur="700" fill="hold"/>
+                              <p:tgtEl>
+                                <p:spTgt spid="313"/>
+                              </p:tgtEl>
+                            </p:cBhvr>
+                          </p:animEffect>
+                        </p:childTnLst>
+                      </p:cTn>
+                    </p:par>
+                    <p:par>
+                      <p:cTn id="315" presetID="10" presetClass="entr" presetSubtype="0" fill="hold" grpId="0" nodeType="clickEffect">
                         <p:stCondLst>
                           <p:cond delay="900"/>
                         </p:stCondLst>
                         <p:childTnLst>
                           <p:animEffect transition="in" filter="fade">
                             <p:cBhvr>
-                              <p:cTn id="312" dur="700" fill="hold"/>
-                              <p:tgtEl>
-                                <p:spTgt spid="311"/>
-                              </p:tgtEl>
-                            </p:cBhvr>
-                          </p:animEffect>
-                        </p:childTnLst>
-                      </p:cTn>
-                    </p:par>
-                    <p:par>
-                      <p:cTn id="313" presetID="10" presetClass="entr" presetSubtype="0" fill="hold" grpId="0" nodeType="clickEffect">
+                              <p:cTn id="316" dur="700" fill="hold"/>
+                              <p:tgtEl>
+                                <p:spTgt spid="315"/>
+                              </p:tgtEl>
+                            </p:cBhvr>
+                          </p:animEffect>
+                        </p:childTnLst>
+                      </p:cTn>
+                    </p:par>
+                    <p:par>
+                      <p:cTn id="317" presetID="10" presetClass="entr" presetSubtype="0" fill="hold" grpId="0" nodeType="clickEffect">
                         <p:stCondLst>
                           <p:cond delay="1000"/>
                         </p:stCondLst>
                         <p:childTnLst>
                           <p:animEffect transition="in" filter="fade">
                             <p:cBhvr>
-                              <p:cTn id="314" dur="700" fill="hold"/>
-                              <p:tgtEl>
-                                <p:spTgt spid="313"/>
-                              </p:tgtEl>
-                            </p:cBhvr>
-                          </p:animEffect>
-                        </p:childTnLst>
-                      </p:cTn>
-                    </p:par>
-                    <p:par>
-                      <p:cTn id="315" presetID="22" presetClass="entr" presetSubtype="0" fill="hold" grpId="0" nodeType="clickEffect">
+                              <p:cTn id="318" dur="700" fill="hold"/>
+                              <p:tgtEl>
+                                <p:spTgt spid="317"/>
+                              </p:tgtEl>
+                            </p:cBhvr>
+                          </p:animEffect>
+                        </p:childTnLst>
+                      </p:cTn>
+                    </p:par>
+                    <p:par>
+                      <p:cTn id="319" presetID="22" presetClass="entr" presetSubtype="0" fill="hold" grpId="0" nodeType="clickEffect">
                         <p:stCondLst>
                           <p:cond delay="950"/>
                         </p:stCondLst>
                         <p:childTnLst>
                           <p:animEffect transition="in" filter="zoom">
                             <p:cBhvr>
-                              <p:cTn id="316" dur="500" fill="hold"/>
-                              <p:tgtEl>
-                                <p:spTgt spid="315"/>
-                              </p:tgtEl>
-                            </p:cBhvr>
-                          </p:animEffect>
-                        </p:childTnLst>
-                      </p:cTn>
-                    </p:par>
-                    <p:par>
-                      <p:cTn id="317" presetID="10" presetClass="entr" presetSubtype="0" fill="hold" grpId="0" nodeType="clickEffect">
+                              <p:cTn id="320" dur="500" fill="hold"/>
+                              <p:tgtEl>
+                                <p:spTgt spid="319"/>
+                              </p:tgtEl>
+                            </p:cBhvr>
+                          </p:animEffect>
+                        </p:childTnLst>
+                      </p:cTn>
+                    </p:par>
+                    <p:par>
+                      <p:cTn id="321" presetID="10" presetClass="entr" presetSubtype="0" fill="hold" grpId="0" nodeType="clickEffect">
                         <p:stCondLst>
                           <p:cond delay="1050"/>
                         </p:stCondLst>
                         <p:childTnLst>
                           <p:animEffect transition="in" filter="fade">
                             <p:cBhvr>
-                              <p:cTn id="318" dur="700" fill="hold"/>
-                              <p:tgtEl>
-                                <p:spTgt spid="317"/>
-                              </p:tgtEl>
-                            </p:cBhvr>
-                          </p:animEffect>
-                        </p:childTnLst>
-                      </p:cTn>
-                    </p:par>
-                    <p:par>
-                      <p:cTn id="319" presetID="10" presetClass="entr" presetSubtype="0" fill="hold" grpId="0" nodeType="clickEffect">
+                              <p:cTn id="322" dur="700" fill="hold"/>
+                              <p:tgtEl>
+                                <p:spTgt spid="321"/>
+                              </p:tgtEl>
+                            </p:cBhvr>
+                          </p:animEffect>
+                        </p:childTnLst>
+                      </p:cTn>
+                    </p:par>
+                    <p:par>
+                      <p:cTn id="323" presetID="10" presetClass="entr" presetSubtype="0" fill="hold" grpId="0" nodeType="clickEffect">
                         <p:stCondLst>
                           <p:cond delay="1150"/>
                         </p:stCondLst>
                         <p:childTnLst>
                           <p:animEffect transition="in" filter="fade">
                             <p:cBhvr>
-                              <p:cTn id="320" dur="700" fill="hold"/>
-                              <p:tgtEl>
-                                <p:spTgt spid="319"/>
-                              </p:tgtEl>
-                            </p:cBhvr>
-                          </p:animEffect>
-                        </p:childTnLst>
-                      </p:cTn>
-                    </p:par>
-                    <p:par>
-                      <p:cTn id="321" presetID="10" presetClass="entr" presetSubtype="0" fill="hold" grpId="0" nodeType="clickEffect">
+                              <p:cTn id="324" dur="700" fill="hold"/>
+                              <p:tgtEl>
+                                <p:spTgt spid="323"/>
+                              </p:tgtEl>
+                            </p:cBhvr>
+                          </p:animEffect>
+                        </p:childTnLst>
+                      </p:cTn>
+                    </p:par>
+                    <p:par>
+                      <p:cTn id="325" presetID="10" presetClass="entr" presetSubtype="0" fill="hold" grpId="0" nodeType="clickEffect">
                         <p:stCondLst>
                           <p:cond delay="1250"/>
                         </p:stCondLst>
                         <p:childTnLst>
                           <p:animEffect transition="in" filter="fade">
                             <p:cBhvr>
-                              <p:cTn id="322" dur="700" fill="hold"/>
-                              <p:tgtEl>
-                                <p:spTgt spid="321"/>
-                              </p:tgtEl>
-                            </p:cBhvr>
-                          </p:animEffect>
-                        </p:childTnLst>
-                      </p:cTn>
-                    </p:par>
-                    <p:par>
-                      <p:cTn id="323" presetID="22" presetClass="entr" presetSubtype="0" fill="hold" grpId="0" nodeType="clickEffect">
+                              <p:cTn id="326" dur="700" fill="hold"/>
+                              <p:tgtEl>
+                                <p:spTgt spid="325"/>
+                              </p:tgtEl>
+                            </p:cBhvr>
+                          </p:animEffect>
+                        </p:childTnLst>
+                      </p:cTn>
+                    </p:par>
+                    <p:par>
+                      <p:cTn id="327" presetID="22" presetClass="entr" presetSubtype="0" fill="hold" grpId="0" nodeType="clickEffect">
                         <p:stCondLst>
                           <p:cond delay="1200"/>
                         </p:stCondLst>
                         <p:childTnLst>
                           <p:animEffect transition="in" filter="zoom">
                             <p:cBhvr>
-                              <p:cTn id="324" dur="500" fill="hold"/>
-                              <p:tgtEl>
-                                <p:spTgt spid="323"/>
-                              </p:tgtEl>
-                            </p:cBhvr>
-                          </p:animEffect>
-                        </p:childTnLst>
-                      </p:cTn>
-                    </p:par>
-                    <p:par>
-                      <p:cTn id="325" presetID="10" presetClass="entr" presetSubtype="0" fill="hold" grpId="0" nodeType="clickEffect">
+                              <p:cTn id="328" dur="500" fill="hold"/>
+                              <p:tgtEl>
+                                <p:spTgt spid="327"/>
+                              </p:tgtEl>
+                            </p:cBhvr>
+                          </p:animEffect>
+                        </p:childTnLst>
+                      </p:cTn>
+                    </p:par>
+                    <p:par>
+                      <p:cTn id="329" presetID="10" presetClass="entr" presetSubtype="0" fill="hold" grpId="0" nodeType="clickEffect">
                         <p:stCondLst>
                           <p:cond delay="1300"/>
                         </p:stCondLst>
                         <p:childTnLst>
                           <p:animEffect transition="in" filter="fade">
                             <p:cBhvr>
-                              <p:cTn id="326" dur="700" fill="hold"/>
-                              <p:tgtEl>
-                                <p:spTgt spid="325"/>
-                              </p:tgtEl>
-                            </p:cBhvr>
-                          </p:animEffect>
-                        </p:childTnLst>
-                      </p:cTn>
-                    </p:par>
-                    <p:par>
-                      <p:cTn id="327" presetID="10" presetClass="entr" presetSubtype="0" fill="hold" grpId="0" nodeType="clickEffect">
+                              <p:cTn id="330" dur="700" fill="hold"/>
+                              <p:tgtEl>
+                                <p:spTgt spid="329"/>
+                              </p:tgtEl>
+                            </p:cBhvr>
+                          </p:animEffect>
+                        </p:childTnLst>
+                      </p:cTn>
+                    </p:par>
+                    <p:par>
+                      <p:cTn id="331" presetID="10" presetClass="entr" presetSubtype="0" fill="hold" grpId="0" nodeType="clickEffect">
                         <p:stCondLst>
                           <p:cond delay="1400"/>
                         </p:stCondLst>
                         <p:childTnLst>
                           <p:animEffect transition="in" filter="fade">
                             <p:cBhvr>
-                              <p:cTn id="328" dur="700" fill="hold"/>
-                              <p:tgtEl>
-                                <p:spTgt spid="327"/>
-                              </p:tgtEl>
-                            </p:cBhvr>
-                          </p:animEffect>
-                        </p:childTnLst>
-                      </p:cTn>
-                    </p:par>
-                    <p:par>
-                      <p:cTn id="329" presetID="10" presetClass="entr" presetSubtype="0" fill="hold" grpId="0" nodeType="clickEffect">
+                              <p:cTn id="332" dur="700" fill="hold"/>
+                              <p:tgtEl>
+                                <p:spTgt spid="331"/>
+                              </p:tgtEl>
+                            </p:cBhvr>
+                          </p:animEffect>
+                        </p:childTnLst>
+                      </p:cTn>
+                    </p:par>
+                    <p:par>
+                      <p:cTn id="333" presetID="10" presetClass="entr" presetSubtype="0" fill="hold" grpId="0" nodeType="clickEffect">
                         <p:stCondLst>
                           <p:cond delay="1500"/>
                         </p:stCondLst>
                         <p:childTnLst>
                           <p:animEffect transition="in" filter="fade">
                             <p:cBhvr>
-                              <p:cTn id="330" dur="700" fill="hold"/>
-                              <p:tgtEl>
-                                <p:spTgt spid="329"/>
-                              </p:tgtEl>
-                            </p:cBhvr>
-                          </p:animEffect>
-                        </p:childTnLst>
-                      </p:cTn>
-                    </p:par>
-                    <p:par>
-                      <p:cTn id="331" presetID="22" presetClass="entr" presetSubtype="0" fill="hold" grpId="0" nodeType="clickEffect">
+                              <p:cTn id="334" dur="700" fill="hold"/>
+                              <p:tgtEl>
+                                <p:spTgt spid="333"/>
+                              </p:tgtEl>
+                            </p:cBhvr>
+                          </p:animEffect>
+                        </p:childTnLst>
+                      </p:cTn>
+                    </p:par>
+                    <p:par>
+                      <p:cTn id="335" presetID="22" presetClass="entr" presetSubtype="0" fill="hold" grpId="0" nodeType="clickEffect">
                         <p:stCondLst>
                           <p:cond delay="1450"/>
                         </p:stCondLst>
                         <p:childTnLst>
                           <p:animEffect transition="in" filter="zoom">
                             <p:cBhvr>
-                              <p:cTn id="332" dur="500" fill="hold"/>
-                              <p:tgtEl>
-                                <p:spTgt spid="331"/>
-                              </p:tgtEl>
-                            </p:cBhvr>
-                          </p:animEffect>
-                        </p:childTnLst>
-                      </p:cTn>
-                    </p:par>
-                    <p:par>
-                      <p:cTn id="333" presetID="10" presetClass="entr" presetSubtype="0" fill="hold" grpId="0" nodeType="clickEffect">
+                              <p:cTn id="336" dur="500" fill="hold"/>
+                              <p:tgtEl>
+                                <p:spTgt spid="335"/>
+                              </p:tgtEl>
+                            </p:cBhvr>
+                          </p:animEffect>
+                        </p:childTnLst>
+                      </p:cTn>
+                    </p:par>
+                    <p:par>
+                      <p:cTn id="337" presetID="10" presetClass="entr" presetSubtype="0" fill="hold" grpId="0" nodeType="clickEffect">
                         <p:stCondLst>
                           <p:cond delay="1550"/>
                         </p:stCondLst>
                         <p:childTnLst>
                           <p:animEffect transition="in" filter="fade">
                             <p:cBhvr>
-                              <p:cTn id="334" dur="700" fill="hold"/>
-                              <p:tgtEl>
-                                <p:spTgt spid="333"/>
-                              </p:tgtEl>
-                            </p:cBhvr>
-                          </p:animEffect>
-                        </p:childTnLst>
-                      </p:cTn>
-                    </p:par>
-                    <p:par>
-                      <p:cTn id="335" presetID="10" presetClass="entr" presetSubtype="0" fill="hold" grpId="0" nodeType="clickEffect">
+                              <p:cTn id="338" dur="700" fill="hold"/>
+                              <p:tgtEl>
+                                <p:spTgt spid="337"/>
+                              </p:tgtEl>
+                            </p:cBhvr>
+                          </p:animEffect>
+                        </p:childTnLst>
+                      </p:cTn>
+                    </p:par>
+                    <p:par>
+                      <p:cTn id="339" presetID="10" presetClass="entr" presetSubtype="0" fill="hold" grpId="0" nodeType="clickEffect">
                         <p:stCondLst>
                           <p:cond delay="1650"/>
                         </p:stCondLst>
                         <p:childTnLst>
                           <p:animEffect transition="in" filter="fade">
                             <p:cBhvr>
-                              <p:cTn id="336" dur="700" fill="hold"/>
-                              <p:tgtEl>
-                                <p:spTgt spid="335"/>
-                              </p:tgtEl>
-                            </p:cBhvr>
-                          </p:animEffect>
-                        </p:childTnLst>
-                      </p:cTn>
-                    </p:par>
-                    <p:par>
-                      <p:cTn id="337" presetID="10" presetClass="entr" presetSubtype="0" fill="hold" grpId="0" nodeType="clickEffect">
+                              <p:cTn id="340" dur="700" fill="hold"/>
+                              <p:tgtEl>
+                                <p:spTgt spid="339"/>
+                              </p:tgtEl>
+                            </p:cBhvr>
+                          </p:animEffect>
+                        </p:childTnLst>
+                      </p:cTn>
+                    </p:par>
+                    <p:par>
+                      <p:cTn id="341" presetID="10" presetClass="entr" presetSubtype="0" fill="hold" grpId="0" nodeType="clickEffect">
                         <p:stCondLst>
                           <p:cond delay="1800"/>
                         </p:stCondLst>
                         <p:childTnLst>
                           <p:animEffect transition="in" filter="fade">
                             <p:cBhvr>
-                              <p:cTn id="338" dur="700" fill="hold"/>
-                              <p:tgtEl>
-                                <p:spTgt spid="337"/>
+                              <p:cTn id="342" dur="700" fill="hold"/>
+                              <p:tgtEl>
+                                <p:spTgt spid="341"/>
                               </p:tgtEl>
                             </p:cBhvr>
                           </p:animEffect>
@@ -5717,7 +5800,7 @@
       </p:sp>
       <p:sp>
         <p:nvSpPr>
-          <p:cNvPr id="341" name="TextBox 340"/>
+          <p:cNvPr id="345" name="TextBox 344"/>
           <p:cNvSpPr txBox="1"/>
           <p:nvPr/>
         </p:nvSpPr>
@@ -5752,7 +5835,7 @@
       </p:sp>
       <p:sp>
         <p:nvSpPr>
-          <p:cNvPr id="343" name="Rectangle 342"/>
+          <p:cNvPr id="347" name="Rectangle 346"/>
           <p:cNvSpPr/>
           <p:nvPr/>
         </p:nvSpPr>
@@ -5797,7 +5880,7 @@
       </p:sp>
       <p:sp>
         <p:nvSpPr>
-          <p:cNvPr id="345" name="TextBox 344"/>
+          <p:cNvPr id="349" name="TextBox 348"/>
           <p:cNvSpPr txBox="1"/>
           <p:nvPr/>
         </p:nvSpPr>
@@ -5832,7 +5915,7 @@
       </p:sp>
       <p:sp>
         <p:nvSpPr>
-          <p:cNvPr id="347" name="TextBox 346"/>
+          <p:cNvPr id="351" name="TextBox 350"/>
           <p:cNvSpPr txBox="1"/>
           <p:nvPr/>
         </p:nvSpPr>
@@ -5867,7 +5950,7 @@
       </p:sp>
       <p:sp>
         <p:nvSpPr>
-          <p:cNvPr id="349" name="TextBox 348"/>
+          <p:cNvPr id="353" name="TextBox 352"/>
           <p:cNvSpPr txBox="1"/>
           <p:nvPr/>
         </p:nvSpPr>
@@ -5902,7 +5985,7 @@
       </p:sp>
       <p:sp>
         <p:nvSpPr>
-          <p:cNvPr id="351" name="Rectangle 350"/>
+          <p:cNvPr id="355" name="Rectangle 354"/>
           <p:cNvSpPr/>
           <p:nvPr/>
         </p:nvSpPr>
@@ -5947,7 +6030,7 @@
       </p:sp>
       <p:sp>
         <p:nvSpPr>
-          <p:cNvPr id="353" name="TextBox 352"/>
+          <p:cNvPr id="357" name="TextBox 356"/>
           <p:cNvSpPr txBox="1"/>
           <p:nvPr/>
         </p:nvSpPr>
@@ -5982,7 +6065,7 @@
       </p:sp>
       <p:sp>
         <p:nvSpPr>
-          <p:cNvPr id="355" name="TextBox 354"/>
+          <p:cNvPr id="359" name="TextBox 358"/>
           <p:cNvSpPr txBox="1"/>
           <p:nvPr/>
         </p:nvSpPr>
@@ -6017,7 +6100,7 @@
       </p:sp>
       <p:sp>
         <p:nvSpPr>
-          <p:cNvPr id="357" name="TextBox 356"/>
+          <p:cNvPr id="361" name="TextBox 360"/>
           <p:cNvSpPr txBox="1"/>
           <p:nvPr/>
         </p:nvSpPr>
@@ -6052,7 +6135,7 @@
       </p:sp>
       <p:sp>
         <p:nvSpPr>
-          <p:cNvPr id="359" name="Rectangle 358"/>
+          <p:cNvPr id="363" name="Rectangle 362"/>
           <p:cNvSpPr/>
           <p:nvPr/>
         </p:nvSpPr>
@@ -6097,7 +6180,7 @@
       </p:sp>
       <p:sp>
         <p:nvSpPr>
-          <p:cNvPr id="361" name="TextBox 360"/>
+          <p:cNvPr id="365" name="TextBox 364"/>
           <p:cNvSpPr txBox="1"/>
           <p:nvPr/>
         </p:nvSpPr>
@@ -6132,7 +6215,7 @@
       </p:sp>
       <p:sp>
         <p:nvSpPr>
-          <p:cNvPr id="363" name="TextBox 362"/>
+          <p:cNvPr id="367" name="TextBox 366"/>
           <p:cNvSpPr txBox="1"/>
           <p:nvPr/>
         </p:nvSpPr>
@@ -6167,7 +6250,7 @@
       </p:sp>
       <p:sp>
         <p:nvSpPr>
-          <p:cNvPr id="365" name="TextBox 364"/>
+          <p:cNvPr id="369" name="TextBox 368"/>
           <p:cNvSpPr txBox="1"/>
           <p:nvPr/>
         </p:nvSpPr>
@@ -6202,7 +6285,7 @@
       </p:sp>
       <p:sp>
         <p:nvSpPr>
-          <p:cNvPr id="367" name="Rectangle 366"/>
+          <p:cNvPr id="371" name="Rectangle 370"/>
           <p:cNvSpPr/>
           <p:nvPr/>
         </p:nvSpPr>
@@ -6247,7 +6330,7 @@
       </p:sp>
       <p:sp>
         <p:nvSpPr>
-          <p:cNvPr id="369" name="TextBox 368"/>
+          <p:cNvPr id="373" name="TextBox 372"/>
           <p:cNvSpPr txBox="1"/>
           <p:nvPr/>
         </p:nvSpPr>
@@ -6282,7 +6365,7 @@
       </p:sp>
       <p:sp>
         <p:nvSpPr>
-          <p:cNvPr id="371" name="TextBox 370"/>
+          <p:cNvPr id="375" name="TextBox 374"/>
           <p:cNvSpPr txBox="1"/>
           <p:nvPr/>
         </p:nvSpPr>
@@ -6317,7 +6400,7 @@
       </p:sp>
       <p:sp>
         <p:nvSpPr>
-          <p:cNvPr id="373" name="TextBox 372"/>
+          <p:cNvPr id="377" name="TextBox 376"/>
           <p:cNvSpPr txBox="1"/>
           <p:nvPr/>
         </p:nvSpPr>
@@ -6352,7 +6435,7 @@
       </p:sp>
       <p:sp>
         <p:nvSpPr>
-          <p:cNvPr id="375" name="Rectangle 374"/>
+          <p:cNvPr id="379" name="Rectangle 378"/>
           <p:cNvSpPr/>
           <p:nvPr/>
         </p:nvSpPr>
@@ -6397,7 +6480,7 @@
       </p:sp>
       <p:sp>
         <p:nvSpPr>
-          <p:cNvPr id="377" name="TextBox 376"/>
+          <p:cNvPr id="381" name="TextBox 380"/>
           <p:cNvSpPr txBox="1"/>
           <p:nvPr/>
         </p:nvSpPr>
@@ -6432,7 +6515,7 @@
       </p:sp>
       <p:sp>
         <p:nvSpPr>
-          <p:cNvPr id="379" name="TextBox 378"/>
+          <p:cNvPr id="383" name="TextBox 382"/>
           <p:cNvSpPr txBox="1"/>
           <p:nvPr/>
         </p:nvSpPr>
@@ -6467,7 +6550,7 @@
       </p:sp>
       <p:sp>
         <p:nvSpPr>
-          <p:cNvPr id="381" name="TextBox 380"/>
+          <p:cNvPr id="385" name="TextBox 384"/>
           <p:cNvSpPr txBox="1"/>
           <p:nvPr/>
         </p:nvSpPr>
@@ -6510,14 +6593,14 @@
                 <p:cTn id="2" dur="indefinite" nodeType="mainSeq">
                   <p:childTnLst>
                     <p:par>
-                      <p:cTn id="339" presetID="2" presetClass="entr" presetSubtype="8" fill="hold" grpId="0" nodeType="clickEffect">
+                      <p:cTn id="343" presetID="2" presetClass="entr" presetSubtype="8" fill="hold" grpId="0" nodeType="clickEffect">
                         <p:stCondLst>
                           <p:cond delay="0"/>
                         </p:stCondLst>
                         <p:childTnLst>
                           <p:animEffect transition="in" filter="fly">
                             <p:cBhvr>
-                              <p:cTn id="340" dur="600" fill="hold"/>
+                              <p:cTn id="344" dur="600" fill="hold"/>
                               <p:tgtEl>
                                 <p:spTgt spid="4"/>
                               </p:tgtEl>
@@ -6527,356 +6610,356 @@
                       </p:cTn>
                     </p:par>
                     <p:par>
-                      <p:cTn id="341" presetID="10" presetClass="entr" presetSubtype="0" fill="hold" grpId="0" nodeType="clickEffect">
+                      <p:cTn id="345" presetID="10" presetClass="entr" presetSubtype="0" fill="hold" grpId="0" nodeType="clickEffect">
                         <p:stCondLst>
                           <p:cond delay="200"/>
                         </p:stCondLst>
                         <p:childTnLst>
                           <p:animEffect transition="in" filter="fade">
                             <p:cBhvr>
-                              <p:cTn id="342" dur="700" fill="hold"/>
-                              <p:tgtEl>
-                                <p:spTgt spid="341"/>
-                              </p:tgtEl>
-                            </p:cBhvr>
-                          </p:animEffect>
-                        </p:childTnLst>
-                      </p:cTn>
-                    </p:par>
-                    <p:par>
-                      <p:cTn id="343" presetID="2" presetClass="entr" presetSubtype="8" fill="hold" grpId="0" nodeType="clickEffect">
+                              <p:cTn id="346" dur="700" fill="hold"/>
+                              <p:tgtEl>
+                                <p:spTgt spid="345"/>
+                              </p:tgtEl>
+                            </p:cBhvr>
+                          </p:animEffect>
+                        </p:childTnLst>
+                      </p:cTn>
+                    </p:par>
+                    <p:par>
+                      <p:cTn id="347" presetID="2" presetClass="entr" presetSubtype="8" fill="hold" grpId="0" nodeType="clickEffect">
                         <p:stCondLst>
                           <p:cond delay="300"/>
                         </p:stCondLst>
                         <p:childTnLst>
                           <p:animEffect transition="in" filter="fly">
                             <p:cBhvr>
-                              <p:cTn id="344" dur="600" fill="hold"/>
-                              <p:tgtEl>
-                                <p:spTgt spid="343"/>
-                              </p:tgtEl>
-                            </p:cBhvr>
-                          </p:animEffect>
-                        </p:childTnLst>
-                      </p:cTn>
-                    </p:par>
-                    <p:par>
-                      <p:cTn id="345" presetID="10" presetClass="entr" presetSubtype="0" fill="hold" grpId="0" nodeType="clickEffect">
+                              <p:cTn id="348" dur="600" fill="hold"/>
+                              <p:tgtEl>
+                                <p:spTgt spid="347"/>
+                              </p:tgtEl>
+                            </p:cBhvr>
+                          </p:animEffect>
+                        </p:childTnLst>
+                      </p:cTn>
+                    </p:par>
+                    <p:par>
+                      <p:cTn id="349" presetID="10" presetClass="entr" presetSubtype="0" fill="hold" grpId="0" nodeType="clickEffect">
                         <p:stCondLst>
                           <p:cond delay="400"/>
                         </p:stCondLst>
                         <p:childTnLst>
                           <p:animEffect transition="in" filter="fade">
                             <p:cBhvr>
-                              <p:cTn id="346" dur="700" fill="hold"/>
-                              <p:tgtEl>
-                                <p:spTgt spid="345"/>
-                              </p:tgtEl>
-                            </p:cBhvr>
-                          </p:animEffect>
-                        </p:childTnLst>
-                      </p:cTn>
-                    </p:par>
-                    <p:par>
-                      <p:cTn id="347" presetID="10" presetClass="entr" presetSubtype="0" fill="hold" grpId="0" nodeType="clickEffect">
+                              <p:cTn id="350" dur="700" fill="hold"/>
+                              <p:tgtEl>
+                                <p:spTgt spid="349"/>
+                              </p:tgtEl>
+                            </p:cBhvr>
+                          </p:animEffect>
+                        </p:childTnLst>
+                      </p:cTn>
+                    </p:par>
+                    <p:par>
+                      <p:cTn id="351" presetID="10" presetClass="entr" presetSubtype="0" fill="hold" grpId="0" nodeType="clickEffect">
                         <p:stCondLst>
                           <p:cond delay="500"/>
                         </p:stCondLst>
                         <p:childTnLst>
                           <p:animEffect transition="in" filter="fade">
                             <p:cBhvr>
-                              <p:cTn id="348" dur="700" fill="hold"/>
-                              <p:tgtEl>
-                                <p:spTgt spid="347"/>
-                              </p:tgtEl>
-                            </p:cBhvr>
-                          </p:animEffect>
-                        </p:childTnLst>
-                      </p:cTn>
-                    </p:par>
-                    <p:par>
-                      <p:cTn id="349" presetID="10" presetClass="entr" presetSubtype="0" fill="hold" grpId="0" nodeType="clickEffect">
+                              <p:cTn id="352" dur="700" fill="hold"/>
+                              <p:tgtEl>
+                                <p:spTgt spid="351"/>
+                              </p:tgtEl>
+                            </p:cBhvr>
+                          </p:animEffect>
+                        </p:childTnLst>
+                      </p:cTn>
+                    </p:par>
+                    <p:par>
+                      <p:cTn id="353" presetID="10" presetClass="entr" presetSubtype="0" fill="hold" grpId="0" nodeType="clickEffect">
                         <p:stCondLst>
                           <p:cond delay="600"/>
                         </p:stCondLst>
                         <p:childTnLst>
                           <p:animEffect transition="in" filter="fade">
                             <p:cBhvr>
-                              <p:cTn id="350" dur="700" fill="hold"/>
-                              <p:tgtEl>
-                                <p:spTgt spid="349"/>
-                              </p:tgtEl>
-                            </p:cBhvr>
-                          </p:animEffect>
-                        </p:childTnLst>
-                      </p:cTn>
-                    </p:par>
-                    <p:par>
-                      <p:cTn id="351" presetID="2" presetClass="entr" presetSubtype="8" fill="hold" grpId="0" nodeType="clickEffect">
+                              <p:cTn id="354" dur="700" fill="hold"/>
+                              <p:tgtEl>
+                                <p:spTgt spid="353"/>
+                              </p:tgtEl>
+                            </p:cBhvr>
+                          </p:animEffect>
+                        </p:childTnLst>
+                      </p:cTn>
+                    </p:par>
+                    <p:par>
+                      <p:cTn id="355" presetID="2" presetClass="entr" presetSubtype="8" fill="hold" grpId="0" nodeType="clickEffect">
                         <p:stCondLst>
                           <p:cond delay="500"/>
                         </p:stCondLst>
                         <p:childTnLst>
                           <p:animEffect transition="in" filter="fly">
                             <p:cBhvr>
-                              <p:cTn id="352" dur="600" fill="hold"/>
-                              <p:tgtEl>
-                                <p:spTgt spid="351"/>
-                              </p:tgtEl>
-                            </p:cBhvr>
-                          </p:animEffect>
-                        </p:childTnLst>
-                      </p:cTn>
-                    </p:par>
-                    <p:par>
-                      <p:cTn id="353" presetID="10" presetClass="entr" presetSubtype="0" fill="hold" grpId="0" nodeType="clickEffect">
+                              <p:cTn id="356" dur="600" fill="hold"/>
+                              <p:tgtEl>
+                                <p:spTgt spid="355"/>
+                              </p:tgtEl>
+                            </p:cBhvr>
+                          </p:animEffect>
+                        </p:childTnLst>
+                      </p:cTn>
+                    </p:par>
+                    <p:par>
+                      <p:cTn id="357" presetID="10" presetClass="entr" presetSubtype="0" fill="hold" grpId="0" nodeType="clickEffect">
                         <p:stCondLst>
                           <p:cond delay="600"/>
                         </p:stCondLst>
                         <p:childTnLst>
                           <p:animEffect transition="in" filter="fade">
                             <p:cBhvr>
-                              <p:cTn id="354" dur="700" fill="hold"/>
-                              <p:tgtEl>
-                                <p:spTgt spid="353"/>
-                              </p:tgtEl>
-                            </p:cBhvr>
-                          </p:animEffect>
-                        </p:childTnLst>
-                      </p:cTn>
-                    </p:par>
-                    <p:par>
-                      <p:cTn id="355" presetID="10" presetClass="entr" presetSubtype="0" fill="hold" grpId="0" nodeType="clickEffect">
+                              <p:cTn id="358" dur="700" fill="hold"/>
+                              <p:tgtEl>
+                                <p:spTgt spid="357"/>
+                              </p:tgtEl>
+                            </p:cBhvr>
+                          </p:animEffect>
+                        </p:childTnLst>
+                      </p:cTn>
+                    </p:par>
+                    <p:par>
+                      <p:cTn id="359" presetID="10" presetClass="entr" presetSubtype="0" fill="hold" grpId="0" nodeType="clickEffect">
                         <p:stCondLst>
                           <p:cond delay="700"/>
                         </p:stCondLst>
                         <p:childTnLst>
                           <p:animEffect transition="in" filter="fade">
                             <p:cBhvr>
-                              <p:cTn id="356" dur="700" fill="hold"/>
-                              <p:tgtEl>
-                                <p:spTgt spid="355"/>
-                              </p:tgtEl>
-                            </p:cBhvr>
-                          </p:animEffect>
-                        </p:childTnLst>
-                      </p:cTn>
-                    </p:par>
-                    <p:par>
-                      <p:cTn id="357" presetID="10" presetClass="entr" presetSubtype="0" fill="hold" grpId="0" nodeType="clickEffect">
+                              <p:cTn id="360" dur="700" fill="hold"/>
+                              <p:tgtEl>
+                                <p:spTgt spid="359"/>
+                              </p:tgtEl>
+                            </p:cBhvr>
+                          </p:animEffect>
+                        </p:childTnLst>
+                      </p:cTn>
+                    </p:par>
+                    <p:par>
+                      <p:cTn id="361" presetID="10" presetClass="entr" presetSubtype="0" fill="hold" grpId="0" nodeType="clickEffect">
                         <p:stCondLst>
                           <p:cond delay="800"/>
                         </p:stCondLst>
                         <p:childTnLst>
                           <p:animEffect transition="in" filter="fade">
                             <p:cBhvr>
-                              <p:cTn id="358" dur="700" fill="hold"/>
-                              <p:tgtEl>
-                                <p:spTgt spid="357"/>
-                              </p:tgtEl>
-                            </p:cBhvr>
-                          </p:animEffect>
-                        </p:childTnLst>
-                      </p:cTn>
-                    </p:par>
-                    <p:par>
-                      <p:cTn id="359" presetID="2" presetClass="entr" presetSubtype="8" fill="hold" grpId="0" nodeType="clickEffect">
+                              <p:cTn id="362" dur="700" fill="hold"/>
+                              <p:tgtEl>
+                                <p:spTgt spid="361"/>
+                              </p:tgtEl>
+                            </p:cBhvr>
+                          </p:animEffect>
+                        </p:childTnLst>
+                      </p:cTn>
+                    </p:par>
+                    <p:par>
+                      <p:cTn id="363" presetID="2" presetClass="entr" presetSubtype="8" fill="hold" grpId="0" nodeType="clickEffect">
                         <p:stCondLst>
                           <p:cond delay="700"/>
                         </p:stCondLst>
                         <p:childTnLst>
                           <p:animEffect transition="in" filter="fly">
                             <p:cBhvr>
-                              <p:cTn id="360" dur="600" fill="hold"/>
-                              <p:tgtEl>
-                                <p:spTgt spid="359"/>
-                              </p:tgtEl>
-                            </p:cBhvr>
-                          </p:animEffect>
-                        </p:childTnLst>
-                      </p:cTn>
-                    </p:par>
-                    <p:par>
-                      <p:cTn id="361" presetID="10" presetClass="entr" presetSubtype="0" fill="hold" grpId="0" nodeType="clickEffect">
+                              <p:cTn id="364" dur="600" fill="hold"/>
+                              <p:tgtEl>
+                                <p:spTgt spid="363"/>
+                              </p:tgtEl>
+                            </p:cBhvr>
+                          </p:animEffect>
+                        </p:childTnLst>
+                      </p:cTn>
+                    </p:par>
+                    <p:par>
+                      <p:cTn id="365" presetID="10" presetClass="entr" presetSubtype="0" fill="hold" grpId="0" nodeType="clickEffect">
                         <p:stCondLst>
                           <p:cond delay="800"/>
                         </p:stCondLst>
                         <p:childTnLst>
                           <p:animEffect transition="in" filter="fade">
                             <p:cBhvr>
-                              <p:cTn id="362" dur="700" fill="hold"/>
-                              <p:tgtEl>
-                                <p:spTgt spid="361"/>
-                              </p:tgtEl>
-                            </p:cBhvr>
-                          </p:animEffect>
-                        </p:childTnLst>
-                      </p:cTn>
-                    </p:par>
-                    <p:par>
-                      <p:cTn id="363" presetID="10" presetClass="entr" presetSubtype="0" fill="hold" grpId="0" nodeType="clickEffect">
+                              <p:cTn id="366" dur="700" fill="hold"/>
+                              <p:tgtEl>
+                                <p:spTgt spid="365"/>
+                              </p:tgtEl>
+                            </p:cBhvr>
+                          </p:animEffect>
+                        </p:childTnLst>
+                      </p:cTn>
+                    </p:par>
+                    <p:par>
+                      <p:cTn id="367" presetID="10" presetClass="entr" presetSubtype="0" fill="hold" grpId="0" nodeType="clickEffect">
                         <p:stCondLst>
                           <p:cond delay="900"/>
                         </p:stCondLst>
                         <p:childTnLst>
                           <p:animEffect transition="in" filter="fade">
                             <p:cBhvr>
-                              <p:cTn id="364" dur="700" fill="hold"/>
-                              <p:tgtEl>
-                                <p:spTgt spid="363"/>
-                              </p:tgtEl>
-                            </p:cBhvr>
-                          </p:animEffect>
-                        </p:childTnLst>
-                      </p:cTn>
-                    </p:par>
-                    <p:par>
-                      <p:cTn id="365" presetID="10" presetClass="entr" presetSubtype="0" fill="hold" grpId="0" nodeType="clickEffect">
+                              <p:cTn id="368" dur="700" fill="hold"/>
+                              <p:tgtEl>
+                                <p:spTgt spid="367"/>
+                              </p:tgtEl>
+                            </p:cBhvr>
+                          </p:animEffect>
+                        </p:childTnLst>
+                      </p:cTn>
+                    </p:par>
+                    <p:par>
+                      <p:cTn id="369" presetID="10" presetClass="entr" presetSubtype="0" fill="hold" grpId="0" nodeType="clickEffect">
                         <p:stCondLst>
                           <p:cond delay="1000"/>
                         </p:stCondLst>
                         <p:childTnLst>
                           <p:animEffect transition="in" filter="fade">
                             <p:cBhvr>
-                              <p:cTn id="366" dur="700" fill="hold"/>
-                              <p:tgtEl>
-                                <p:spTgt spid="365"/>
-                              </p:tgtEl>
-                            </p:cBhvr>
-                          </p:animEffect>
-                        </p:childTnLst>
-                      </p:cTn>
-                    </p:par>
-                    <p:par>
-                      <p:cTn id="367" presetID="2" presetClass="entr" presetSubtype="8" fill="hold" grpId="0" nodeType="clickEffect">
+                              <p:cTn id="370" dur="700" fill="hold"/>
+                              <p:tgtEl>
+                                <p:spTgt spid="369"/>
+                              </p:tgtEl>
+                            </p:cBhvr>
+                          </p:animEffect>
+                        </p:childTnLst>
+                      </p:cTn>
+                    </p:par>
+                    <p:par>
+                      <p:cTn id="371" presetID="2" presetClass="entr" presetSubtype="8" fill="hold" grpId="0" nodeType="clickEffect">
                         <p:stCondLst>
                           <p:cond delay="900"/>
                         </p:stCondLst>
                         <p:childTnLst>
                           <p:animEffect transition="in" filter="fly">
                             <p:cBhvr>
-                              <p:cTn id="368" dur="600" fill="hold"/>
-                              <p:tgtEl>
-                                <p:spTgt spid="367"/>
-                              </p:tgtEl>
-                            </p:cBhvr>
-                          </p:animEffect>
-                        </p:childTnLst>
-                      </p:cTn>
-                    </p:par>
-                    <p:par>
-                      <p:cTn id="369" presetID="10" presetClass="entr" presetSubtype="0" fill="hold" grpId="0" nodeType="clickEffect">
+                              <p:cTn id="372" dur="600" fill="hold"/>
+                              <p:tgtEl>
+                                <p:spTgt spid="371"/>
+                              </p:tgtEl>
+                            </p:cBhvr>
+                          </p:animEffect>
+                        </p:childTnLst>
+                      </p:cTn>
+                    </p:par>
+                    <p:par>
+                      <p:cTn id="373" presetID="10" presetClass="entr" presetSubtype="0" fill="hold" grpId="0" nodeType="clickEffect">
                         <p:stCondLst>
                           <p:cond delay="1000"/>
                         </p:stCondLst>
                         <p:childTnLst>
                           <p:animEffect transition="in" filter="fade">
                             <p:cBhvr>
-                              <p:cTn id="370" dur="700" fill="hold"/>
-                              <p:tgtEl>
-                                <p:spTgt spid="369"/>
-                              </p:tgtEl>
-                            </p:cBhvr>
-                          </p:animEffect>
-                        </p:childTnLst>
-                      </p:cTn>
-                    </p:par>
-                    <p:par>
-                      <p:cTn id="371" presetID="10" presetClass="entr" presetSubtype="0" fill="hold" grpId="0" nodeType="clickEffect">
+                              <p:cTn id="374" dur="700" fill="hold"/>
+                              <p:tgtEl>
+                                <p:spTgt spid="373"/>
+                              </p:tgtEl>
+                            </p:cBhvr>
+                          </p:animEffect>
+                        </p:childTnLst>
+                      </p:cTn>
+                    </p:par>
+                    <p:par>
+                      <p:cTn id="375" presetID="10" presetClass="entr" presetSubtype="0" fill="hold" grpId="0" nodeType="clickEffect">
                         <p:stCondLst>
                           <p:cond delay="1100"/>
                         </p:stCondLst>
                         <p:childTnLst>
                           <p:animEffect transition="in" filter="fade">
                             <p:cBhvr>
-                              <p:cTn id="372" dur="700" fill="hold"/>
-                              <p:tgtEl>
-                                <p:spTgt spid="371"/>
-                              </p:tgtEl>
-                            </p:cBhvr>
-                          </p:animEffect>
-                        </p:childTnLst>
-                      </p:cTn>
-                    </p:par>
-                    <p:par>
-                      <p:cTn id="373" presetID="10" presetClass="entr" presetSubtype="0" fill="hold" grpId="0" nodeType="clickEffect">
+                              <p:cTn id="376" dur="700" fill="hold"/>
+                              <p:tgtEl>
+                                <p:spTgt spid="375"/>
+                              </p:tgtEl>
+                            </p:cBhvr>
+                          </p:animEffect>
+                        </p:childTnLst>
+                      </p:cTn>
+                    </p:par>
+                    <p:par>
+                      <p:cTn id="377" presetID="10" presetClass="entr" presetSubtype="0" fill="hold" grpId="0" nodeType="clickEffect">
                         <p:stCondLst>
                           <p:cond delay="1200"/>
                         </p:stCondLst>
                         <p:childTnLst>
                           <p:animEffect transition="in" filter="fade">
                             <p:cBhvr>
-                              <p:cTn id="374" dur="700" fill="hold"/>
-                              <p:tgtEl>
-                                <p:spTgt spid="373"/>
-                              </p:tgtEl>
-                            </p:cBhvr>
-                          </p:animEffect>
-                        </p:childTnLst>
-                      </p:cTn>
-                    </p:par>
-                    <p:par>
-                      <p:cTn id="375" presetID="2" presetClass="entr" presetSubtype="8" fill="hold" grpId="0" nodeType="clickEffect">
+                              <p:cTn id="378" dur="700" fill="hold"/>
+                              <p:tgtEl>
+                                <p:spTgt spid="377"/>
+                              </p:tgtEl>
+                            </p:cBhvr>
+                          </p:animEffect>
+                        </p:childTnLst>
+                      </p:cTn>
+                    </p:par>
+                    <p:par>
+                      <p:cTn id="379" presetID="2" presetClass="entr" presetSubtype="8" fill="hold" grpId="0" nodeType="clickEffect">
                         <p:stCondLst>
                           <p:cond delay="1100"/>
                         </p:stCondLst>
                         <p:childTnLst>
                           <p:animEffect transition="in" filter="fly">
                             <p:cBhvr>
-                              <p:cTn id="376" dur="600" fill="hold"/>
-                              <p:tgtEl>
-                                <p:spTgt spid="375"/>
-                              </p:tgtEl>
-                            </p:cBhvr>
-                          </p:animEffect>
-                        </p:childTnLst>
-                      </p:cTn>
-                    </p:par>
-                    <p:par>
-                      <p:cTn id="377" presetID="10" presetClass="entr" presetSubtype="0" fill="hold" grpId="0" nodeType="clickEffect">
+                              <p:cTn id="380" dur="600" fill="hold"/>
+                              <p:tgtEl>
+                                <p:spTgt spid="379"/>
+                              </p:tgtEl>
+                            </p:cBhvr>
+                          </p:animEffect>
+                        </p:childTnLst>
+                      </p:cTn>
+                    </p:par>
+                    <p:par>
+                      <p:cTn id="381" presetID="10" presetClass="entr" presetSubtype="0" fill="hold" grpId="0" nodeType="clickEffect">
                         <p:stCondLst>
                           <p:cond delay="1200"/>
                         </p:stCondLst>
                         <p:childTnLst>
                           <p:animEffect transition="in" filter="fade">
                             <p:cBhvr>
-                              <p:cTn id="378" dur="700" fill="hold"/>
-                              <p:tgtEl>
-                                <p:spTgt spid="377"/>
-                              </p:tgtEl>
-                            </p:cBhvr>
-                          </p:animEffect>
-                        </p:childTnLst>
-                      </p:cTn>
-                    </p:par>
-                    <p:par>
-                      <p:cTn id="379" presetID="10" presetClass="entr" presetSubtype="0" fill="hold" grpId="0" nodeType="clickEffect">
+                              <p:cTn id="382" dur="700" fill="hold"/>
+                              <p:tgtEl>
+                                <p:spTgt spid="381"/>
+                              </p:tgtEl>
+                            </p:cBhvr>
+                          </p:animEffect>
+                        </p:childTnLst>
+                      </p:cTn>
+                    </p:par>
+                    <p:par>
+                      <p:cTn id="383" presetID="10" presetClass="entr" presetSubtype="0" fill="hold" grpId="0" nodeType="clickEffect">
                         <p:stCondLst>
                           <p:cond delay="1300"/>
                         </p:stCondLst>
                         <p:childTnLst>
                           <p:animEffect transition="in" filter="fade">
                             <p:cBhvr>
-                              <p:cTn id="380" dur="700" fill="hold"/>
-                              <p:tgtEl>
-                                <p:spTgt spid="379"/>
-                              </p:tgtEl>
-                            </p:cBhvr>
-                          </p:animEffect>
-                        </p:childTnLst>
-                      </p:cTn>
-                    </p:par>
-                    <p:par>
-                      <p:cTn id="381" presetID="10" presetClass="entr" presetSubtype="0" fill="hold" grpId="0" nodeType="clickEffect">
+                              <p:cTn id="384" dur="700" fill="hold"/>
+                              <p:tgtEl>
+                                <p:spTgt spid="383"/>
+                              </p:tgtEl>
+                            </p:cBhvr>
+                          </p:animEffect>
+                        </p:childTnLst>
+                      </p:cTn>
+                    </p:par>
+                    <p:par>
+                      <p:cTn id="385" presetID="10" presetClass="entr" presetSubtype="0" fill="hold" grpId="0" nodeType="clickEffect">
                         <p:stCondLst>
                           <p:cond delay="1400"/>
                         </p:stCondLst>
                         <p:childTnLst>
                           <p:animEffect transition="in" filter="fade">
                             <p:cBhvr>
-                              <p:cTn id="382" dur="700" fill="hold"/>
-                              <p:tgtEl>
-                                <p:spTgt spid="381"/>
+                              <p:cTn id="386" dur="700" fill="hold"/>
+                              <p:tgtEl>
+                                <p:spTgt spid="385"/>
                               </p:tgtEl>
                             </p:cBhvr>
                           </p:animEffect>
@@ -7018,7 +7101,7 @@
       </p:sp>
       <p:sp>
         <p:nvSpPr>
-          <p:cNvPr id="385" name="Rectangle 384"/>
+          <p:cNvPr id="389" name="Rectangle 388"/>
           <p:cNvSpPr/>
           <p:nvPr/>
         </p:nvSpPr>
@@ -7061,7 +7144,7 @@
       </p:sp>
       <p:sp>
         <p:nvSpPr>
-          <p:cNvPr id="387" name="Rectangle 386"/>
+          <p:cNvPr id="391" name="Rectangle 390"/>
           <p:cNvSpPr/>
           <p:nvPr/>
         </p:nvSpPr>
@@ -7104,7 +7187,7 @@
       </p:sp>
       <p:sp>
         <p:nvSpPr>
-          <p:cNvPr id="389" name="TextBox 388"/>
+          <p:cNvPr id="393" name="TextBox 392"/>
           <p:cNvSpPr txBox="1"/>
           <p:nvPr/>
         </p:nvSpPr>
@@ -7139,7 +7222,7 @@
       </p:sp>
       <p:sp>
         <p:nvSpPr>
-          <p:cNvPr id="391" name="TextBox 390"/>
+          <p:cNvPr id="395" name="TextBox 394"/>
           <p:cNvSpPr txBox="1"/>
           <p:nvPr/>
         </p:nvSpPr>
@@ -7182,14 +7265,14 @@
                 <p:cTn id="2" dur="indefinite" nodeType="mainSeq">
                   <p:childTnLst>
                     <p:par>
-                      <p:cTn id="383" presetID="10" presetClass="entr" presetSubtype="0" fill="hold" grpId="0" nodeType="clickEffect">
+                      <p:cTn id="387" presetID="10" presetClass="entr" presetSubtype="0" fill="hold" grpId="0" nodeType="clickEffect">
                         <p:stCondLst>
                           <p:cond delay="0"/>
                         </p:stCondLst>
                         <p:childTnLst>
                           <p:animEffect transition="in" filter="fade">
                             <p:cBhvr>
-                              <p:cTn id="384" dur="700" fill="hold"/>
+                              <p:cTn id="388" dur="700" fill="hold"/>
                               <p:tgtEl>
                                 <p:spTgt spid="3"/>
                               </p:tgtEl>
@@ -7199,67 +7282,67 @@
                       </p:cTn>
                     </p:par>
                     <p:par>
-                      <p:cTn id="385" presetID="10" presetClass="entr" presetSubtype="0" fill="hold" grpId="0" nodeType="clickEffect">
+                      <p:cTn id="389" presetID="10" presetClass="entr" presetSubtype="0" fill="hold" grpId="0" nodeType="clickEffect">
                         <p:stCondLst>
                           <p:cond delay="0"/>
                         </p:stCondLst>
                         <p:childTnLst>
                           <p:animEffect transition="in" filter="fade">
                             <p:cBhvr>
-                              <p:cTn id="386" dur="700" fill="hold"/>
-                              <p:tgtEl>
-                                <p:spTgt spid="385"/>
-                              </p:tgtEl>
-                            </p:cBhvr>
-                          </p:animEffect>
-                        </p:childTnLst>
-                      </p:cTn>
-                    </p:par>
-                    <p:par>
-                      <p:cTn id="387" presetID="10" presetClass="entr" presetSubtype="0" fill="hold" grpId="0" nodeType="clickEffect">
+                              <p:cTn id="390" dur="700" fill="hold"/>
+                              <p:tgtEl>
+                                <p:spTgt spid="389"/>
+                              </p:tgtEl>
+                            </p:cBhvr>
+                          </p:animEffect>
+                        </p:childTnLst>
+                      </p:cTn>
+                    </p:par>
+                    <p:par>
+                      <p:cTn id="391" presetID="10" presetClass="entr" presetSubtype="0" fill="hold" grpId="0" nodeType="clickEffect">
                         <p:stCondLst>
                           <p:cond delay="300"/>
                         </p:stCondLst>
                         <p:childTnLst>
                           <p:animEffect transition="in" filter="fade">
                             <p:cBhvr>
-                              <p:cTn id="388" dur="700" fill="hold"/>
-                              <p:tgtEl>
-                                <p:spTgt spid="387"/>
-                              </p:tgtEl>
-                            </p:cBhvr>
-                          </p:animEffect>
-                        </p:childTnLst>
-                      </p:cTn>
-                    </p:par>
-                    <p:par>
-                      <p:cTn id="389" presetID="22" presetClass="entr" presetSubtype="0" fill="hold" grpId="0" nodeType="clickEffect">
+                              <p:cTn id="392" dur="700" fill="hold"/>
+                              <p:tgtEl>
+                                <p:spTgt spid="391"/>
+                              </p:tgtEl>
+                            </p:cBhvr>
+                          </p:animEffect>
+                        </p:childTnLst>
+                      </p:cTn>
+                    </p:par>
+                    <p:par>
+                      <p:cTn id="393" presetID="22" presetClass="entr" presetSubtype="0" fill="hold" grpId="0" nodeType="clickEffect">
                         <p:stCondLst>
                           <p:cond delay="100"/>
                         </p:stCondLst>
                         <p:childTnLst>
                           <p:animEffect transition="in" filter="zoom">
                             <p:cBhvr>
-                              <p:cTn id="390" dur="500" fill="hold"/>
-                              <p:tgtEl>
-                                <p:spTgt spid="389"/>
-                              </p:tgtEl>
-                            </p:cBhvr>
-                          </p:animEffect>
-                        </p:childTnLst>
-                      </p:cTn>
-                    </p:par>
-                    <p:par>
-                      <p:cTn id="391" presetID="10" presetClass="entr" presetSubtype="0" fill="hold" grpId="0" nodeType="clickEffect">
+                              <p:cTn id="394" dur="500" fill="hold"/>
+                              <p:tgtEl>
+                                <p:spTgt spid="393"/>
+                              </p:tgtEl>
+                            </p:cBhvr>
+                          </p:animEffect>
+                        </p:childTnLst>
+                      </p:cTn>
+                    </p:par>
+                    <p:par>
+                      <p:cTn id="395" presetID="10" presetClass="entr" presetSubtype="0" fill="hold" grpId="0" nodeType="clickEffect">
                         <p:stCondLst>
                           <p:cond delay="400"/>
                         </p:stCondLst>
                         <p:childTnLst>
                           <p:animEffect transition="in" filter="fade">
                             <p:cBhvr>
-                              <p:cTn id="392" dur="700" fill="hold"/>
-                              <p:tgtEl>
-                                <p:spTgt spid="391"/>
+                              <p:cTn id="396" dur="700" fill="hold"/>
+                              <p:tgtEl>
+                                <p:spTgt spid="395"/>
                               </p:tgtEl>
                             </p:cBhvr>
                           </p:animEffect>
@@ -7428,7 +7511,7 @@
       </p:sp>
       <p:sp>
         <p:nvSpPr>
-          <p:cNvPr id="395" name="Rectangle 394"/>
+          <p:cNvPr id="399" name="Rectangle 398"/>
           <p:cNvSpPr/>
           <p:nvPr/>
         </p:nvSpPr>
@@ -7473,7 +7556,7 @@
       </p:sp>
       <p:sp>
         <p:nvSpPr>
-          <p:cNvPr id="397" name="Rectangle 396"/>
+          <p:cNvPr id="401" name="Rectangle 400"/>
           <p:cNvSpPr/>
           <p:nvPr/>
         </p:nvSpPr>
@@ -7516,7 +7599,7 @@
       </p:sp>
       <p:sp>
         <p:nvSpPr>
-          <p:cNvPr id="399" name="TextBox 398"/>
+          <p:cNvPr id="403" name="TextBox 402"/>
           <p:cNvSpPr txBox="1"/>
           <p:nvPr/>
         </p:nvSpPr>
@@ -7551,7 +7634,7 @@
       </p:sp>
       <p:sp>
         <p:nvSpPr>
-          <p:cNvPr id="401" name="TextBox 400"/>
+          <p:cNvPr id="405" name="TextBox 404"/>
           <p:cNvSpPr txBox="1"/>
           <p:nvPr/>
         </p:nvSpPr>
@@ -7586,7 +7669,7 @@
       </p:sp>
       <p:sp>
         <p:nvSpPr>
-          <p:cNvPr id="403" name="TextBox 402"/>
+          <p:cNvPr id="407" name="TextBox 406"/>
           <p:cNvSpPr txBox="1"/>
           <p:nvPr/>
         </p:nvSpPr>
@@ -7621,7 +7704,7 @@
       </p:sp>
       <p:sp>
         <p:nvSpPr>
-          <p:cNvPr id="405" name="TextBox 404"/>
+          <p:cNvPr id="409" name="TextBox 408"/>
           <p:cNvSpPr txBox="1"/>
           <p:nvPr/>
         </p:nvSpPr>
@@ -7656,7 +7739,7 @@
       </p:sp>
       <p:sp>
         <p:nvSpPr>
-          <p:cNvPr id="407" name="Rectangle 406"/>
+          <p:cNvPr id="411" name="Rectangle 410"/>
           <p:cNvSpPr/>
           <p:nvPr/>
         </p:nvSpPr>
@@ -7701,7 +7784,7 @@
       </p:sp>
       <p:sp>
         <p:nvSpPr>
-          <p:cNvPr id="409" name="Rectangle 408"/>
+          <p:cNvPr id="413" name="Rectangle 412"/>
           <p:cNvSpPr/>
           <p:nvPr/>
         </p:nvSpPr>
@@ -7744,7 +7827,7 @@
       </p:sp>
       <p:sp>
         <p:nvSpPr>
-          <p:cNvPr id="411" name="TextBox 410"/>
+          <p:cNvPr id="415" name="TextBox 414"/>
           <p:cNvSpPr txBox="1"/>
           <p:nvPr/>
         </p:nvSpPr>
@@ -7779,7 +7862,7 @@
       </p:sp>
       <p:sp>
         <p:nvSpPr>
-          <p:cNvPr id="413" name="TextBox 412"/>
+          <p:cNvPr id="417" name="TextBox 416"/>
           <p:cNvSpPr txBox="1"/>
           <p:nvPr/>
         </p:nvSpPr>
@@ -7814,7 +7897,7 @@
       </p:sp>
       <p:sp>
         <p:nvSpPr>
-          <p:cNvPr id="415" name="TextBox 414"/>
+          <p:cNvPr id="419" name="TextBox 418"/>
           <p:cNvSpPr txBox="1"/>
           <p:nvPr/>
         </p:nvSpPr>
@@ -7849,7 +7932,7 @@
       </p:sp>
       <p:sp>
         <p:nvSpPr>
-          <p:cNvPr id="417" name="TextBox 416"/>
+          <p:cNvPr id="421" name="TextBox 420"/>
           <p:cNvSpPr txBox="1"/>
           <p:nvPr/>
         </p:nvSpPr>
@@ -7884,7 +7967,7 @@
       </p:sp>
       <p:sp>
         <p:nvSpPr>
-          <p:cNvPr id="419" name="Rectangle 418"/>
+          <p:cNvPr id="423" name="Rectangle 422"/>
           <p:cNvSpPr/>
           <p:nvPr/>
         </p:nvSpPr>
@@ -7929,7 +8012,7 @@
       </p:sp>
       <p:sp>
         <p:nvSpPr>
-          <p:cNvPr id="421" name="Rectangle 420"/>
+          <p:cNvPr id="425" name="Rectangle 424"/>
           <p:cNvSpPr/>
           <p:nvPr/>
         </p:nvSpPr>
@@ -7972,7 +8055,7 @@
       </p:sp>
       <p:sp>
         <p:nvSpPr>
-          <p:cNvPr id="423" name="TextBox 422"/>
+          <p:cNvPr id="427" name="TextBox 426"/>
           <p:cNvSpPr txBox="1"/>
           <p:nvPr/>
         </p:nvSpPr>
@@ -8007,7 +8090,7 @@
       </p:sp>
       <p:sp>
         <p:nvSpPr>
-          <p:cNvPr id="425" name="TextBox 424"/>
+          <p:cNvPr id="429" name="TextBox 428"/>
           <p:cNvSpPr txBox="1"/>
           <p:nvPr/>
         </p:nvSpPr>
@@ -8042,7 +8125,7 @@
       </p:sp>
       <p:sp>
         <p:nvSpPr>
-          <p:cNvPr id="427" name="TextBox 426"/>
+          <p:cNvPr id="431" name="TextBox 430"/>
           <p:cNvSpPr txBox="1"/>
           <p:nvPr/>
         </p:nvSpPr>
@@ -8077,7 +8160,7 @@
       </p:sp>
       <p:sp>
         <p:nvSpPr>
-          <p:cNvPr id="429" name="TextBox 428"/>
+          <p:cNvPr id="433" name="TextBox 432"/>
           <p:cNvSpPr txBox="1"/>
           <p:nvPr/>
         </p:nvSpPr>
@@ -8112,7 +8195,7 @@
       </p:sp>
       <p:sp>
         <p:nvSpPr>
-          <p:cNvPr id="431" name="Rectangle 430"/>
+          <p:cNvPr id="435" name="Rectangle 434"/>
           <p:cNvSpPr/>
           <p:nvPr/>
         </p:nvSpPr>
@@ -8157,7 +8240,7 @@
       </p:sp>
       <p:sp>
         <p:nvSpPr>
-          <p:cNvPr id="433" name="Rectangle 432"/>
+          <p:cNvPr id="437" name="Rectangle 436"/>
           <p:cNvSpPr/>
           <p:nvPr/>
         </p:nvSpPr>
@@ -8200,7 +8283,7 @@
       </p:sp>
       <p:sp>
         <p:nvSpPr>
-          <p:cNvPr id="435" name="TextBox 434"/>
+          <p:cNvPr id="439" name="TextBox 438"/>
           <p:cNvSpPr txBox="1"/>
           <p:nvPr/>
         </p:nvSpPr>
@@ -8235,7 +8318,7 @@
       </p:sp>
       <p:sp>
         <p:nvSpPr>
-          <p:cNvPr id="437" name="TextBox 436"/>
+          <p:cNvPr id="441" name="TextBox 440"/>
           <p:cNvSpPr txBox="1"/>
           <p:nvPr/>
         </p:nvSpPr>
@@ -8270,7 +8353,7 @@
       </p:sp>
       <p:sp>
         <p:nvSpPr>
-          <p:cNvPr id="439" name="TextBox 438"/>
+          <p:cNvPr id="443" name="TextBox 442"/>
           <p:cNvSpPr txBox="1"/>
           <p:nvPr/>
         </p:nvSpPr>
@@ -8305,7 +8388,7 @@
       </p:sp>
       <p:sp>
         <p:nvSpPr>
-          <p:cNvPr id="441" name="TextBox 440"/>
+          <p:cNvPr id="445" name="TextBox 444"/>
           <p:cNvSpPr txBox="1"/>
           <p:nvPr/>
         </p:nvSpPr>
@@ -8340,7 +8423,7 @@
       </p:sp>
       <p:sp>
         <p:nvSpPr>
-          <p:cNvPr id="443" name="Rectangle 442"/>
+          <p:cNvPr id="447" name="Rectangle 446"/>
           <p:cNvSpPr/>
           <p:nvPr/>
         </p:nvSpPr>
@@ -8385,7 +8468,7 @@
       </p:sp>
       <p:sp>
         <p:nvSpPr>
-          <p:cNvPr id="445" name="Rectangle 444"/>
+          <p:cNvPr id="449" name="Rectangle 448"/>
           <p:cNvSpPr/>
           <p:nvPr/>
         </p:nvSpPr>
@@ -8428,7 +8511,7 @@
       </p:sp>
       <p:sp>
         <p:nvSpPr>
-          <p:cNvPr id="447" name="TextBox 446"/>
+          <p:cNvPr id="451" name="TextBox 450"/>
           <p:cNvSpPr txBox="1"/>
           <p:nvPr/>
         </p:nvSpPr>
@@ -8463,7 +8546,7 @@
       </p:sp>
       <p:sp>
         <p:nvSpPr>
-          <p:cNvPr id="449" name="TextBox 448"/>
+          <p:cNvPr id="453" name="TextBox 452"/>
           <p:cNvSpPr txBox="1"/>
           <p:nvPr/>
         </p:nvSpPr>
@@ -8498,7 +8581,7 @@
       </p:sp>
       <p:sp>
         <p:nvSpPr>
-          <p:cNvPr id="451" name="TextBox 450"/>
+          <p:cNvPr id="455" name="TextBox 454"/>
           <p:cNvSpPr txBox="1"/>
           <p:nvPr/>
         </p:nvSpPr>
@@ -8533,7 +8616,7 @@
       </p:sp>
       <p:sp>
         <p:nvSpPr>
-          <p:cNvPr id="453" name="TextBox 452"/>
+          <p:cNvPr id="457" name="TextBox 456"/>
           <p:cNvSpPr txBox="1"/>
           <p:nvPr/>
         </p:nvSpPr>
@@ -8576,14 +8659,14 @@
                 <p:cTn id="2" dur="indefinite" nodeType="mainSeq">
                   <p:childTnLst>
                     <p:par>
-                      <p:cTn id="393" presetID="2" presetClass="entr" presetSubtype="8" fill="hold" grpId="0" nodeType="clickEffect">
+                      <p:cTn id="397" presetID="2" presetClass="entr" presetSubtype="8" fill="hold" grpId="0" nodeType="clickEffect">
                         <p:stCondLst>
                           <p:cond delay="0"/>
                         </p:stCondLst>
                         <p:childTnLst>
                           <p:animEffect transition="in" filter="fly">
                             <p:cBhvr>
-                              <p:cTn id="394" dur="600" fill="hold"/>
+                              <p:cTn id="398" dur="600" fill="hold"/>
                               <p:tgtEl>
                                 <p:spTgt spid="4"/>
                               </p:tgtEl>
@@ -8593,509 +8676,509 @@
                       </p:cTn>
                     </p:par>
                     <p:par>
-                      <p:cTn id="395" presetID="2" presetClass="entr" presetSubtype="8" fill="hold" grpId="0" nodeType="clickEffect">
+                      <p:cTn id="399" presetID="2" presetClass="entr" presetSubtype="8" fill="hold" grpId="0" nodeType="clickEffect">
                         <p:stCondLst>
                           <p:cond delay="200"/>
                         </p:stCondLst>
                         <p:childTnLst>
                           <p:animEffect transition="in" filter="fly">
                             <p:cBhvr>
-                              <p:cTn id="396" dur="600" fill="hold"/>
-                              <p:tgtEl>
-                                <p:spTgt spid="395"/>
-                              </p:tgtEl>
-                            </p:cBhvr>
-                          </p:animEffect>
-                        </p:childTnLst>
-                      </p:cTn>
-                    </p:par>
-                    <p:par>
-                      <p:cTn id="397" presetID="22" presetClass="entr" presetSubtype="0" fill="hold" grpId="0" nodeType="clickEffect">
+                              <p:cTn id="400" dur="600" fill="hold"/>
+                              <p:tgtEl>
+                                <p:spTgt spid="399"/>
+                              </p:tgtEl>
+                            </p:cBhvr>
+                          </p:animEffect>
+                        </p:childTnLst>
+                      </p:cTn>
+                    </p:par>
+                    <p:par>
+                      <p:cTn id="401" presetID="22" presetClass="entr" presetSubtype="0" fill="hold" grpId="0" nodeType="clickEffect">
                         <p:stCondLst>
                           <p:cond delay="300"/>
                         </p:stCondLst>
                         <p:childTnLst>
                           <p:animEffect transition="in" filter="zoom">
                             <p:cBhvr>
-                              <p:cTn id="398" dur="500" fill="hold"/>
-                              <p:tgtEl>
-                                <p:spTgt spid="397"/>
-                              </p:tgtEl>
-                            </p:cBhvr>
-                          </p:animEffect>
-                        </p:childTnLst>
-                      </p:cTn>
-                    </p:par>
-                    <p:par>
-                      <p:cTn id="399" presetID="22" presetClass="entr" presetSubtype="0" fill="hold" grpId="0" nodeType="clickEffect">
+                              <p:cTn id="402" dur="500" fill="hold"/>
+                              <p:tgtEl>
+                                <p:spTgt spid="401"/>
+                              </p:tgtEl>
+                            </p:cBhvr>
+                          </p:animEffect>
+                        </p:childTnLst>
+                      </p:cTn>
+                    </p:par>
+                    <p:par>
+                      <p:cTn id="403" presetID="22" presetClass="entr" presetSubtype="0" fill="hold" grpId="0" nodeType="clickEffect">
                         <p:stCondLst>
                           <p:cond delay="300"/>
                         </p:stCondLst>
                         <p:childTnLst>
                           <p:animEffect transition="in" filter="zoom">
                             <p:cBhvr>
-                              <p:cTn id="400" dur="500" fill="hold"/>
-                              <p:tgtEl>
-                                <p:spTgt spid="399"/>
-                              </p:tgtEl>
-                            </p:cBhvr>
-                          </p:animEffect>
-                        </p:childTnLst>
-                      </p:cTn>
-                    </p:par>
-                    <p:par>
-                      <p:cTn id="401" presetID="10" presetClass="entr" presetSubtype="0" fill="hold" grpId="0" nodeType="clickEffect">
+                              <p:cTn id="404" dur="500" fill="hold"/>
+                              <p:tgtEl>
+                                <p:spTgt spid="403"/>
+                              </p:tgtEl>
+                            </p:cBhvr>
+                          </p:animEffect>
+                        </p:childTnLst>
+                      </p:cTn>
+                    </p:par>
+                    <p:par>
+                      <p:cTn id="405" presetID="10" presetClass="entr" presetSubtype="0" fill="hold" grpId="0" nodeType="clickEffect">
                         <p:stCondLst>
                           <p:cond delay="400"/>
                         </p:stCondLst>
                         <p:childTnLst>
                           <p:animEffect transition="in" filter="fade">
                             <p:cBhvr>
-                              <p:cTn id="402" dur="700" fill="hold"/>
-                              <p:tgtEl>
-                                <p:spTgt spid="401"/>
-                              </p:tgtEl>
-                            </p:cBhvr>
-                          </p:animEffect>
-                        </p:childTnLst>
-                      </p:cTn>
-                    </p:par>
-                    <p:par>
-                      <p:cTn id="403" presetID="10" presetClass="entr" presetSubtype="0" fill="hold" grpId="0" nodeType="clickEffect">
+                              <p:cTn id="406" dur="700" fill="hold"/>
+                              <p:tgtEl>
+                                <p:spTgt spid="405"/>
+                              </p:tgtEl>
+                            </p:cBhvr>
+                          </p:animEffect>
+                        </p:childTnLst>
+                      </p:cTn>
+                    </p:par>
+                    <p:par>
+                      <p:cTn id="407" presetID="10" presetClass="entr" presetSubtype="0" fill="hold" grpId="0" nodeType="clickEffect">
                         <p:stCondLst>
                           <p:cond delay="500"/>
                         </p:stCondLst>
                         <p:childTnLst>
                           <p:animEffect transition="in" filter="fade">
                             <p:cBhvr>
-                              <p:cTn id="404" dur="700" fill="hold"/>
-                              <p:tgtEl>
-                                <p:spTgt spid="403"/>
-                              </p:tgtEl>
-                            </p:cBhvr>
-                          </p:animEffect>
-                        </p:childTnLst>
-                      </p:cTn>
-                    </p:par>
-                    <p:par>
-                      <p:cTn id="405" presetID="10" presetClass="entr" presetSubtype="0" fill="hold" grpId="0" nodeType="clickEffect">
+                              <p:cTn id="408" dur="700" fill="hold"/>
+                              <p:tgtEl>
+                                <p:spTgt spid="407"/>
+                              </p:tgtEl>
+                            </p:cBhvr>
+                          </p:animEffect>
+                        </p:childTnLst>
+                      </p:cTn>
+                    </p:par>
+                    <p:par>
+                      <p:cTn id="409" presetID="10" presetClass="entr" presetSubtype="0" fill="hold" grpId="0" nodeType="clickEffect">
                         <p:stCondLst>
                           <p:cond delay="600"/>
                         </p:stCondLst>
                         <p:childTnLst>
                           <p:animEffect transition="in" filter="fade">
                             <p:cBhvr>
-                              <p:cTn id="406" dur="700" fill="hold"/>
-                              <p:tgtEl>
-                                <p:spTgt spid="405"/>
-                              </p:tgtEl>
-                            </p:cBhvr>
-                          </p:animEffect>
-                        </p:childTnLst>
-                      </p:cTn>
-                    </p:par>
-                    <p:par>
-                      <p:cTn id="407" presetID="2" presetClass="entr" presetSubtype="8" fill="hold" grpId="0" nodeType="clickEffect">
+                              <p:cTn id="410" dur="700" fill="hold"/>
+                              <p:tgtEl>
+                                <p:spTgt spid="409"/>
+                              </p:tgtEl>
+                            </p:cBhvr>
+                          </p:animEffect>
+                        </p:childTnLst>
+                      </p:cTn>
+                    </p:par>
+                    <p:par>
+                      <p:cTn id="411" presetID="2" presetClass="entr" presetSubtype="8" fill="hold" grpId="0" nodeType="clickEffect">
                         <p:stCondLst>
                           <p:cond delay="400"/>
                         </p:stCondLst>
                         <p:childTnLst>
                           <p:animEffect transition="in" filter="fly">
                             <p:cBhvr>
-                              <p:cTn id="408" dur="600" fill="hold"/>
-                              <p:tgtEl>
-                                <p:spTgt spid="407"/>
-                              </p:tgtEl>
-                            </p:cBhvr>
-                          </p:animEffect>
-                        </p:childTnLst>
-                      </p:cTn>
-                    </p:par>
-                    <p:par>
-                      <p:cTn id="409" presetID="22" presetClass="entr" presetSubtype="0" fill="hold" grpId="0" nodeType="clickEffect">
+                              <p:cTn id="412" dur="600" fill="hold"/>
+                              <p:tgtEl>
+                                <p:spTgt spid="411"/>
+                              </p:tgtEl>
+                            </p:cBhvr>
+                          </p:animEffect>
+                        </p:childTnLst>
+                      </p:cTn>
+                    </p:par>
+                    <p:par>
+                      <p:cTn id="413" presetID="22" presetClass="entr" presetSubtype="0" fill="hold" grpId="0" nodeType="clickEffect">
                         <p:stCondLst>
                           <p:cond delay="500"/>
                         </p:stCondLst>
                         <p:childTnLst>
                           <p:animEffect transition="in" filter="zoom">
                             <p:cBhvr>
-                              <p:cTn id="410" dur="500" fill="hold"/>
-                              <p:tgtEl>
-                                <p:spTgt spid="409"/>
-                              </p:tgtEl>
-                            </p:cBhvr>
-                          </p:animEffect>
-                        </p:childTnLst>
-                      </p:cTn>
-                    </p:par>
-                    <p:par>
-                      <p:cTn id="411" presetID="22" presetClass="entr" presetSubtype="0" fill="hold" grpId="0" nodeType="clickEffect">
+                              <p:cTn id="414" dur="500" fill="hold"/>
+                              <p:tgtEl>
+                                <p:spTgt spid="413"/>
+                              </p:tgtEl>
+                            </p:cBhvr>
+                          </p:animEffect>
+                        </p:childTnLst>
+                      </p:cTn>
+                    </p:par>
+                    <p:par>
+                      <p:cTn id="415" presetID="22" presetClass="entr" presetSubtype="0" fill="hold" grpId="0" nodeType="clickEffect">
                         <p:stCondLst>
                           <p:cond delay="500"/>
                         </p:stCondLst>
                         <p:childTnLst>
                           <p:animEffect transition="in" filter="zoom">
                             <p:cBhvr>
-                              <p:cTn id="412" dur="500" fill="hold"/>
-                              <p:tgtEl>
-                                <p:spTgt spid="411"/>
-                              </p:tgtEl>
-                            </p:cBhvr>
-                          </p:animEffect>
-                        </p:childTnLst>
-                      </p:cTn>
-                    </p:par>
-                    <p:par>
-                      <p:cTn id="413" presetID="10" presetClass="entr" presetSubtype="0" fill="hold" grpId="0" nodeType="clickEffect">
+                              <p:cTn id="416" dur="500" fill="hold"/>
+                              <p:tgtEl>
+                                <p:spTgt spid="415"/>
+                              </p:tgtEl>
+                            </p:cBhvr>
+                          </p:animEffect>
+                        </p:childTnLst>
+                      </p:cTn>
+                    </p:par>
+                    <p:par>
+                      <p:cTn id="417" presetID="10" presetClass="entr" presetSubtype="0" fill="hold" grpId="0" nodeType="clickEffect">
                         <p:stCondLst>
                           <p:cond delay="600"/>
                         </p:stCondLst>
                         <p:childTnLst>
                           <p:animEffect transition="in" filter="fade">
                             <p:cBhvr>
-                              <p:cTn id="414" dur="700" fill="hold"/>
-                              <p:tgtEl>
-                                <p:spTgt spid="413"/>
-                              </p:tgtEl>
-                            </p:cBhvr>
-                          </p:animEffect>
-                        </p:childTnLst>
-                      </p:cTn>
-                    </p:par>
-                    <p:par>
-                      <p:cTn id="415" presetID="10" presetClass="entr" presetSubtype="0" fill="hold" grpId="0" nodeType="clickEffect">
+                              <p:cTn id="418" dur="700" fill="hold"/>
+                              <p:tgtEl>
+                                <p:spTgt spid="417"/>
+                              </p:tgtEl>
+                            </p:cBhvr>
+                          </p:animEffect>
+                        </p:childTnLst>
+                      </p:cTn>
+                    </p:par>
+                    <p:par>
+                      <p:cTn id="419" presetID="10" presetClass="entr" presetSubtype="0" fill="hold" grpId="0" nodeType="clickEffect">
                         <p:stCondLst>
                           <p:cond delay="700"/>
                         </p:stCondLst>
                         <p:childTnLst>
                           <p:animEffect transition="in" filter="fade">
                             <p:cBhvr>
-                              <p:cTn id="416" dur="700" fill="hold"/>
-                              <p:tgtEl>
-                                <p:spTgt spid="415"/>
-                              </p:tgtEl>
-                            </p:cBhvr>
-                          </p:animEffect>
-                        </p:childTnLst>
-                      </p:cTn>
-                    </p:par>
-                    <p:par>
-                      <p:cTn id="417" presetID="10" presetClass="entr" presetSubtype="0" fill="hold" grpId="0" nodeType="clickEffect">
+                              <p:cTn id="420" dur="700" fill="hold"/>
+                              <p:tgtEl>
+                                <p:spTgt spid="419"/>
+                              </p:tgtEl>
+                            </p:cBhvr>
+                          </p:animEffect>
+                        </p:childTnLst>
+                      </p:cTn>
+                    </p:par>
+                    <p:par>
+                      <p:cTn id="421" presetID="10" presetClass="entr" presetSubtype="0" fill="hold" grpId="0" nodeType="clickEffect">
                         <p:stCondLst>
                           <p:cond delay="800"/>
                         </p:stCondLst>
                         <p:childTnLst>
                           <p:animEffect transition="in" filter="fade">
                             <p:cBhvr>
-                              <p:cTn id="418" dur="700" fill="hold"/>
-                              <p:tgtEl>
-                                <p:spTgt spid="417"/>
-                              </p:tgtEl>
-                            </p:cBhvr>
-                          </p:animEffect>
-                        </p:childTnLst>
-                      </p:cTn>
-                    </p:par>
-                    <p:par>
-                      <p:cTn id="419" presetID="2" presetClass="entr" presetSubtype="8" fill="hold" grpId="0" nodeType="clickEffect">
+                              <p:cTn id="422" dur="700" fill="hold"/>
+                              <p:tgtEl>
+                                <p:spTgt spid="421"/>
+                              </p:tgtEl>
+                            </p:cBhvr>
+                          </p:animEffect>
+                        </p:childTnLst>
+                      </p:cTn>
+                    </p:par>
+                    <p:par>
+                      <p:cTn id="423" presetID="2" presetClass="entr" presetSubtype="8" fill="hold" grpId="0" nodeType="clickEffect">
                         <p:stCondLst>
                           <p:cond delay="600"/>
                         </p:stCondLst>
                         <p:childTnLst>
                           <p:animEffect transition="in" filter="fly">
                             <p:cBhvr>
-                              <p:cTn id="420" dur="600" fill="hold"/>
-                              <p:tgtEl>
-                                <p:spTgt spid="419"/>
-                              </p:tgtEl>
-                            </p:cBhvr>
-                          </p:animEffect>
-                        </p:childTnLst>
-                      </p:cTn>
-                    </p:par>
-                    <p:par>
-                      <p:cTn id="421" presetID="22" presetClass="entr" presetSubtype="0" fill="hold" grpId="0" nodeType="clickEffect">
+                              <p:cTn id="424" dur="600" fill="hold"/>
+                              <p:tgtEl>
+                                <p:spTgt spid="423"/>
+                              </p:tgtEl>
+                            </p:cBhvr>
+                          </p:animEffect>
+                        </p:childTnLst>
+                      </p:cTn>
+                    </p:par>
+                    <p:par>
+                      <p:cTn id="425" presetID="22" presetClass="entr" presetSubtype="0" fill="hold" grpId="0" nodeType="clickEffect">
                         <p:stCondLst>
                           <p:cond delay="700"/>
                         </p:stCondLst>
                         <p:childTnLst>
                           <p:animEffect transition="in" filter="zoom">
                             <p:cBhvr>
-                              <p:cTn id="422" dur="500" fill="hold"/>
-                              <p:tgtEl>
-                                <p:spTgt spid="421"/>
-                              </p:tgtEl>
-                            </p:cBhvr>
-                          </p:animEffect>
-                        </p:childTnLst>
-                      </p:cTn>
-                    </p:par>
-                    <p:par>
-                      <p:cTn id="423" presetID="22" presetClass="entr" presetSubtype="0" fill="hold" grpId="0" nodeType="clickEffect">
+                              <p:cTn id="426" dur="500" fill="hold"/>
+                              <p:tgtEl>
+                                <p:spTgt spid="425"/>
+                              </p:tgtEl>
+                            </p:cBhvr>
+                          </p:animEffect>
+                        </p:childTnLst>
+                      </p:cTn>
+                    </p:par>
+                    <p:par>
+                      <p:cTn id="427" presetID="22" presetClass="entr" presetSubtype="0" fill="hold" grpId="0" nodeType="clickEffect">
                         <p:stCondLst>
                           <p:cond delay="700"/>
                         </p:stCondLst>
                         <p:childTnLst>
                           <p:animEffect transition="in" filter="zoom">
                             <p:cBhvr>
-                              <p:cTn id="424" dur="500" fill="hold"/>
-                              <p:tgtEl>
-                                <p:spTgt spid="423"/>
-                              </p:tgtEl>
-                            </p:cBhvr>
-                          </p:animEffect>
-                        </p:childTnLst>
-                      </p:cTn>
-                    </p:par>
-                    <p:par>
-                      <p:cTn id="425" presetID="10" presetClass="entr" presetSubtype="0" fill="hold" grpId="0" nodeType="clickEffect">
+                              <p:cTn id="428" dur="500" fill="hold"/>
+                              <p:tgtEl>
+                                <p:spTgt spid="427"/>
+                              </p:tgtEl>
+                            </p:cBhvr>
+                          </p:animEffect>
+                        </p:childTnLst>
+                      </p:cTn>
+                    </p:par>
+                    <p:par>
+                      <p:cTn id="429" presetID="10" presetClass="entr" presetSubtype="0" fill="hold" grpId="0" nodeType="clickEffect">
                         <p:stCondLst>
                           <p:cond delay="800"/>
                         </p:stCondLst>
                         <p:childTnLst>
                           <p:animEffect transition="in" filter="fade">
                             <p:cBhvr>
-                              <p:cTn id="426" dur="700" fill="hold"/>
-                              <p:tgtEl>
-                                <p:spTgt spid="425"/>
-                              </p:tgtEl>
-                            </p:cBhvr>
-                          </p:animEffect>
-                        </p:childTnLst>
-                      </p:cTn>
-                    </p:par>
-                    <p:par>
-                      <p:cTn id="427" presetID="10" presetClass="entr" presetSubtype="0" fill="hold" grpId="0" nodeType="clickEffect">
+                              <p:cTn id="430" dur="700" fill="hold"/>
+                              <p:tgtEl>
+                                <p:spTgt spid="429"/>
+                              </p:tgtEl>
+                            </p:cBhvr>
+                          </p:animEffect>
+                        </p:childTnLst>
+                      </p:cTn>
+                    </p:par>
+                    <p:par>
+                      <p:cTn id="431" presetID="10" presetClass="entr" presetSubtype="0" fill="hold" grpId="0" nodeType="clickEffect">
                         <p:stCondLst>
                           <p:cond delay="900"/>
                         </p:stCondLst>
                         <p:childTnLst>
                           <p:animEffect transition="in" filter="fade">
                             <p:cBhvr>
-                              <p:cTn id="428" dur="700" fill="hold"/>
-                              <p:tgtEl>
-                                <p:spTgt spid="427"/>
-                              </p:tgtEl>
-                            </p:cBhvr>
-                          </p:animEffect>
-                        </p:childTnLst>
-                      </p:cTn>
-                    </p:par>
-                    <p:par>
-                      <p:cTn id="429" presetID="10" presetClass="entr" presetSubtype="0" fill="hold" grpId="0" nodeType="clickEffect">
+                              <p:cTn id="432" dur="700" fill="hold"/>
+                              <p:tgtEl>
+                                <p:spTgt spid="431"/>
+                              </p:tgtEl>
+                            </p:cBhvr>
+                          </p:animEffect>
+                        </p:childTnLst>
+                      </p:cTn>
+                    </p:par>
+                    <p:par>
+                      <p:cTn id="433" presetID="10" presetClass="entr" presetSubtype="0" fill="hold" grpId="0" nodeType="clickEffect">
                         <p:stCondLst>
                           <p:cond delay="1000"/>
                         </p:stCondLst>
                         <p:childTnLst>
                           <p:animEffect transition="in" filter="fade">
                             <p:cBhvr>
-                              <p:cTn id="430" dur="700" fill="hold"/>
-                              <p:tgtEl>
-                                <p:spTgt spid="429"/>
-                              </p:tgtEl>
-                            </p:cBhvr>
-                          </p:animEffect>
-                        </p:childTnLst>
-                      </p:cTn>
-                    </p:par>
-                    <p:par>
-                      <p:cTn id="431" presetID="2" presetClass="entr" presetSubtype="8" fill="hold" grpId="0" nodeType="clickEffect">
+                              <p:cTn id="434" dur="700" fill="hold"/>
+                              <p:tgtEl>
+                                <p:spTgt spid="433"/>
+                              </p:tgtEl>
+                            </p:cBhvr>
+                          </p:animEffect>
+                        </p:childTnLst>
+                      </p:cTn>
+                    </p:par>
+                    <p:par>
+                      <p:cTn id="435" presetID="2" presetClass="entr" presetSubtype="8" fill="hold" grpId="0" nodeType="clickEffect">
                         <p:stCondLst>
                           <p:cond delay="800"/>
                         </p:stCondLst>
                         <p:childTnLst>
                           <p:animEffect transition="in" filter="fly">
                             <p:cBhvr>
-                              <p:cTn id="432" dur="600" fill="hold"/>
-                              <p:tgtEl>
-                                <p:spTgt spid="431"/>
-                              </p:tgtEl>
-                            </p:cBhvr>
-                          </p:animEffect>
-                        </p:childTnLst>
-                      </p:cTn>
-                    </p:par>
-                    <p:par>
-                      <p:cTn id="433" presetID="22" presetClass="entr" presetSubtype="0" fill="hold" grpId="0" nodeType="clickEffect">
+                              <p:cTn id="436" dur="600" fill="hold"/>
+                              <p:tgtEl>
+                                <p:spTgt spid="435"/>
+                              </p:tgtEl>
+                            </p:cBhvr>
+                          </p:animEffect>
+                        </p:childTnLst>
+                      </p:cTn>
+                    </p:par>
+                    <p:par>
+                      <p:cTn id="437" presetID="22" presetClass="entr" presetSubtype="0" fill="hold" grpId="0" nodeType="clickEffect">
                         <p:stCondLst>
                           <p:cond delay="900"/>
                         </p:stCondLst>
                         <p:childTnLst>
                           <p:animEffect transition="in" filter="zoom">
                             <p:cBhvr>
-                              <p:cTn id="434" dur="500" fill="hold"/>
-                              <p:tgtEl>
-                                <p:spTgt spid="433"/>
-                              </p:tgtEl>
-                            </p:cBhvr>
-                          </p:animEffect>
-                        </p:childTnLst>
-                      </p:cTn>
-                    </p:par>
-                    <p:par>
-                      <p:cTn id="435" presetID="22" presetClass="entr" presetSubtype="0" fill="hold" grpId="0" nodeType="clickEffect">
+                              <p:cTn id="438" dur="500" fill="hold"/>
+                              <p:tgtEl>
+                                <p:spTgt spid="437"/>
+                              </p:tgtEl>
+                            </p:cBhvr>
+                          </p:animEffect>
+                        </p:childTnLst>
+                      </p:cTn>
+                    </p:par>
+                    <p:par>
+                      <p:cTn id="439" presetID="22" presetClass="entr" presetSubtype="0" fill="hold" grpId="0" nodeType="clickEffect">
                         <p:stCondLst>
                           <p:cond delay="900"/>
                         </p:stCondLst>
                         <p:childTnLst>
                           <p:animEffect transition="in" filter="zoom">
                             <p:cBhvr>
-                              <p:cTn id="436" dur="500" fill="hold"/>
-                              <p:tgtEl>
-                                <p:spTgt spid="435"/>
-                              </p:tgtEl>
-                            </p:cBhvr>
-                          </p:animEffect>
-                        </p:childTnLst>
-                      </p:cTn>
-                    </p:par>
-                    <p:par>
-                      <p:cTn id="437" presetID="10" presetClass="entr" presetSubtype="0" fill="hold" grpId="0" nodeType="clickEffect">
+                              <p:cTn id="440" dur="500" fill="hold"/>
+                              <p:tgtEl>
+                                <p:spTgt spid="439"/>
+                              </p:tgtEl>
+                            </p:cBhvr>
+                          </p:animEffect>
+                        </p:childTnLst>
+                      </p:cTn>
+                    </p:par>
+                    <p:par>
+                      <p:cTn id="441" presetID="10" presetClass="entr" presetSubtype="0" fill="hold" grpId="0" nodeType="clickEffect">
                         <p:stCondLst>
                           <p:cond delay="1000"/>
                         </p:stCondLst>
                         <p:childTnLst>
                           <p:animEffect transition="in" filter="fade">
                             <p:cBhvr>
-                              <p:cTn id="438" dur="700" fill="hold"/>
-                              <p:tgtEl>
-                                <p:spTgt spid="437"/>
-                              </p:tgtEl>
-                            </p:cBhvr>
-                          </p:animEffect>
-                        </p:childTnLst>
-                      </p:cTn>
-                    </p:par>
-                    <p:par>
-                      <p:cTn id="439" presetID="10" presetClass="entr" presetSubtype="0" fill="hold" grpId="0" nodeType="clickEffect">
+                              <p:cTn id="442" dur="700" fill="hold"/>
+                              <p:tgtEl>
+                                <p:spTgt spid="441"/>
+                              </p:tgtEl>
+                            </p:cBhvr>
+                          </p:animEffect>
+                        </p:childTnLst>
+                      </p:cTn>
+                    </p:par>
+                    <p:par>
+                      <p:cTn id="443" presetID="10" presetClass="entr" presetSubtype="0" fill="hold" grpId="0" nodeType="clickEffect">
                         <p:stCondLst>
                           <p:cond delay="1100"/>
                         </p:stCondLst>
                         <p:childTnLst>
                           <p:animEffect transition="in" filter="fade">
                             <p:cBhvr>
-                              <p:cTn id="440" dur="700" fill="hold"/>
-                              <p:tgtEl>
-                                <p:spTgt spid="439"/>
-                              </p:tgtEl>
-                            </p:cBhvr>
-                          </p:animEffect>
-                        </p:childTnLst>
-                      </p:cTn>
-                    </p:par>
-                    <p:par>
-                      <p:cTn id="441" presetID="10" presetClass="entr" presetSubtype="0" fill="hold" grpId="0" nodeType="clickEffect">
+                              <p:cTn id="444" dur="700" fill="hold"/>
+                              <p:tgtEl>
+                                <p:spTgt spid="443"/>
+                              </p:tgtEl>
+                            </p:cBhvr>
+                          </p:animEffect>
+                        </p:childTnLst>
+                      </p:cTn>
+                    </p:par>
+                    <p:par>
+                      <p:cTn id="445" presetID="10" presetClass="entr" presetSubtype="0" fill="hold" grpId="0" nodeType="clickEffect">
                         <p:stCondLst>
                           <p:cond delay="1200"/>
                         </p:stCondLst>
                         <p:childTnLst>
                           <p:animEffect transition="in" filter="fade">
                             <p:cBhvr>
-                              <p:cTn id="442" dur="700" fill="hold"/>
-                              <p:tgtEl>
-                                <p:spTgt spid="441"/>
-                              </p:tgtEl>
-                            </p:cBhvr>
-                          </p:animEffect>
-                        </p:childTnLst>
-                      </p:cTn>
-                    </p:par>
-                    <p:par>
-                      <p:cTn id="443" presetID="2" presetClass="entr" presetSubtype="8" fill="hold" grpId="0" nodeType="clickEffect">
+                              <p:cTn id="446" dur="700" fill="hold"/>
+                              <p:tgtEl>
+                                <p:spTgt spid="445"/>
+                              </p:tgtEl>
+                            </p:cBhvr>
+                          </p:animEffect>
+                        </p:childTnLst>
+                      </p:cTn>
+                    </p:par>
+                    <p:par>
+                      <p:cTn id="447" presetID="2" presetClass="entr" presetSubtype="8" fill="hold" grpId="0" nodeType="clickEffect">
                         <p:stCondLst>
                           <p:cond delay="1000"/>
                         </p:stCondLst>
                         <p:childTnLst>
                           <p:animEffect transition="in" filter="fly">
                             <p:cBhvr>
-                              <p:cTn id="444" dur="600" fill="hold"/>
-                              <p:tgtEl>
-                                <p:spTgt spid="443"/>
-                              </p:tgtEl>
-                            </p:cBhvr>
-                          </p:animEffect>
-                        </p:childTnLst>
-                      </p:cTn>
-                    </p:par>
-                    <p:par>
-                      <p:cTn id="445" presetID="22" presetClass="entr" presetSubtype="0" fill="hold" grpId="0" nodeType="clickEffect">
+                              <p:cTn id="448" dur="600" fill="hold"/>
+                              <p:tgtEl>
+                                <p:spTgt spid="447"/>
+                              </p:tgtEl>
+                            </p:cBhvr>
+                          </p:animEffect>
+                        </p:childTnLst>
+                      </p:cTn>
+                    </p:par>
+                    <p:par>
+                      <p:cTn id="449" presetID="22" presetClass="entr" presetSubtype="0" fill="hold" grpId="0" nodeType="clickEffect">
                         <p:stCondLst>
                           <p:cond delay="1100"/>
                         </p:stCondLst>
                         <p:childTnLst>
                           <p:animEffect transition="in" filter="zoom">
                             <p:cBhvr>
-                              <p:cTn id="446" dur="500" fill="hold"/>
-                              <p:tgtEl>
-                                <p:spTgt spid="445"/>
-                              </p:tgtEl>
-                            </p:cBhvr>
-                          </p:animEffect>
-                        </p:childTnLst>
-                      </p:cTn>
-                    </p:par>
-                    <p:par>
-                      <p:cTn id="447" presetID="22" presetClass="entr" presetSubtype="0" fill="hold" grpId="0" nodeType="clickEffect">
+                              <p:cTn id="450" dur="500" fill="hold"/>
+                              <p:tgtEl>
+                                <p:spTgt spid="449"/>
+                              </p:tgtEl>
+                            </p:cBhvr>
+                          </p:animEffect>
+                        </p:childTnLst>
+                      </p:cTn>
+                    </p:par>
+                    <p:par>
+                      <p:cTn id="451" presetID="22" presetClass="entr" presetSubtype="0" fill="hold" grpId="0" nodeType="clickEffect">
                         <p:stCondLst>
                           <p:cond delay="1100"/>
                         </p:stCondLst>
                         <p:childTnLst>
                           <p:animEffect transition="in" filter="zoom">
                             <p:cBhvr>
-                              <p:cTn id="448" dur="500" fill="hold"/>
-                              <p:tgtEl>
-                                <p:spTgt spid="447"/>
-                              </p:tgtEl>
-                            </p:cBhvr>
-                          </p:animEffect>
-                        </p:childTnLst>
-                      </p:cTn>
-                    </p:par>
-                    <p:par>
-                      <p:cTn id="449" presetID="10" presetClass="entr" presetSubtype="0" fill="hold" grpId="0" nodeType="clickEffect">
+                              <p:cTn id="452" dur="500" fill="hold"/>
+                              <p:tgtEl>
+                                <p:spTgt spid="451"/>
+                              </p:tgtEl>
+                            </p:cBhvr>
+                          </p:animEffect>
+                        </p:childTnLst>
+                      </p:cTn>
+                    </p:par>
+                    <p:par>
+                      <p:cTn id="453" presetID="10" presetClass="entr" presetSubtype="0" fill="hold" grpId="0" nodeType="clickEffect">
                         <p:stCondLst>
                           <p:cond delay="1200"/>
                         </p:stCondLst>
                         <p:childTnLst>
                           <p:animEffect transition="in" filter="fade">
                             <p:cBhvr>
-                              <p:cTn id="450" dur="700" fill="hold"/>
-                              <p:tgtEl>
-                                <p:spTgt spid="449"/>
-                              </p:tgtEl>
-                            </p:cBhvr>
-                          </p:animEffect>
-                        </p:childTnLst>
-                      </p:cTn>
-                    </p:par>
-                    <p:par>
-                      <p:cTn id="451" presetID="10" presetClass="entr" presetSubtype="0" fill="hold" grpId="0" nodeType="clickEffect">
+                              <p:cTn id="454" dur="700" fill="hold"/>
+                              <p:tgtEl>
+                                <p:spTgt spid="453"/>
+                              </p:tgtEl>
+                            </p:cBhvr>
+                          </p:animEffect>
+                        </p:childTnLst>
+                      </p:cTn>
+                    </p:par>
+                    <p:par>
+                      <p:cTn id="455" presetID="10" presetClass="entr" presetSubtype="0" fill="hold" grpId="0" nodeType="clickEffect">
                         <p:stCondLst>
                           <p:cond delay="1300"/>
                         </p:stCondLst>
                         <p:childTnLst>
                           <p:animEffect transition="in" filter="fade">
                             <p:cBhvr>
-                              <p:cTn id="452" dur="700" fill="hold"/>
-                              <p:tgtEl>
-                                <p:spTgt spid="451"/>
-                              </p:tgtEl>
-                            </p:cBhvr>
-                          </p:animEffect>
-                        </p:childTnLst>
-                      </p:cTn>
-                    </p:par>
-                    <p:par>
-                      <p:cTn id="453" presetID="10" presetClass="entr" presetSubtype="0" fill="hold" grpId="0" nodeType="clickEffect">
+                              <p:cTn id="456" dur="700" fill="hold"/>
+                              <p:tgtEl>
+                                <p:spTgt spid="455"/>
+                              </p:tgtEl>
+                            </p:cBhvr>
+                          </p:animEffect>
+                        </p:childTnLst>
+                      </p:cTn>
+                    </p:par>
+                    <p:par>
+                      <p:cTn id="457" presetID="10" presetClass="entr" presetSubtype="0" fill="hold" grpId="0" nodeType="clickEffect">
                         <p:stCondLst>
                           <p:cond delay="1400"/>
                         </p:stCondLst>
                         <p:childTnLst>
                           <p:animEffect transition="in" filter="fade">
                             <p:cBhvr>
-                              <p:cTn id="454" dur="700" fill="hold"/>
-                              <p:tgtEl>
-                                <p:spTgt spid="453"/>
+                              <p:cTn id="458" dur="700" fill="hold"/>
+                              <p:tgtEl>
+                                <p:spTgt spid="457"/>
                               </p:tgtEl>
                             </p:cBhvr>
                           </p:animEffect>
@@ -9323,7 +9406,7 @@
       </p:sp>
       <p:sp>
         <p:nvSpPr>
-          <p:cNvPr id="457" name="Rectangle 456"/>
+          <p:cNvPr id="461" name="Rectangle 460"/>
           <p:cNvSpPr/>
           <p:nvPr/>
         </p:nvSpPr>
@@ -9366,7 +9449,7 @@
       </p:sp>
       <p:sp>
         <p:nvSpPr>
-          <p:cNvPr id="459" name="TextBox 458"/>
+          <p:cNvPr id="463" name="TextBox 462"/>
           <p:cNvSpPr txBox="1"/>
           <p:nvPr/>
         </p:nvSpPr>
@@ -9401,7 +9484,7 @@
       </p:sp>
       <p:sp>
         <p:nvSpPr>
-          <p:cNvPr id="461" name="TextBox 460"/>
+          <p:cNvPr id="465" name="TextBox 464"/>
           <p:cNvSpPr txBox="1"/>
           <p:nvPr/>
         </p:nvSpPr>
@@ -9436,7 +9519,7 @@
       </p:sp>
       <p:sp>
         <p:nvSpPr>
-          <p:cNvPr id="463" name="TextBox 462"/>
+          <p:cNvPr id="467" name="TextBox 466"/>
           <p:cNvSpPr txBox="1"/>
           <p:nvPr/>
         </p:nvSpPr>
@@ -9471,7 +9554,7 @@
       </p:sp>
       <p:sp>
         <p:nvSpPr>
-          <p:cNvPr id="465" name="Rectangle 464"/>
+          <p:cNvPr id="469" name="Rectangle 468"/>
           <p:cNvSpPr/>
           <p:nvPr/>
         </p:nvSpPr>
@@ -9514,7 +9597,7 @@
       </p:sp>
       <p:sp>
         <p:nvSpPr>
-          <p:cNvPr id="467" name="TextBox 466"/>
+          <p:cNvPr id="471" name="TextBox 470"/>
           <p:cNvSpPr txBox="1"/>
           <p:nvPr/>
         </p:nvSpPr>
@@ -9549,7 +9632,7 @@
       </p:sp>
       <p:sp>
         <p:nvSpPr>
-          <p:cNvPr id="469" name="TextBox 468"/>
+          <p:cNvPr id="473" name="TextBox 472"/>
           <p:cNvSpPr txBox="1"/>
           <p:nvPr/>
         </p:nvSpPr>
@@ -9584,7 +9667,7 @@
       </p:sp>
       <p:sp>
         <p:nvSpPr>
-          <p:cNvPr id="471" name="TextBox 470"/>
+          <p:cNvPr id="475" name="TextBox 474"/>
           <p:cNvSpPr txBox="1"/>
           <p:nvPr/>
         </p:nvSpPr>
@@ -9619,7 +9702,7 @@
       </p:sp>
       <p:sp>
         <p:nvSpPr>
-          <p:cNvPr id="473" name="TextBox 472"/>
+          <p:cNvPr id="477" name="TextBox 476"/>
           <p:cNvSpPr txBox="1"/>
           <p:nvPr/>
         </p:nvSpPr>
@@ -9654,7 +9737,7 @@
       </p:sp>
       <p:sp>
         <p:nvSpPr>
-          <p:cNvPr id="475" name="TextBox 474"/>
+          <p:cNvPr id="479" name="TextBox 478"/>
           <p:cNvSpPr txBox="1"/>
           <p:nvPr/>
         </p:nvSpPr>
@@ -9689,7 +9772,7 @@
       </p:sp>
       <p:sp>
         <p:nvSpPr>
-          <p:cNvPr id="477" name="TextBox 476"/>
+          <p:cNvPr id="481" name="TextBox 480"/>
           <p:cNvSpPr txBox="1"/>
           <p:nvPr/>
         </p:nvSpPr>
@@ -9732,14 +9815,14 @@
                 <p:cTn id="2" dur="indefinite" nodeType="mainSeq">
                   <p:childTnLst>
                     <p:par>
-                      <p:cTn id="455" presetID="10" presetClass="entr" presetSubtype="0" fill="hold" grpId="0" nodeType="clickEffect">
+                      <p:cTn id="459" presetID="10" presetClass="entr" presetSubtype="0" fill="hold" grpId="0" nodeType="clickEffect">
                         <p:stCondLst>
                           <p:cond delay="0"/>
                         </p:stCondLst>
                         <p:childTnLst>
                           <p:animEffect transition="in" filter="fade">
                             <p:cBhvr>
-                              <p:cTn id="456" dur="700" fill="hold"/>
+                              <p:cTn id="460" dur="700" fill="hold"/>
                               <p:tgtEl>
                                 <p:spTgt spid="5"/>
                               </p:tgtEl>
@@ -9749,186 +9832,186 @@
                       </p:cTn>
                     </p:par>
                     <p:par>
-                      <p:cTn id="457" presetID="10" presetClass="entr" presetSubtype="0" fill="hold" grpId="0" nodeType="clickEffect">
+                      <p:cTn id="461" presetID="10" presetClass="entr" presetSubtype="0" fill="hold" grpId="0" nodeType="clickEffect">
                         <p:stCondLst>
                           <p:cond delay="0"/>
                         </p:stCondLst>
                         <p:childTnLst>
                           <p:animEffect transition="in" filter="fade">
                             <p:cBhvr>
-                              <p:cTn id="458" dur="700" fill="hold"/>
-                              <p:tgtEl>
-                                <p:spTgt spid="457"/>
-                              </p:tgtEl>
-                            </p:cBhvr>
-                          </p:animEffect>
-                        </p:childTnLst>
-                      </p:cTn>
-                    </p:par>
-                    <p:par>
-                      <p:cTn id="459" presetID="22" presetClass="entr" presetSubtype="0" fill="hold" grpId="0" nodeType="clickEffect">
+                              <p:cTn id="462" dur="700" fill="hold"/>
+                              <p:tgtEl>
+                                <p:spTgt spid="461"/>
+                              </p:tgtEl>
+                            </p:cBhvr>
+                          </p:animEffect>
+                        </p:childTnLst>
+                      </p:cTn>
+                    </p:par>
+                    <p:par>
+                      <p:cTn id="463" presetID="22" presetClass="entr" presetSubtype="0" fill="hold" grpId="0" nodeType="clickEffect">
                         <p:stCondLst>
                           <p:cond delay="100"/>
                         </p:stCondLst>
                         <p:childTnLst>
                           <p:animEffect transition="in" filter="zoom">
                             <p:cBhvr>
-                              <p:cTn id="460" dur="500" fill="hold"/>
-                              <p:tgtEl>
-                                <p:spTgt spid="459"/>
-                              </p:tgtEl>
-                            </p:cBhvr>
-                          </p:animEffect>
-                        </p:childTnLst>
-                      </p:cTn>
-                    </p:par>
-                    <p:par>
-                      <p:cTn id="461" presetID="2" presetClass="entr" presetSubtype="8" fill="hold" grpId="0" nodeType="clickEffect">
+                              <p:cTn id="464" dur="500" fill="hold"/>
+                              <p:tgtEl>
+                                <p:spTgt spid="463"/>
+                              </p:tgtEl>
+                            </p:cBhvr>
+                          </p:animEffect>
+                        </p:childTnLst>
+                      </p:cTn>
+                    </p:par>
+                    <p:par>
+                      <p:cTn id="465" presetID="2" presetClass="entr" presetSubtype="8" fill="hold" grpId="0" nodeType="clickEffect">
                         <p:stCondLst>
                           <p:cond delay="300"/>
                         </p:stCondLst>
                         <p:childTnLst>
                           <p:animEffect transition="in" filter="fly">
                             <p:cBhvr>
-                              <p:cTn id="462" dur="600" fill="hold"/>
-                              <p:tgtEl>
-                                <p:spTgt spid="461"/>
-                              </p:tgtEl>
-                            </p:cBhvr>
-                          </p:animEffect>
-                        </p:childTnLst>
-                      </p:cTn>
-                    </p:par>
-                    <p:par>
-                      <p:cTn id="463" presetID="2" presetClass="entr" presetSubtype="8" fill="hold" grpId="0" nodeType="clickEffect">
+                              <p:cTn id="466" dur="600" fill="hold"/>
+                              <p:tgtEl>
+                                <p:spTgt spid="465"/>
+                              </p:tgtEl>
+                            </p:cBhvr>
+                          </p:animEffect>
+                        </p:childTnLst>
+                      </p:cTn>
+                    </p:par>
+                    <p:par>
+                      <p:cTn id="467" presetID="2" presetClass="entr" presetSubtype="8" fill="hold" grpId="0" nodeType="clickEffect">
                         <p:stCondLst>
                           <p:cond delay="600"/>
                         </p:stCondLst>
                         <p:childTnLst>
                           <p:animEffect transition="in" filter="fly">
                             <p:cBhvr>
-                              <p:cTn id="464" dur="600" fill="hold"/>
-                              <p:tgtEl>
-                                <p:spTgt spid="463"/>
-                              </p:tgtEl>
-                            </p:cBhvr>
-                          </p:animEffect>
-                        </p:childTnLst>
-                      </p:cTn>
-                    </p:par>
-                    <p:par>
-                      <p:cTn id="465" presetID="10" presetClass="entr" presetSubtype="0" fill="hold" grpId="0" nodeType="clickEffect">
+                              <p:cTn id="468" dur="600" fill="hold"/>
+                              <p:tgtEl>
+                                <p:spTgt spid="467"/>
+                              </p:tgtEl>
+                            </p:cBhvr>
+                          </p:animEffect>
+                        </p:childTnLst>
+                      </p:cTn>
+                    </p:par>
+                    <p:par>
+                      <p:cTn id="469" presetID="10" presetClass="entr" presetSubtype="0" fill="hold" grpId="0" nodeType="clickEffect">
                         <p:stCondLst>
                           <p:cond delay="900"/>
                         </p:stCondLst>
                         <p:childTnLst>
                           <p:animEffect transition="in" filter="fade">
                             <p:cBhvr>
-                              <p:cTn id="466" dur="700" fill="hold"/>
-                              <p:tgtEl>
-                                <p:spTgt spid="465"/>
-                              </p:tgtEl>
-                            </p:cBhvr>
-                          </p:animEffect>
-                        </p:childTnLst>
-                      </p:cTn>
-                    </p:par>
-                    <p:par>
-                      <p:cTn id="467" presetID="10" presetClass="entr" presetSubtype="0" fill="hold" grpId="0" nodeType="clickEffect">
+                              <p:cTn id="470" dur="700" fill="hold"/>
+                              <p:tgtEl>
+                                <p:spTgt spid="469"/>
+                              </p:tgtEl>
+                            </p:cBhvr>
+                          </p:animEffect>
+                        </p:childTnLst>
+                      </p:cTn>
+                    </p:par>
+                    <p:par>
+                      <p:cTn id="471" presetID="10" presetClass="entr" presetSubtype="0" fill="hold" grpId="0" nodeType="clickEffect">
                         <p:stCondLst>
                           <p:cond delay="1000"/>
                         </p:stCondLst>
                         <p:childTnLst>
                           <p:animEffect transition="in" filter="fade">
                             <p:cBhvr>
-                              <p:cTn id="468" dur="700" fill="hold"/>
-                              <p:tgtEl>
-                                <p:spTgt spid="467"/>
-                              </p:tgtEl>
-                            </p:cBhvr>
-                          </p:animEffect>
-                        </p:childTnLst>
-                      </p:cTn>
-                    </p:par>
-                    <p:par>
-                      <p:cTn id="469" presetID="10" presetClass="entr" presetSubtype="0" fill="hold" grpId="0" nodeType="clickEffect">
+                              <p:cTn id="472" dur="700" fill="hold"/>
+                              <p:tgtEl>
+                                <p:spTgt spid="471"/>
+                              </p:tgtEl>
+                            </p:cBhvr>
+                          </p:animEffect>
+                        </p:childTnLst>
+                      </p:cTn>
+                    </p:par>
+                    <p:par>
+                      <p:cTn id="473" presetID="10" presetClass="entr" presetSubtype="0" fill="hold" grpId="0" nodeType="clickEffect">
                         <p:stCondLst>
                           <p:cond delay="1100"/>
                         </p:stCondLst>
                         <p:childTnLst>
                           <p:animEffect transition="in" filter="fade">
                             <p:cBhvr>
-                              <p:cTn id="470" dur="700" fill="hold"/>
-                              <p:tgtEl>
-                                <p:spTgt spid="469"/>
-                              </p:tgtEl>
-                            </p:cBhvr>
-                          </p:animEffect>
-                        </p:childTnLst>
-                      </p:cTn>
-                    </p:par>
-                    <p:par>
-                      <p:cTn id="471" presetID="10" presetClass="entr" presetSubtype="0" fill="hold" grpId="0" nodeType="clickEffect">
+                              <p:cTn id="474" dur="700" fill="hold"/>
+                              <p:tgtEl>
+                                <p:spTgt spid="473"/>
+                              </p:tgtEl>
+                            </p:cBhvr>
+                          </p:animEffect>
+                        </p:childTnLst>
+                      </p:cTn>
+                    </p:par>
+                    <p:par>
+                      <p:cTn id="475" presetID="10" presetClass="entr" presetSubtype="0" fill="hold" grpId="0" nodeType="clickEffect">
                         <p:stCondLst>
                           <p:cond delay="1300"/>
                         </p:stCondLst>
                         <p:childTnLst>
                           <p:animEffect transition="in" filter="fade">
                             <p:cBhvr>
-                              <p:cTn id="472" dur="700" fill="hold"/>
-                              <p:tgtEl>
-                                <p:spTgt spid="471"/>
-                              </p:tgtEl>
-                            </p:cBhvr>
-                          </p:animEffect>
-                        </p:childTnLst>
-                      </p:cTn>
-                    </p:par>
-                    <p:par>
-                      <p:cTn id="473" presetID="10" presetClass="entr" presetSubtype="0" fill="hold" grpId="0" nodeType="clickEffect">
+                              <p:cTn id="476" dur="700" fill="hold"/>
+                              <p:tgtEl>
+                                <p:spTgt spid="475"/>
+                              </p:tgtEl>
+                            </p:cBhvr>
+                          </p:animEffect>
+                        </p:childTnLst>
+                      </p:cTn>
+                    </p:par>
+                    <p:par>
+                      <p:cTn id="477" presetID="10" presetClass="entr" presetSubtype="0" fill="hold" grpId="0" nodeType="clickEffect">
                         <p:stCondLst>
                           <p:cond delay="1500"/>
                         </p:stCondLst>
                         <p:childTnLst>
                           <p:animEffect transition="in" filter="fade">
                             <p:cBhvr>
-                              <p:cTn id="474" dur="700" fill="hold"/>
-                              <p:tgtEl>
-                                <p:spTgt spid="473"/>
-                              </p:tgtEl>
-                            </p:cBhvr>
-                          </p:animEffect>
-                        </p:childTnLst>
-                      </p:cTn>
-                    </p:par>
-                    <p:par>
-                      <p:cTn id="475" presetID="22" presetClass="entr" presetSubtype="0" fill="hold" grpId="0" nodeType="clickEffect">
+                              <p:cTn id="478" dur="700" fill="hold"/>
+                              <p:tgtEl>
+                                <p:spTgt spid="477"/>
+                              </p:tgtEl>
+                            </p:cBhvr>
+                          </p:animEffect>
+                        </p:childTnLst>
+                      </p:cTn>
+                    </p:par>
+                    <p:par>
+                      <p:cTn id="479" presetID="22" presetClass="entr" presetSubtype="0" fill="hold" grpId="0" nodeType="clickEffect">
                         <p:stCondLst>
                           <p:cond delay="1700"/>
                         </p:stCondLst>
                         <p:childTnLst>
                           <p:animEffect transition="in" filter="zoom">
                             <p:cBhvr>
-                              <p:cTn id="476" dur="500" fill="hold"/>
-                              <p:tgtEl>
-                                <p:spTgt spid="475"/>
-                              </p:tgtEl>
-                            </p:cBhvr>
-                          </p:animEffect>
-                        </p:childTnLst>
-                      </p:cTn>
-                    </p:par>
-                    <p:par>
-                      <p:cTn id="477" presetID="10" presetClass="entr" presetSubtype="0" fill="hold" grpId="0" nodeType="clickEffect">
+                              <p:cTn id="480" dur="500" fill="hold"/>
+                              <p:tgtEl>
+                                <p:spTgt spid="479"/>
+                              </p:tgtEl>
+                            </p:cBhvr>
+                          </p:animEffect>
+                        </p:childTnLst>
+                      </p:cTn>
+                    </p:par>
+                    <p:par>
+                      <p:cTn id="481" presetID="10" presetClass="entr" presetSubtype="0" fill="hold" grpId="0" nodeType="clickEffect">
                         <p:stCondLst>
                           <p:cond delay="0"/>
                         </p:stCondLst>
                         <p:childTnLst>
                           <p:animEffect transition="in" filter="fade">
                             <p:cBhvr>
-                              <p:cTn id="478" dur="700" fill="hold"/>
-                              <p:tgtEl>
-                                <p:spTgt spid="477"/>
+                              <p:cTn id="482" dur="700" fill="hold"/>
+                              <p:tgtEl>
+                                <p:spTgt spid="481"/>
                               </p:tgtEl>
                             </p:cBhvr>
                           </p:animEffect>
@@ -10070,7 +10153,7 @@
       </p:sp>
       <p:sp>
         <p:nvSpPr>
-          <p:cNvPr id="37" name="TextBox 36"/>
+          <p:cNvPr id="41" name="TextBox 40"/>
           <p:cNvSpPr txBox="1"/>
           <p:nvPr/>
         </p:nvSpPr>
@@ -10105,7 +10188,7 @@
       </p:sp>
       <p:sp>
         <p:nvSpPr>
-          <p:cNvPr id="39" name="TextBox 38"/>
+          <p:cNvPr id="43" name="TextBox 42"/>
           <p:cNvSpPr txBox="1"/>
           <p:nvPr/>
         </p:nvSpPr>
@@ -10140,7 +10223,7 @@
       </p:sp>
       <p:sp>
         <p:nvSpPr>
-          <p:cNvPr id="40" name="TextBox 39"/>
+          <p:cNvPr id="44" name="TextBox 43"/>
           <p:cNvSpPr txBox="1"/>
           <p:nvPr/>
         </p:nvSpPr>
@@ -10175,7 +10258,7 @@
       </p:sp>
       <p:sp>
         <p:nvSpPr>
-          <p:cNvPr id="41" name="TextBox 40"/>
+          <p:cNvPr id="45" name="TextBox 44"/>
           <p:cNvSpPr txBox="1"/>
           <p:nvPr/>
         </p:nvSpPr>
@@ -10210,7 +10293,7 @@
       </p:sp>
       <p:sp>
         <p:nvSpPr>
-          <p:cNvPr id="43" name="TextBox 42"/>
+          <p:cNvPr id="47" name="TextBox 46"/>
           <p:cNvSpPr txBox="1"/>
           <p:nvPr/>
         </p:nvSpPr>
@@ -10245,7 +10328,7 @@
       </p:sp>
       <p:sp>
         <p:nvSpPr>
-          <p:cNvPr id="45" name="Rectangle 44"/>
+          <p:cNvPr id="49" name="Rectangle 48"/>
           <p:cNvSpPr/>
           <p:nvPr/>
         </p:nvSpPr>
@@ -10288,7 +10371,7 @@
       </p:sp>
       <p:sp>
         <p:nvSpPr>
-          <p:cNvPr id="47" name="Rectangle 46"/>
+          <p:cNvPr id="51" name="Rectangle 50"/>
           <p:cNvSpPr/>
           <p:nvPr/>
         </p:nvSpPr>
@@ -10333,7 +10416,7 @@
       </p:sp>
       <p:sp>
         <p:nvSpPr>
-          <p:cNvPr id="49" name="TextBox 48"/>
+          <p:cNvPr id="53" name="TextBox 52"/>
           <p:cNvSpPr txBox="1"/>
           <p:nvPr/>
         </p:nvSpPr>
@@ -10368,7 +10451,7 @@
       </p:sp>
       <p:sp>
         <p:nvSpPr>
-          <p:cNvPr id="50" name="TextBox 49"/>
+          <p:cNvPr id="54" name="TextBox 53"/>
           <p:cNvSpPr txBox="1"/>
           <p:nvPr/>
         </p:nvSpPr>
@@ -10403,7 +10486,7 @@
       </p:sp>
       <p:sp>
         <p:nvSpPr>
-          <p:cNvPr id="51" name="TextBox 50"/>
+          <p:cNvPr id="55" name="TextBox 54"/>
           <p:cNvSpPr txBox="1"/>
           <p:nvPr/>
         </p:nvSpPr>
@@ -10438,7 +10521,7 @@
       </p:sp>
       <p:sp>
         <p:nvSpPr>
-          <p:cNvPr id="53" name="TextBox 52"/>
+          <p:cNvPr id="57" name="TextBox 56"/>
           <p:cNvSpPr txBox="1"/>
           <p:nvPr/>
         </p:nvSpPr>
@@ -10473,7 +10556,7 @@
       </p:sp>
       <p:sp>
         <p:nvSpPr>
-          <p:cNvPr id="55" name="TextBox 54"/>
+          <p:cNvPr id="59" name="TextBox 58"/>
           <p:cNvSpPr txBox="1"/>
           <p:nvPr/>
         </p:nvSpPr>
@@ -10508,7 +10591,7 @@
       </p:sp>
       <p:sp>
         <p:nvSpPr>
-          <p:cNvPr id="57" name="TextBox 56"/>
+          <p:cNvPr id="61" name="TextBox 60"/>
           <p:cNvSpPr txBox="1"/>
           <p:nvPr/>
         </p:nvSpPr>
@@ -10543,7 +10626,7 @@
       </p:sp>
       <p:sp>
         <p:nvSpPr>
-          <p:cNvPr id="59" name="Rectangle 58"/>
+          <p:cNvPr id="63" name="Rectangle 62"/>
           <p:cNvSpPr/>
           <p:nvPr/>
         </p:nvSpPr>
@@ -10588,7 +10671,7 @@
       </p:sp>
       <p:sp>
         <p:nvSpPr>
-          <p:cNvPr id="61" name="TextBox 60"/>
+          <p:cNvPr id="65" name="TextBox 64"/>
           <p:cNvSpPr txBox="1"/>
           <p:nvPr/>
         </p:nvSpPr>
@@ -10623,7 +10706,7 @@
       </p:sp>
       <p:sp>
         <p:nvSpPr>
-          <p:cNvPr id="62" name="TextBox 61"/>
+          <p:cNvPr id="66" name="TextBox 65"/>
           <p:cNvSpPr txBox="1"/>
           <p:nvPr/>
         </p:nvSpPr>
@@ -10658,7 +10741,7 @@
       </p:sp>
       <p:sp>
         <p:nvSpPr>
-          <p:cNvPr id="63" name="TextBox 62"/>
+          <p:cNvPr id="67" name="TextBox 66"/>
           <p:cNvSpPr txBox="1"/>
           <p:nvPr/>
         </p:nvSpPr>
@@ -10693,7 +10776,7 @@
       </p:sp>
       <p:sp>
         <p:nvSpPr>
-          <p:cNvPr id="65" name="TextBox 64"/>
+          <p:cNvPr id="69" name="TextBox 68"/>
           <p:cNvSpPr txBox="1"/>
           <p:nvPr/>
         </p:nvSpPr>
@@ -10728,7 +10811,7 @@
       </p:sp>
       <p:sp>
         <p:nvSpPr>
-          <p:cNvPr id="67" name="TextBox 66"/>
+          <p:cNvPr id="71" name="TextBox 70"/>
           <p:cNvSpPr txBox="1"/>
           <p:nvPr/>
         </p:nvSpPr>
@@ -10763,7 +10846,7 @@
       </p:sp>
       <p:sp>
         <p:nvSpPr>
-          <p:cNvPr id="69" name="TextBox 68"/>
+          <p:cNvPr id="73" name="TextBox 72"/>
           <p:cNvSpPr txBox="1"/>
           <p:nvPr/>
         </p:nvSpPr>
@@ -10798,7 +10881,7 @@
       </p:sp>
       <p:sp>
         <p:nvSpPr>
-          <p:cNvPr id="71" name="Rectangle 70"/>
+          <p:cNvPr id="75" name="Rectangle 74"/>
           <p:cNvSpPr/>
           <p:nvPr/>
         </p:nvSpPr>
@@ -10841,7 +10924,7 @@
       </p:sp>
       <p:sp>
         <p:nvSpPr>
-          <p:cNvPr id="73" name="TextBox 72"/>
+          <p:cNvPr id="77" name="TextBox 76"/>
           <p:cNvSpPr txBox="1"/>
           <p:nvPr/>
         </p:nvSpPr>
@@ -10884,14 +10967,14 @@
                 <p:cTn id="2" dur="indefinite" nodeType="mainSeq">
                   <p:childTnLst>
                     <p:par>
-                      <p:cTn id="35" presetID="22" presetClass="entr" presetSubtype="0" fill="hold" grpId="0" nodeType="clickEffect">
+                      <p:cTn id="39" presetID="22" presetClass="entr" presetSubtype="0" fill="hold" grpId="0" nodeType="clickEffect">
                         <p:stCondLst>
                           <p:cond delay="0"/>
                         </p:stCondLst>
                         <p:childTnLst>
                           <p:animEffect transition="in" filter="zoom">
                             <p:cBhvr>
-                              <p:cTn id="36" dur="500" fill="hold"/>
+                              <p:cTn id="40" dur="500" fill="hold"/>
                               <p:tgtEl>
                                 <p:spTgt spid="3"/>
                               </p:tgtEl>
@@ -10901,322 +10984,322 @@
                       </p:cTn>
                     </p:par>
                     <p:par>
-                      <p:cTn id="37" presetID="22" presetClass="entr" presetSubtype="0" fill="hold" grpId="0" nodeType="clickEffect">
+                      <p:cTn id="41" presetID="22" presetClass="entr" presetSubtype="0" fill="hold" grpId="0" nodeType="clickEffect">
                         <p:stCondLst>
                           <p:cond delay="0"/>
                         </p:stCondLst>
                         <p:childTnLst>
                           <p:animEffect transition="in" filter="zoom">
                             <p:cBhvr>
-                              <p:cTn id="38" dur="500" fill="hold"/>
-                              <p:tgtEl>
-                                <p:spTgt spid="37"/>
-                              </p:tgtEl>
-                            </p:cBhvr>
-                          </p:animEffect>
-                        </p:childTnLst>
-                      </p:cTn>
-                    </p:par>
-                    <p:par>
-                      <p:cTn id="39" presetID="2" presetClass="entr" presetSubtype="8" fill="hold" grpId="0" nodeType="clickEffect">
+                              <p:cTn id="42" dur="500" fill="hold"/>
+                              <p:tgtEl>
+                                <p:spTgt spid="41"/>
+                              </p:tgtEl>
+                            </p:cBhvr>
+                          </p:animEffect>
+                        </p:childTnLst>
+                      </p:cTn>
+                    </p:par>
+                    <p:par>
+                      <p:cTn id="43" presetID="2" presetClass="entr" presetSubtype="8" fill="hold" grpId="0" nodeType="clickEffect">
                         <p:stCondLst>
                           <p:cond delay="200"/>
                         </p:stCondLst>
                         <p:childTnLst>
                           <p:animEffect transition="in" filter="fly">
                             <p:cBhvr>
-                              <p:cTn id="40" dur="600" fill="hold"/>
-                              <p:tgtEl>
-                                <p:spTgt spid="40"/>
-                              </p:tgtEl>
-                            </p:cBhvr>
-                          </p:animEffect>
-                        </p:childTnLst>
-                      </p:cTn>
-                    </p:par>
-                    <p:par>
-                      <p:cTn id="41" presetID="2" presetClass="entr" presetSubtype="8" fill="hold" grpId="0" nodeType="clickEffect">
+                              <p:cTn id="44" dur="600" fill="hold"/>
+                              <p:tgtEl>
+                                <p:spTgt spid="44"/>
+                              </p:tgtEl>
+                            </p:cBhvr>
+                          </p:animEffect>
+                        </p:childTnLst>
+                      </p:cTn>
+                    </p:par>
+                    <p:par>
+                      <p:cTn id="45" presetID="2" presetClass="entr" presetSubtype="8" fill="hold" grpId="0" nodeType="clickEffect">
                         <p:stCondLst>
                           <p:cond delay="400"/>
                         </p:stCondLst>
                         <p:childTnLst>
                           <p:animEffect transition="in" filter="fly">
                             <p:cBhvr>
-                              <p:cTn id="42" dur="600" fill="hold"/>
-                              <p:tgtEl>
-                                <p:spTgt spid="41"/>
-                              </p:tgtEl>
-                            </p:cBhvr>
-                          </p:animEffect>
-                        </p:childTnLst>
-                      </p:cTn>
-                    </p:par>
-                    <p:par>
-                      <p:cTn id="43" presetID="2" presetClass="entr" presetSubtype="8" fill="hold" grpId="0" nodeType="clickEffect">
+                              <p:cTn id="46" dur="600" fill="hold"/>
+                              <p:tgtEl>
+                                <p:spTgt spid="45"/>
+                              </p:tgtEl>
+                            </p:cBhvr>
+                          </p:animEffect>
+                        </p:childTnLst>
+                      </p:cTn>
+                    </p:par>
+                    <p:par>
+                      <p:cTn id="47" presetID="2" presetClass="entr" presetSubtype="8" fill="hold" grpId="0" nodeType="clickEffect">
                         <p:stCondLst>
                           <p:cond delay="600"/>
                         </p:stCondLst>
                         <p:childTnLst>
                           <p:animEffect transition="in" filter="fly">
                             <p:cBhvr>
-                              <p:cTn id="44" dur="600" fill="hold"/>
-                              <p:tgtEl>
-                                <p:spTgt spid="43"/>
-                              </p:tgtEl>
-                            </p:cBhvr>
-                          </p:animEffect>
-                        </p:childTnLst>
-                      </p:cTn>
-                    </p:par>
-                    <p:par>
-                      <p:cTn id="45" presetID="10" presetClass="entr" presetSubtype="0" fill="hold" grpId="0" nodeType="clickEffect">
+                              <p:cTn id="48" dur="600" fill="hold"/>
+                              <p:tgtEl>
+                                <p:spTgt spid="47"/>
+                              </p:tgtEl>
+                            </p:cBhvr>
+                          </p:animEffect>
+                        </p:childTnLst>
+                      </p:cTn>
+                    </p:par>
+                    <p:par>
+                      <p:cTn id="49" presetID="10" presetClass="entr" presetSubtype="0" fill="hold" grpId="0" nodeType="clickEffect">
                         <p:stCondLst>
                           <p:cond delay="700"/>
                         </p:stCondLst>
                         <p:childTnLst>
                           <p:animEffect transition="in" filter="fade">
                             <p:cBhvr>
-                              <p:cTn id="46" dur="700" fill="hold"/>
-                              <p:tgtEl>
-                                <p:spTgt spid="45"/>
-                              </p:tgtEl>
-                            </p:cBhvr>
-                          </p:animEffect>
-                        </p:childTnLst>
-                      </p:cTn>
-                    </p:par>
-                    <p:par>
-                      <p:cTn id="47" presetID="2" presetClass="entr" presetSubtype="8" fill="hold" grpId="0" nodeType="clickEffect">
+                              <p:cTn id="50" dur="700" fill="hold"/>
+                              <p:tgtEl>
+                                <p:spTgt spid="49"/>
+                              </p:tgtEl>
+                            </p:cBhvr>
+                          </p:animEffect>
+                        </p:childTnLst>
+                      </p:cTn>
+                    </p:par>
+                    <p:par>
+                      <p:cTn id="51" presetID="2" presetClass="entr" presetSubtype="8" fill="hold" grpId="0" nodeType="clickEffect">
                         <p:stCondLst>
                           <p:cond delay="800"/>
                         </p:stCondLst>
                         <p:childTnLst>
                           <p:animEffect transition="in" filter="fly">
                             <p:cBhvr>
-                              <p:cTn id="48" dur="600" fill="hold"/>
-                              <p:tgtEl>
-                                <p:spTgt spid="47"/>
-                              </p:tgtEl>
-                            </p:cBhvr>
-                          </p:animEffect>
-                        </p:childTnLst>
-                      </p:cTn>
-                    </p:par>
-                    <p:par>
-                      <p:cTn id="49" presetID="10" presetClass="entr" presetSubtype="0" fill="hold" grpId="0" nodeType="clickEffect">
+                              <p:cTn id="52" dur="600" fill="hold"/>
+                              <p:tgtEl>
+                                <p:spTgt spid="51"/>
+                              </p:tgtEl>
+                            </p:cBhvr>
+                          </p:animEffect>
+                        </p:childTnLst>
+                      </p:cTn>
+                    </p:par>
+                    <p:par>
+                      <p:cTn id="53" presetID="10" presetClass="entr" presetSubtype="0" fill="hold" grpId="0" nodeType="clickEffect">
                         <p:stCondLst>
                           <p:cond delay="900"/>
                         </p:stCondLst>
                         <p:childTnLst>
                           <p:animEffect transition="in" filter="fade">
                             <p:cBhvr>
-                              <p:cTn id="50" dur="700" fill="hold"/>
-                              <p:tgtEl>
-                                <p:spTgt spid="50"/>
-                              </p:tgtEl>
-                            </p:cBhvr>
-                          </p:animEffect>
-                        </p:childTnLst>
-                      </p:cTn>
-                    </p:par>
-                    <p:par>
-                      <p:cTn id="51" presetID="10" presetClass="entr" presetSubtype="0" fill="hold" grpId="0" nodeType="clickEffect">
+                              <p:cTn id="54" dur="700" fill="hold"/>
+                              <p:tgtEl>
+                                <p:spTgt spid="54"/>
+                              </p:tgtEl>
+                            </p:cBhvr>
+                          </p:animEffect>
+                        </p:childTnLst>
+                      </p:cTn>
+                    </p:par>
+                    <p:par>
+                      <p:cTn id="55" presetID="10" presetClass="entr" presetSubtype="0" fill="hold" grpId="0" nodeType="clickEffect">
                         <p:stCondLst>
                           <p:cond delay="1050"/>
                         </p:stCondLst>
                         <p:childTnLst>
                           <p:animEffect transition="in" filter="fade">
                             <p:cBhvr>
-                              <p:cTn id="52" dur="700" fill="hold"/>
-                              <p:tgtEl>
-                                <p:spTgt spid="51"/>
-                              </p:tgtEl>
-                            </p:cBhvr>
-                          </p:animEffect>
-                        </p:childTnLst>
-                      </p:cTn>
-                    </p:par>
-                    <p:par>
-                      <p:cTn id="53" presetID="10" presetClass="entr" presetSubtype="0" fill="hold" grpId="0" nodeType="clickEffect">
+                              <p:cTn id="56" dur="700" fill="hold"/>
+                              <p:tgtEl>
+                                <p:spTgt spid="55"/>
+                              </p:tgtEl>
+                            </p:cBhvr>
+                          </p:animEffect>
+                        </p:childTnLst>
+                      </p:cTn>
+                    </p:par>
+                    <p:par>
+                      <p:cTn id="57" presetID="10" presetClass="entr" presetSubtype="0" fill="hold" grpId="0" nodeType="clickEffect">
                         <p:stCondLst>
                           <p:cond delay="1200"/>
                         </p:stCondLst>
                         <p:childTnLst>
                           <p:animEffect transition="in" filter="fade">
                             <p:cBhvr>
-                              <p:cTn id="54" dur="700" fill="hold"/>
-                              <p:tgtEl>
-                                <p:spTgt spid="53"/>
-                              </p:tgtEl>
-                            </p:cBhvr>
-                          </p:animEffect>
-                        </p:childTnLst>
-                      </p:cTn>
-                    </p:par>
-                    <p:par>
-                      <p:cTn id="55" presetID="10" presetClass="entr" presetSubtype="0" fill="hold" grpId="0" nodeType="clickEffect">
+                              <p:cTn id="58" dur="700" fill="hold"/>
+                              <p:tgtEl>
+                                <p:spTgt spid="57"/>
+                              </p:tgtEl>
+                            </p:cBhvr>
+                          </p:animEffect>
+                        </p:childTnLst>
+                      </p:cTn>
+                    </p:par>
+                    <p:par>
+                      <p:cTn id="59" presetID="10" presetClass="entr" presetSubtype="0" fill="hold" grpId="0" nodeType="clickEffect">
                         <p:stCondLst>
                           <p:cond delay="1350"/>
                         </p:stCondLst>
                         <p:childTnLst>
                           <p:animEffect transition="in" filter="fade">
                             <p:cBhvr>
-                              <p:cTn id="56" dur="700" fill="hold"/>
-                              <p:tgtEl>
-                                <p:spTgt spid="55"/>
-                              </p:tgtEl>
-                            </p:cBhvr>
-                          </p:animEffect>
-                        </p:childTnLst>
-                      </p:cTn>
-                    </p:par>
-                    <p:par>
-                      <p:cTn id="57" presetID="10" presetClass="entr" presetSubtype="0" fill="hold" grpId="0" nodeType="clickEffect">
+                              <p:cTn id="60" dur="700" fill="hold"/>
+                              <p:tgtEl>
+                                <p:spTgt spid="59"/>
+                              </p:tgtEl>
+                            </p:cBhvr>
+                          </p:animEffect>
+                        </p:childTnLst>
+                      </p:cTn>
+                    </p:par>
+                    <p:par>
+                      <p:cTn id="61" presetID="10" presetClass="entr" presetSubtype="0" fill="hold" grpId="0" nodeType="clickEffect">
                         <p:stCondLst>
                           <p:cond delay="1500"/>
                         </p:stCondLst>
                         <p:childTnLst>
                           <p:animEffect transition="in" filter="fade">
                             <p:cBhvr>
-                              <p:cTn id="58" dur="700" fill="hold"/>
-                              <p:tgtEl>
-                                <p:spTgt spid="57"/>
-                              </p:tgtEl>
-                            </p:cBhvr>
-                          </p:animEffect>
-                        </p:childTnLst>
-                      </p:cTn>
-                    </p:par>
-                    <p:par>
-                      <p:cTn id="59" presetID="2" presetClass="entr" presetSubtype="8" fill="hold" grpId="0" nodeType="clickEffect">
+                              <p:cTn id="62" dur="700" fill="hold"/>
+                              <p:tgtEl>
+                                <p:spTgt spid="61"/>
+                              </p:tgtEl>
+                            </p:cBhvr>
+                          </p:animEffect>
+                        </p:childTnLst>
+                      </p:cTn>
+                    </p:par>
+                    <p:par>
+                      <p:cTn id="63" presetID="2" presetClass="entr" presetSubtype="8" fill="hold" grpId="0" nodeType="clickEffect">
                         <p:stCondLst>
                           <p:cond delay="800"/>
                         </p:stCondLst>
                         <p:childTnLst>
                           <p:animEffect transition="in" filter="fly">
                             <p:cBhvr>
-                              <p:cTn id="60" dur="600" fill="hold"/>
-                              <p:tgtEl>
-                                <p:spTgt spid="59"/>
-                              </p:tgtEl>
-                            </p:cBhvr>
-                          </p:animEffect>
-                        </p:childTnLst>
-                      </p:cTn>
-                    </p:par>
-                    <p:par>
-                      <p:cTn id="61" presetID="10" presetClass="entr" presetSubtype="0" fill="hold" grpId="0" nodeType="clickEffect">
+                              <p:cTn id="64" dur="600" fill="hold"/>
+                              <p:tgtEl>
+                                <p:spTgt spid="63"/>
+                              </p:tgtEl>
+                            </p:cBhvr>
+                          </p:animEffect>
+                        </p:childTnLst>
+                      </p:cTn>
+                    </p:par>
+                    <p:par>
+                      <p:cTn id="65" presetID="10" presetClass="entr" presetSubtype="0" fill="hold" grpId="0" nodeType="clickEffect">
                         <p:stCondLst>
                           <p:cond delay="900"/>
                         </p:stCondLst>
                         <p:childTnLst>
                           <p:animEffect transition="in" filter="fade">
                             <p:cBhvr>
-                              <p:cTn id="62" dur="700" fill="hold"/>
-                              <p:tgtEl>
-                                <p:spTgt spid="62"/>
-                              </p:tgtEl>
-                            </p:cBhvr>
-                          </p:animEffect>
-                        </p:childTnLst>
-                      </p:cTn>
-                    </p:par>
-                    <p:par>
-                      <p:cTn id="63" presetID="10" presetClass="entr" presetSubtype="0" fill="hold" grpId="0" nodeType="clickEffect">
+                              <p:cTn id="66" dur="700" fill="hold"/>
+                              <p:tgtEl>
+                                <p:spTgt spid="66"/>
+                              </p:tgtEl>
+                            </p:cBhvr>
+                          </p:animEffect>
+                        </p:childTnLst>
+                      </p:cTn>
+                    </p:par>
+                    <p:par>
+                      <p:cTn id="67" presetID="10" presetClass="entr" presetSubtype="0" fill="hold" grpId="0" nodeType="clickEffect">
                         <p:stCondLst>
                           <p:cond delay="1050"/>
                         </p:stCondLst>
                         <p:childTnLst>
                           <p:animEffect transition="in" filter="fade">
                             <p:cBhvr>
-                              <p:cTn id="64" dur="700" fill="hold"/>
-                              <p:tgtEl>
-                                <p:spTgt spid="63"/>
-                              </p:tgtEl>
-                            </p:cBhvr>
-                          </p:animEffect>
-                        </p:childTnLst>
-                      </p:cTn>
-                    </p:par>
-                    <p:par>
-                      <p:cTn id="65" presetID="10" presetClass="entr" presetSubtype="0" fill="hold" grpId="0" nodeType="clickEffect">
+                              <p:cTn id="68" dur="700" fill="hold"/>
+                              <p:tgtEl>
+                                <p:spTgt spid="67"/>
+                              </p:tgtEl>
+                            </p:cBhvr>
+                          </p:animEffect>
+                        </p:childTnLst>
+                      </p:cTn>
+                    </p:par>
+                    <p:par>
+                      <p:cTn id="69" presetID="10" presetClass="entr" presetSubtype="0" fill="hold" grpId="0" nodeType="clickEffect">
                         <p:stCondLst>
                           <p:cond delay="1200"/>
                         </p:stCondLst>
                         <p:childTnLst>
                           <p:animEffect transition="in" filter="fade">
                             <p:cBhvr>
-                              <p:cTn id="66" dur="700" fill="hold"/>
-                              <p:tgtEl>
-                                <p:spTgt spid="65"/>
-                              </p:tgtEl>
-                            </p:cBhvr>
-                          </p:animEffect>
-                        </p:childTnLst>
-                      </p:cTn>
-                    </p:par>
-                    <p:par>
-                      <p:cTn id="67" presetID="10" presetClass="entr" presetSubtype="0" fill="hold" grpId="0" nodeType="clickEffect">
+                              <p:cTn id="70" dur="700" fill="hold"/>
+                              <p:tgtEl>
+                                <p:spTgt spid="69"/>
+                              </p:tgtEl>
+                            </p:cBhvr>
+                          </p:animEffect>
+                        </p:childTnLst>
+                      </p:cTn>
+                    </p:par>
+                    <p:par>
+                      <p:cTn id="71" presetID="10" presetClass="entr" presetSubtype="0" fill="hold" grpId="0" nodeType="clickEffect">
                         <p:stCondLst>
                           <p:cond delay="1350"/>
                         </p:stCondLst>
                         <p:childTnLst>
                           <p:animEffect transition="in" filter="fade">
                             <p:cBhvr>
-                              <p:cTn id="68" dur="700" fill="hold"/>
-                              <p:tgtEl>
-                                <p:spTgt spid="67"/>
-                              </p:tgtEl>
-                            </p:cBhvr>
-                          </p:animEffect>
-                        </p:childTnLst>
-                      </p:cTn>
-                    </p:par>
-                    <p:par>
-                      <p:cTn id="69" presetID="10" presetClass="entr" presetSubtype="0" fill="hold" grpId="0" nodeType="clickEffect">
+                              <p:cTn id="72" dur="700" fill="hold"/>
+                              <p:tgtEl>
+                                <p:spTgt spid="71"/>
+                              </p:tgtEl>
+                            </p:cBhvr>
+                          </p:animEffect>
+                        </p:childTnLst>
+                      </p:cTn>
+                    </p:par>
+                    <p:par>
+                      <p:cTn id="73" presetID="10" presetClass="entr" presetSubtype="0" fill="hold" grpId="0" nodeType="clickEffect">
                         <p:stCondLst>
                           <p:cond delay="1500"/>
                         </p:stCondLst>
                         <p:childTnLst>
                           <p:animEffect transition="in" filter="fade">
                             <p:cBhvr>
-                              <p:cTn id="70" dur="700" fill="hold"/>
-                              <p:tgtEl>
-                                <p:spTgt spid="69"/>
-                              </p:tgtEl>
-                            </p:cBhvr>
-                          </p:animEffect>
-                        </p:childTnLst>
-                      </p:cTn>
-                    </p:par>
-                    <p:par>
-                      <p:cTn id="71" presetID="22" presetClass="entr" presetSubtype="0" fill="hold" grpId="0" nodeType="clickEffect">
+                              <p:cTn id="74" dur="700" fill="hold"/>
+                              <p:tgtEl>
+                                <p:spTgt spid="73"/>
+                              </p:tgtEl>
+                            </p:cBhvr>
+                          </p:animEffect>
+                        </p:childTnLst>
+                      </p:cTn>
+                    </p:par>
+                    <p:par>
+                      <p:cTn id="75" presetID="22" presetClass="entr" presetSubtype="0" fill="hold" grpId="0" nodeType="clickEffect">
                         <p:stCondLst>
                           <p:cond delay="850"/>
                         </p:stCondLst>
                         <p:childTnLst>
                           <p:animEffect transition="in" filter="zoom">
                             <p:cBhvr>
-                              <p:cTn id="72" dur="500" fill="hold"/>
-                              <p:tgtEl>
-                                <p:spTgt spid="71"/>
-                              </p:tgtEl>
-                            </p:cBhvr>
-                          </p:animEffect>
-                        </p:childTnLst>
-                      </p:cTn>
-                    </p:par>
-                    <p:par>
-                      <p:cTn id="73" presetID="22" presetClass="entr" presetSubtype="0" fill="hold" grpId="0" nodeType="clickEffect">
+                              <p:cTn id="76" dur="500" fill="hold"/>
+                              <p:tgtEl>
+                                <p:spTgt spid="75"/>
+                              </p:tgtEl>
+                            </p:cBhvr>
+                          </p:animEffect>
+                        </p:childTnLst>
+                      </p:cTn>
+                    </p:par>
+                    <p:par>
+                      <p:cTn id="77" presetID="22" presetClass="entr" presetSubtype="0" fill="hold" grpId="0" nodeType="clickEffect">
                         <p:stCondLst>
                           <p:cond delay="850"/>
                         </p:stCondLst>
                         <p:childTnLst>
                           <p:animEffect transition="in" filter="zoom">
                             <p:cBhvr>
-                              <p:cTn id="74" dur="500" fill="hold"/>
-                              <p:tgtEl>
-                                <p:spTgt spid="73"/>
+                              <p:cTn id="78" dur="500" fill="hold"/>
+                              <p:tgtEl>
+                                <p:spTgt spid="77"/>
                               </p:tgtEl>
                             </p:cBhvr>
                           </p:animEffect>
@@ -11358,7 +11441,7 @@
       </p:sp>
       <p:sp>
         <p:nvSpPr>
-          <p:cNvPr id="77" name="Rectangle 76"/>
+          <p:cNvPr id="81" name="Rectangle 80"/>
           <p:cNvSpPr/>
           <p:nvPr/>
         </p:nvSpPr>
@@ -11401,7 +11484,7 @@
       </p:sp>
       <p:sp>
         <p:nvSpPr>
-          <p:cNvPr id="79" name="Rectangle 78"/>
+          <p:cNvPr id="83" name="Rectangle 82"/>
           <p:cNvSpPr/>
           <p:nvPr/>
         </p:nvSpPr>
@@ -11444,7 +11527,7 @@
       </p:sp>
       <p:sp>
         <p:nvSpPr>
-          <p:cNvPr id="81" name="TextBox 80"/>
+          <p:cNvPr id="85" name="TextBox 84"/>
           <p:cNvSpPr txBox="1"/>
           <p:nvPr/>
         </p:nvSpPr>
@@ -11479,7 +11562,7 @@
       </p:sp>
       <p:sp>
         <p:nvSpPr>
-          <p:cNvPr id="83" name="TextBox 82"/>
+          <p:cNvPr id="87" name="TextBox 86"/>
           <p:cNvSpPr txBox="1"/>
           <p:nvPr/>
         </p:nvSpPr>
@@ -11522,14 +11605,14 @@
                 <p:cTn id="2" dur="indefinite" nodeType="mainSeq">
                   <p:childTnLst>
                     <p:par>
-                      <p:cTn id="75" presetID="10" presetClass="entr" presetSubtype="0" fill="hold" grpId="0" nodeType="clickEffect">
+                      <p:cTn id="79" presetID="10" presetClass="entr" presetSubtype="0" fill="hold" grpId="0" nodeType="clickEffect">
                         <p:stCondLst>
                           <p:cond delay="0"/>
                         </p:stCondLst>
                         <p:childTnLst>
                           <p:animEffect transition="in" filter="fade">
                             <p:cBhvr>
-                              <p:cTn id="76" dur="700" fill="hold"/>
+                              <p:cTn id="80" dur="700" fill="hold"/>
                               <p:tgtEl>
                                 <p:spTgt spid="3"/>
                               </p:tgtEl>
@@ -11539,67 +11622,67 @@
                       </p:cTn>
                     </p:par>
                     <p:par>
-                      <p:cTn id="77" presetID="10" presetClass="entr" presetSubtype="0" fill="hold" grpId="0" nodeType="clickEffect">
+                      <p:cTn id="81" presetID="10" presetClass="entr" presetSubtype="0" fill="hold" grpId="0" nodeType="clickEffect">
                         <p:stCondLst>
                           <p:cond delay="0"/>
                         </p:stCondLst>
                         <p:childTnLst>
                           <p:animEffect transition="in" filter="fade">
                             <p:cBhvr>
-                              <p:cTn id="78" dur="700" fill="hold"/>
-                              <p:tgtEl>
-                                <p:spTgt spid="77"/>
-                              </p:tgtEl>
-                            </p:cBhvr>
-                          </p:animEffect>
-                        </p:childTnLst>
-                      </p:cTn>
-                    </p:par>
-                    <p:par>
-                      <p:cTn id="79" presetID="10" presetClass="entr" presetSubtype="0" fill="hold" grpId="0" nodeType="clickEffect">
+                              <p:cTn id="82" dur="700" fill="hold"/>
+                              <p:tgtEl>
+                                <p:spTgt spid="81"/>
+                              </p:tgtEl>
+                            </p:cBhvr>
+                          </p:animEffect>
+                        </p:childTnLst>
+                      </p:cTn>
+                    </p:par>
+                    <p:par>
+                      <p:cTn id="83" presetID="10" presetClass="entr" presetSubtype="0" fill="hold" grpId="0" nodeType="clickEffect">
                         <p:stCondLst>
                           <p:cond delay="300"/>
                         </p:stCondLst>
                         <p:childTnLst>
                           <p:animEffect transition="in" filter="fade">
                             <p:cBhvr>
-                              <p:cTn id="80" dur="700" fill="hold"/>
-                              <p:tgtEl>
-                                <p:spTgt spid="79"/>
-                              </p:tgtEl>
-                            </p:cBhvr>
-                          </p:animEffect>
-                        </p:childTnLst>
-                      </p:cTn>
-                    </p:par>
-                    <p:par>
-                      <p:cTn id="81" presetID="22" presetClass="entr" presetSubtype="0" fill="hold" grpId="0" nodeType="clickEffect">
+                              <p:cTn id="84" dur="700" fill="hold"/>
+                              <p:tgtEl>
+                                <p:spTgt spid="83"/>
+                              </p:tgtEl>
+                            </p:cBhvr>
+                          </p:animEffect>
+                        </p:childTnLst>
+                      </p:cTn>
+                    </p:par>
+                    <p:par>
+                      <p:cTn id="85" presetID="22" presetClass="entr" presetSubtype="0" fill="hold" grpId="0" nodeType="clickEffect">
                         <p:stCondLst>
                           <p:cond delay="100"/>
                         </p:stCondLst>
                         <p:childTnLst>
                           <p:animEffect transition="in" filter="zoom">
                             <p:cBhvr>
-                              <p:cTn id="82" dur="500" fill="hold"/>
-                              <p:tgtEl>
-                                <p:spTgt spid="81"/>
-                              </p:tgtEl>
-                            </p:cBhvr>
-                          </p:animEffect>
-                        </p:childTnLst>
-                      </p:cTn>
-                    </p:par>
-                    <p:par>
-                      <p:cTn id="83" presetID="10" presetClass="entr" presetSubtype="0" fill="hold" grpId="0" nodeType="clickEffect">
+                              <p:cTn id="86" dur="500" fill="hold"/>
+                              <p:tgtEl>
+                                <p:spTgt spid="85"/>
+                              </p:tgtEl>
+                            </p:cBhvr>
+                          </p:animEffect>
+                        </p:childTnLst>
+                      </p:cTn>
+                    </p:par>
+                    <p:par>
+                      <p:cTn id="87" presetID="10" presetClass="entr" presetSubtype="0" fill="hold" grpId="0" nodeType="clickEffect">
                         <p:stCondLst>
                           <p:cond delay="400"/>
                         </p:stCondLst>
                         <p:childTnLst>
                           <p:animEffect transition="in" filter="fade">
                             <p:cBhvr>
-                              <p:cTn id="84" dur="700" fill="hold"/>
-                              <p:tgtEl>
-                                <p:spTgt spid="83"/>
+                              <p:cTn id="88" dur="700" fill="hold"/>
+                              <p:tgtEl>
+                                <p:spTgt spid="87"/>
                               </p:tgtEl>
                             </p:cBhvr>
                           </p:animEffect>
@@ -11768,7 +11851,7 @@
       </p:sp>
       <p:sp>
         <p:nvSpPr>
-          <p:cNvPr id="87" name="TextBox 86"/>
+          <p:cNvPr id="91" name="TextBox 90"/>
           <p:cNvSpPr txBox="1"/>
           <p:nvPr/>
         </p:nvSpPr>
@@ -11803,7 +11886,7 @@
       </p:sp>
       <p:sp>
         <p:nvSpPr>
-          <p:cNvPr id="89" name="Rectangle 88"/>
+          <p:cNvPr id="93" name="Rectangle 92"/>
           <p:cNvSpPr/>
           <p:nvPr/>
         </p:nvSpPr>
@@ -11848,7 +11931,7 @@
       </p:sp>
       <p:sp>
         <p:nvSpPr>
-          <p:cNvPr id="91" name="TextBox 90"/>
+          <p:cNvPr id="95" name="TextBox 94"/>
           <p:cNvSpPr txBox="1"/>
           <p:nvPr/>
         </p:nvSpPr>
@@ -11883,7 +11966,7 @@
       </p:sp>
       <p:sp>
         <p:nvSpPr>
-          <p:cNvPr id="93" name="TextBox 92"/>
+          <p:cNvPr id="97" name="TextBox 96"/>
           <p:cNvSpPr txBox="1"/>
           <p:nvPr/>
         </p:nvSpPr>
@@ -11918,7 +12001,7 @@
       </p:sp>
       <p:sp>
         <p:nvSpPr>
-          <p:cNvPr id="95" name="TextBox 94"/>
+          <p:cNvPr id="99" name="TextBox 98"/>
           <p:cNvSpPr txBox="1"/>
           <p:nvPr/>
         </p:nvSpPr>
@@ -11953,7 +12036,7 @@
       </p:sp>
       <p:sp>
         <p:nvSpPr>
-          <p:cNvPr id="97" name="Rectangle 96"/>
+          <p:cNvPr id="101" name="Rectangle 100"/>
           <p:cNvSpPr/>
           <p:nvPr/>
         </p:nvSpPr>
@@ -11998,7 +12081,7 @@
       </p:sp>
       <p:sp>
         <p:nvSpPr>
-          <p:cNvPr id="99" name="TextBox 98"/>
+          <p:cNvPr id="103" name="TextBox 102"/>
           <p:cNvSpPr txBox="1"/>
           <p:nvPr/>
         </p:nvSpPr>
@@ -12033,7 +12116,7 @@
       </p:sp>
       <p:sp>
         <p:nvSpPr>
-          <p:cNvPr id="101" name="TextBox 100"/>
+          <p:cNvPr id="105" name="TextBox 104"/>
           <p:cNvSpPr txBox="1"/>
           <p:nvPr/>
         </p:nvSpPr>
@@ -12068,7 +12151,7 @@
       </p:sp>
       <p:sp>
         <p:nvSpPr>
-          <p:cNvPr id="103" name="TextBox 102"/>
+          <p:cNvPr id="107" name="TextBox 106"/>
           <p:cNvSpPr txBox="1"/>
           <p:nvPr/>
         </p:nvSpPr>
@@ -12103,7 +12186,7 @@
       </p:sp>
       <p:sp>
         <p:nvSpPr>
-          <p:cNvPr id="105" name="Rectangle 104"/>
+          <p:cNvPr id="109" name="Rectangle 108"/>
           <p:cNvSpPr/>
           <p:nvPr/>
         </p:nvSpPr>
@@ -12148,7 +12231,7 @@
       </p:sp>
       <p:sp>
         <p:nvSpPr>
-          <p:cNvPr id="107" name="TextBox 106"/>
+          <p:cNvPr id="111" name="TextBox 110"/>
           <p:cNvSpPr txBox="1"/>
           <p:nvPr/>
         </p:nvSpPr>
@@ -12183,7 +12266,7 @@
       </p:sp>
       <p:sp>
         <p:nvSpPr>
-          <p:cNvPr id="109" name="TextBox 108"/>
+          <p:cNvPr id="113" name="TextBox 112"/>
           <p:cNvSpPr txBox="1"/>
           <p:nvPr/>
         </p:nvSpPr>
@@ -12218,7 +12301,7 @@
       </p:sp>
       <p:sp>
         <p:nvSpPr>
-          <p:cNvPr id="111" name="TextBox 110"/>
+          <p:cNvPr id="115" name="TextBox 114"/>
           <p:cNvSpPr txBox="1"/>
           <p:nvPr/>
         </p:nvSpPr>
@@ -12253,7 +12336,7 @@
       </p:sp>
       <p:sp>
         <p:nvSpPr>
-          <p:cNvPr id="113" name="Rectangle 112"/>
+          <p:cNvPr id="117" name="Rectangle 116"/>
           <p:cNvSpPr/>
           <p:nvPr/>
         </p:nvSpPr>
@@ -12298,7 +12381,7 @@
       </p:sp>
       <p:sp>
         <p:nvSpPr>
-          <p:cNvPr id="115" name="TextBox 114"/>
+          <p:cNvPr id="119" name="TextBox 118"/>
           <p:cNvSpPr txBox="1"/>
           <p:nvPr/>
         </p:nvSpPr>
@@ -12333,7 +12416,7 @@
       </p:sp>
       <p:sp>
         <p:nvSpPr>
-          <p:cNvPr id="117" name="TextBox 116"/>
+          <p:cNvPr id="121" name="TextBox 120"/>
           <p:cNvSpPr txBox="1"/>
           <p:nvPr/>
         </p:nvSpPr>
@@ -12368,7 +12451,7 @@
       </p:sp>
       <p:sp>
         <p:nvSpPr>
-          <p:cNvPr id="119" name="TextBox 118"/>
+          <p:cNvPr id="123" name="TextBox 122"/>
           <p:cNvSpPr txBox="1"/>
           <p:nvPr/>
         </p:nvSpPr>
@@ -12403,7 +12486,7 @@
       </p:sp>
       <p:sp>
         <p:nvSpPr>
-          <p:cNvPr id="121" name="Rectangle 120"/>
+          <p:cNvPr id="125" name="Rectangle 124"/>
           <p:cNvSpPr/>
           <p:nvPr/>
         </p:nvSpPr>
@@ -12448,7 +12531,7 @@
       </p:sp>
       <p:sp>
         <p:nvSpPr>
-          <p:cNvPr id="123" name="TextBox 122"/>
+          <p:cNvPr id="127" name="TextBox 126"/>
           <p:cNvSpPr txBox="1"/>
           <p:nvPr/>
         </p:nvSpPr>
@@ -12483,7 +12566,7 @@
       </p:sp>
       <p:sp>
         <p:nvSpPr>
-          <p:cNvPr id="125" name="TextBox 124"/>
+          <p:cNvPr id="129" name="TextBox 128"/>
           <p:cNvSpPr txBox="1"/>
           <p:nvPr/>
         </p:nvSpPr>
@@ -12518,7 +12601,7 @@
       </p:sp>
       <p:sp>
         <p:nvSpPr>
-          <p:cNvPr id="127" name="TextBox 126"/>
+          <p:cNvPr id="131" name="TextBox 130"/>
           <p:cNvSpPr txBox="1"/>
           <p:nvPr/>
         </p:nvSpPr>
@@ -12561,14 +12644,14 @@
                 <p:cTn id="2" dur="indefinite" nodeType="mainSeq">
                   <p:childTnLst>
                     <p:par>
-                      <p:cTn id="85" presetID="2" presetClass="entr" presetSubtype="8" fill="hold" grpId="0" nodeType="clickEffect">
+                      <p:cTn id="89" presetID="2" presetClass="entr" presetSubtype="8" fill="hold" grpId="0" nodeType="clickEffect">
                         <p:stCondLst>
                           <p:cond delay="0"/>
                         </p:stCondLst>
                         <p:childTnLst>
                           <p:animEffect transition="in" filter="fly">
                             <p:cBhvr>
-                              <p:cTn id="86" dur="600" fill="hold"/>
+                              <p:cTn id="90" dur="600" fill="hold"/>
                               <p:tgtEl>
                                 <p:spTgt spid="4"/>
                               </p:tgtEl>
@@ -12578,356 +12661,356 @@
                       </p:cTn>
                     </p:par>
                     <p:par>
-                      <p:cTn id="87" presetID="10" presetClass="entr" presetSubtype="0" fill="hold" grpId="0" nodeType="clickEffect">
+                      <p:cTn id="91" presetID="10" presetClass="entr" presetSubtype="0" fill="hold" grpId="0" nodeType="clickEffect">
                         <p:stCondLst>
                           <p:cond delay="200"/>
                         </p:stCondLst>
                         <p:childTnLst>
                           <p:animEffect transition="in" filter="fade">
                             <p:cBhvr>
-                              <p:cTn id="88" dur="700" fill="hold"/>
-                              <p:tgtEl>
-                                <p:spTgt spid="87"/>
-                              </p:tgtEl>
-                            </p:cBhvr>
-                          </p:animEffect>
-                        </p:childTnLst>
-                      </p:cTn>
-                    </p:par>
-                    <p:par>
-                      <p:cTn id="89" presetID="2" presetClass="entr" presetSubtype="8" fill="hold" grpId="0" nodeType="clickEffect">
+                              <p:cTn id="92" dur="700" fill="hold"/>
+                              <p:tgtEl>
+                                <p:spTgt spid="91"/>
+                              </p:tgtEl>
+                            </p:cBhvr>
+                          </p:animEffect>
+                        </p:childTnLst>
+                      </p:cTn>
+                    </p:par>
+                    <p:par>
+                      <p:cTn id="93" presetID="2" presetClass="entr" presetSubtype="8" fill="hold" grpId="0" nodeType="clickEffect">
                         <p:stCondLst>
                           <p:cond delay="300"/>
                         </p:stCondLst>
                         <p:childTnLst>
                           <p:animEffect transition="in" filter="fly">
                             <p:cBhvr>
-                              <p:cTn id="90" dur="600" fill="hold"/>
-                              <p:tgtEl>
-                                <p:spTgt spid="89"/>
-                              </p:tgtEl>
-                            </p:cBhvr>
-                          </p:animEffect>
-                        </p:childTnLst>
-                      </p:cTn>
-                    </p:par>
-                    <p:par>
-                      <p:cTn id="91" presetID="10" presetClass="entr" presetSubtype="0" fill="hold" grpId="0" nodeType="clickEffect">
+                              <p:cTn id="94" dur="600" fill="hold"/>
+                              <p:tgtEl>
+                                <p:spTgt spid="93"/>
+                              </p:tgtEl>
+                            </p:cBhvr>
+                          </p:animEffect>
+                        </p:childTnLst>
+                      </p:cTn>
+                    </p:par>
+                    <p:par>
+                      <p:cTn id="95" presetID="10" presetClass="entr" presetSubtype="0" fill="hold" grpId="0" nodeType="clickEffect">
                         <p:stCondLst>
                           <p:cond delay="400"/>
                         </p:stCondLst>
                         <p:childTnLst>
                           <p:animEffect transition="in" filter="fade">
                             <p:cBhvr>
-                              <p:cTn id="92" dur="700" fill="hold"/>
-                              <p:tgtEl>
-                                <p:spTgt spid="91"/>
-                              </p:tgtEl>
-                            </p:cBhvr>
-                          </p:animEffect>
-                        </p:childTnLst>
-                      </p:cTn>
-                    </p:par>
-                    <p:par>
-                      <p:cTn id="93" presetID="10" presetClass="entr" presetSubtype="0" fill="hold" grpId="0" nodeType="clickEffect">
+                              <p:cTn id="96" dur="700" fill="hold"/>
+                              <p:tgtEl>
+                                <p:spTgt spid="95"/>
+                              </p:tgtEl>
+                            </p:cBhvr>
+                          </p:animEffect>
+                        </p:childTnLst>
+                      </p:cTn>
+                    </p:par>
+                    <p:par>
+                      <p:cTn id="97" presetID="10" presetClass="entr" presetSubtype="0" fill="hold" grpId="0" nodeType="clickEffect">
                         <p:stCondLst>
                           <p:cond delay="500"/>
                         </p:stCondLst>
                         <p:childTnLst>
                           <p:animEffect transition="in" filter="fade">
                             <p:cBhvr>
-                              <p:cTn id="94" dur="700" fill="hold"/>
-                              <p:tgtEl>
-                                <p:spTgt spid="93"/>
-                              </p:tgtEl>
-                            </p:cBhvr>
-                          </p:animEffect>
-                        </p:childTnLst>
-                      </p:cTn>
-                    </p:par>
-                    <p:par>
-                      <p:cTn id="95" presetID="10" presetClass="entr" presetSubtype="0" fill="hold" grpId="0" nodeType="clickEffect">
+                              <p:cTn id="98" dur="700" fill="hold"/>
+                              <p:tgtEl>
+                                <p:spTgt spid="97"/>
+                              </p:tgtEl>
+                            </p:cBhvr>
+                          </p:animEffect>
+                        </p:childTnLst>
+                      </p:cTn>
+                    </p:par>
+                    <p:par>
+                      <p:cTn id="99" presetID="10" presetClass="entr" presetSubtype="0" fill="hold" grpId="0" nodeType="clickEffect">
                         <p:stCondLst>
                           <p:cond delay="600"/>
                         </p:stCondLst>
                         <p:childTnLst>
                           <p:animEffect transition="in" filter="fade">
                             <p:cBhvr>
-                              <p:cTn id="96" dur="700" fill="hold"/>
-                              <p:tgtEl>
-                                <p:spTgt spid="95"/>
-                              </p:tgtEl>
-                            </p:cBhvr>
-                          </p:animEffect>
-                        </p:childTnLst>
-                      </p:cTn>
-                    </p:par>
-                    <p:par>
-                      <p:cTn id="97" presetID="2" presetClass="entr" presetSubtype="8" fill="hold" grpId="0" nodeType="clickEffect">
+                              <p:cTn id="100" dur="700" fill="hold"/>
+                              <p:tgtEl>
+                                <p:spTgt spid="99"/>
+                              </p:tgtEl>
+                            </p:cBhvr>
+                          </p:animEffect>
+                        </p:childTnLst>
+                      </p:cTn>
+                    </p:par>
+                    <p:par>
+                      <p:cTn id="101" presetID="2" presetClass="entr" presetSubtype="8" fill="hold" grpId="0" nodeType="clickEffect">
                         <p:stCondLst>
                           <p:cond delay="500"/>
                         </p:stCondLst>
                         <p:childTnLst>
                           <p:animEffect transition="in" filter="fly">
                             <p:cBhvr>
-                              <p:cTn id="98" dur="600" fill="hold"/>
-                              <p:tgtEl>
-                                <p:spTgt spid="97"/>
-                              </p:tgtEl>
-                            </p:cBhvr>
-                          </p:animEffect>
-                        </p:childTnLst>
-                      </p:cTn>
-                    </p:par>
-                    <p:par>
-                      <p:cTn id="99" presetID="10" presetClass="entr" presetSubtype="0" fill="hold" grpId="0" nodeType="clickEffect">
+                              <p:cTn id="102" dur="600" fill="hold"/>
+                              <p:tgtEl>
+                                <p:spTgt spid="101"/>
+                              </p:tgtEl>
+                            </p:cBhvr>
+                          </p:animEffect>
+                        </p:childTnLst>
+                      </p:cTn>
+                    </p:par>
+                    <p:par>
+                      <p:cTn id="103" presetID="10" presetClass="entr" presetSubtype="0" fill="hold" grpId="0" nodeType="clickEffect">
                         <p:stCondLst>
                           <p:cond delay="600"/>
                         </p:stCondLst>
                         <p:childTnLst>
                           <p:animEffect transition="in" filter="fade">
                             <p:cBhvr>
-                              <p:cTn id="100" dur="700" fill="hold"/>
-                              <p:tgtEl>
-                                <p:spTgt spid="99"/>
-                              </p:tgtEl>
-                            </p:cBhvr>
-                          </p:animEffect>
-                        </p:childTnLst>
-                      </p:cTn>
-                    </p:par>
-                    <p:par>
-                      <p:cTn id="101" presetID="10" presetClass="entr" presetSubtype="0" fill="hold" grpId="0" nodeType="clickEffect">
+                              <p:cTn id="104" dur="700" fill="hold"/>
+                              <p:tgtEl>
+                                <p:spTgt spid="103"/>
+                              </p:tgtEl>
+                            </p:cBhvr>
+                          </p:animEffect>
+                        </p:childTnLst>
+                      </p:cTn>
+                    </p:par>
+                    <p:par>
+                      <p:cTn id="105" presetID="10" presetClass="entr" presetSubtype="0" fill="hold" grpId="0" nodeType="clickEffect">
                         <p:stCondLst>
                           <p:cond delay="700"/>
                         </p:stCondLst>
                         <p:childTnLst>
                           <p:animEffect transition="in" filter="fade">
                             <p:cBhvr>
-                              <p:cTn id="102" dur="700" fill="hold"/>
-                              <p:tgtEl>
-                                <p:spTgt spid="101"/>
-                              </p:tgtEl>
-                            </p:cBhvr>
-                          </p:animEffect>
-                        </p:childTnLst>
-                      </p:cTn>
-                    </p:par>
-                    <p:par>
-                      <p:cTn id="103" presetID="10" presetClass="entr" presetSubtype="0" fill="hold" grpId="0" nodeType="clickEffect">
+                              <p:cTn id="106" dur="700" fill="hold"/>
+                              <p:tgtEl>
+                                <p:spTgt spid="105"/>
+                              </p:tgtEl>
+                            </p:cBhvr>
+                          </p:animEffect>
+                        </p:childTnLst>
+                      </p:cTn>
+                    </p:par>
+                    <p:par>
+                      <p:cTn id="107" presetID="10" presetClass="entr" presetSubtype="0" fill="hold" grpId="0" nodeType="clickEffect">
                         <p:stCondLst>
                           <p:cond delay="800"/>
                         </p:stCondLst>
                         <p:childTnLst>
                           <p:animEffect transition="in" filter="fade">
                             <p:cBhvr>
-                              <p:cTn id="104" dur="700" fill="hold"/>
-                              <p:tgtEl>
-                                <p:spTgt spid="103"/>
-                              </p:tgtEl>
-                            </p:cBhvr>
-                          </p:animEffect>
-                        </p:childTnLst>
-                      </p:cTn>
-                    </p:par>
-                    <p:par>
-                      <p:cTn id="105" presetID="2" presetClass="entr" presetSubtype="8" fill="hold" grpId="0" nodeType="clickEffect">
+                              <p:cTn id="108" dur="700" fill="hold"/>
+                              <p:tgtEl>
+                                <p:spTgt spid="107"/>
+                              </p:tgtEl>
+                            </p:cBhvr>
+                          </p:animEffect>
+                        </p:childTnLst>
+                      </p:cTn>
+                    </p:par>
+                    <p:par>
+                      <p:cTn id="109" presetID="2" presetClass="entr" presetSubtype="8" fill="hold" grpId="0" nodeType="clickEffect">
                         <p:stCondLst>
                           <p:cond delay="700"/>
                         </p:stCondLst>
                         <p:childTnLst>
                           <p:animEffect transition="in" filter="fly">
                             <p:cBhvr>
-                              <p:cTn id="106" dur="600" fill="hold"/>
-                              <p:tgtEl>
-                                <p:spTgt spid="105"/>
-                              </p:tgtEl>
-                            </p:cBhvr>
-                          </p:animEffect>
-                        </p:childTnLst>
-                      </p:cTn>
-                    </p:par>
-                    <p:par>
-                      <p:cTn id="107" presetID="10" presetClass="entr" presetSubtype="0" fill="hold" grpId="0" nodeType="clickEffect">
+                              <p:cTn id="110" dur="600" fill="hold"/>
+                              <p:tgtEl>
+                                <p:spTgt spid="109"/>
+                              </p:tgtEl>
+                            </p:cBhvr>
+                          </p:animEffect>
+                        </p:childTnLst>
+                      </p:cTn>
+                    </p:par>
+                    <p:par>
+                      <p:cTn id="111" presetID="10" presetClass="entr" presetSubtype="0" fill="hold" grpId="0" nodeType="clickEffect">
                         <p:stCondLst>
                           <p:cond delay="800"/>
                         </p:stCondLst>
                         <p:childTnLst>
                           <p:animEffect transition="in" filter="fade">
                             <p:cBhvr>
-                              <p:cTn id="108" dur="700" fill="hold"/>
-                              <p:tgtEl>
-                                <p:spTgt spid="107"/>
-                              </p:tgtEl>
-                            </p:cBhvr>
-                          </p:animEffect>
-                        </p:childTnLst>
-                      </p:cTn>
-                    </p:par>
-                    <p:par>
-                      <p:cTn id="109" presetID="10" presetClass="entr" presetSubtype="0" fill="hold" grpId="0" nodeType="clickEffect">
+                              <p:cTn id="112" dur="700" fill="hold"/>
+                              <p:tgtEl>
+                                <p:spTgt spid="111"/>
+                              </p:tgtEl>
+                            </p:cBhvr>
+                          </p:animEffect>
+                        </p:childTnLst>
+                      </p:cTn>
+                    </p:par>
+                    <p:par>
+                      <p:cTn id="113" presetID="10" presetClass="entr" presetSubtype="0" fill="hold" grpId="0" nodeType="clickEffect">
                         <p:stCondLst>
                           <p:cond delay="900"/>
                         </p:stCondLst>
                         <p:childTnLst>
                           <p:animEffect transition="in" filter="fade">
                             <p:cBhvr>
-                              <p:cTn id="110" dur="700" fill="hold"/>
-                              <p:tgtEl>
-                                <p:spTgt spid="109"/>
-                              </p:tgtEl>
-                            </p:cBhvr>
-                          </p:animEffect>
-                        </p:childTnLst>
-                      </p:cTn>
-                    </p:par>
-                    <p:par>
-                      <p:cTn id="111" presetID="10" presetClass="entr" presetSubtype="0" fill="hold" grpId="0" nodeType="clickEffect">
+                              <p:cTn id="114" dur="700" fill="hold"/>
+                              <p:tgtEl>
+                                <p:spTgt spid="113"/>
+                              </p:tgtEl>
+                            </p:cBhvr>
+                          </p:animEffect>
+                        </p:childTnLst>
+                      </p:cTn>
+                    </p:par>
+                    <p:par>
+                      <p:cTn id="115" presetID="10" presetClass="entr" presetSubtype="0" fill="hold" grpId="0" nodeType="clickEffect">
                         <p:stCondLst>
                           <p:cond delay="1000"/>
                         </p:stCondLst>
                         <p:childTnLst>
                           <p:animEffect transition="in" filter="fade">
                             <p:cBhvr>
-                              <p:cTn id="112" dur="700" fill="hold"/>
-                              <p:tgtEl>
-                                <p:spTgt spid="111"/>
-                              </p:tgtEl>
-                            </p:cBhvr>
-                          </p:animEffect>
-                        </p:childTnLst>
-                      </p:cTn>
-                    </p:par>
-                    <p:par>
-                      <p:cTn id="113" presetID="2" presetClass="entr" presetSubtype="8" fill="hold" grpId="0" nodeType="clickEffect">
+                              <p:cTn id="116" dur="700" fill="hold"/>
+                              <p:tgtEl>
+                                <p:spTgt spid="115"/>
+                              </p:tgtEl>
+                            </p:cBhvr>
+                          </p:animEffect>
+                        </p:childTnLst>
+                      </p:cTn>
+                    </p:par>
+                    <p:par>
+                      <p:cTn id="117" presetID="2" presetClass="entr" presetSubtype="8" fill="hold" grpId="0" nodeType="clickEffect">
                         <p:stCondLst>
                           <p:cond delay="900"/>
                         </p:stCondLst>
                         <p:childTnLst>
                           <p:animEffect transition="in" filter="fly">
                             <p:cBhvr>
-                              <p:cTn id="114" dur="600" fill="hold"/>
-                              <p:tgtEl>
-                                <p:spTgt spid="113"/>
-                              </p:tgtEl>
-                            </p:cBhvr>
-                          </p:animEffect>
-                        </p:childTnLst>
-                      </p:cTn>
-                    </p:par>
-                    <p:par>
-                      <p:cTn id="115" presetID="10" presetClass="entr" presetSubtype="0" fill="hold" grpId="0" nodeType="clickEffect">
+                              <p:cTn id="118" dur="600" fill="hold"/>
+                              <p:tgtEl>
+                                <p:spTgt spid="117"/>
+                              </p:tgtEl>
+                            </p:cBhvr>
+                          </p:animEffect>
+                        </p:childTnLst>
+                      </p:cTn>
+                    </p:par>
+                    <p:par>
+                      <p:cTn id="119" presetID="10" presetClass="entr" presetSubtype="0" fill="hold" grpId="0" nodeType="clickEffect">
                         <p:stCondLst>
                           <p:cond delay="1000"/>
                         </p:stCondLst>
                         <p:childTnLst>
                           <p:animEffect transition="in" filter="fade">
                             <p:cBhvr>
-                              <p:cTn id="116" dur="700" fill="hold"/>
-                              <p:tgtEl>
-                                <p:spTgt spid="115"/>
-                              </p:tgtEl>
-                            </p:cBhvr>
-                          </p:animEffect>
-                        </p:childTnLst>
-                      </p:cTn>
-                    </p:par>
-                    <p:par>
-                      <p:cTn id="117" presetID="10" presetClass="entr" presetSubtype="0" fill="hold" grpId="0" nodeType="clickEffect">
+                              <p:cTn id="120" dur="700" fill="hold"/>
+                              <p:tgtEl>
+                                <p:spTgt spid="119"/>
+                              </p:tgtEl>
+                            </p:cBhvr>
+                          </p:animEffect>
+                        </p:childTnLst>
+                      </p:cTn>
+                    </p:par>
+                    <p:par>
+                      <p:cTn id="121" presetID="10" presetClass="entr" presetSubtype="0" fill="hold" grpId="0" nodeType="clickEffect">
                         <p:stCondLst>
                           <p:cond delay="1100"/>
                         </p:stCondLst>
                         <p:childTnLst>
                           <p:animEffect transition="in" filter="fade">
                             <p:cBhvr>
-                              <p:cTn id="118" dur="700" fill="hold"/>
-                              <p:tgtEl>
-                                <p:spTgt spid="117"/>
-                              </p:tgtEl>
-                            </p:cBhvr>
-                          </p:animEffect>
-                        </p:childTnLst>
-                      </p:cTn>
-                    </p:par>
-                    <p:par>
-                      <p:cTn id="119" presetID="10" presetClass="entr" presetSubtype="0" fill="hold" grpId="0" nodeType="clickEffect">
+                              <p:cTn id="122" dur="700" fill="hold"/>
+                              <p:tgtEl>
+                                <p:spTgt spid="121"/>
+                              </p:tgtEl>
+                            </p:cBhvr>
+                          </p:animEffect>
+                        </p:childTnLst>
+                      </p:cTn>
+                    </p:par>
+                    <p:par>
+                      <p:cTn id="123" presetID="10" presetClass="entr" presetSubtype="0" fill="hold" grpId="0" nodeType="clickEffect">
                         <p:stCondLst>
                           <p:cond delay="1200"/>
                         </p:stCondLst>
                         <p:childTnLst>
                           <p:animEffect transition="in" filter="fade">
                             <p:cBhvr>
-                              <p:cTn id="120" dur="700" fill="hold"/>
-                              <p:tgtEl>
-                                <p:spTgt spid="119"/>
-                              </p:tgtEl>
-                            </p:cBhvr>
-                          </p:animEffect>
-                        </p:childTnLst>
-                      </p:cTn>
-                    </p:par>
-                    <p:par>
-                      <p:cTn id="121" presetID="2" presetClass="entr" presetSubtype="8" fill="hold" grpId="0" nodeType="clickEffect">
+                              <p:cTn id="124" dur="700" fill="hold"/>
+                              <p:tgtEl>
+                                <p:spTgt spid="123"/>
+                              </p:tgtEl>
+                            </p:cBhvr>
+                          </p:animEffect>
+                        </p:childTnLst>
+                      </p:cTn>
+                    </p:par>
+                    <p:par>
+                      <p:cTn id="125" presetID="2" presetClass="entr" presetSubtype="8" fill="hold" grpId="0" nodeType="clickEffect">
                         <p:stCondLst>
                           <p:cond delay="1100"/>
                         </p:stCondLst>
                         <p:childTnLst>
                           <p:animEffect transition="in" filter="fly">
                             <p:cBhvr>
-                              <p:cTn id="122" dur="600" fill="hold"/>
-                              <p:tgtEl>
-                                <p:spTgt spid="121"/>
-                              </p:tgtEl>
-                            </p:cBhvr>
-                          </p:animEffect>
-                        </p:childTnLst>
-                      </p:cTn>
-                    </p:par>
-                    <p:par>
-                      <p:cTn id="123" presetID="10" presetClass="entr" presetSubtype="0" fill="hold" grpId="0" nodeType="clickEffect">
+                              <p:cTn id="126" dur="600" fill="hold"/>
+                              <p:tgtEl>
+                                <p:spTgt spid="125"/>
+                              </p:tgtEl>
+                            </p:cBhvr>
+                          </p:animEffect>
+                        </p:childTnLst>
+                      </p:cTn>
+                    </p:par>
+                    <p:par>
+                      <p:cTn id="127" presetID="10" presetClass="entr" presetSubtype="0" fill="hold" grpId="0" nodeType="clickEffect">
                         <p:stCondLst>
                           <p:cond delay="1200"/>
                         </p:stCondLst>
                         <p:childTnLst>
                           <p:animEffect transition="in" filter="fade">
                             <p:cBhvr>
-                              <p:cTn id="124" dur="700" fill="hold"/>
-                              <p:tgtEl>
-                                <p:spTgt spid="123"/>
-                              </p:tgtEl>
-                            </p:cBhvr>
-                          </p:animEffect>
-                        </p:childTnLst>
-                      </p:cTn>
-                    </p:par>
-                    <p:par>
-                      <p:cTn id="125" presetID="10" presetClass="entr" presetSubtype="0" fill="hold" grpId="0" nodeType="clickEffect">
+                              <p:cTn id="128" dur="700" fill="hold"/>
+                              <p:tgtEl>
+                                <p:spTgt spid="127"/>
+                              </p:tgtEl>
+                            </p:cBhvr>
+                          </p:animEffect>
+                        </p:childTnLst>
+                      </p:cTn>
+                    </p:par>
+                    <p:par>
+                      <p:cTn id="129" presetID="10" presetClass="entr" presetSubtype="0" fill="hold" grpId="0" nodeType="clickEffect">
                         <p:stCondLst>
                           <p:cond delay="1300"/>
                         </p:stCondLst>
                         <p:childTnLst>
                           <p:animEffect transition="in" filter="fade">
                             <p:cBhvr>
-                              <p:cTn id="126" dur="700" fill="hold"/>
-                              <p:tgtEl>
-                                <p:spTgt spid="125"/>
-                              </p:tgtEl>
-                            </p:cBhvr>
-                          </p:animEffect>
-                        </p:childTnLst>
-                      </p:cTn>
-                    </p:par>
-                    <p:par>
-                      <p:cTn id="127" presetID="10" presetClass="entr" presetSubtype="0" fill="hold" grpId="0" nodeType="clickEffect">
+                              <p:cTn id="130" dur="700" fill="hold"/>
+                              <p:tgtEl>
+                                <p:spTgt spid="129"/>
+                              </p:tgtEl>
+                            </p:cBhvr>
+                          </p:animEffect>
+                        </p:childTnLst>
+                      </p:cTn>
+                    </p:par>
+                    <p:par>
+                      <p:cTn id="131" presetID="10" presetClass="entr" presetSubtype="0" fill="hold" grpId="0" nodeType="clickEffect">
                         <p:stCondLst>
                           <p:cond delay="1400"/>
                         </p:stCondLst>
                         <p:childTnLst>
                           <p:animEffect transition="in" filter="fade">
                             <p:cBhvr>
-                              <p:cTn id="128" dur="700" fill="hold"/>
-                              <p:tgtEl>
-                                <p:spTgt spid="127"/>
+                              <p:cTn id="132" dur="700" fill="hold"/>
+                              <p:tgtEl>
+                                <p:spTgt spid="131"/>
                               </p:tgtEl>
                             </p:cBhvr>
                           </p:animEffect>
@@ -13096,7 +13179,7 @@
       </p:sp>
       <p:sp>
         <p:nvSpPr>
-          <p:cNvPr id="131" name="TextBox 130"/>
+          <p:cNvPr id="135" name="TextBox 134"/>
           <p:cNvSpPr txBox="1"/>
           <p:nvPr/>
         </p:nvSpPr>
@@ -13131,7 +13214,7 @@
       </p:sp>
       <p:sp>
         <p:nvSpPr>
-          <p:cNvPr id="133" name="Rectangle 132"/>
+          <p:cNvPr id="137" name="Rectangle 136"/>
           <p:cNvSpPr/>
           <p:nvPr/>
         </p:nvSpPr>
@@ -13176,7 +13259,7 @@
       </p:sp>
       <p:sp>
         <p:nvSpPr>
-          <p:cNvPr id="135" name="TextBox 134"/>
+          <p:cNvPr id="139" name="TextBox 138"/>
           <p:cNvSpPr txBox="1"/>
           <p:nvPr/>
         </p:nvSpPr>
@@ -13211,7 +13294,7 @@
       </p:sp>
       <p:sp>
         <p:nvSpPr>
-          <p:cNvPr id="137" name="TextBox 136"/>
+          <p:cNvPr id="141" name="TextBox 140"/>
           <p:cNvSpPr txBox="1"/>
           <p:nvPr/>
         </p:nvSpPr>
@@ -13246,7 +13329,7 @@
       </p:sp>
       <p:sp>
         <p:nvSpPr>
-          <p:cNvPr id="139" name="TextBox 138"/>
+          <p:cNvPr id="143" name="TextBox 142"/>
           <p:cNvSpPr txBox="1"/>
           <p:nvPr/>
         </p:nvSpPr>
@@ -13281,7 +13364,7 @@
       </p:sp>
       <p:sp>
         <p:nvSpPr>
-          <p:cNvPr id="141" name="Rectangle 140"/>
+          <p:cNvPr id="145" name="Rectangle 144"/>
           <p:cNvSpPr/>
           <p:nvPr/>
         </p:nvSpPr>
@@ -13326,7 +13409,7 @@
       </p:sp>
       <p:sp>
         <p:nvSpPr>
-          <p:cNvPr id="143" name="TextBox 142"/>
+          <p:cNvPr id="147" name="TextBox 146"/>
           <p:cNvSpPr txBox="1"/>
           <p:nvPr/>
         </p:nvSpPr>
@@ -13361,7 +13444,7 @@
       </p:sp>
       <p:sp>
         <p:nvSpPr>
-          <p:cNvPr id="145" name="TextBox 144"/>
+          <p:cNvPr id="149" name="TextBox 148"/>
           <p:cNvSpPr txBox="1"/>
           <p:nvPr/>
         </p:nvSpPr>
@@ -13396,7 +13479,7 @@
       </p:sp>
       <p:sp>
         <p:nvSpPr>
-          <p:cNvPr id="147" name="TextBox 146"/>
+          <p:cNvPr id="151" name="TextBox 150"/>
           <p:cNvSpPr txBox="1"/>
           <p:nvPr/>
         </p:nvSpPr>
@@ -13431,7 +13514,7 @@
       </p:sp>
       <p:sp>
         <p:nvSpPr>
-          <p:cNvPr id="149" name="Rectangle 148"/>
+          <p:cNvPr id="153" name="Rectangle 152"/>
           <p:cNvSpPr/>
           <p:nvPr/>
         </p:nvSpPr>
@@ -13476,7 +13559,7 @@
       </p:sp>
       <p:sp>
         <p:nvSpPr>
-          <p:cNvPr id="151" name="TextBox 150"/>
+          <p:cNvPr id="155" name="TextBox 154"/>
           <p:cNvSpPr txBox="1"/>
           <p:nvPr/>
         </p:nvSpPr>
@@ -13511,7 +13594,7 @@
       </p:sp>
       <p:sp>
         <p:nvSpPr>
-          <p:cNvPr id="153" name="TextBox 152"/>
+          <p:cNvPr id="157" name="TextBox 156"/>
           <p:cNvSpPr txBox="1"/>
           <p:nvPr/>
         </p:nvSpPr>
@@ -13546,7 +13629,7 @@
       </p:sp>
       <p:sp>
         <p:nvSpPr>
-          <p:cNvPr id="155" name="TextBox 154"/>
+          <p:cNvPr id="159" name="TextBox 158"/>
           <p:cNvSpPr txBox="1"/>
           <p:nvPr/>
         </p:nvSpPr>
@@ -13581,7 +13664,7 @@
       </p:sp>
       <p:sp>
         <p:nvSpPr>
-          <p:cNvPr id="157" name="Rectangle 156"/>
+          <p:cNvPr id="161" name="Rectangle 160"/>
           <p:cNvSpPr/>
           <p:nvPr/>
         </p:nvSpPr>
@@ -13626,7 +13709,7 @@
       </p:sp>
       <p:sp>
         <p:nvSpPr>
-          <p:cNvPr id="159" name="TextBox 158"/>
+          <p:cNvPr id="163" name="TextBox 162"/>
           <p:cNvSpPr txBox="1"/>
           <p:nvPr/>
         </p:nvSpPr>
@@ -13661,7 +13744,7 @@
       </p:sp>
       <p:sp>
         <p:nvSpPr>
-          <p:cNvPr id="161" name="TextBox 160"/>
+          <p:cNvPr id="165" name="TextBox 164"/>
           <p:cNvSpPr txBox="1"/>
           <p:nvPr/>
         </p:nvSpPr>
@@ -13696,7 +13779,7 @@
       </p:sp>
       <p:sp>
         <p:nvSpPr>
-          <p:cNvPr id="163" name="TextBox 162"/>
+          <p:cNvPr id="167" name="TextBox 166"/>
           <p:cNvSpPr txBox="1"/>
           <p:nvPr/>
         </p:nvSpPr>
@@ -13731,7 +13814,7 @@
       </p:sp>
       <p:sp>
         <p:nvSpPr>
-          <p:cNvPr id="165" name="Rectangle 164"/>
+          <p:cNvPr id="169" name="Rectangle 168"/>
           <p:cNvSpPr/>
           <p:nvPr/>
         </p:nvSpPr>
@@ -13776,7 +13859,7 @@
       </p:sp>
       <p:sp>
         <p:nvSpPr>
-          <p:cNvPr id="167" name="TextBox 166"/>
+          <p:cNvPr id="171" name="TextBox 170"/>
           <p:cNvSpPr txBox="1"/>
           <p:nvPr/>
         </p:nvSpPr>
@@ -13811,7 +13894,7 @@
       </p:sp>
       <p:sp>
         <p:nvSpPr>
-          <p:cNvPr id="169" name="TextBox 168"/>
+          <p:cNvPr id="173" name="TextBox 172"/>
           <p:cNvSpPr txBox="1"/>
           <p:nvPr/>
         </p:nvSpPr>
@@ -13846,7 +13929,7 @@
       </p:sp>
       <p:sp>
         <p:nvSpPr>
-          <p:cNvPr id="171" name="TextBox 170"/>
+          <p:cNvPr id="175" name="TextBox 174"/>
           <p:cNvSpPr txBox="1"/>
           <p:nvPr/>
         </p:nvSpPr>
@@ -13889,14 +13972,14 @@
                 <p:cTn id="2" dur="indefinite" nodeType="mainSeq">
                   <p:childTnLst>
                     <p:par>
-                      <p:cTn id="129" presetID="2" presetClass="entr" presetSubtype="8" fill="hold" grpId="0" nodeType="clickEffect">
+                      <p:cTn id="133" presetID="2" presetClass="entr" presetSubtype="8" fill="hold" grpId="0" nodeType="clickEffect">
                         <p:stCondLst>
                           <p:cond delay="0"/>
                         </p:stCondLst>
                         <p:childTnLst>
                           <p:animEffect transition="in" filter="fly">
                             <p:cBhvr>
-                              <p:cTn id="130" dur="600" fill="hold"/>
+                              <p:cTn id="134" dur="600" fill="hold"/>
                               <p:tgtEl>
                                 <p:spTgt spid="4"/>
                               </p:tgtEl>
@@ -13906,356 +13989,356 @@
                       </p:cTn>
                     </p:par>
                     <p:par>
-                      <p:cTn id="131" presetID="10" presetClass="entr" presetSubtype="0" fill="hold" grpId="0" nodeType="clickEffect">
+                      <p:cTn id="135" presetID="10" presetClass="entr" presetSubtype="0" fill="hold" grpId="0" nodeType="clickEffect">
                         <p:stCondLst>
                           <p:cond delay="200"/>
                         </p:stCondLst>
                         <p:childTnLst>
                           <p:animEffect transition="in" filter="fade">
                             <p:cBhvr>
-                              <p:cTn id="132" dur="700" fill="hold"/>
-                              <p:tgtEl>
-                                <p:spTgt spid="131"/>
-                              </p:tgtEl>
-                            </p:cBhvr>
-                          </p:animEffect>
-                        </p:childTnLst>
-                      </p:cTn>
-                    </p:par>
-                    <p:par>
-                      <p:cTn id="133" presetID="2" presetClass="entr" presetSubtype="8" fill="hold" grpId="0" nodeType="clickEffect">
+                              <p:cTn id="136" dur="700" fill="hold"/>
+                              <p:tgtEl>
+                                <p:spTgt spid="135"/>
+                              </p:tgtEl>
+                            </p:cBhvr>
+                          </p:animEffect>
+                        </p:childTnLst>
+                      </p:cTn>
+                    </p:par>
+                    <p:par>
+                      <p:cTn id="137" presetID="2" presetClass="entr" presetSubtype="8" fill="hold" grpId="0" nodeType="clickEffect">
                         <p:stCondLst>
                           <p:cond delay="300"/>
                         </p:stCondLst>
                         <p:childTnLst>
                           <p:animEffect transition="in" filter="fly">
                             <p:cBhvr>
-                              <p:cTn id="134" dur="600" fill="hold"/>
-                              <p:tgtEl>
-                                <p:spTgt spid="133"/>
-                              </p:tgtEl>
-                            </p:cBhvr>
-                          </p:animEffect>
-                        </p:childTnLst>
-                      </p:cTn>
-                    </p:par>
-                    <p:par>
-                      <p:cTn id="135" presetID="10" presetClass="entr" presetSubtype="0" fill="hold" grpId="0" nodeType="clickEffect">
+                              <p:cTn id="138" dur="600" fill="hold"/>
+                              <p:tgtEl>
+                                <p:spTgt spid="137"/>
+                              </p:tgtEl>
+                            </p:cBhvr>
+                          </p:animEffect>
+                        </p:childTnLst>
+                      </p:cTn>
+                    </p:par>
+                    <p:par>
+                      <p:cTn id="139" presetID="10" presetClass="entr" presetSubtype="0" fill="hold" grpId="0" nodeType="clickEffect">
                         <p:stCondLst>
                           <p:cond delay="400"/>
                         </p:stCondLst>
                         <p:childTnLst>
                           <p:animEffect transition="in" filter="fade">
                             <p:cBhvr>
-                              <p:cTn id="136" dur="700" fill="hold"/>
-                              <p:tgtEl>
-                                <p:spTgt spid="135"/>
-                              </p:tgtEl>
-                            </p:cBhvr>
-                          </p:animEffect>
-                        </p:childTnLst>
-                      </p:cTn>
-                    </p:par>
-                    <p:par>
-                      <p:cTn id="137" presetID="10" presetClass="entr" presetSubtype="0" fill="hold" grpId="0" nodeType="clickEffect">
+                              <p:cTn id="140" dur="700" fill="hold"/>
+                              <p:tgtEl>
+                                <p:spTgt spid="139"/>
+                              </p:tgtEl>
+                            </p:cBhvr>
+                          </p:animEffect>
+                        </p:childTnLst>
+                      </p:cTn>
+                    </p:par>
+                    <p:par>
+                      <p:cTn id="141" presetID="10" presetClass="entr" presetSubtype="0" fill="hold" grpId="0" nodeType="clickEffect">
                         <p:stCondLst>
                           <p:cond delay="500"/>
                         </p:stCondLst>
                         <p:childTnLst>
                           <p:animEffect transition="in" filter="fade">
                             <p:cBhvr>
-                              <p:cTn id="138" dur="700" fill="hold"/>
-                              <p:tgtEl>
-                                <p:spTgt spid="137"/>
-                              </p:tgtEl>
-                            </p:cBhvr>
-                          </p:animEffect>
-                        </p:childTnLst>
-                      </p:cTn>
-                    </p:par>
-                    <p:par>
-                      <p:cTn id="139" presetID="10" presetClass="entr" presetSubtype="0" fill="hold" grpId="0" nodeType="clickEffect">
+                              <p:cTn id="142" dur="700" fill="hold"/>
+                              <p:tgtEl>
+                                <p:spTgt spid="141"/>
+                              </p:tgtEl>
+                            </p:cBhvr>
+                          </p:animEffect>
+                        </p:childTnLst>
+                      </p:cTn>
+                    </p:par>
+                    <p:par>
+                      <p:cTn id="143" presetID="10" presetClass="entr" presetSubtype="0" fill="hold" grpId="0" nodeType="clickEffect">
                         <p:stCondLst>
                           <p:cond delay="600"/>
                         </p:stCondLst>
                         <p:childTnLst>
                           <p:animEffect transition="in" filter="fade">
                             <p:cBhvr>
-                              <p:cTn id="140" dur="700" fill="hold"/>
-                              <p:tgtEl>
-                                <p:spTgt spid="139"/>
-                              </p:tgtEl>
-                            </p:cBhvr>
-                          </p:animEffect>
-                        </p:childTnLst>
-                      </p:cTn>
-                    </p:par>
-                    <p:par>
-                      <p:cTn id="141" presetID="2" presetClass="entr" presetSubtype="8" fill="hold" grpId="0" nodeType="clickEffect">
+                              <p:cTn id="144" dur="700" fill="hold"/>
+                              <p:tgtEl>
+                                <p:spTgt spid="143"/>
+                              </p:tgtEl>
+                            </p:cBhvr>
+                          </p:animEffect>
+                        </p:childTnLst>
+                      </p:cTn>
+                    </p:par>
+                    <p:par>
+                      <p:cTn id="145" presetID="2" presetClass="entr" presetSubtype="8" fill="hold" grpId="0" nodeType="clickEffect">
                         <p:stCondLst>
                           <p:cond delay="500"/>
                         </p:stCondLst>
                         <p:childTnLst>
                           <p:animEffect transition="in" filter="fly">
                             <p:cBhvr>
-                              <p:cTn id="142" dur="600" fill="hold"/>
-                              <p:tgtEl>
-                                <p:spTgt spid="141"/>
-                              </p:tgtEl>
-                            </p:cBhvr>
-                          </p:animEffect>
-                        </p:childTnLst>
-                      </p:cTn>
-                    </p:par>
-                    <p:par>
-                      <p:cTn id="143" presetID="10" presetClass="entr" presetSubtype="0" fill="hold" grpId="0" nodeType="clickEffect">
+                              <p:cTn id="146" dur="600" fill="hold"/>
+                              <p:tgtEl>
+                                <p:spTgt spid="145"/>
+                              </p:tgtEl>
+                            </p:cBhvr>
+                          </p:animEffect>
+                        </p:childTnLst>
+                      </p:cTn>
+                    </p:par>
+                    <p:par>
+                      <p:cTn id="147" presetID="10" presetClass="entr" presetSubtype="0" fill="hold" grpId="0" nodeType="clickEffect">
                         <p:stCondLst>
                           <p:cond delay="600"/>
                         </p:stCondLst>
                         <p:childTnLst>
                           <p:animEffect transition="in" filter="fade">
                             <p:cBhvr>
-                              <p:cTn id="144" dur="700" fill="hold"/>
-                              <p:tgtEl>
-                                <p:spTgt spid="143"/>
-                              </p:tgtEl>
-                            </p:cBhvr>
-                          </p:animEffect>
-                        </p:childTnLst>
-                      </p:cTn>
-                    </p:par>
-                    <p:par>
-                      <p:cTn id="145" presetID="10" presetClass="entr" presetSubtype="0" fill="hold" grpId="0" nodeType="clickEffect">
+                              <p:cTn id="148" dur="700" fill="hold"/>
+                              <p:tgtEl>
+                                <p:spTgt spid="147"/>
+                              </p:tgtEl>
+                            </p:cBhvr>
+                          </p:animEffect>
+                        </p:childTnLst>
+                      </p:cTn>
+                    </p:par>
+                    <p:par>
+                      <p:cTn id="149" presetID="10" presetClass="entr" presetSubtype="0" fill="hold" grpId="0" nodeType="clickEffect">
                         <p:stCondLst>
                           <p:cond delay="700"/>
                         </p:stCondLst>
                         <p:childTnLst>
                           <p:animEffect transition="in" filter="fade">
                             <p:cBhvr>
-                              <p:cTn id="146" dur="700" fill="hold"/>
-                              <p:tgtEl>
-                                <p:spTgt spid="145"/>
-                              </p:tgtEl>
-                            </p:cBhvr>
-                          </p:animEffect>
-                        </p:childTnLst>
-                      </p:cTn>
-                    </p:par>
-                    <p:par>
-                      <p:cTn id="147" presetID="10" presetClass="entr" presetSubtype="0" fill="hold" grpId="0" nodeType="clickEffect">
+                              <p:cTn id="150" dur="700" fill="hold"/>
+                              <p:tgtEl>
+                                <p:spTgt spid="149"/>
+                              </p:tgtEl>
+                            </p:cBhvr>
+                          </p:animEffect>
+                        </p:childTnLst>
+                      </p:cTn>
+                    </p:par>
+                    <p:par>
+                      <p:cTn id="151" presetID="10" presetClass="entr" presetSubtype="0" fill="hold" grpId="0" nodeType="clickEffect">
                         <p:stCondLst>
                           <p:cond delay="800"/>
                         </p:stCondLst>
                         <p:childTnLst>
                           <p:animEffect transition="in" filter="fade">
                             <p:cBhvr>
-                              <p:cTn id="148" dur="700" fill="hold"/>
-                              <p:tgtEl>
-                                <p:spTgt spid="147"/>
-                              </p:tgtEl>
-                            </p:cBhvr>
-                          </p:animEffect>
-                        </p:childTnLst>
-                      </p:cTn>
-                    </p:par>
-                    <p:par>
-                      <p:cTn id="149" presetID="2" presetClass="entr" presetSubtype="8" fill="hold" grpId="0" nodeType="clickEffect">
+                              <p:cTn id="152" dur="700" fill="hold"/>
+                              <p:tgtEl>
+                                <p:spTgt spid="151"/>
+                              </p:tgtEl>
+                            </p:cBhvr>
+                          </p:animEffect>
+                        </p:childTnLst>
+                      </p:cTn>
+                    </p:par>
+                    <p:par>
+                      <p:cTn id="153" presetID="2" presetClass="entr" presetSubtype="8" fill="hold" grpId="0" nodeType="clickEffect">
                         <p:stCondLst>
                           <p:cond delay="700"/>
                         </p:stCondLst>
                         <p:childTnLst>
                           <p:animEffect transition="in" filter="fly">
                             <p:cBhvr>
-                              <p:cTn id="150" dur="600" fill="hold"/>
-                              <p:tgtEl>
-                                <p:spTgt spid="149"/>
-                              </p:tgtEl>
-                            </p:cBhvr>
-                          </p:animEffect>
-                        </p:childTnLst>
-                      </p:cTn>
-                    </p:par>
-                    <p:par>
-                      <p:cTn id="151" presetID="10" presetClass="entr" presetSubtype="0" fill="hold" grpId="0" nodeType="clickEffect">
+                              <p:cTn id="154" dur="600" fill="hold"/>
+                              <p:tgtEl>
+                                <p:spTgt spid="153"/>
+                              </p:tgtEl>
+                            </p:cBhvr>
+                          </p:animEffect>
+                        </p:childTnLst>
+                      </p:cTn>
+                    </p:par>
+                    <p:par>
+                      <p:cTn id="155" presetID="10" presetClass="entr" presetSubtype="0" fill="hold" grpId="0" nodeType="clickEffect">
                         <p:stCondLst>
                           <p:cond delay="800"/>
                         </p:stCondLst>
                         <p:childTnLst>
                           <p:animEffect transition="in" filter="fade">
                             <p:cBhvr>
-                              <p:cTn id="152" dur="700" fill="hold"/>
-                              <p:tgtEl>
-                                <p:spTgt spid="151"/>
-                              </p:tgtEl>
-                            </p:cBhvr>
-                          </p:animEffect>
-                        </p:childTnLst>
-                      </p:cTn>
-                    </p:par>
-                    <p:par>
-                      <p:cTn id="153" presetID="10" presetClass="entr" presetSubtype="0" fill="hold" grpId="0" nodeType="clickEffect">
+                              <p:cTn id="156" dur="700" fill="hold"/>
+                              <p:tgtEl>
+                                <p:spTgt spid="155"/>
+                              </p:tgtEl>
+                            </p:cBhvr>
+                          </p:animEffect>
+                        </p:childTnLst>
+                      </p:cTn>
+                    </p:par>
+                    <p:par>
+                      <p:cTn id="157" presetID="10" presetClass="entr" presetSubtype="0" fill="hold" grpId="0" nodeType="clickEffect">
                         <p:stCondLst>
                           <p:cond delay="900"/>
                         </p:stCondLst>
                         <p:childTnLst>
                           <p:animEffect transition="in" filter="fade">
                             <p:cBhvr>
-                              <p:cTn id="154" dur="700" fill="hold"/>
-                              <p:tgtEl>
-                                <p:spTgt spid="153"/>
-                              </p:tgtEl>
-                            </p:cBhvr>
-                          </p:animEffect>
-                        </p:childTnLst>
-                      </p:cTn>
-                    </p:par>
-                    <p:par>
-                      <p:cTn id="155" presetID="10" presetClass="entr" presetSubtype="0" fill="hold" grpId="0" nodeType="clickEffect">
+                              <p:cTn id="158" dur="700" fill="hold"/>
+                              <p:tgtEl>
+                                <p:spTgt spid="157"/>
+                              </p:tgtEl>
+                            </p:cBhvr>
+                          </p:animEffect>
+                        </p:childTnLst>
+                      </p:cTn>
+                    </p:par>
+                    <p:par>
+                      <p:cTn id="159" presetID="10" presetClass="entr" presetSubtype="0" fill="hold" grpId="0" nodeType="clickEffect">
                         <p:stCondLst>
                           <p:cond delay="1000"/>
                         </p:stCondLst>
                         <p:childTnLst>
                           <p:animEffect transition="in" filter="fade">
                             <p:cBhvr>
-                              <p:cTn id="156" dur="700" fill="hold"/>
-                              <p:tgtEl>
-                                <p:spTgt spid="155"/>
-                              </p:tgtEl>
-                            </p:cBhvr>
-                          </p:animEffect>
-                        </p:childTnLst>
-                      </p:cTn>
-                    </p:par>
-                    <p:par>
-                      <p:cTn id="157" presetID="2" presetClass="entr" presetSubtype="8" fill="hold" grpId="0" nodeType="clickEffect">
+                              <p:cTn id="160" dur="700" fill="hold"/>
+                              <p:tgtEl>
+                                <p:spTgt spid="159"/>
+                              </p:tgtEl>
+                            </p:cBhvr>
+                          </p:animEffect>
+                        </p:childTnLst>
+                      </p:cTn>
+                    </p:par>
+                    <p:par>
+                      <p:cTn id="161" presetID="2" presetClass="entr" presetSubtype="8" fill="hold" grpId="0" nodeType="clickEffect">
                         <p:stCondLst>
                           <p:cond delay="900"/>
                         </p:stCondLst>
                         <p:childTnLst>
                           <p:animEffect transition="in" filter="fly">
                             <p:cBhvr>
-                              <p:cTn id="158" dur="600" fill="hold"/>
-                              <p:tgtEl>
-                                <p:spTgt spid="157"/>
-                              </p:tgtEl>
-                            </p:cBhvr>
-                          </p:animEffect>
-                        </p:childTnLst>
-                      </p:cTn>
-                    </p:par>
-                    <p:par>
-                      <p:cTn id="159" presetID="10" presetClass="entr" presetSubtype="0" fill="hold" grpId="0" nodeType="clickEffect">
+                              <p:cTn id="162" dur="600" fill="hold"/>
+                              <p:tgtEl>
+                                <p:spTgt spid="161"/>
+                              </p:tgtEl>
+                            </p:cBhvr>
+                          </p:animEffect>
+                        </p:childTnLst>
+                      </p:cTn>
+                    </p:par>
+                    <p:par>
+                      <p:cTn id="163" presetID="10" presetClass="entr" presetSubtype="0" fill="hold" grpId="0" nodeType="clickEffect">
                         <p:stCondLst>
                           <p:cond delay="1000"/>
                         </p:stCondLst>
                         <p:childTnLst>
                           <p:animEffect transition="in" filter="fade">
                             <p:cBhvr>
-                              <p:cTn id="160" dur="700" fill="hold"/>
-                              <p:tgtEl>
-                                <p:spTgt spid="159"/>
-                              </p:tgtEl>
-                            </p:cBhvr>
-                          </p:animEffect>
-                        </p:childTnLst>
-                      </p:cTn>
-                    </p:par>
-                    <p:par>
-                      <p:cTn id="161" presetID="10" presetClass="entr" presetSubtype="0" fill="hold" grpId="0" nodeType="clickEffect">
+                              <p:cTn id="164" dur="700" fill="hold"/>
+                              <p:tgtEl>
+                                <p:spTgt spid="163"/>
+                              </p:tgtEl>
+                            </p:cBhvr>
+                          </p:animEffect>
+                        </p:childTnLst>
+                      </p:cTn>
+                    </p:par>
+                    <p:par>
+                      <p:cTn id="165" presetID="10" presetClass="entr" presetSubtype="0" fill="hold" grpId="0" nodeType="clickEffect">
                         <p:stCondLst>
                           <p:cond delay="1100"/>
                         </p:stCondLst>
                         <p:childTnLst>
                           <p:animEffect transition="in" filter="fade">
                             <p:cBhvr>
-                              <p:cTn id="162" dur="700" fill="hold"/>
-                              <p:tgtEl>
-                                <p:spTgt spid="161"/>
-                              </p:tgtEl>
-                            </p:cBhvr>
-                          </p:animEffect>
-                        </p:childTnLst>
-                      </p:cTn>
-                    </p:par>
-                    <p:par>
-                      <p:cTn id="163" presetID="10" presetClass="entr" presetSubtype="0" fill="hold" grpId="0" nodeType="clickEffect">
+                              <p:cTn id="166" dur="700" fill="hold"/>
+                              <p:tgtEl>
+                                <p:spTgt spid="165"/>
+                              </p:tgtEl>
+                            </p:cBhvr>
+                          </p:animEffect>
+                        </p:childTnLst>
+                      </p:cTn>
+                    </p:par>
+                    <p:par>
+                      <p:cTn id="167" presetID="10" presetClass="entr" presetSubtype="0" fill="hold" grpId="0" nodeType="clickEffect">
                         <p:stCondLst>
                           <p:cond delay="1200"/>
                         </p:stCondLst>
                         <p:childTnLst>
                           <p:animEffect transition="in" filter="fade">
                             <p:cBhvr>
-                              <p:cTn id="164" dur="700" fill="hold"/>
-                              <p:tgtEl>
-                                <p:spTgt spid="163"/>
-                              </p:tgtEl>
-                            </p:cBhvr>
-                          </p:animEffect>
-                        </p:childTnLst>
-                      </p:cTn>
-                    </p:par>
-                    <p:par>
-                      <p:cTn id="165" presetID="2" presetClass="entr" presetSubtype="8" fill="hold" grpId="0" nodeType="clickEffect">
+                              <p:cTn id="168" dur="700" fill="hold"/>
+                              <p:tgtEl>
+                                <p:spTgt spid="167"/>
+                              </p:tgtEl>
+                            </p:cBhvr>
+                          </p:animEffect>
+                        </p:childTnLst>
+                      </p:cTn>
+                    </p:par>
+                    <p:par>
+                      <p:cTn id="169" presetID="2" presetClass="entr" presetSubtype="8" fill="hold" grpId="0" nodeType="clickEffect">
                         <p:stCondLst>
                           <p:cond delay="1100"/>
                         </p:stCondLst>
                         <p:childTnLst>
                           <p:animEffect transition="in" filter="fly">
                             <p:cBhvr>
-                              <p:cTn id="166" dur="600" fill="hold"/>
-                              <p:tgtEl>
-                                <p:spTgt spid="165"/>
-                              </p:tgtEl>
-                            </p:cBhvr>
-                          </p:animEffect>
-                        </p:childTnLst>
-                      </p:cTn>
-                    </p:par>
-                    <p:par>
-                      <p:cTn id="167" presetID="10" presetClass="entr" presetSubtype="0" fill="hold" grpId="0" nodeType="clickEffect">
+                              <p:cTn id="170" dur="600" fill="hold"/>
+                              <p:tgtEl>
+                                <p:spTgt spid="169"/>
+                              </p:tgtEl>
+                            </p:cBhvr>
+                          </p:animEffect>
+                        </p:childTnLst>
+                      </p:cTn>
+                    </p:par>
+                    <p:par>
+                      <p:cTn id="171" presetID="10" presetClass="entr" presetSubtype="0" fill="hold" grpId="0" nodeType="clickEffect">
                         <p:stCondLst>
                           <p:cond delay="1200"/>
                         </p:stCondLst>
                         <p:childTnLst>
                           <p:animEffect transition="in" filter="fade">
                             <p:cBhvr>
-                              <p:cTn id="168" dur="700" fill="hold"/>
-                              <p:tgtEl>
-                                <p:spTgt spid="167"/>
-                              </p:tgtEl>
-                            </p:cBhvr>
-                          </p:animEffect>
-                        </p:childTnLst>
-                      </p:cTn>
-                    </p:par>
-                    <p:par>
-                      <p:cTn id="169" presetID="10" presetClass="entr" presetSubtype="0" fill="hold" grpId="0" nodeType="clickEffect">
+                              <p:cTn id="172" dur="700" fill="hold"/>
+                              <p:tgtEl>
+                                <p:spTgt spid="171"/>
+                              </p:tgtEl>
+                            </p:cBhvr>
+                          </p:animEffect>
+                        </p:childTnLst>
+                      </p:cTn>
+                    </p:par>
+                    <p:par>
+                      <p:cTn id="173" presetID="10" presetClass="entr" presetSubtype="0" fill="hold" grpId="0" nodeType="clickEffect">
                         <p:stCondLst>
                           <p:cond delay="1300"/>
                         </p:stCondLst>
                         <p:childTnLst>
                           <p:animEffect transition="in" filter="fade">
                             <p:cBhvr>
-                              <p:cTn id="170" dur="700" fill="hold"/>
-                              <p:tgtEl>
-                                <p:spTgt spid="169"/>
-                              </p:tgtEl>
-                            </p:cBhvr>
-                          </p:animEffect>
-                        </p:childTnLst>
-                      </p:cTn>
-                    </p:par>
-                    <p:par>
-                      <p:cTn id="171" presetID="10" presetClass="entr" presetSubtype="0" fill="hold" grpId="0" nodeType="clickEffect">
+                              <p:cTn id="174" dur="700" fill="hold"/>
+                              <p:tgtEl>
+                                <p:spTgt spid="173"/>
+                              </p:tgtEl>
+                            </p:cBhvr>
+                          </p:animEffect>
+                        </p:childTnLst>
+                      </p:cTn>
+                    </p:par>
+                    <p:par>
+                      <p:cTn id="175" presetID="10" presetClass="entr" presetSubtype="0" fill="hold" grpId="0" nodeType="clickEffect">
                         <p:stCondLst>
                           <p:cond delay="1400"/>
                         </p:stCondLst>
                         <p:childTnLst>
                           <p:animEffect transition="in" filter="fade">
                             <p:cBhvr>
-                              <p:cTn id="172" dur="700" fill="hold"/>
-                              <p:tgtEl>
-                                <p:spTgt spid="171"/>
+                              <p:cTn id="176" dur="700" fill="hold"/>
+                              <p:tgtEl>
+                                <p:spTgt spid="175"/>
                               </p:tgtEl>
                             </p:cBhvr>
                           </p:animEffect>
@@ -14397,7 +14480,7 @@
       </p:sp>
       <p:sp>
         <p:nvSpPr>
-          <p:cNvPr id="175" name="Rectangle 174"/>
+          <p:cNvPr id="179" name="Rectangle 178"/>
           <p:cNvSpPr/>
           <p:nvPr/>
         </p:nvSpPr>
@@ -14440,7 +14523,7 @@
       </p:sp>
       <p:sp>
         <p:nvSpPr>
-          <p:cNvPr id="177" name="Rectangle 176"/>
+          <p:cNvPr id="181" name="Rectangle 180"/>
           <p:cNvSpPr/>
           <p:nvPr/>
         </p:nvSpPr>
@@ -14483,7 +14566,7 @@
       </p:sp>
       <p:sp>
         <p:nvSpPr>
-          <p:cNvPr id="179" name="TextBox 178"/>
+          <p:cNvPr id="183" name="TextBox 182"/>
           <p:cNvSpPr txBox="1"/>
           <p:nvPr/>
         </p:nvSpPr>
@@ -14518,7 +14601,7 @@
       </p:sp>
       <p:sp>
         <p:nvSpPr>
-          <p:cNvPr id="181" name="TextBox 180"/>
+          <p:cNvPr id="185" name="TextBox 184"/>
           <p:cNvSpPr txBox="1"/>
           <p:nvPr/>
         </p:nvSpPr>
@@ -14561,14 +14644,14 @@
                 <p:cTn id="2" dur="indefinite" nodeType="mainSeq">
                   <p:childTnLst>
                     <p:par>
-                      <p:cTn id="173" presetID="10" presetClass="entr" presetSubtype="0" fill="hold" grpId="0" nodeType="clickEffect">
+                      <p:cTn id="177" presetID="10" presetClass="entr" presetSubtype="0" fill="hold" grpId="0" nodeType="clickEffect">
                         <p:stCondLst>
                           <p:cond delay="0"/>
                         </p:stCondLst>
                         <p:childTnLst>
                           <p:animEffect transition="in" filter="fade">
                             <p:cBhvr>
-                              <p:cTn id="174" dur="700" fill="hold"/>
+                              <p:cTn id="178" dur="700" fill="hold"/>
                               <p:tgtEl>
                                 <p:spTgt spid="3"/>
                               </p:tgtEl>
@@ -14578,67 +14661,67 @@
                       </p:cTn>
                     </p:par>
                     <p:par>
-                      <p:cTn id="175" presetID="10" presetClass="entr" presetSubtype="0" fill="hold" grpId="0" nodeType="clickEffect">
+                      <p:cTn id="179" presetID="10" presetClass="entr" presetSubtype="0" fill="hold" grpId="0" nodeType="clickEffect">
                         <p:stCondLst>
                           <p:cond delay="0"/>
                         </p:stCondLst>
                         <p:childTnLst>
                           <p:animEffect transition="in" filter="fade">
                             <p:cBhvr>
-                              <p:cTn id="176" dur="700" fill="hold"/>
-                              <p:tgtEl>
-                                <p:spTgt spid="175"/>
-                              </p:tgtEl>
-                            </p:cBhvr>
-                          </p:animEffect>
-                        </p:childTnLst>
-                      </p:cTn>
-                    </p:par>
-                    <p:par>
-                      <p:cTn id="177" presetID="10" presetClass="entr" presetSubtype="0" fill="hold" grpId="0" nodeType="clickEffect">
+                              <p:cTn id="180" dur="700" fill="hold"/>
+                              <p:tgtEl>
+                                <p:spTgt spid="179"/>
+                              </p:tgtEl>
+                            </p:cBhvr>
+                          </p:animEffect>
+                        </p:childTnLst>
+                      </p:cTn>
+                    </p:par>
+                    <p:par>
+                      <p:cTn id="181" presetID="10" presetClass="entr" presetSubtype="0" fill="hold" grpId="0" nodeType="clickEffect">
                         <p:stCondLst>
                           <p:cond delay="300"/>
                         </p:stCondLst>
                         <p:childTnLst>
                           <p:animEffect transition="in" filter="fade">
                             <p:cBhvr>
-                              <p:cTn id="178" dur="700" fill="hold"/>
-                              <p:tgtEl>
-                                <p:spTgt spid="177"/>
-                              </p:tgtEl>
-                            </p:cBhvr>
-                          </p:animEffect>
-                        </p:childTnLst>
-                      </p:cTn>
-                    </p:par>
-                    <p:par>
-                      <p:cTn id="179" presetID="22" presetClass="entr" presetSubtype="0" fill="hold" grpId="0" nodeType="clickEffect">
+                              <p:cTn id="182" dur="700" fill="hold"/>
+                              <p:tgtEl>
+                                <p:spTgt spid="181"/>
+                              </p:tgtEl>
+                            </p:cBhvr>
+                          </p:animEffect>
+                        </p:childTnLst>
+                      </p:cTn>
+                    </p:par>
+                    <p:par>
+                      <p:cTn id="183" presetID="22" presetClass="entr" presetSubtype="0" fill="hold" grpId="0" nodeType="clickEffect">
                         <p:stCondLst>
                           <p:cond delay="100"/>
                         </p:stCondLst>
                         <p:childTnLst>
                           <p:animEffect transition="in" filter="zoom">
                             <p:cBhvr>
-                              <p:cTn id="180" dur="500" fill="hold"/>
-                              <p:tgtEl>
-                                <p:spTgt spid="179"/>
-                              </p:tgtEl>
-                            </p:cBhvr>
-                          </p:animEffect>
-                        </p:childTnLst>
-                      </p:cTn>
-                    </p:par>
-                    <p:par>
-                      <p:cTn id="181" presetID="10" presetClass="entr" presetSubtype="0" fill="hold" grpId="0" nodeType="clickEffect">
+                              <p:cTn id="184" dur="500" fill="hold"/>
+                              <p:tgtEl>
+                                <p:spTgt spid="183"/>
+                              </p:tgtEl>
+                            </p:cBhvr>
+                          </p:animEffect>
+                        </p:childTnLst>
+                      </p:cTn>
+                    </p:par>
+                    <p:par>
+                      <p:cTn id="185" presetID="10" presetClass="entr" presetSubtype="0" fill="hold" grpId="0" nodeType="clickEffect">
                         <p:stCondLst>
                           <p:cond delay="400"/>
                         </p:stCondLst>
                         <p:childTnLst>
                           <p:animEffect transition="in" filter="fade">
                             <p:cBhvr>
-                              <p:cTn id="182" dur="700" fill="hold"/>
-                              <p:tgtEl>
-                                <p:spTgt spid="181"/>
+                              <p:cTn id="186" dur="700" fill="hold"/>
+                              <p:tgtEl>
+                                <p:spTgt spid="185"/>
                               </p:tgtEl>
                             </p:cBhvr>
                           </p:animEffect>
@@ -14807,7 +14890,7 @@
       </p:sp>
       <p:sp>
         <p:nvSpPr>
-          <p:cNvPr id="185" name="Rectangle 184"/>
+          <p:cNvPr id="189" name="Rectangle 188"/>
           <p:cNvSpPr/>
           <p:nvPr/>
         </p:nvSpPr>
@@ -14852,7 +14935,7 @@
       </p:sp>
       <p:sp>
         <p:nvSpPr>
-          <p:cNvPr id="187" name="TextBox 186"/>
+          <p:cNvPr id="191" name="TextBox 190"/>
           <p:cNvSpPr txBox="1"/>
           <p:nvPr/>
         </p:nvSpPr>
@@ -14887,7 +14970,7 @@
       </p:sp>
       <p:sp>
         <p:nvSpPr>
-          <p:cNvPr id="189" name="TextBox 188"/>
+          <p:cNvPr id="193" name="TextBox 192"/>
           <p:cNvSpPr txBox="1"/>
           <p:nvPr/>
         </p:nvSpPr>
@@ -14922,7 +15005,7 @@
       </p:sp>
       <p:sp>
         <p:nvSpPr>
-          <p:cNvPr id="191" name="Rectangle 190"/>
+          <p:cNvPr id="195" name="Rectangle 194"/>
           <p:cNvSpPr/>
           <p:nvPr/>
         </p:nvSpPr>
@@ -14967,7 +15050,7 @@
       </p:sp>
       <p:sp>
         <p:nvSpPr>
-          <p:cNvPr id="193" name="TextBox 192"/>
+          <p:cNvPr id="197" name="TextBox 196"/>
           <p:cNvSpPr txBox="1"/>
           <p:nvPr/>
         </p:nvSpPr>
@@ -15002,7 +15085,7 @@
       </p:sp>
       <p:sp>
         <p:nvSpPr>
-          <p:cNvPr id="195" name="TextBox 194"/>
+          <p:cNvPr id="199" name="TextBox 198"/>
           <p:cNvSpPr txBox="1"/>
           <p:nvPr/>
         </p:nvSpPr>
@@ -15037,7 +15120,7 @@
       </p:sp>
       <p:sp>
         <p:nvSpPr>
-          <p:cNvPr id="197" name="Rectangle 196"/>
+          <p:cNvPr id="201" name="Rectangle 200"/>
           <p:cNvSpPr/>
           <p:nvPr/>
         </p:nvSpPr>
@@ -15082,7 +15165,7 @@
       </p:sp>
       <p:sp>
         <p:nvSpPr>
-          <p:cNvPr id="199" name="TextBox 198"/>
+          <p:cNvPr id="203" name="TextBox 202"/>
           <p:cNvSpPr txBox="1"/>
           <p:nvPr/>
         </p:nvSpPr>
@@ -15117,7 +15200,7 @@
       </p:sp>
       <p:sp>
         <p:nvSpPr>
-          <p:cNvPr id="201" name="TextBox 200"/>
+          <p:cNvPr id="205" name="TextBox 204"/>
           <p:cNvSpPr txBox="1"/>
           <p:nvPr/>
         </p:nvSpPr>
@@ -15152,7 +15235,7 @@
       </p:sp>
       <p:sp>
         <p:nvSpPr>
-          <p:cNvPr id="203" name="Rectangle 202"/>
+          <p:cNvPr id="207" name="Rectangle 206"/>
           <p:cNvSpPr/>
           <p:nvPr/>
         </p:nvSpPr>
@@ -15197,7 +15280,7 @@
       </p:sp>
       <p:sp>
         <p:nvSpPr>
-          <p:cNvPr id="205" name="TextBox 204"/>
+          <p:cNvPr id="209" name="TextBox 208"/>
           <p:cNvSpPr txBox="1"/>
           <p:nvPr/>
         </p:nvSpPr>
@@ -15232,7 +15315,7 @@
       </p:sp>
       <p:sp>
         <p:nvSpPr>
-          <p:cNvPr id="207" name="TextBox 206"/>
+          <p:cNvPr id="211" name="TextBox 210"/>
           <p:cNvSpPr txBox="1"/>
           <p:nvPr/>
         </p:nvSpPr>
@@ -15267,7 +15350,7 @@
       </p:sp>
       <p:sp>
         <p:nvSpPr>
-          <p:cNvPr id="209" name="Rectangle 208"/>
+          <p:cNvPr id="213" name="Rectangle 212"/>
           <p:cNvSpPr/>
           <p:nvPr/>
         </p:nvSpPr>
@@ -15312,7 +15395,7 @@
       </p:sp>
       <p:sp>
         <p:nvSpPr>
-          <p:cNvPr id="211" name="TextBox 210"/>
+          <p:cNvPr id="215" name="TextBox 214"/>
           <p:cNvSpPr txBox="1"/>
           <p:nvPr/>
         </p:nvSpPr>
@@ -15347,7 +15430,7 @@
       </p:sp>
       <p:sp>
         <p:nvSpPr>
-          <p:cNvPr id="213" name="TextBox 212"/>
+          <p:cNvPr id="217" name="TextBox 216"/>
           <p:cNvSpPr txBox="1"/>
           <p:nvPr/>
         </p:nvSpPr>
@@ -15382,7 +15465,7 @@
       </p:sp>
       <p:sp>
         <p:nvSpPr>
-          <p:cNvPr id="215" name="Rectangle 214"/>
+          <p:cNvPr id="219" name="Rectangle 218"/>
           <p:cNvSpPr/>
           <p:nvPr/>
         </p:nvSpPr>
@@ -15425,7 +15508,7 @@
       </p:sp>
       <p:sp>
         <p:nvSpPr>
-          <p:cNvPr id="217" name="TextBox 216"/>
+          <p:cNvPr id="221" name="TextBox 220"/>
           <p:cNvSpPr txBox="1"/>
           <p:nvPr/>
         </p:nvSpPr>
@@ -15460,7 +15543,7 @@
       </p:sp>
       <p:sp>
         <p:nvSpPr>
-          <p:cNvPr id="219" name="TextBox 218"/>
+          <p:cNvPr id="223" name="TextBox 222"/>
           <p:cNvSpPr txBox="1"/>
           <p:nvPr/>
         </p:nvSpPr>
@@ -15495,7 +15578,7 @@
       </p:sp>
       <p:sp>
         <p:nvSpPr>
-          <p:cNvPr id="221" name="TextBox 220"/>
+          <p:cNvPr id="225" name="TextBox 224"/>
           <p:cNvSpPr txBox="1"/>
           <p:nvPr/>
         </p:nvSpPr>
@@ -15530,7 +15613,7 @@
       </p:sp>
       <p:sp>
         <p:nvSpPr>
-          <p:cNvPr id="223" name="TextBox 222"/>
+          <p:cNvPr id="227" name="TextBox 226"/>
           <p:cNvSpPr txBox="1"/>
           <p:nvPr/>
         </p:nvSpPr>
@@ -15565,7 +15648,7 @@
       </p:sp>
       <p:sp>
         <p:nvSpPr>
-          <p:cNvPr id="225" name="TextBox 224"/>
+          <p:cNvPr id="229" name="TextBox 228"/>
           <p:cNvSpPr txBox="1"/>
           <p:nvPr/>
         </p:nvSpPr>
@@ -15600,7 +15683,7 @@
       </p:sp>
       <p:sp>
         <p:nvSpPr>
-          <p:cNvPr id="227" name="TextBox 226"/>
+          <p:cNvPr id="231" name="TextBox 230"/>
           <p:cNvSpPr txBox="1"/>
           <p:nvPr/>
         </p:nvSpPr>
@@ -15635,7 +15718,7 @@
       </p:sp>
       <p:sp>
         <p:nvSpPr>
-          <p:cNvPr id="229" name="TextBox 228"/>
+          <p:cNvPr id="233" name="TextBox 232"/>
           <p:cNvSpPr txBox="1"/>
           <p:nvPr/>
         </p:nvSpPr>
@@ -15670,7 +15753,7 @@
       </p:sp>
       <p:sp>
         <p:nvSpPr>
-          <p:cNvPr id="231" name="TextBox 230"/>
+          <p:cNvPr id="235" name="TextBox 234"/>
           <p:cNvSpPr txBox="1"/>
           <p:nvPr/>
         </p:nvSpPr>
@@ -15705,7 +15788,7 @@
       </p:sp>
       <p:sp>
         <p:nvSpPr>
-          <p:cNvPr id="233" name="TextBox 232"/>
+          <p:cNvPr id="237" name="TextBox 236"/>
           <p:cNvSpPr txBox="1"/>
           <p:nvPr/>
         </p:nvSpPr>
@@ -15740,7 +15823,7 @@
       </p:sp>
       <p:sp>
         <p:nvSpPr>
-          <p:cNvPr id="235" name="TextBox 234"/>
+          <p:cNvPr id="239" name="TextBox 238"/>
           <p:cNvSpPr txBox="1"/>
           <p:nvPr/>
         </p:nvSpPr>
@@ -15775,7 +15858,7 @@
       </p:sp>
       <p:sp>
         <p:nvSpPr>
-          <p:cNvPr id="237" name="TextBox 236"/>
+          <p:cNvPr id="241" name="TextBox 240"/>
           <p:cNvSpPr txBox="1"/>
           <p:nvPr/>
         </p:nvSpPr>
@@ -15810,7 +15893,7 @@
       </p:sp>
       <p:sp>
         <p:nvSpPr>
-          <p:cNvPr id="239" name="TextBox 238"/>
+          <p:cNvPr id="243" name="TextBox 242"/>
           <p:cNvSpPr txBox="1"/>
           <p:nvPr/>
         </p:nvSpPr>
@@ -15845,7 +15928,7 @@
       </p:sp>
       <p:sp>
         <p:nvSpPr>
-          <p:cNvPr id="241" name="Rectangle 240"/>
+          <p:cNvPr id="245" name="Rectangle 244"/>
           <p:cNvSpPr/>
           <p:nvPr/>
         </p:nvSpPr>
@@ -15888,7 +15971,7 @@
       </p:sp>
       <p:sp>
         <p:nvSpPr>
-          <p:cNvPr id="243" name="TextBox 242"/>
+          <p:cNvPr id="247" name="TextBox 246"/>
           <p:cNvSpPr txBox="1"/>
           <p:nvPr/>
         </p:nvSpPr>
@@ -15931,14 +16014,14 @@
                 <p:cTn id="2" dur="indefinite" nodeType="mainSeq">
                   <p:childTnLst>
                     <p:par>
-                      <p:cTn id="183" presetID="2" presetClass="entr" presetSubtype="8" fill="hold" grpId="0" nodeType="clickEffect">
+                      <p:cTn id="187" presetID="2" presetClass="entr" presetSubtype="8" fill="hold" grpId="0" nodeType="clickEffect">
                         <p:stCondLst>
                           <p:cond delay="0"/>
                         </p:stCondLst>
                         <p:childTnLst>
                           <p:animEffect transition="in" filter="fly">
                             <p:cBhvr>
-                              <p:cTn id="184" dur="600" fill="hold"/>
+                              <p:cTn id="188" dur="600" fill="hold"/>
                               <p:tgtEl>
                                 <p:spTgt spid="4"/>
                               </p:tgtEl>
@@ -15948,492 +16031,492 @@
                       </p:cTn>
                     </p:par>
                     <p:par>
-                      <p:cTn id="185" presetID="22" presetClass="entr" presetSubtype="0" fill="hold" grpId="0" nodeType="clickEffect">
+                      <p:cTn id="189" presetID="22" presetClass="entr" presetSubtype="0" fill="hold" grpId="0" nodeType="clickEffect">
                         <p:stCondLst>
                           <p:cond delay="200"/>
                         </p:stCondLst>
                         <p:childTnLst>
                           <p:animEffect transition="in" filter="zoom">
                             <p:cBhvr>
-                              <p:cTn id="186" dur="500" fill="hold"/>
-                              <p:tgtEl>
-                                <p:spTgt spid="185"/>
-                              </p:tgtEl>
-                            </p:cBhvr>
-                          </p:animEffect>
-                        </p:childTnLst>
-                      </p:cTn>
-                    </p:par>
-                    <p:par>
-                      <p:cTn id="187" presetID="22" presetClass="entr" presetSubtype="0" fill="hold" grpId="0" nodeType="clickEffect">
+                              <p:cTn id="190" dur="500" fill="hold"/>
+                              <p:tgtEl>
+                                <p:spTgt spid="189"/>
+                              </p:tgtEl>
+                            </p:cBhvr>
+                          </p:animEffect>
+                        </p:childTnLst>
+                      </p:cTn>
+                    </p:par>
+                    <p:par>
+                      <p:cTn id="191" presetID="22" presetClass="entr" presetSubtype="0" fill="hold" grpId="0" nodeType="clickEffect">
                         <p:stCondLst>
                           <p:cond delay="200"/>
                         </p:stCondLst>
                         <p:childTnLst>
                           <p:animEffect transition="in" filter="zoom">
                             <p:cBhvr>
-                              <p:cTn id="188" dur="500" fill="hold"/>
-                              <p:tgtEl>
-                                <p:spTgt spid="187"/>
-                              </p:tgtEl>
-                            </p:cBhvr>
-                          </p:animEffect>
-                        </p:childTnLst>
-                      </p:cTn>
-                    </p:par>
-                    <p:par>
-                      <p:cTn id="189" presetID="10" presetClass="entr" presetSubtype="0" fill="hold" grpId="0" nodeType="clickEffect">
+                              <p:cTn id="192" dur="500" fill="hold"/>
+                              <p:tgtEl>
+                                <p:spTgt spid="191"/>
+                              </p:tgtEl>
+                            </p:cBhvr>
+                          </p:animEffect>
+                        </p:childTnLst>
+                      </p:cTn>
+                    </p:par>
+                    <p:par>
+                      <p:cTn id="193" presetID="10" presetClass="entr" presetSubtype="0" fill="hold" grpId="0" nodeType="clickEffect">
                         <p:stCondLst>
                           <p:cond delay="350"/>
                         </p:stCondLst>
                         <p:childTnLst>
                           <p:animEffect transition="in" filter="fade">
                             <p:cBhvr>
-                              <p:cTn id="190" dur="700" fill="hold"/>
-                              <p:tgtEl>
-                                <p:spTgt spid="189"/>
-                              </p:tgtEl>
-                            </p:cBhvr>
-                          </p:animEffect>
-                        </p:childTnLst>
-                      </p:cTn>
-                    </p:par>
-                    <p:par>
-                      <p:cTn id="191" presetID="22" presetClass="entr" presetSubtype="0" fill="hold" grpId="0" nodeType="clickEffect">
+                              <p:cTn id="194" dur="700" fill="hold"/>
+                              <p:tgtEl>
+                                <p:spTgt spid="193"/>
+                              </p:tgtEl>
+                            </p:cBhvr>
+                          </p:animEffect>
+                        </p:childTnLst>
+                      </p:cTn>
+                    </p:par>
+                    <p:par>
+                      <p:cTn id="195" presetID="22" presetClass="entr" presetSubtype="0" fill="hold" grpId="0" nodeType="clickEffect">
                         <p:stCondLst>
                           <p:cond delay="350"/>
                         </p:stCondLst>
                         <p:childTnLst>
                           <p:animEffect transition="in" filter="zoom">
                             <p:cBhvr>
-                              <p:cTn id="192" dur="500" fill="hold"/>
-                              <p:tgtEl>
-                                <p:spTgt spid="191"/>
-                              </p:tgtEl>
-                            </p:cBhvr>
-                          </p:animEffect>
-                        </p:childTnLst>
-                      </p:cTn>
-                    </p:par>
-                    <p:par>
-                      <p:cTn id="193" presetID="22" presetClass="entr" presetSubtype="0" fill="hold" grpId="0" nodeType="clickEffect">
+                              <p:cTn id="196" dur="500" fill="hold"/>
+                              <p:tgtEl>
+                                <p:spTgt spid="195"/>
+                              </p:tgtEl>
+                            </p:cBhvr>
+                          </p:animEffect>
+                        </p:childTnLst>
+                      </p:cTn>
+                    </p:par>
+                    <p:par>
+                      <p:cTn id="197" presetID="22" presetClass="entr" presetSubtype="0" fill="hold" grpId="0" nodeType="clickEffect">
                         <p:stCondLst>
                           <p:cond delay="350"/>
                         </p:stCondLst>
                         <p:childTnLst>
                           <p:animEffect transition="in" filter="zoom">
                             <p:cBhvr>
-                              <p:cTn id="194" dur="500" fill="hold"/>
-                              <p:tgtEl>
-                                <p:spTgt spid="193"/>
-                              </p:tgtEl>
-                            </p:cBhvr>
-                          </p:animEffect>
-                        </p:childTnLst>
-                      </p:cTn>
-                    </p:par>
-                    <p:par>
-                      <p:cTn id="195" presetID="10" presetClass="entr" presetSubtype="0" fill="hold" grpId="0" nodeType="clickEffect">
+                              <p:cTn id="198" dur="500" fill="hold"/>
+                              <p:tgtEl>
+                                <p:spTgt spid="197"/>
+                              </p:tgtEl>
+                            </p:cBhvr>
+                          </p:animEffect>
+                        </p:childTnLst>
+                      </p:cTn>
+                    </p:par>
+                    <p:par>
+                      <p:cTn id="199" presetID="10" presetClass="entr" presetSubtype="0" fill="hold" grpId="0" nodeType="clickEffect">
                         <p:stCondLst>
                           <p:cond delay="500"/>
                         </p:stCondLst>
                         <p:childTnLst>
                           <p:animEffect transition="in" filter="fade">
                             <p:cBhvr>
-                              <p:cTn id="196" dur="700" fill="hold"/>
-                              <p:tgtEl>
-                                <p:spTgt spid="195"/>
-                              </p:tgtEl>
-                            </p:cBhvr>
-                          </p:animEffect>
-                        </p:childTnLst>
-                      </p:cTn>
-                    </p:par>
-                    <p:par>
-                      <p:cTn id="197" presetID="22" presetClass="entr" presetSubtype="0" fill="hold" grpId="0" nodeType="clickEffect">
+                              <p:cTn id="200" dur="700" fill="hold"/>
+                              <p:tgtEl>
+                                <p:spTgt spid="199"/>
+                              </p:tgtEl>
+                            </p:cBhvr>
+                          </p:animEffect>
+                        </p:childTnLst>
+                      </p:cTn>
+                    </p:par>
+                    <p:par>
+                      <p:cTn id="201" presetID="22" presetClass="entr" presetSubtype="0" fill="hold" grpId="0" nodeType="clickEffect">
                         <p:stCondLst>
                           <p:cond delay="500"/>
                         </p:stCondLst>
                         <p:childTnLst>
                           <p:animEffect transition="in" filter="zoom">
                             <p:cBhvr>
-                              <p:cTn id="198" dur="500" fill="hold"/>
-                              <p:tgtEl>
-                                <p:spTgt spid="197"/>
-                              </p:tgtEl>
-                            </p:cBhvr>
-                          </p:animEffect>
-                        </p:childTnLst>
-                      </p:cTn>
-                    </p:par>
-                    <p:par>
-                      <p:cTn id="199" presetID="22" presetClass="entr" presetSubtype="0" fill="hold" grpId="0" nodeType="clickEffect">
+                              <p:cTn id="202" dur="500" fill="hold"/>
+                              <p:tgtEl>
+                                <p:spTgt spid="201"/>
+                              </p:tgtEl>
+                            </p:cBhvr>
+                          </p:animEffect>
+                        </p:childTnLst>
+                      </p:cTn>
+                    </p:par>
+                    <p:par>
+                      <p:cTn id="203" presetID="22" presetClass="entr" presetSubtype="0" fill="hold" grpId="0" nodeType="clickEffect">
                         <p:stCondLst>
                           <p:cond delay="500"/>
                         </p:stCondLst>
                         <p:childTnLst>
                           <p:animEffect transition="in" filter="zoom">
                             <p:cBhvr>
-                              <p:cTn id="200" dur="500" fill="hold"/>
-                              <p:tgtEl>
-                                <p:spTgt spid="199"/>
-                              </p:tgtEl>
-                            </p:cBhvr>
-                          </p:animEffect>
-                        </p:childTnLst>
-                      </p:cTn>
-                    </p:par>
-                    <p:par>
-                      <p:cTn id="201" presetID="10" presetClass="entr" presetSubtype="0" fill="hold" grpId="0" nodeType="clickEffect">
+                              <p:cTn id="204" dur="500" fill="hold"/>
+                              <p:tgtEl>
+                                <p:spTgt spid="203"/>
+                              </p:tgtEl>
+                            </p:cBhvr>
+                          </p:animEffect>
+                        </p:childTnLst>
+                      </p:cTn>
+                    </p:par>
+                    <p:par>
+                      <p:cTn id="205" presetID="10" presetClass="entr" presetSubtype="0" fill="hold" grpId="0" nodeType="clickEffect">
                         <p:stCondLst>
                           <p:cond delay="650"/>
                         </p:stCondLst>
                         <p:childTnLst>
                           <p:animEffect transition="in" filter="fade">
                             <p:cBhvr>
-                              <p:cTn id="202" dur="700" fill="hold"/>
-                              <p:tgtEl>
-                                <p:spTgt spid="201"/>
-                              </p:tgtEl>
-                            </p:cBhvr>
-                          </p:animEffect>
-                        </p:childTnLst>
-                      </p:cTn>
-                    </p:par>
-                    <p:par>
-                      <p:cTn id="203" presetID="22" presetClass="entr" presetSubtype="0" fill="hold" grpId="0" nodeType="clickEffect">
+                              <p:cTn id="206" dur="700" fill="hold"/>
+                              <p:tgtEl>
+                                <p:spTgt spid="205"/>
+                              </p:tgtEl>
+                            </p:cBhvr>
+                          </p:animEffect>
+                        </p:childTnLst>
+                      </p:cTn>
+                    </p:par>
+                    <p:par>
+                      <p:cTn id="207" presetID="22" presetClass="entr" presetSubtype="0" fill="hold" grpId="0" nodeType="clickEffect">
                         <p:stCondLst>
                           <p:cond delay="650"/>
                         </p:stCondLst>
                         <p:childTnLst>
                           <p:animEffect transition="in" filter="zoom">
                             <p:cBhvr>
-                              <p:cTn id="204" dur="500" fill="hold"/>
-                              <p:tgtEl>
-                                <p:spTgt spid="203"/>
-                              </p:tgtEl>
-                            </p:cBhvr>
-                          </p:animEffect>
-                        </p:childTnLst>
-                      </p:cTn>
-                    </p:par>
-                    <p:par>
-                      <p:cTn id="205" presetID="22" presetClass="entr" presetSubtype="0" fill="hold" grpId="0" nodeType="clickEffect">
+                              <p:cTn id="208" dur="500" fill="hold"/>
+                              <p:tgtEl>
+                                <p:spTgt spid="207"/>
+                              </p:tgtEl>
+                            </p:cBhvr>
+                          </p:animEffect>
+                        </p:childTnLst>
+                      </p:cTn>
+                    </p:par>
+                    <p:par>
+                      <p:cTn id="209" presetID="22" presetClass="entr" presetSubtype="0" fill="hold" grpId="0" nodeType="clickEffect">
                         <p:stCondLst>
                           <p:cond delay="650"/>
                         </p:stCondLst>
                         <p:childTnLst>
                           <p:animEffect transition="in" filter="zoom">
                             <p:cBhvr>
-                              <p:cTn id="206" dur="500" fill="hold"/>
-                              <p:tgtEl>
-                                <p:spTgt spid="205"/>
-                              </p:tgtEl>
-                            </p:cBhvr>
-                          </p:animEffect>
-                        </p:childTnLst>
-                      </p:cTn>
-                    </p:par>
-                    <p:par>
-                      <p:cTn id="207" presetID="10" presetClass="entr" presetSubtype="0" fill="hold" grpId="0" nodeType="clickEffect">
+                              <p:cTn id="210" dur="500" fill="hold"/>
+                              <p:tgtEl>
+                                <p:spTgt spid="209"/>
+                              </p:tgtEl>
+                            </p:cBhvr>
+                          </p:animEffect>
+                        </p:childTnLst>
+                      </p:cTn>
+                    </p:par>
+                    <p:par>
+                      <p:cTn id="211" presetID="10" presetClass="entr" presetSubtype="0" fill="hold" grpId="0" nodeType="clickEffect">
                         <p:stCondLst>
                           <p:cond delay="800"/>
                         </p:stCondLst>
                         <p:childTnLst>
                           <p:animEffect transition="in" filter="fade">
                             <p:cBhvr>
-                              <p:cTn id="208" dur="700" fill="hold"/>
-                              <p:tgtEl>
-                                <p:spTgt spid="207"/>
-                              </p:tgtEl>
-                            </p:cBhvr>
-                          </p:animEffect>
-                        </p:childTnLst>
-                      </p:cTn>
-                    </p:par>
-                    <p:par>
-                      <p:cTn id="209" presetID="22" presetClass="entr" presetSubtype="0" fill="hold" grpId="0" nodeType="clickEffect">
+                              <p:cTn id="212" dur="700" fill="hold"/>
+                              <p:tgtEl>
+                                <p:spTgt spid="211"/>
+                              </p:tgtEl>
+                            </p:cBhvr>
+                          </p:animEffect>
+                        </p:childTnLst>
+                      </p:cTn>
+                    </p:par>
+                    <p:par>
+                      <p:cTn id="213" presetID="22" presetClass="entr" presetSubtype="0" fill="hold" grpId="0" nodeType="clickEffect">
                         <p:stCondLst>
                           <p:cond delay="800"/>
                         </p:stCondLst>
                         <p:childTnLst>
                           <p:animEffect transition="in" filter="zoom">
                             <p:cBhvr>
-                              <p:cTn id="210" dur="500" fill="hold"/>
-                              <p:tgtEl>
-                                <p:spTgt spid="209"/>
-                              </p:tgtEl>
-                            </p:cBhvr>
-                          </p:animEffect>
-                        </p:childTnLst>
-                      </p:cTn>
-                    </p:par>
-                    <p:par>
-                      <p:cTn id="211" presetID="22" presetClass="entr" presetSubtype="0" fill="hold" grpId="0" nodeType="clickEffect">
+                              <p:cTn id="214" dur="500" fill="hold"/>
+                              <p:tgtEl>
+                                <p:spTgt spid="213"/>
+                              </p:tgtEl>
+                            </p:cBhvr>
+                          </p:animEffect>
+                        </p:childTnLst>
+                      </p:cTn>
+                    </p:par>
+                    <p:par>
+                      <p:cTn id="215" presetID="22" presetClass="entr" presetSubtype="0" fill="hold" grpId="0" nodeType="clickEffect">
                         <p:stCondLst>
                           <p:cond delay="800"/>
                         </p:stCondLst>
                         <p:childTnLst>
                           <p:animEffect transition="in" filter="zoom">
                             <p:cBhvr>
-                              <p:cTn id="212" dur="500" fill="hold"/>
-                              <p:tgtEl>
-                                <p:spTgt spid="211"/>
-                              </p:tgtEl>
-                            </p:cBhvr>
-                          </p:animEffect>
-                        </p:childTnLst>
-                      </p:cTn>
-                    </p:par>
-                    <p:par>
-                      <p:cTn id="213" presetID="10" presetClass="entr" presetSubtype="0" fill="hold" grpId="0" nodeType="clickEffect">
+                              <p:cTn id="216" dur="500" fill="hold"/>
+                              <p:tgtEl>
+                                <p:spTgt spid="215"/>
+                              </p:tgtEl>
+                            </p:cBhvr>
+                          </p:animEffect>
+                        </p:childTnLst>
+                      </p:cTn>
+                    </p:par>
+                    <p:par>
+                      <p:cTn id="217" presetID="10" presetClass="entr" presetSubtype="0" fill="hold" grpId="0" nodeType="clickEffect">
                         <p:stCondLst>
                           <p:cond delay="950"/>
                         </p:stCondLst>
                         <p:childTnLst>
                           <p:animEffect transition="in" filter="fade">
                             <p:cBhvr>
-                              <p:cTn id="214" dur="700" fill="hold"/>
-                              <p:tgtEl>
-                                <p:spTgt spid="213"/>
-                              </p:tgtEl>
-                            </p:cBhvr>
-                          </p:animEffect>
-                        </p:childTnLst>
-                      </p:cTn>
-                    </p:par>
-                    <p:par>
-                      <p:cTn id="215" presetID="10" presetClass="entr" presetSubtype="0" fill="hold" grpId="0" nodeType="clickEffect">
+                              <p:cTn id="218" dur="700" fill="hold"/>
+                              <p:tgtEl>
+                                <p:spTgt spid="217"/>
+                              </p:tgtEl>
+                            </p:cBhvr>
+                          </p:animEffect>
+                        </p:childTnLst>
+                      </p:cTn>
+                    </p:par>
+                    <p:par>
+                      <p:cTn id="219" presetID="10" presetClass="entr" presetSubtype="0" fill="hold" grpId="0" nodeType="clickEffect">
                         <p:stCondLst>
                           <p:cond delay="1000"/>
                         </p:stCondLst>
                         <p:childTnLst>
                           <p:animEffect transition="in" filter="fade">
                             <p:cBhvr>
-                              <p:cTn id="216" dur="700" fill="hold"/>
-                              <p:tgtEl>
-                                <p:spTgt spid="215"/>
-                              </p:tgtEl>
-                            </p:cBhvr>
-                          </p:animEffect>
-                        </p:childTnLst>
-                      </p:cTn>
-                    </p:par>
-                    <p:par>
-                      <p:cTn id="217" presetID="2" presetClass="entr" presetSubtype="8" fill="hold" grpId="0" nodeType="clickEffect">
+                              <p:cTn id="220" dur="700" fill="hold"/>
+                              <p:tgtEl>
+                                <p:spTgt spid="219"/>
+                              </p:tgtEl>
+                            </p:cBhvr>
+                          </p:animEffect>
+                        </p:childTnLst>
+                      </p:cTn>
+                    </p:par>
+                    <p:par>
+                      <p:cTn id="221" presetID="2" presetClass="entr" presetSubtype="8" fill="hold" grpId="0" nodeType="clickEffect">
                         <p:stCondLst>
                           <p:cond delay="1100"/>
                         </p:stCondLst>
                         <p:childTnLst>
                           <p:animEffect transition="in" filter="fly">
                             <p:cBhvr>
-                              <p:cTn id="218" dur="600" fill="hold"/>
-                              <p:tgtEl>
-                                <p:spTgt spid="217"/>
-                              </p:tgtEl>
-                            </p:cBhvr>
-                          </p:animEffect>
-                        </p:childTnLst>
-                      </p:cTn>
-                    </p:par>
-                    <p:par>
-                      <p:cTn id="219" presetID="10" presetClass="entr" presetSubtype="0" fill="hold" grpId="0" nodeType="clickEffect">
+                              <p:cTn id="222" dur="600" fill="hold"/>
+                              <p:tgtEl>
+                                <p:spTgt spid="221"/>
+                              </p:tgtEl>
+                            </p:cBhvr>
+                          </p:animEffect>
+                        </p:childTnLst>
+                      </p:cTn>
+                    </p:par>
+                    <p:par>
+                      <p:cTn id="223" presetID="10" presetClass="entr" presetSubtype="0" fill="hold" grpId="0" nodeType="clickEffect">
                         <p:stCondLst>
                           <p:cond delay="1200"/>
                         </p:stCondLst>
                         <p:childTnLst>
                           <p:animEffect transition="in" filter="fade">
                             <p:cBhvr>
-                              <p:cTn id="220" dur="700" fill="hold"/>
-                              <p:tgtEl>
-                                <p:spTgt spid="219"/>
-                              </p:tgtEl>
-                            </p:cBhvr>
-                          </p:animEffect>
-                        </p:childTnLst>
-                      </p:cTn>
-                    </p:par>
-                    <p:par>
-                      <p:cTn id="221" presetID="10" presetClass="entr" presetSubtype="0" fill="hold" grpId="0" nodeType="clickEffect">
+                              <p:cTn id="224" dur="700" fill="hold"/>
+                              <p:tgtEl>
+                                <p:spTgt spid="223"/>
+                              </p:tgtEl>
+                            </p:cBhvr>
+                          </p:animEffect>
+                        </p:childTnLst>
+                      </p:cTn>
+                    </p:par>
+                    <p:par>
+                      <p:cTn id="225" presetID="10" presetClass="entr" presetSubtype="0" fill="hold" grpId="0" nodeType="clickEffect">
                         <p:stCondLst>
                           <p:cond delay="1300"/>
                         </p:stCondLst>
                         <p:childTnLst>
                           <p:animEffect transition="in" filter="fade">
                             <p:cBhvr>
-                              <p:cTn id="222" dur="700" fill="hold"/>
-                              <p:tgtEl>
-                                <p:spTgt spid="221"/>
-                              </p:tgtEl>
-                            </p:cBhvr>
-                          </p:animEffect>
-                        </p:childTnLst>
-                      </p:cTn>
-                    </p:par>
-                    <p:par>
-                      <p:cTn id="223" presetID="10" presetClass="entr" presetSubtype="0" fill="hold" grpId="0" nodeType="clickEffect">
+                              <p:cTn id="226" dur="700" fill="hold"/>
+                              <p:tgtEl>
+                                <p:spTgt spid="225"/>
+                              </p:tgtEl>
+                            </p:cBhvr>
+                          </p:animEffect>
+                        </p:childTnLst>
+                      </p:cTn>
+                    </p:par>
+                    <p:par>
+                      <p:cTn id="227" presetID="10" presetClass="entr" presetSubtype="0" fill="hold" grpId="0" nodeType="clickEffect">
                         <p:stCondLst>
                           <p:cond delay="1400"/>
                         </p:stCondLst>
                         <p:childTnLst>
                           <p:animEffect transition="in" filter="fade">
                             <p:cBhvr>
-                              <p:cTn id="224" dur="700" fill="hold"/>
-                              <p:tgtEl>
-                                <p:spTgt spid="223"/>
-                              </p:tgtEl>
-                            </p:cBhvr>
-                          </p:animEffect>
-                        </p:childTnLst>
-                      </p:cTn>
-                    </p:par>
-                    <p:par>
-                      <p:cTn id="225" presetID="10" presetClass="entr" presetSubtype="0" fill="hold" grpId="0" nodeType="clickEffect">
+                              <p:cTn id="228" dur="700" fill="hold"/>
+                              <p:tgtEl>
+                                <p:spTgt spid="227"/>
+                              </p:tgtEl>
+                            </p:cBhvr>
+                          </p:animEffect>
+                        </p:childTnLst>
+                      </p:cTn>
+                    </p:par>
+                    <p:par>
+                      <p:cTn id="229" presetID="10" presetClass="entr" presetSubtype="0" fill="hold" grpId="0" nodeType="clickEffect">
                         <p:stCondLst>
                           <p:cond delay="1500"/>
                         </p:stCondLst>
                         <p:childTnLst>
                           <p:animEffect transition="in" filter="fade">
                             <p:cBhvr>
-                              <p:cTn id="226" dur="700" fill="hold"/>
-                              <p:tgtEl>
-                                <p:spTgt spid="225"/>
-                              </p:tgtEl>
-                            </p:cBhvr>
-                          </p:animEffect>
-                        </p:childTnLst>
-                      </p:cTn>
-                    </p:par>
-                    <p:par>
-                      <p:cTn id="227" presetID="10" presetClass="entr" presetSubtype="0" fill="hold" grpId="0" nodeType="clickEffect">
+                              <p:cTn id="230" dur="700" fill="hold"/>
+                              <p:tgtEl>
+                                <p:spTgt spid="229"/>
+                              </p:tgtEl>
+                            </p:cBhvr>
+                          </p:animEffect>
+                        </p:childTnLst>
+                      </p:cTn>
+                    </p:par>
+                    <p:par>
+                      <p:cTn id="231" presetID="10" presetClass="entr" presetSubtype="0" fill="hold" grpId="0" nodeType="clickEffect">
                         <p:stCondLst>
                           <p:cond delay="1600"/>
                         </p:stCondLst>
                         <p:childTnLst>
                           <p:animEffect transition="in" filter="fade">
                             <p:cBhvr>
-                              <p:cTn id="228" dur="700" fill="hold"/>
-                              <p:tgtEl>
-                                <p:spTgt spid="227"/>
-                              </p:tgtEl>
-                            </p:cBhvr>
-                          </p:animEffect>
-                        </p:childTnLst>
-                      </p:cTn>
-                    </p:par>
-                    <p:par>
-                      <p:cTn id="229" presetID="2" presetClass="entr" presetSubtype="8" fill="hold" grpId="0" nodeType="clickEffect">
+                              <p:cTn id="232" dur="700" fill="hold"/>
+                              <p:tgtEl>
+                                <p:spTgt spid="231"/>
+                              </p:tgtEl>
+                            </p:cBhvr>
+                          </p:animEffect>
+                        </p:childTnLst>
+                      </p:cTn>
+                    </p:par>
+                    <p:par>
+                      <p:cTn id="233" presetID="2" presetClass="entr" presetSubtype="8" fill="hold" grpId="0" nodeType="clickEffect">
                         <p:stCondLst>
                           <p:cond delay="1100"/>
                         </p:stCondLst>
                         <p:childTnLst>
                           <p:animEffect transition="in" filter="fly">
                             <p:cBhvr>
-                              <p:cTn id="230" dur="600" fill="hold"/>
-                              <p:tgtEl>
-                                <p:spTgt spid="229"/>
-                              </p:tgtEl>
-                            </p:cBhvr>
-                          </p:animEffect>
-                        </p:childTnLst>
-                      </p:cTn>
-                    </p:par>
-                    <p:par>
-                      <p:cTn id="231" presetID="10" presetClass="entr" presetSubtype="0" fill="hold" grpId="0" nodeType="clickEffect">
+                              <p:cTn id="234" dur="600" fill="hold"/>
+                              <p:tgtEl>
+                                <p:spTgt spid="233"/>
+                              </p:tgtEl>
+                            </p:cBhvr>
+                          </p:animEffect>
+                        </p:childTnLst>
+                      </p:cTn>
+                    </p:par>
+                    <p:par>
+                      <p:cTn id="235" presetID="10" presetClass="entr" presetSubtype="0" fill="hold" grpId="0" nodeType="clickEffect">
                         <p:stCondLst>
                           <p:cond delay="1200"/>
                         </p:stCondLst>
                         <p:childTnLst>
                           <p:animEffect transition="in" filter="fade">
                             <p:cBhvr>
-                              <p:cTn id="232" dur="700" fill="hold"/>
-                              <p:tgtEl>
-                                <p:spTgt spid="231"/>
-                              </p:tgtEl>
-                            </p:cBhvr>
-                          </p:animEffect>
-                        </p:childTnLst>
-                      </p:cTn>
-                    </p:par>
-                    <p:par>
-                      <p:cTn id="233" presetID="10" presetClass="entr" presetSubtype="0" fill="hold" grpId="0" nodeType="clickEffect">
+                              <p:cTn id="236" dur="700" fill="hold"/>
+                              <p:tgtEl>
+                                <p:spTgt spid="235"/>
+                              </p:tgtEl>
+                            </p:cBhvr>
+                          </p:animEffect>
+                        </p:childTnLst>
+                      </p:cTn>
+                    </p:par>
+                    <p:par>
+                      <p:cTn id="237" presetID="10" presetClass="entr" presetSubtype="0" fill="hold" grpId="0" nodeType="clickEffect">
                         <p:stCondLst>
                           <p:cond delay="1300"/>
                         </p:stCondLst>
                         <p:childTnLst>
                           <p:animEffect transition="in" filter="fade">
                             <p:cBhvr>
-                              <p:cTn id="234" dur="700" fill="hold"/>
-                              <p:tgtEl>
-                                <p:spTgt spid="233"/>
-                              </p:tgtEl>
-                            </p:cBhvr>
-                          </p:animEffect>
-                        </p:childTnLst>
-                      </p:cTn>
-                    </p:par>
-                    <p:par>
-                      <p:cTn id="235" presetID="10" presetClass="entr" presetSubtype="0" fill="hold" grpId="0" nodeType="clickEffect">
+                              <p:cTn id="238" dur="700" fill="hold"/>
+                              <p:tgtEl>
+                                <p:spTgt spid="237"/>
+                              </p:tgtEl>
+                            </p:cBhvr>
+                          </p:animEffect>
+                        </p:childTnLst>
+                      </p:cTn>
+                    </p:par>
+                    <p:par>
+                      <p:cTn id="239" presetID="10" presetClass="entr" presetSubtype="0" fill="hold" grpId="0" nodeType="clickEffect">
                         <p:stCondLst>
                           <p:cond delay="1400"/>
                         </p:stCondLst>
                         <p:childTnLst>
                           <p:animEffect transition="in" filter="fade">
                             <p:cBhvr>
-                              <p:cTn id="236" dur="700" fill="hold"/>
-                              <p:tgtEl>
-                                <p:spTgt spid="235"/>
-                              </p:tgtEl>
-                            </p:cBhvr>
-                          </p:animEffect>
-                        </p:childTnLst>
-                      </p:cTn>
-                    </p:par>
-                    <p:par>
-                      <p:cTn id="237" presetID="10" presetClass="entr" presetSubtype="0" fill="hold" grpId="0" nodeType="clickEffect">
+                              <p:cTn id="240" dur="700" fill="hold"/>
+                              <p:tgtEl>
+                                <p:spTgt spid="239"/>
+                              </p:tgtEl>
+                            </p:cBhvr>
+                          </p:animEffect>
+                        </p:childTnLst>
+                      </p:cTn>
+                    </p:par>
+                    <p:par>
+                      <p:cTn id="241" presetID="10" presetClass="entr" presetSubtype="0" fill="hold" grpId="0" nodeType="clickEffect">
                         <p:stCondLst>
                           <p:cond delay="1500"/>
                         </p:stCondLst>
                         <p:childTnLst>
                           <p:animEffect transition="in" filter="fade">
                             <p:cBhvr>
-                              <p:cTn id="238" dur="700" fill="hold"/>
-                              <p:tgtEl>
-                                <p:spTgt spid="237"/>
-                              </p:tgtEl>
-                            </p:cBhvr>
-                          </p:animEffect>
-                        </p:childTnLst>
-                      </p:cTn>
-                    </p:par>
-                    <p:par>
-                      <p:cTn id="239" presetID="10" presetClass="entr" presetSubtype="0" fill="hold" grpId="0" nodeType="clickEffect">
+                              <p:cTn id="242" dur="700" fill="hold"/>
+                              <p:tgtEl>
+                                <p:spTgt spid="241"/>
+                              </p:tgtEl>
+                            </p:cBhvr>
+                          </p:animEffect>
+                        </p:childTnLst>
+                      </p:cTn>
+                    </p:par>
+                    <p:par>
+                      <p:cTn id="243" presetID="10" presetClass="entr" presetSubtype="0" fill="hold" grpId="0" nodeType="clickEffect">
                         <p:stCondLst>
                           <p:cond delay="1600"/>
                         </p:stCondLst>
                         <p:childTnLst>
                           <p:animEffect transition="in" filter="fade">
                             <p:cBhvr>
-                              <p:cTn id="240" dur="700" fill="hold"/>
-                              <p:tgtEl>
-                                <p:spTgt spid="239"/>
-                              </p:tgtEl>
-                            </p:cBhvr>
-                          </p:animEffect>
-                        </p:childTnLst>
-                      </p:cTn>
-                    </p:par>
-                    <p:par>
-                      <p:cTn id="241" presetID="22" presetClass="entr" presetSubtype="0" fill="hold" grpId="0" nodeType="clickEffect">
+                              <p:cTn id="244" dur="700" fill="hold"/>
+                              <p:tgtEl>
+                                <p:spTgt spid="243"/>
+                              </p:tgtEl>
+                            </p:cBhvr>
+                          </p:animEffect>
+                        </p:childTnLst>
+                      </p:cTn>
+                    </p:par>
+                    <p:par>
+                      <p:cTn id="245" presetID="22" presetClass="entr" presetSubtype="0" fill="hold" grpId="0" nodeType="clickEffect">
                         <p:stCondLst>
                           <p:cond delay="1150"/>
                         </p:stCondLst>
                         <p:childTnLst>
                           <p:animEffect transition="in" filter="zoom">
                             <p:cBhvr>
-                              <p:cTn id="242" dur="500" fill="hold"/>
-                              <p:tgtEl>
-                                <p:spTgt spid="241"/>
+                              <p:cTn id="246" dur="500" fill="hold"/>
+                              <p:tgtEl>
+                                <p:spTgt spid="245"/>
                               </p:tgtEl>
                             </p:cBhvr>
                           </p:animEffect>
@@ -16602,7 +16685,7 @@
       </p:sp>
       <p:sp>
         <p:nvSpPr>
-          <p:cNvPr id="245" name="TextBox 244"/>
+          <p:cNvPr id="249" name="TextBox 248"/>
           <p:cNvSpPr txBox="1"/>
           <p:nvPr/>
         </p:nvSpPr>
@@ -16637,7 +16720,7 @@
       </p:sp>
       <p:sp>
         <p:nvSpPr>
-          <p:cNvPr id="247" name="Rectangle 246"/>
+          <p:cNvPr id="251" name="Rectangle 250"/>
           <p:cNvSpPr/>
           <p:nvPr/>
         </p:nvSpPr>
@@ -16682,7 +16765,7 @@
       </p:sp>
       <p:sp>
         <p:nvSpPr>
-          <p:cNvPr id="249" name="TextBox 248"/>
+          <p:cNvPr id="253" name="TextBox 252"/>
           <p:cNvSpPr txBox="1"/>
           <p:nvPr/>
         </p:nvSpPr>
@@ -16717,7 +16800,7 @@
       </p:sp>
       <p:sp>
         <p:nvSpPr>
-          <p:cNvPr id="251" name="TextBox 250"/>
+          <p:cNvPr id="255" name="TextBox 254"/>
           <p:cNvSpPr txBox="1"/>
           <p:nvPr/>
         </p:nvSpPr>
@@ -16752,7 +16835,7 @@
       </p:sp>
       <p:sp>
         <p:nvSpPr>
-          <p:cNvPr id="253" name="TextBox 252"/>
+          <p:cNvPr id="257" name="TextBox 256"/>
           <p:cNvSpPr txBox="1"/>
           <p:nvPr/>
         </p:nvSpPr>
@@ -16788,7 +16871,7 @@
       </p:sp>
       <p:sp>
         <p:nvSpPr>
-          <p:cNvPr id="255" name="Rectangle 254"/>
+          <p:cNvPr id="259" name="Rectangle 258"/>
           <p:cNvSpPr/>
           <p:nvPr/>
         </p:nvSpPr>
@@ -16833,7 +16916,7 @@
       </p:sp>
       <p:sp>
         <p:nvSpPr>
-          <p:cNvPr id="257" name="TextBox 256"/>
+          <p:cNvPr id="261" name="TextBox 260"/>
           <p:cNvSpPr txBox="1"/>
           <p:nvPr/>
         </p:nvSpPr>
@@ -16868,7 +16951,7 @@
       </p:sp>
       <p:sp>
         <p:nvSpPr>
-          <p:cNvPr id="259" name="TextBox 258"/>
+          <p:cNvPr id="263" name="TextBox 262"/>
           <p:cNvSpPr txBox="1"/>
           <p:nvPr/>
         </p:nvSpPr>
@@ -16903,7 +16986,7 @@
       </p:sp>
       <p:sp>
         <p:nvSpPr>
-          <p:cNvPr id="261" name="TextBox 260"/>
+          <p:cNvPr id="265" name="TextBox 264"/>
           <p:cNvSpPr txBox="1"/>
           <p:nvPr/>
         </p:nvSpPr>
@@ -16939,7 +17022,7 @@
       </p:sp>
       <p:sp>
         <p:nvSpPr>
-          <p:cNvPr id="263" name="Rectangle 262"/>
+          <p:cNvPr id="267" name="Rectangle 266"/>
           <p:cNvSpPr/>
           <p:nvPr/>
         </p:nvSpPr>
@@ -16984,7 +17067,7 @@
       </p:sp>
       <p:sp>
         <p:nvSpPr>
-          <p:cNvPr id="265" name="TextBox 264"/>
+          <p:cNvPr id="269" name="TextBox 268"/>
           <p:cNvSpPr txBox="1"/>
           <p:nvPr/>
         </p:nvSpPr>
@@ -17019,7 +17102,7 @@
       </p:sp>
       <p:sp>
         <p:nvSpPr>
-          <p:cNvPr id="267" name="TextBox 266"/>
+          <p:cNvPr id="271" name="TextBox 270"/>
           <p:cNvSpPr txBox="1"/>
           <p:nvPr/>
         </p:nvSpPr>
@@ -17054,7 +17137,7 @@
       </p:sp>
       <p:sp>
         <p:nvSpPr>
-          <p:cNvPr id="269" name="TextBox 268"/>
+          <p:cNvPr id="273" name="TextBox 272"/>
           <p:cNvSpPr txBox="1"/>
           <p:nvPr/>
         </p:nvSpPr>
@@ -17090,7 +17173,7 @@
       </p:sp>
       <p:sp>
         <p:nvSpPr>
-          <p:cNvPr id="271" name="Rectangle 270"/>
+          <p:cNvPr id="275" name="Rectangle 274"/>
           <p:cNvSpPr/>
           <p:nvPr/>
         </p:nvSpPr>
@@ -17135,7 +17218,7 @@
       </p:sp>
       <p:sp>
         <p:nvSpPr>
-          <p:cNvPr id="273" name="TextBox 272"/>
+          <p:cNvPr id="277" name="TextBox 276"/>
           <p:cNvSpPr txBox="1"/>
           <p:nvPr/>
         </p:nvSpPr>
@@ -17170,7 +17253,7 @@
       </p:sp>
       <p:sp>
         <p:nvSpPr>
-          <p:cNvPr id="275" name="TextBox 274"/>
+          <p:cNvPr id="279" name="TextBox 278"/>
           <p:cNvSpPr txBox="1"/>
           <p:nvPr/>
         </p:nvSpPr>
@@ -17205,7 +17288,7 @@
       </p:sp>
       <p:sp>
         <p:nvSpPr>
-          <p:cNvPr id="277" name="TextBox 276"/>
+          <p:cNvPr id="281" name="TextBox 280"/>
           <p:cNvSpPr txBox="1"/>
           <p:nvPr/>
         </p:nvSpPr>
@@ -17249,14 +17332,14 @@
                 <p:cTn id="2" dur="indefinite" nodeType="mainSeq">
                   <p:childTnLst>
                     <p:par>
-                      <p:cTn id="243" presetID="2" presetClass="entr" presetSubtype="8" fill="hold" grpId="0" nodeType="clickEffect">
+                      <p:cTn id="247" presetID="2" presetClass="entr" presetSubtype="8" fill="hold" grpId="0" nodeType="clickEffect">
                         <p:stCondLst>
                           <p:cond delay="0"/>
                         </p:stCondLst>
                         <p:childTnLst>
                           <p:animEffect transition="in" filter="fly">
                             <p:cBhvr>
-                              <p:cTn id="244" dur="600" fill="hold"/>
+                              <p:cTn id="248" dur="600" fill="hold"/>
                               <p:tgtEl>
                                 <p:spTgt spid="4"/>
                               </p:tgtEl>
@@ -17266,288 +17349,288 @@
                       </p:cTn>
                     </p:par>
                     <p:par>
-                      <p:cTn id="245" presetID="10" presetClass="entr" presetSubtype="0" fill="hold" grpId="0" nodeType="clickEffect">
+                      <p:cTn id="249" presetID="10" presetClass="entr" presetSubtype="0" fill="hold" grpId="0" nodeType="clickEffect">
                         <p:stCondLst>
                           <p:cond delay="200"/>
                         </p:stCondLst>
                         <p:childTnLst>
                           <p:animEffect transition="in" filter="fade">
                             <p:cBhvr>
-                              <p:cTn id="246" dur="700" fill="hold"/>
-                              <p:tgtEl>
-                                <p:spTgt spid="245"/>
-                              </p:tgtEl>
-                            </p:cBhvr>
-                          </p:animEffect>
-                        </p:childTnLst>
-                      </p:cTn>
-                    </p:par>
-                    <p:par>
-                      <p:cTn id="247" presetID="2" presetClass="entr" presetSubtype="8" fill="hold" grpId="0" nodeType="clickEffect">
+                              <p:cTn id="250" dur="700" fill="hold"/>
+                              <p:tgtEl>
+                                <p:spTgt spid="249"/>
+                              </p:tgtEl>
+                            </p:cBhvr>
+                          </p:animEffect>
+                        </p:childTnLst>
+                      </p:cTn>
+                    </p:par>
+                    <p:par>
+                      <p:cTn id="251" presetID="2" presetClass="entr" presetSubtype="8" fill="hold" grpId="0" nodeType="clickEffect">
                         <p:stCondLst>
                           <p:cond delay="300"/>
                         </p:stCondLst>
                         <p:childTnLst>
                           <p:animEffect transition="in" filter="fly">
                             <p:cBhvr>
-                              <p:cTn id="248" dur="600" fill="hold"/>
-                              <p:tgtEl>
-                                <p:spTgt spid="247"/>
-                              </p:tgtEl>
-                            </p:cBhvr>
-                          </p:animEffect>
-                        </p:childTnLst>
-                      </p:cTn>
-                    </p:par>
-                    <p:par>
-                      <p:cTn id="249" presetID="22" presetClass="entr" presetSubtype="0" fill="hold" grpId="0" nodeType="clickEffect">
+                              <p:cTn id="252" dur="600" fill="hold"/>
+                              <p:tgtEl>
+                                <p:spTgt spid="251"/>
+                              </p:tgtEl>
+                            </p:cBhvr>
+                          </p:animEffect>
+                        </p:childTnLst>
+                      </p:cTn>
+                    </p:par>
+                    <p:par>
+                      <p:cTn id="253" presetID="22" presetClass="entr" presetSubtype="0" fill="hold" grpId="0" nodeType="clickEffect">
                         <p:stCondLst>
                           <p:cond delay="400"/>
                         </p:stCondLst>
                         <p:childTnLst>
                           <p:animEffect transition="in" filter="zoom">
                             <p:cBhvr>
-                              <p:cTn id="250" dur="500" fill="hold"/>
-                              <p:tgtEl>
-                                <p:spTgt spid="249"/>
-                              </p:tgtEl>
-                            </p:cBhvr>
-                          </p:animEffect>
-                        </p:childTnLst>
-                      </p:cTn>
-                    </p:par>
-                    <p:par>
-                      <p:cTn id="251" presetID="10" presetClass="entr" presetSubtype="0" fill="hold" grpId="0" nodeType="clickEffect">
+                              <p:cTn id="254" dur="500" fill="hold"/>
+                              <p:tgtEl>
+                                <p:spTgt spid="253"/>
+                              </p:tgtEl>
+                            </p:cBhvr>
+                          </p:animEffect>
+                        </p:childTnLst>
+                      </p:cTn>
+                    </p:par>
+                    <p:par>
+                      <p:cTn id="255" presetID="10" presetClass="entr" presetSubtype="0" fill="hold" grpId="0" nodeType="clickEffect">
                         <p:stCondLst>
                           <p:cond delay="500"/>
                         </p:stCondLst>
                         <p:childTnLst>
                           <p:animEffect transition="in" filter="fade">
                             <p:cBhvr>
-                              <p:cTn id="252" dur="700" fill="hold"/>
-                              <p:tgtEl>
-                                <p:spTgt spid="251"/>
-                              </p:tgtEl>
-                            </p:cBhvr>
-                          </p:animEffect>
-                        </p:childTnLst>
-                      </p:cTn>
-                    </p:par>
-                    <p:par>
-                      <p:cTn id="253" presetID="10" presetClass="entr" presetSubtype="0" fill="hold" grpId="0" nodeType="clickEffect">
+                              <p:cTn id="256" dur="700" fill="hold"/>
+                              <p:tgtEl>
+                                <p:spTgt spid="255"/>
+                              </p:tgtEl>
+                            </p:cBhvr>
+                          </p:animEffect>
+                        </p:childTnLst>
+                      </p:cTn>
+                    </p:par>
+                    <p:par>
+                      <p:cTn id="257" presetID="10" presetClass="entr" presetSubtype="0" fill="hold" grpId="0" nodeType="clickEffect">
                         <p:stCondLst>
                           <p:cond delay="600"/>
                         </p:stCondLst>
                         <p:childTnLst>
                           <p:animEffect transition="in" filter="fade">
                             <p:cBhvr>
-                              <p:cTn id="254" dur="700" fill="hold"/>
-                              <p:tgtEl>
-                                <p:spTgt spid="253"/>
-                              </p:tgtEl>
-                            </p:cBhvr>
-                          </p:animEffect>
-                        </p:childTnLst>
-                      </p:cTn>
-                    </p:par>
-                    <p:par>
-                      <p:cTn id="255" presetID="2" presetClass="entr" presetSubtype="8" fill="hold" grpId="0" nodeType="clickEffect">
+                              <p:cTn id="258" dur="700" fill="hold"/>
+                              <p:tgtEl>
+                                <p:spTgt spid="257"/>
+                              </p:tgtEl>
+                            </p:cBhvr>
+                          </p:animEffect>
+                        </p:childTnLst>
+                      </p:cTn>
+                    </p:par>
+                    <p:par>
+                      <p:cTn id="259" presetID="2" presetClass="entr" presetSubtype="8" fill="hold" grpId="0" nodeType="clickEffect">
                         <p:stCondLst>
                           <p:cond delay="300"/>
                         </p:stCondLst>
                         <p:childTnLst>
                           <p:animEffect transition="in" filter="fly">
                             <p:cBhvr>
-                              <p:cTn id="256" dur="600" fill="hold"/>
-                              <p:tgtEl>
-                                <p:spTgt spid="255"/>
-                              </p:tgtEl>
-                            </p:cBhvr>
-                          </p:animEffect>
-                        </p:childTnLst>
-                      </p:cTn>
-                    </p:par>
-                    <p:par>
-                      <p:cTn id="257" presetID="22" presetClass="entr" presetSubtype="0" fill="hold" grpId="0" nodeType="clickEffect">
+                              <p:cTn id="260" dur="600" fill="hold"/>
+                              <p:tgtEl>
+                                <p:spTgt spid="259"/>
+                              </p:tgtEl>
+                            </p:cBhvr>
+                          </p:animEffect>
+                        </p:childTnLst>
+                      </p:cTn>
+                    </p:par>
+                    <p:par>
+                      <p:cTn id="261" presetID="22" presetClass="entr" presetSubtype="0" fill="hold" grpId="0" nodeType="clickEffect">
                         <p:stCondLst>
                           <p:cond delay="400"/>
                         </p:stCondLst>
                         <p:childTnLst>
                           <p:animEffect transition="in" filter="zoom">
                             <p:cBhvr>
-                              <p:cTn id="258" dur="500" fill="hold"/>
-                              <p:tgtEl>
-                                <p:spTgt spid="257"/>
-                              </p:tgtEl>
-                            </p:cBhvr>
-                          </p:animEffect>
-                        </p:childTnLst>
-                      </p:cTn>
-                    </p:par>
-                    <p:par>
-                      <p:cTn id="259" presetID="10" presetClass="entr" presetSubtype="0" fill="hold" grpId="0" nodeType="clickEffect">
+                              <p:cTn id="262" dur="500" fill="hold"/>
+                              <p:tgtEl>
+                                <p:spTgt spid="261"/>
+                              </p:tgtEl>
+                            </p:cBhvr>
+                          </p:animEffect>
+                        </p:childTnLst>
+                      </p:cTn>
+                    </p:par>
+                    <p:par>
+                      <p:cTn id="263" presetID="10" presetClass="entr" presetSubtype="0" fill="hold" grpId="0" nodeType="clickEffect">
                         <p:stCondLst>
                           <p:cond delay="500"/>
                         </p:stCondLst>
                         <p:childTnLst>
                           <p:animEffect transition="in" filter="fade">
                             <p:cBhvr>
-                              <p:cTn id="260" dur="700" fill="hold"/>
-                              <p:tgtEl>
-                                <p:spTgt spid="259"/>
-                              </p:tgtEl>
-                            </p:cBhvr>
-                          </p:animEffect>
-                        </p:childTnLst>
-                      </p:cTn>
-                    </p:par>
-                    <p:par>
-                      <p:cTn id="261" presetID="10" presetClass="entr" presetSubtype="0" fill="hold" grpId="0" nodeType="clickEffect">
+                              <p:cTn id="264" dur="700" fill="hold"/>
+                              <p:tgtEl>
+                                <p:spTgt spid="263"/>
+                              </p:tgtEl>
+                            </p:cBhvr>
+                          </p:animEffect>
+                        </p:childTnLst>
+                      </p:cTn>
+                    </p:par>
+                    <p:par>
+                      <p:cTn id="265" presetID="10" presetClass="entr" presetSubtype="0" fill="hold" grpId="0" nodeType="clickEffect">
                         <p:stCondLst>
                           <p:cond delay="600"/>
                         </p:stCondLst>
                         <p:childTnLst>
                           <p:animEffect transition="in" filter="fade">
                             <p:cBhvr>
-                              <p:cTn id="262" dur="700" fill="hold"/>
-                              <p:tgtEl>
-                                <p:spTgt spid="261"/>
-                              </p:tgtEl>
-                            </p:cBhvr>
-                          </p:animEffect>
-                        </p:childTnLst>
-                      </p:cTn>
-                    </p:par>
-                    <p:par>
-                      <p:cTn id="263" presetID="2" presetClass="entr" presetSubtype="8" fill="hold" grpId="0" nodeType="clickEffect">
+                              <p:cTn id="266" dur="700" fill="hold"/>
+                              <p:tgtEl>
+                                <p:spTgt spid="265"/>
+                              </p:tgtEl>
+                            </p:cBhvr>
+                          </p:animEffect>
+                        </p:childTnLst>
+                      </p:cTn>
+                    </p:par>
+                    <p:par>
+                      <p:cTn id="267" presetID="2" presetClass="entr" presetSubtype="8" fill="hold" grpId="0" nodeType="clickEffect">
                         <p:stCondLst>
                           <p:cond delay="300"/>
                         </p:stCondLst>
                         <p:childTnLst>
                           <p:animEffect transition="in" filter="fly">
                             <p:cBhvr>
-                              <p:cTn id="264" dur="600" fill="hold"/>
-                              <p:tgtEl>
-                                <p:spTgt spid="263"/>
-                              </p:tgtEl>
-                            </p:cBhvr>
-                          </p:animEffect>
-                        </p:childTnLst>
-                      </p:cTn>
-                    </p:par>
-                    <p:par>
-                      <p:cTn id="265" presetID="22" presetClass="entr" presetSubtype="0" fill="hold" grpId="0" nodeType="clickEffect">
+                              <p:cTn id="268" dur="600" fill="hold"/>
+                              <p:tgtEl>
+                                <p:spTgt spid="267"/>
+                              </p:tgtEl>
+                            </p:cBhvr>
+                          </p:animEffect>
+                        </p:childTnLst>
+                      </p:cTn>
+                    </p:par>
+                    <p:par>
+                      <p:cTn id="269" presetID="22" presetClass="entr" presetSubtype="0" fill="hold" grpId="0" nodeType="clickEffect">
                         <p:stCondLst>
                           <p:cond delay="400"/>
                         </p:stCondLst>
                         <p:childTnLst>
                           <p:animEffect transition="in" filter="zoom">
                             <p:cBhvr>
-                              <p:cTn id="266" dur="500" fill="hold"/>
-                              <p:tgtEl>
-                                <p:spTgt spid="265"/>
-                              </p:tgtEl>
-                            </p:cBhvr>
-                          </p:animEffect>
-                        </p:childTnLst>
-                      </p:cTn>
-                    </p:par>
-                    <p:par>
-                      <p:cTn id="267" presetID="10" presetClass="entr" presetSubtype="0" fill="hold" grpId="0" nodeType="clickEffect">
+                              <p:cTn id="270" dur="500" fill="hold"/>
+                              <p:tgtEl>
+                                <p:spTgt spid="269"/>
+                              </p:tgtEl>
+                            </p:cBhvr>
+                          </p:animEffect>
+                        </p:childTnLst>
+                      </p:cTn>
+                    </p:par>
+                    <p:par>
+                      <p:cTn id="271" presetID="10" presetClass="entr" presetSubtype="0" fill="hold" grpId="0" nodeType="clickEffect">
                         <p:stCondLst>
                           <p:cond delay="500"/>
                         </p:stCondLst>
                         <p:childTnLst>
                           <p:animEffect transition="in" filter="fade">
                             <p:cBhvr>
-                              <p:cTn id="268" dur="700" fill="hold"/>
-                              <p:tgtEl>
-                                <p:spTgt spid="267"/>
-                              </p:tgtEl>
-                            </p:cBhvr>
-                          </p:animEffect>
-                        </p:childTnLst>
-                      </p:cTn>
-                    </p:par>
-                    <p:par>
-                      <p:cTn id="269" presetID="10" presetClass="entr" presetSubtype="0" fill="hold" grpId="0" nodeType="clickEffect">
+                              <p:cTn id="272" dur="700" fill="hold"/>
+                              <p:tgtEl>
+                                <p:spTgt spid="271"/>
+                              </p:tgtEl>
+                            </p:cBhvr>
+                          </p:animEffect>
+                        </p:childTnLst>
+                      </p:cTn>
+                    </p:par>
+                    <p:par>
+                      <p:cTn id="273" presetID="10" presetClass="entr" presetSubtype="0" fill="hold" grpId="0" nodeType="clickEffect">
                         <p:stCondLst>
                           <p:cond delay="600"/>
                         </p:stCondLst>
                         <p:childTnLst>
                           <p:animEffect transition="in" filter="fade">
                             <p:cBhvr>
-                              <p:cTn id="270" dur="700" fill="hold"/>
-                              <p:tgtEl>
-                                <p:spTgt spid="269"/>
-                              </p:tgtEl>
-                            </p:cBhvr>
-                          </p:animEffect>
-                        </p:childTnLst>
-                      </p:cTn>
-                    </p:par>
-                    <p:par>
-                      <p:cTn id="271" presetID="2" presetClass="entr" presetSubtype="8" fill="hold" grpId="0" nodeType="clickEffect">
+                              <p:cTn id="274" dur="700" fill="hold"/>
+                              <p:tgtEl>
+                                <p:spTgt spid="273"/>
+                              </p:tgtEl>
+                            </p:cBhvr>
+                          </p:animEffect>
+                        </p:childTnLst>
+                      </p:cTn>
+                    </p:par>
+                    <p:par>
+                      <p:cTn id="275" presetID="2" presetClass="entr" presetSubtype="8" fill="hold" grpId="0" nodeType="clickEffect">
                         <p:stCondLst>
                           <p:cond delay="300"/>
                         </p:stCondLst>
                         <p:childTnLst>
                           <p:animEffect transition="in" filter="fly">
                             <p:cBhvr>
-                              <p:cTn id="272" dur="600" fill="hold"/>
-                              <p:tgtEl>
-                                <p:spTgt spid="271"/>
-                              </p:tgtEl>
-                            </p:cBhvr>
-                          </p:animEffect>
-                        </p:childTnLst>
-                      </p:cTn>
-                    </p:par>
-                    <p:par>
-                      <p:cTn id="273" presetID="22" presetClass="entr" presetSubtype="0" fill="hold" grpId="0" nodeType="clickEffect">
+                              <p:cTn id="276" dur="600" fill="hold"/>
+                              <p:tgtEl>
+                                <p:spTgt spid="275"/>
+                              </p:tgtEl>
+                            </p:cBhvr>
+                          </p:animEffect>
+                        </p:childTnLst>
+                      </p:cTn>
+                    </p:par>
+                    <p:par>
+                      <p:cTn id="277" presetID="22" presetClass="entr" presetSubtype="0" fill="hold" grpId="0" nodeType="clickEffect">
                         <p:stCondLst>
                           <p:cond delay="400"/>
                         </p:stCondLst>
                         <p:childTnLst>
                           <p:animEffect transition="in" filter="zoom">
                             <p:cBhvr>
-                              <p:cTn id="274" dur="500" fill="hold"/>
-                              <p:tgtEl>
-                                <p:spTgt spid="273"/>
-                              </p:tgtEl>
-                            </p:cBhvr>
-                          </p:animEffect>
-                        </p:childTnLst>
-                      </p:cTn>
-                    </p:par>
-                    <p:par>
-                      <p:cTn id="275" presetID="10" presetClass="entr" presetSubtype="0" fill="hold" grpId="0" nodeType="clickEffect">
+                              <p:cTn id="278" dur="500" fill="hold"/>
+                              <p:tgtEl>
+                                <p:spTgt spid="277"/>
+                              </p:tgtEl>
+                            </p:cBhvr>
+                          </p:animEffect>
+                        </p:childTnLst>
+                      </p:cTn>
+                    </p:par>
+                    <p:par>
+                      <p:cTn id="279" presetID="10" presetClass="entr" presetSubtype="0" fill="hold" grpId="0" nodeType="clickEffect">
                         <p:stCondLst>
                           <p:cond delay="500"/>
                         </p:stCondLst>
                         <p:childTnLst>
                           <p:animEffect transition="in" filter="fade">
                             <p:cBhvr>
-                              <p:cTn id="276" dur="700" fill="hold"/>
-                              <p:tgtEl>
-                                <p:spTgt spid="275"/>
-                              </p:tgtEl>
-                            </p:cBhvr>
-                          </p:animEffect>
-                        </p:childTnLst>
-                      </p:cTn>
-                    </p:par>
-                    <p:par>
-                      <p:cTn id="277" presetID="10" presetClass="entr" presetSubtype="0" fill="hold" grpId="0" nodeType="clickEffect">
+                              <p:cTn id="280" dur="700" fill="hold"/>
+                              <p:tgtEl>
+                                <p:spTgt spid="279"/>
+                              </p:tgtEl>
+                            </p:cBhvr>
+                          </p:animEffect>
+                        </p:childTnLst>
+                      </p:cTn>
+                    </p:par>
+                    <p:par>
+                      <p:cTn id="281" presetID="10" presetClass="entr" presetSubtype="0" fill="hold" grpId="0" nodeType="clickEffect">
                         <p:stCondLst>
                           <p:cond delay="600"/>
                         </p:stCondLst>
                         <p:childTnLst>
                           <p:animEffect transition="in" filter="fade">
                             <p:cBhvr>
-                              <p:cTn id="278" dur="700" fill="hold"/>
-                              <p:tgtEl>
-                                <p:spTgt spid="277"/>
+                              <p:cTn id="282" dur="700" fill="hold"/>
+                              <p:tgtEl>
+                                <p:spTgt spid="281"/>
                               </p:tgtEl>
                             </p:cBhvr>
                           </p:animEffect>
@@ -17689,7 +17772,7 @@
       </p:sp>
       <p:sp>
         <p:nvSpPr>
-          <p:cNvPr id="281" name="Rectangle 280"/>
+          <p:cNvPr id="285" name="Rectangle 284"/>
           <p:cNvSpPr/>
           <p:nvPr/>
         </p:nvSpPr>
@@ -17732,7 +17815,7 @@
       </p:sp>
       <p:sp>
         <p:nvSpPr>
-          <p:cNvPr id="283" name="Rectangle 282"/>
+          <p:cNvPr id="287" name="Rectangle 286"/>
           <p:cNvSpPr/>
           <p:nvPr/>
         </p:nvSpPr>
@@ -17775,7 +17858,7 @@
       </p:sp>
       <p:sp>
         <p:nvSpPr>
-          <p:cNvPr id="285" name="TextBox 284"/>
+          <p:cNvPr id="289" name="TextBox 288"/>
           <p:cNvSpPr txBox="1"/>
           <p:nvPr/>
         </p:nvSpPr>
@@ -17810,7 +17893,7 @@
       </p:sp>
       <p:sp>
         <p:nvSpPr>
-          <p:cNvPr id="287" name="TextBox 286"/>
+          <p:cNvPr id="291" name="TextBox 290"/>
           <p:cNvSpPr txBox="1"/>
           <p:nvPr/>
         </p:nvSpPr>
@@ -17853,14 +17936,14 @@
                 <p:cTn id="2" dur="indefinite" nodeType="mainSeq">
                   <p:childTnLst>
                     <p:par>
-                      <p:cTn id="279" presetID="10" presetClass="entr" presetSubtype="0" fill="hold" grpId="0" nodeType="clickEffect">
+                      <p:cTn id="283" presetID="10" presetClass="entr" presetSubtype="0" fill="hold" grpId="0" nodeType="clickEffect">
                         <p:stCondLst>
                           <p:cond delay="0"/>
                         </p:stCondLst>
                         <p:childTnLst>
                           <p:animEffect transition="in" filter="fade">
                             <p:cBhvr>
-                              <p:cTn id="280" dur="700" fill="hold"/>
+                              <p:cTn id="284" dur="700" fill="hold"/>
                               <p:tgtEl>
                                 <p:spTgt spid="3"/>
                               </p:tgtEl>
@@ -17870,67 +17953,67 @@
                       </p:cTn>
                     </p:par>
                     <p:par>
-                      <p:cTn id="281" presetID="10" presetClass="entr" presetSubtype="0" fill="hold" grpId="0" nodeType="clickEffect">
+                      <p:cTn id="285" presetID="10" presetClass="entr" presetSubtype="0" fill="hold" grpId="0" nodeType="clickEffect">
                         <p:stCondLst>
                           <p:cond delay="0"/>
                         </p:stCondLst>
                         <p:childTnLst>
                           <p:animEffect transition="in" filter="fade">
                             <p:cBhvr>
-                              <p:cTn id="282" dur="700" fill="hold"/>
-                              <p:tgtEl>
-                                <p:spTgt spid="281"/>
-                              </p:tgtEl>
-                            </p:cBhvr>
-                          </p:animEffect>
-                        </p:childTnLst>
-                      </p:cTn>
-                    </p:par>
-                    <p:par>
-                      <p:cTn id="283" presetID="10" presetClass="entr" presetSubtype="0" fill="hold" grpId="0" nodeType="clickEffect">
+                              <p:cTn id="286" dur="700" fill="hold"/>
+                              <p:tgtEl>
+                                <p:spTgt spid="285"/>
+                              </p:tgtEl>
+                            </p:cBhvr>
+                          </p:animEffect>
+                        </p:childTnLst>
+                      </p:cTn>
+                    </p:par>
+                    <p:par>
+                      <p:cTn id="287" presetID="10" presetClass="entr" presetSubtype="0" fill="hold" grpId="0" nodeType="clickEffect">
                         <p:stCondLst>
                           <p:cond delay="300"/>
                         </p:stCondLst>
                         <p:childTnLst>
                           <p:animEffect transition="in" filter="fade">
                             <p:cBhvr>
-                              <p:cTn id="284" dur="700" fill="hold"/>
-                              <p:tgtEl>
-                                <p:spTgt spid="283"/>
-                              </p:tgtEl>
-                            </p:cBhvr>
-                          </p:animEffect>
-                        </p:childTnLst>
-                      </p:cTn>
-                    </p:par>
-                    <p:par>
-                      <p:cTn id="285" presetID="22" presetClass="entr" presetSubtype="0" fill="hold" grpId="0" nodeType="clickEffect">
+                              <p:cTn id="288" dur="700" fill="hold"/>
+                              <p:tgtEl>
+                                <p:spTgt spid="287"/>
+                              </p:tgtEl>
+                            </p:cBhvr>
+                          </p:animEffect>
+                        </p:childTnLst>
+                      </p:cTn>
+                    </p:par>
+                    <p:par>
+                      <p:cTn id="289" presetID="22" presetClass="entr" presetSubtype="0" fill="hold" grpId="0" nodeType="clickEffect">
                         <p:stCondLst>
                           <p:cond delay="100"/>
                         </p:stCondLst>
                         <p:childTnLst>
                           <p:animEffect transition="in" filter="zoom">
                             <p:cBhvr>
-                              <p:cTn id="286" dur="500" fill="hold"/>
-                              <p:tgtEl>
-                                <p:spTgt spid="285"/>
-                              </p:tgtEl>
-                            </p:cBhvr>
-                          </p:animEffect>
-                        </p:childTnLst>
-                      </p:cTn>
-                    </p:par>
-                    <p:par>
-                      <p:cTn id="287" presetID="10" presetClass="entr" presetSubtype="0" fill="hold" grpId="0" nodeType="clickEffect">
+                              <p:cTn id="290" dur="500" fill="hold"/>
+                              <p:tgtEl>
+                                <p:spTgt spid="289"/>
+                              </p:tgtEl>
+                            </p:cBhvr>
+                          </p:animEffect>
+                        </p:childTnLst>
+                      </p:cTn>
+                    </p:par>
+                    <p:par>
+                      <p:cTn id="291" presetID="10" presetClass="entr" presetSubtype="0" fill="hold" grpId="0" nodeType="clickEffect">
                         <p:stCondLst>
                           <p:cond delay="400"/>
                         </p:stCondLst>
                         <p:childTnLst>
                           <p:animEffect transition="in" filter="fade">
                             <p:cBhvr>
-                              <p:cTn id="288" dur="700" fill="hold"/>
-                              <p:tgtEl>
-                                <p:spTgt spid="287"/>
+                              <p:cTn id="292" dur="700" fill="hold"/>
+                              <p:tgtEl>
+                                <p:spTgt spid="291"/>
                               </p:tgtEl>
                             </p:cBhvr>
                           </p:animEffect>

--- a/BPL_Presentation.pptx
+++ b/BPL_Presentation.pptx
@@ -3437,8 +3437,8 @@
         </p:nvSpPr>
         <p:spPr>
           <a:xfrm>
-            <a:off x="548640" y="4206240"/>
-            <a:ext cx="5029200" cy="2194560"/>
+            <a:off x="548640" y="4023360"/>
+            <a:ext cx="5029200" cy="2468880"/>
           </a:xfrm>
           <a:prstGeom prst="rect">
             <a:avLst/>
@@ -3482,8 +3482,8 @@
         </p:nvSpPr>
         <p:spPr>
           <a:xfrm>
-            <a:off x="548640" y="4206240"/>
-            <a:ext cx="5029200" cy="411480"/>
+            <a:off x="548640" y="4069080"/>
+            <a:ext cx="5029200" cy="320040"/>
           </a:xfrm>
           <a:prstGeom prst="rect">
             <a:avLst/>
@@ -3498,7 +3498,7 @@
           <a:p>
             <a:pPr algn="ctr"/>
             <a:r>
-              <a:rPr sz="1300" b="1" i="0">
+              <a:rPr sz="1200" b="1" i="0">
                 <a:solidFill>
                   <a:srgbClr val="FFD700"/>
                 </a:solidFill>
@@ -3517,8 +3517,8 @@
         </p:nvSpPr>
         <p:spPr>
           <a:xfrm>
-            <a:off x="822960" y="4617720"/>
-            <a:ext cx="4480560" cy="320040"/>
+            <a:off x="548640" y="4389120"/>
+            <a:ext cx="5029200" cy="320040"/>
           </a:xfrm>
           <a:prstGeom prst="rect">
             <a:avLst/>
@@ -3531,15 +3531,15 @@
           </a:bodyPr>
           <a:lstStyle/>
           <a:p>
-            <a:pPr algn="l"/>
-            <a:r>
-              <a:rPr sz="1300" b="0" i="0">
-                <a:solidFill>
-                  <a:srgbClr val="FFFFFF"/>
+            <a:pPr algn="ctr"/>
+            <a:r>
+              <a:rPr sz="1200" b="1" i="0">
+                <a:solidFill>
+                  <a:srgbClr val="00C853"/>
                 </a:solidFill>
                 <a:latin typeface="Segoe UI"/>
               </a:rPr>
-              <a:t>▸  Member 1</a:t>
+              <a:t>Textile Department  |  Batch 232</a:t>
             </a:r>
           </a:p>
         </p:txBody>
@@ -3552,8 +3552,8 @@
         </p:nvSpPr>
         <p:spPr>
           <a:xfrm>
-            <a:off x="822960" y="4928616"/>
-            <a:ext cx="4480560" cy="320040"/>
+            <a:off x="1097280" y="4709160"/>
+            <a:ext cx="3931920" cy="320040"/>
           </a:xfrm>
           <a:prstGeom prst="rect">
             <a:avLst/>
@@ -3574,7 +3574,7 @@
                 </a:solidFill>
                 <a:latin typeface="Segoe UI"/>
               </a:rPr>
-              <a:t>▸  Member 2</a:t>
+              <a:t>▸  ID: 232-093-801</a:t>
             </a:r>
           </a:p>
         </p:txBody>
@@ -3587,8 +3587,8 @@
         </p:nvSpPr>
         <p:spPr>
           <a:xfrm>
-            <a:off x="822960" y="5239512"/>
-            <a:ext cx="4480560" cy="320040"/>
+            <a:off x="1097280" y="5029200"/>
+            <a:ext cx="3931920" cy="320040"/>
           </a:xfrm>
           <a:prstGeom prst="rect">
             <a:avLst/>
@@ -3609,7 +3609,7 @@
                 </a:solidFill>
                 <a:latin typeface="Segoe UI"/>
               </a:rPr>
-              <a:t>▸  Member 3</a:t>
+              <a:t>▸  ID: 232-171-801</a:t>
             </a:r>
           </a:p>
         </p:txBody>
@@ -3622,8 +3622,8 @@
         </p:nvSpPr>
         <p:spPr>
           <a:xfrm>
-            <a:off x="822960" y="5550408"/>
-            <a:ext cx="4480560" cy="320040"/>
+            <a:off x="1097280" y="5349240"/>
+            <a:ext cx="3931920" cy="320040"/>
           </a:xfrm>
           <a:prstGeom prst="rect">
             <a:avLst/>
@@ -3644,7 +3644,7 @@
                 </a:solidFill>
                 <a:latin typeface="Segoe UI"/>
               </a:rPr>
-              <a:t>▸  Member 4</a:t>
+              <a:t>▸  ID: 232-172-801</a:t>
             </a:r>
           </a:p>
         </p:txBody>
@@ -3657,8 +3657,8 @@
         </p:nvSpPr>
         <p:spPr>
           <a:xfrm>
-            <a:off x="822960" y="5861304"/>
-            <a:ext cx="4480560" cy="320040"/>
+            <a:off x="1097280" y="5669280"/>
+            <a:ext cx="3931920" cy="320040"/>
           </a:xfrm>
           <a:prstGeom prst="rect">
             <a:avLst/>
@@ -3679,14 +3679,49 @@
                 </a:solidFill>
                 <a:latin typeface="Segoe UI"/>
               </a:rPr>
-              <a:t>▸  Member 5</a:t>
-            </a:r>
-          </a:p>
-        </p:txBody>
-      </p:sp>
-      <p:sp>
-        <p:nvSpPr>
-          <p:cNvPr id="31" name="Rectangle 30"/>
+              <a:t>▸  ID: 232-236-801</a:t>
+            </a:r>
+          </a:p>
+        </p:txBody>
+      </p:sp>
+      <p:sp>
+        <p:nvSpPr>
+          <p:cNvPr id="31" name="TextBox 30"/>
+          <p:cNvSpPr txBox="1"/>
+          <p:nvPr/>
+        </p:nvSpPr>
+        <p:spPr>
+          <a:xfrm>
+            <a:off x="1097280" y="5989320"/>
+            <a:ext cx="3931920" cy="320040"/>
+          </a:xfrm>
+          <a:prstGeom prst="rect">
+            <a:avLst/>
+          </a:prstGeom>
+          <a:noFill/>
+        </p:spPr>
+        <p:txBody>
+          <a:bodyPr wrap="square">
+            <a:spAutoFit/>
+          </a:bodyPr>
+          <a:lstStyle/>
+          <a:p>
+            <a:pPr algn="l"/>
+            <a:r>
+              <a:rPr sz="1300" b="0" i="0">
+                <a:solidFill>
+                  <a:srgbClr val="FFFFFF"/>
+                </a:solidFill>
+                <a:latin typeface="Segoe UI"/>
+              </a:rPr>
+              <a:t>▸  ID: 232-282-801</a:t>
+            </a:r>
+          </a:p>
+        </p:txBody>
+      </p:sp>
+      <p:sp>
+        <p:nvSpPr>
+          <p:cNvPr id="33" name="Rectangle 32"/>
           <p:cNvSpPr/>
           <p:nvPr/>
         </p:nvSpPr>
@@ -3729,7 +3764,7 @@
       </p:sp>
       <p:pic>
         <p:nvPicPr>
-          <p:cNvPr id="33" name="Picture 32" descr="user_split_image.jpg"/>
+          <p:cNvPr id="35" name="Picture 34" descr="user_split_image.jpg"/>
           <p:cNvPicPr>
             <a:picLocks noChangeAspect="1"/>
           </p:cNvPicPr>
@@ -3753,7 +3788,7 @@
       </p:pic>
       <p:sp>
         <p:nvSpPr>
-          <p:cNvPr id="35" name="Rectangle 34"/>
+          <p:cNvPr id="37" name="Rectangle 36"/>
           <p:cNvSpPr/>
           <p:nvPr/>
         </p:nvSpPr>
@@ -3796,7 +3831,7 @@
       </p:sp>
       <p:sp>
         <p:nvSpPr>
-          <p:cNvPr id="37" name="TextBox 36"/>
+          <p:cNvPr id="39" name="TextBox 38"/>
           <p:cNvSpPr txBox="1"/>
           <p:nvPr/>
         </p:nvSpPr>
@@ -3994,150 +4029,167 @@
                     <p:par>
                       <p:cTn id="21" presetID="10" presetClass="entr" presetSubtype="0" fill="hold" grpId="0" nodeType="clickEffect">
                         <p:stCondLst>
+                          <p:cond delay="1050"/>
+                        </p:stCondLst>
+                        <p:childTnLst>
+                          <p:animEffect transition="in" filter="fade">
+                            <p:cBhvr>
+                              <p:cTn id="22" dur="700" fill="hold"/>
+                              <p:tgtEl>
+                                <p:spTgt spid="21"/>
+                              </p:tgtEl>
+                            </p:cBhvr>
+                          </p:animEffect>
+                        </p:childTnLst>
+                      </p:cTn>
+                    </p:par>
+                    <p:par>
+                      <p:cTn id="23" presetID="10" presetClass="entr" presetSubtype="0" fill="hold" grpId="0" nodeType="clickEffect">
+                        <p:stCondLst>
                           <p:cond delay="1100"/>
                         </p:stCondLst>
                         <p:childTnLst>
                           <p:animEffect transition="in" filter="fade">
                             <p:cBhvr>
-                              <p:cTn id="22" dur="700" fill="hold"/>
-                              <p:tgtEl>
-                                <p:spTgt spid="21"/>
-                              </p:tgtEl>
-                            </p:cBhvr>
-                          </p:animEffect>
-                        </p:childTnLst>
-                      </p:cTn>
-                    </p:par>
-                    <p:par>
-                      <p:cTn id="23" presetID="10" presetClass="entr" presetSubtype="0" fill="hold" grpId="0" nodeType="clickEffect">
+                              <p:cTn id="24" dur="700" fill="hold"/>
+                              <p:tgtEl>
+                                <p:spTgt spid="23"/>
+                              </p:tgtEl>
+                            </p:cBhvr>
+                          </p:animEffect>
+                        </p:childTnLst>
+                      </p:cTn>
+                    </p:par>
+                    <p:par>
+                      <p:cTn id="25" presetID="10" presetClass="entr" presetSubtype="0" fill="hold" grpId="0" nodeType="clickEffect">
                         <p:stCondLst>
                           <p:cond delay="1250"/>
                         </p:stCondLst>
                         <p:childTnLst>
                           <p:animEffect transition="in" filter="fade">
                             <p:cBhvr>
-                              <p:cTn id="24" dur="700" fill="hold"/>
-                              <p:tgtEl>
-                                <p:spTgt spid="23"/>
-                              </p:tgtEl>
-                            </p:cBhvr>
-                          </p:animEffect>
-                        </p:childTnLst>
-                      </p:cTn>
-                    </p:par>
-                    <p:par>
-                      <p:cTn id="25" presetID="10" presetClass="entr" presetSubtype="0" fill="hold" grpId="0" nodeType="clickEffect">
+                              <p:cTn id="26" dur="700" fill="hold"/>
+                              <p:tgtEl>
+                                <p:spTgt spid="25"/>
+                              </p:tgtEl>
+                            </p:cBhvr>
+                          </p:animEffect>
+                        </p:childTnLst>
+                      </p:cTn>
+                    </p:par>
+                    <p:par>
+                      <p:cTn id="27" presetID="10" presetClass="entr" presetSubtype="0" fill="hold" grpId="0" nodeType="clickEffect">
                         <p:stCondLst>
                           <p:cond delay="1400"/>
                         </p:stCondLst>
                         <p:childTnLst>
                           <p:animEffect transition="in" filter="fade">
                             <p:cBhvr>
-                              <p:cTn id="26" dur="700" fill="hold"/>
-                              <p:tgtEl>
-                                <p:spTgt spid="25"/>
-                              </p:tgtEl>
-                            </p:cBhvr>
-                          </p:animEffect>
-                        </p:childTnLst>
-                      </p:cTn>
-                    </p:par>
-                    <p:par>
-                      <p:cTn id="27" presetID="10" presetClass="entr" presetSubtype="0" fill="hold" grpId="0" nodeType="clickEffect">
+                              <p:cTn id="28" dur="700" fill="hold"/>
+                              <p:tgtEl>
+                                <p:spTgt spid="27"/>
+                              </p:tgtEl>
+                            </p:cBhvr>
+                          </p:animEffect>
+                        </p:childTnLst>
+                      </p:cTn>
+                    </p:par>
+                    <p:par>
+                      <p:cTn id="29" presetID="10" presetClass="entr" presetSubtype="0" fill="hold" grpId="0" nodeType="clickEffect">
                         <p:stCondLst>
                           <p:cond delay="1550"/>
                         </p:stCondLst>
                         <p:childTnLst>
                           <p:animEffect transition="in" filter="fade">
                             <p:cBhvr>
-                              <p:cTn id="28" dur="700" fill="hold"/>
-                              <p:tgtEl>
-                                <p:spTgt spid="27"/>
-                              </p:tgtEl>
-                            </p:cBhvr>
-                          </p:animEffect>
-                        </p:childTnLst>
-                      </p:cTn>
-                    </p:par>
-                    <p:par>
-                      <p:cTn id="29" presetID="10" presetClass="entr" presetSubtype="0" fill="hold" grpId="0" nodeType="clickEffect">
+                              <p:cTn id="30" dur="700" fill="hold"/>
+                              <p:tgtEl>
+                                <p:spTgt spid="29"/>
+                              </p:tgtEl>
+                            </p:cBhvr>
+                          </p:animEffect>
+                        </p:childTnLst>
+                      </p:cTn>
+                    </p:par>
+                    <p:par>
+                      <p:cTn id="31" presetID="10" presetClass="entr" presetSubtype="0" fill="hold" grpId="0" nodeType="clickEffect">
                         <p:stCondLst>
                           <p:cond delay="1700"/>
                         </p:stCondLst>
                         <p:childTnLst>
                           <p:animEffect transition="in" filter="fade">
                             <p:cBhvr>
-                              <p:cTn id="30" dur="700" fill="hold"/>
-                              <p:tgtEl>
-                                <p:spTgt spid="29"/>
-                              </p:tgtEl>
-                            </p:cBhvr>
-                          </p:animEffect>
-                        </p:childTnLst>
-                      </p:cTn>
-                    </p:par>
-                    <p:par>
-                      <p:cTn id="31" presetID="22" presetClass="entr" presetSubtype="0" fill="hold" grpId="0" nodeType="clickEffect">
+                              <p:cTn id="32" dur="700" fill="hold"/>
+                              <p:tgtEl>
+                                <p:spTgt spid="31"/>
+                              </p:tgtEl>
+                            </p:cBhvr>
+                          </p:animEffect>
+                        </p:childTnLst>
+                      </p:cTn>
+                    </p:par>
+                    <p:par>
+                      <p:cTn id="33" presetID="22" presetClass="entr" presetSubtype="0" fill="hold" grpId="0" nodeType="clickEffect">
                         <p:stCondLst>
                           <p:cond delay="600"/>
                         </p:stCondLst>
                         <p:childTnLst>
                           <p:animEffect transition="in" filter="zoom">
                             <p:cBhvr>
-                              <p:cTn id="32" dur="500" fill="hold"/>
-                              <p:tgtEl>
-                                <p:spTgt spid="31"/>
-                              </p:tgtEl>
-                            </p:cBhvr>
-                          </p:animEffect>
-                        </p:childTnLst>
-                      </p:cTn>
-                    </p:par>
-                    <p:par>
-                      <p:cTn id="33" presetID="22" presetClass="entr" presetSubtype="0" fill="hold" grpId="0" nodeType="clickEffect">
+                              <p:cTn id="34" dur="500" fill="hold"/>
+                              <p:tgtEl>
+                                <p:spTgt spid="33"/>
+                              </p:tgtEl>
+                            </p:cBhvr>
+                          </p:animEffect>
+                        </p:childTnLst>
+                      </p:cTn>
+                    </p:par>
+                    <p:par>
+                      <p:cTn id="35" presetID="22" presetClass="entr" presetSubtype="0" fill="hold" grpId="0" nodeType="clickEffect">
                         <p:stCondLst>
                           <p:cond delay="700"/>
                         </p:stCondLst>
                         <p:childTnLst>
                           <p:animEffect transition="in" filter="zoom">
                             <p:cBhvr>
-                              <p:cTn id="34" dur="500" fill="hold"/>
-                              <p:tgtEl>
-                                <p:spTgt spid="33"/>
-                              </p:tgtEl>
-                            </p:cBhvr>
-                          </p:animEffect>
-                        </p:childTnLst>
-                      </p:cTn>
-                    </p:par>
-                    <p:par>
-                      <p:cTn id="35" presetID="10" presetClass="entr" presetSubtype="0" fill="hold" grpId="0" nodeType="clickEffect">
+                              <p:cTn id="36" dur="500" fill="hold"/>
+                              <p:tgtEl>
+                                <p:spTgt spid="35"/>
+                              </p:tgtEl>
+                            </p:cBhvr>
+                          </p:animEffect>
+                        </p:childTnLst>
+                      </p:cTn>
+                    </p:par>
+                    <p:par>
+                      <p:cTn id="37" presetID="10" presetClass="entr" presetSubtype="0" fill="hold" grpId="0" nodeType="clickEffect">
                         <p:stCondLst>
                           <p:cond delay="0"/>
                         </p:stCondLst>
                         <p:childTnLst>
                           <p:animEffect transition="in" filter="fade">
                             <p:cBhvr>
-                              <p:cTn id="36" dur="700" fill="hold"/>
-                              <p:tgtEl>
-                                <p:spTgt spid="35"/>
-                              </p:tgtEl>
-                            </p:cBhvr>
-                          </p:animEffect>
-                        </p:childTnLst>
-                      </p:cTn>
-                    </p:par>
-                    <p:par>
-                      <p:cTn id="37" presetID="10" presetClass="entr" presetSubtype="0" fill="hold" grpId="0" nodeType="clickEffect">
+                              <p:cTn id="38" dur="700" fill="hold"/>
+                              <p:tgtEl>
+                                <p:spTgt spid="37"/>
+                              </p:tgtEl>
+                            </p:cBhvr>
+                          </p:animEffect>
+                        </p:childTnLst>
+                      </p:cTn>
+                    </p:par>
+                    <p:par>
+                      <p:cTn id="39" presetID="10" presetClass="entr" presetSubtype="0" fill="hold" grpId="0" nodeType="clickEffect">
                         <p:stCondLst>
                           <p:cond delay="0"/>
                         </p:stCondLst>
                         <p:childTnLst>
                           <p:animEffect transition="in" filter="fade">
                             <p:cBhvr>
-                              <p:cTn id="38" dur="700" fill="hold"/>
-                              <p:tgtEl>
-                                <p:spTgt spid="37"/>
+                              <p:cTn id="40" dur="700" fill="hold"/>
+                              <p:tgtEl>
+                                <p:spTgt spid="39"/>
                               </p:tgtEl>
                             </p:cBhvr>
                           </p:animEffect>
@@ -4306,7 +4358,7 @@
       </p:sp>
       <p:sp>
         <p:nvSpPr>
-          <p:cNvPr id="295" name="Rectangle 294"/>
+          <p:cNvPr id="297" name="Rectangle 296"/>
           <p:cNvSpPr/>
           <p:nvPr/>
         </p:nvSpPr>
@@ -4351,7 +4403,7 @@
       </p:sp>
       <p:sp>
         <p:nvSpPr>
-          <p:cNvPr id="297" name="TextBox 296"/>
+          <p:cNvPr id="299" name="TextBox 298"/>
           <p:cNvSpPr txBox="1"/>
           <p:nvPr/>
         </p:nvSpPr>
@@ -4386,7 +4438,7 @@
       </p:sp>
       <p:sp>
         <p:nvSpPr>
-          <p:cNvPr id="299" name="TextBox 298"/>
+          <p:cNvPr id="301" name="TextBox 300"/>
           <p:cNvSpPr txBox="1"/>
           <p:nvPr/>
         </p:nvSpPr>
@@ -4421,7 +4473,7 @@
       </p:sp>
       <p:sp>
         <p:nvSpPr>
-          <p:cNvPr id="301" name="TextBox 300"/>
+          <p:cNvPr id="303" name="TextBox 302"/>
           <p:cNvSpPr txBox="1"/>
           <p:nvPr/>
         </p:nvSpPr>
@@ -4456,7 +4508,7 @@
       </p:sp>
       <p:sp>
         <p:nvSpPr>
-          <p:cNvPr id="303" name="Rectangle 302"/>
+          <p:cNvPr id="305" name="Rectangle 304"/>
           <p:cNvSpPr/>
           <p:nvPr/>
         </p:nvSpPr>
@@ -4501,7 +4553,7 @@
       </p:sp>
       <p:sp>
         <p:nvSpPr>
-          <p:cNvPr id="305" name="TextBox 304"/>
+          <p:cNvPr id="307" name="TextBox 306"/>
           <p:cNvSpPr txBox="1"/>
           <p:nvPr/>
         </p:nvSpPr>
@@ -4536,7 +4588,7 @@
       </p:sp>
       <p:sp>
         <p:nvSpPr>
-          <p:cNvPr id="307" name="TextBox 306"/>
+          <p:cNvPr id="309" name="TextBox 308"/>
           <p:cNvSpPr txBox="1"/>
           <p:nvPr/>
         </p:nvSpPr>
@@ -4571,7 +4623,7 @@
       </p:sp>
       <p:sp>
         <p:nvSpPr>
-          <p:cNvPr id="309" name="TextBox 308"/>
+          <p:cNvPr id="311" name="TextBox 310"/>
           <p:cNvSpPr txBox="1"/>
           <p:nvPr/>
         </p:nvSpPr>
@@ -4606,7 +4658,7 @@
       </p:sp>
       <p:sp>
         <p:nvSpPr>
-          <p:cNvPr id="311" name="Rectangle 310"/>
+          <p:cNvPr id="313" name="Rectangle 312"/>
           <p:cNvSpPr/>
           <p:nvPr/>
         </p:nvSpPr>
@@ -4651,7 +4703,7 @@
       </p:sp>
       <p:sp>
         <p:nvSpPr>
-          <p:cNvPr id="313" name="TextBox 312"/>
+          <p:cNvPr id="315" name="TextBox 314"/>
           <p:cNvSpPr txBox="1"/>
           <p:nvPr/>
         </p:nvSpPr>
@@ -4686,7 +4738,7 @@
       </p:sp>
       <p:sp>
         <p:nvSpPr>
-          <p:cNvPr id="315" name="TextBox 314"/>
+          <p:cNvPr id="317" name="TextBox 316"/>
           <p:cNvSpPr txBox="1"/>
           <p:nvPr/>
         </p:nvSpPr>
@@ -4721,7 +4773,7 @@
       </p:sp>
       <p:sp>
         <p:nvSpPr>
-          <p:cNvPr id="317" name="TextBox 316"/>
+          <p:cNvPr id="319" name="TextBox 318"/>
           <p:cNvSpPr txBox="1"/>
           <p:nvPr/>
         </p:nvSpPr>
@@ -4756,7 +4808,7 @@
       </p:sp>
       <p:sp>
         <p:nvSpPr>
-          <p:cNvPr id="319" name="Rectangle 318"/>
+          <p:cNvPr id="321" name="Rectangle 320"/>
           <p:cNvSpPr/>
           <p:nvPr/>
         </p:nvSpPr>
@@ -4801,7 +4853,7 @@
       </p:sp>
       <p:sp>
         <p:nvSpPr>
-          <p:cNvPr id="321" name="TextBox 320"/>
+          <p:cNvPr id="323" name="TextBox 322"/>
           <p:cNvSpPr txBox="1"/>
           <p:nvPr/>
         </p:nvSpPr>
@@ -4836,7 +4888,7 @@
       </p:sp>
       <p:sp>
         <p:nvSpPr>
-          <p:cNvPr id="323" name="TextBox 322"/>
+          <p:cNvPr id="325" name="TextBox 324"/>
           <p:cNvSpPr txBox="1"/>
           <p:nvPr/>
         </p:nvSpPr>
@@ -4871,7 +4923,7 @@
       </p:sp>
       <p:sp>
         <p:nvSpPr>
-          <p:cNvPr id="325" name="TextBox 324"/>
+          <p:cNvPr id="327" name="TextBox 326"/>
           <p:cNvSpPr txBox="1"/>
           <p:nvPr/>
         </p:nvSpPr>
@@ -4906,7 +4958,7 @@
       </p:sp>
       <p:sp>
         <p:nvSpPr>
-          <p:cNvPr id="327" name="Rectangle 326"/>
+          <p:cNvPr id="329" name="Rectangle 328"/>
           <p:cNvSpPr/>
           <p:nvPr/>
         </p:nvSpPr>
@@ -4951,7 +5003,7 @@
       </p:sp>
       <p:sp>
         <p:nvSpPr>
-          <p:cNvPr id="329" name="TextBox 328"/>
+          <p:cNvPr id="331" name="TextBox 330"/>
           <p:cNvSpPr txBox="1"/>
           <p:nvPr/>
         </p:nvSpPr>
@@ -4986,7 +5038,7 @@
       </p:sp>
       <p:sp>
         <p:nvSpPr>
-          <p:cNvPr id="331" name="TextBox 330"/>
+          <p:cNvPr id="333" name="TextBox 332"/>
           <p:cNvSpPr txBox="1"/>
           <p:nvPr/>
         </p:nvSpPr>
@@ -5021,7 +5073,7 @@
       </p:sp>
       <p:sp>
         <p:nvSpPr>
-          <p:cNvPr id="333" name="TextBox 332"/>
+          <p:cNvPr id="335" name="TextBox 334"/>
           <p:cNvSpPr txBox="1"/>
           <p:nvPr/>
         </p:nvSpPr>
@@ -5056,7 +5108,7 @@
       </p:sp>
       <p:sp>
         <p:nvSpPr>
-          <p:cNvPr id="335" name="Rectangle 334"/>
+          <p:cNvPr id="337" name="Rectangle 336"/>
           <p:cNvSpPr/>
           <p:nvPr/>
         </p:nvSpPr>
@@ -5101,7 +5153,7 @@
       </p:sp>
       <p:sp>
         <p:nvSpPr>
-          <p:cNvPr id="337" name="TextBox 336"/>
+          <p:cNvPr id="339" name="TextBox 338"/>
           <p:cNvSpPr txBox="1"/>
           <p:nvPr/>
         </p:nvSpPr>
@@ -5136,7 +5188,7 @@
       </p:sp>
       <p:sp>
         <p:nvSpPr>
-          <p:cNvPr id="339" name="TextBox 338"/>
+          <p:cNvPr id="341" name="TextBox 340"/>
           <p:cNvSpPr txBox="1"/>
           <p:nvPr/>
         </p:nvSpPr>
@@ -5171,7 +5223,7 @@
       </p:sp>
       <p:sp>
         <p:nvSpPr>
-          <p:cNvPr id="341" name="TextBox 340"/>
+          <p:cNvPr id="343" name="TextBox 342"/>
           <p:cNvSpPr txBox="1"/>
           <p:nvPr/>
         </p:nvSpPr>
@@ -5214,14 +5266,14 @@
                 <p:cTn id="2" dur="indefinite" nodeType="mainSeq">
                   <p:childTnLst>
                     <p:par>
-                      <p:cTn id="293" presetID="2" presetClass="entr" presetSubtype="8" fill="hold" grpId="0" nodeType="clickEffect">
+                      <p:cTn id="295" presetID="2" presetClass="entr" presetSubtype="8" fill="hold" grpId="0" nodeType="clickEffect">
                         <p:stCondLst>
                           <p:cond delay="0"/>
                         </p:stCondLst>
                         <p:childTnLst>
                           <p:animEffect transition="in" filter="fly">
                             <p:cBhvr>
-                              <p:cTn id="294" dur="600" fill="hold"/>
+                              <p:cTn id="296" dur="600" fill="hold"/>
                               <p:tgtEl>
                                 <p:spTgt spid="4"/>
                               </p:tgtEl>
@@ -5231,407 +5283,407 @@
                       </p:cTn>
                     </p:par>
                     <p:par>
-                      <p:cTn id="295" presetID="22" presetClass="entr" presetSubtype="0" fill="hold" grpId="0" nodeType="clickEffect">
+                      <p:cTn id="297" presetID="22" presetClass="entr" presetSubtype="0" fill="hold" grpId="0" nodeType="clickEffect">
                         <p:stCondLst>
                           <p:cond delay="200"/>
                         </p:stCondLst>
                         <p:childTnLst>
                           <p:animEffect transition="in" filter="zoom">
                             <p:cBhvr>
-                              <p:cTn id="296" dur="500" fill="hold"/>
-                              <p:tgtEl>
-                                <p:spTgt spid="295"/>
-                              </p:tgtEl>
-                            </p:cBhvr>
-                          </p:animEffect>
-                        </p:childTnLst>
-                      </p:cTn>
-                    </p:par>
-                    <p:par>
-                      <p:cTn id="297" presetID="10" presetClass="entr" presetSubtype="0" fill="hold" grpId="0" nodeType="clickEffect">
+                              <p:cTn id="298" dur="500" fill="hold"/>
+                              <p:tgtEl>
+                                <p:spTgt spid="297"/>
+                              </p:tgtEl>
+                            </p:cBhvr>
+                          </p:animEffect>
+                        </p:childTnLst>
+                      </p:cTn>
+                    </p:par>
+                    <p:par>
+                      <p:cTn id="299" presetID="10" presetClass="entr" presetSubtype="0" fill="hold" grpId="0" nodeType="clickEffect">
                         <p:stCondLst>
                           <p:cond delay="300"/>
                         </p:stCondLst>
                         <p:childTnLst>
                           <p:animEffect transition="in" filter="fade">
                             <p:cBhvr>
-                              <p:cTn id="298" dur="700" fill="hold"/>
-                              <p:tgtEl>
-                                <p:spTgt spid="297"/>
-                              </p:tgtEl>
-                            </p:cBhvr>
-                          </p:animEffect>
-                        </p:childTnLst>
-                      </p:cTn>
-                    </p:par>
-                    <p:par>
-                      <p:cTn id="299" presetID="10" presetClass="entr" presetSubtype="0" fill="hold" grpId="0" nodeType="clickEffect">
+                              <p:cTn id="300" dur="700" fill="hold"/>
+                              <p:tgtEl>
+                                <p:spTgt spid="299"/>
+                              </p:tgtEl>
+                            </p:cBhvr>
+                          </p:animEffect>
+                        </p:childTnLst>
+                      </p:cTn>
+                    </p:par>
+                    <p:par>
+                      <p:cTn id="301" presetID="10" presetClass="entr" presetSubtype="0" fill="hold" grpId="0" nodeType="clickEffect">
                         <p:stCondLst>
                           <p:cond delay="400"/>
                         </p:stCondLst>
                         <p:childTnLst>
                           <p:animEffect transition="in" filter="fade">
                             <p:cBhvr>
-                              <p:cTn id="300" dur="700" fill="hold"/>
-                              <p:tgtEl>
-                                <p:spTgt spid="299"/>
-                              </p:tgtEl>
-                            </p:cBhvr>
-                          </p:animEffect>
-                        </p:childTnLst>
-                      </p:cTn>
-                    </p:par>
-                    <p:par>
-                      <p:cTn id="301" presetID="10" presetClass="entr" presetSubtype="0" fill="hold" grpId="0" nodeType="clickEffect">
+                              <p:cTn id="302" dur="700" fill="hold"/>
+                              <p:tgtEl>
+                                <p:spTgt spid="301"/>
+                              </p:tgtEl>
+                            </p:cBhvr>
+                          </p:animEffect>
+                        </p:childTnLst>
+                      </p:cTn>
+                    </p:par>
+                    <p:par>
+                      <p:cTn id="303" presetID="10" presetClass="entr" presetSubtype="0" fill="hold" grpId="0" nodeType="clickEffect">
                         <p:stCondLst>
                           <p:cond delay="500"/>
                         </p:stCondLst>
                         <p:childTnLst>
                           <p:animEffect transition="in" filter="fade">
                             <p:cBhvr>
-                              <p:cTn id="302" dur="700" fill="hold"/>
-                              <p:tgtEl>
-                                <p:spTgt spid="301"/>
-                              </p:tgtEl>
-                            </p:cBhvr>
-                          </p:animEffect>
-                        </p:childTnLst>
-                      </p:cTn>
-                    </p:par>
-                    <p:par>
-                      <p:cTn id="303" presetID="22" presetClass="entr" presetSubtype="0" fill="hold" grpId="0" nodeType="clickEffect">
+                              <p:cTn id="304" dur="700" fill="hold"/>
+                              <p:tgtEl>
+                                <p:spTgt spid="303"/>
+                              </p:tgtEl>
+                            </p:cBhvr>
+                          </p:animEffect>
+                        </p:childTnLst>
+                      </p:cTn>
+                    </p:par>
+                    <p:par>
+                      <p:cTn id="305" presetID="22" presetClass="entr" presetSubtype="0" fill="hold" grpId="0" nodeType="clickEffect">
                         <p:stCondLst>
                           <p:cond delay="450"/>
                         </p:stCondLst>
                         <p:childTnLst>
                           <p:animEffect transition="in" filter="zoom">
                             <p:cBhvr>
-                              <p:cTn id="304" dur="500" fill="hold"/>
-                              <p:tgtEl>
-                                <p:spTgt spid="303"/>
-                              </p:tgtEl>
-                            </p:cBhvr>
-                          </p:animEffect>
-                        </p:childTnLst>
-                      </p:cTn>
-                    </p:par>
-                    <p:par>
-                      <p:cTn id="305" presetID="10" presetClass="entr" presetSubtype="0" fill="hold" grpId="0" nodeType="clickEffect">
+                              <p:cTn id="306" dur="500" fill="hold"/>
+                              <p:tgtEl>
+                                <p:spTgt spid="305"/>
+                              </p:tgtEl>
+                            </p:cBhvr>
+                          </p:animEffect>
+                        </p:childTnLst>
+                      </p:cTn>
+                    </p:par>
+                    <p:par>
+                      <p:cTn id="307" presetID="10" presetClass="entr" presetSubtype="0" fill="hold" grpId="0" nodeType="clickEffect">
                         <p:stCondLst>
                           <p:cond delay="550"/>
                         </p:stCondLst>
                         <p:childTnLst>
                           <p:animEffect transition="in" filter="fade">
                             <p:cBhvr>
-                              <p:cTn id="306" dur="700" fill="hold"/>
-                              <p:tgtEl>
-                                <p:spTgt spid="305"/>
-                              </p:tgtEl>
-                            </p:cBhvr>
-                          </p:animEffect>
-                        </p:childTnLst>
-                      </p:cTn>
-                    </p:par>
-                    <p:par>
-                      <p:cTn id="307" presetID="10" presetClass="entr" presetSubtype="0" fill="hold" grpId="0" nodeType="clickEffect">
+                              <p:cTn id="308" dur="700" fill="hold"/>
+                              <p:tgtEl>
+                                <p:spTgt spid="307"/>
+                              </p:tgtEl>
+                            </p:cBhvr>
+                          </p:animEffect>
+                        </p:childTnLst>
+                      </p:cTn>
+                    </p:par>
+                    <p:par>
+                      <p:cTn id="309" presetID="10" presetClass="entr" presetSubtype="0" fill="hold" grpId="0" nodeType="clickEffect">
                         <p:stCondLst>
                           <p:cond delay="650"/>
                         </p:stCondLst>
                         <p:childTnLst>
                           <p:animEffect transition="in" filter="fade">
                             <p:cBhvr>
-                              <p:cTn id="308" dur="700" fill="hold"/>
-                              <p:tgtEl>
-                                <p:spTgt spid="307"/>
-                              </p:tgtEl>
-                            </p:cBhvr>
-                          </p:animEffect>
-                        </p:childTnLst>
-                      </p:cTn>
-                    </p:par>
-                    <p:par>
-                      <p:cTn id="309" presetID="10" presetClass="entr" presetSubtype="0" fill="hold" grpId="0" nodeType="clickEffect">
+                              <p:cTn id="310" dur="700" fill="hold"/>
+                              <p:tgtEl>
+                                <p:spTgt spid="309"/>
+                              </p:tgtEl>
+                            </p:cBhvr>
+                          </p:animEffect>
+                        </p:childTnLst>
+                      </p:cTn>
+                    </p:par>
+                    <p:par>
+                      <p:cTn id="311" presetID="10" presetClass="entr" presetSubtype="0" fill="hold" grpId="0" nodeType="clickEffect">
                         <p:stCondLst>
                           <p:cond delay="750"/>
                         </p:stCondLst>
                         <p:childTnLst>
                           <p:animEffect transition="in" filter="fade">
                             <p:cBhvr>
-                              <p:cTn id="310" dur="700" fill="hold"/>
-                              <p:tgtEl>
-                                <p:spTgt spid="309"/>
-                              </p:tgtEl>
-                            </p:cBhvr>
-                          </p:animEffect>
-                        </p:childTnLst>
-                      </p:cTn>
-                    </p:par>
-                    <p:par>
-                      <p:cTn id="311" presetID="22" presetClass="entr" presetSubtype="0" fill="hold" grpId="0" nodeType="clickEffect">
+                              <p:cTn id="312" dur="700" fill="hold"/>
+                              <p:tgtEl>
+                                <p:spTgt spid="311"/>
+                              </p:tgtEl>
+                            </p:cBhvr>
+                          </p:animEffect>
+                        </p:childTnLst>
+                      </p:cTn>
+                    </p:par>
+                    <p:par>
+                      <p:cTn id="313" presetID="22" presetClass="entr" presetSubtype="0" fill="hold" grpId="0" nodeType="clickEffect">
                         <p:stCondLst>
                           <p:cond delay="700"/>
                         </p:stCondLst>
                         <p:childTnLst>
                           <p:animEffect transition="in" filter="zoom">
                             <p:cBhvr>
-                              <p:cTn id="312" dur="500" fill="hold"/>
-                              <p:tgtEl>
-                                <p:spTgt spid="311"/>
-                              </p:tgtEl>
-                            </p:cBhvr>
-                          </p:animEffect>
-                        </p:childTnLst>
-                      </p:cTn>
-                    </p:par>
-                    <p:par>
-                      <p:cTn id="313" presetID="10" presetClass="entr" presetSubtype="0" fill="hold" grpId="0" nodeType="clickEffect">
+                              <p:cTn id="314" dur="500" fill="hold"/>
+                              <p:tgtEl>
+                                <p:spTgt spid="313"/>
+                              </p:tgtEl>
+                            </p:cBhvr>
+                          </p:animEffect>
+                        </p:childTnLst>
+                      </p:cTn>
+                    </p:par>
+                    <p:par>
+                      <p:cTn id="315" presetID="10" presetClass="entr" presetSubtype="0" fill="hold" grpId="0" nodeType="clickEffect">
                         <p:stCondLst>
                           <p:cond delay="800"/>
                         </p:stCondLst>
                         <p:childTnLst>
                           <p:animEffect transition="in" filter="fade">
                             <p:cBhvr>
-                              <p:cTn id="314" dur="700" fill="hold"/>
-                              <p:tgtEl>
-                                <p:spTgt spid="313"/>
-                              </p:tgtEl>
-                            </p:cBhvr>
-                          </p:animEffect>
-                        </p:childTnLst>
-                      </p:cTn>
-                    </p:par>
-                    <p:par>
-                      <p:cTn id="315" presetID="10" presetClass="entr" presetSubtype="0" fill="hold" grpId="0" nodeType="clickEffect">
+                              <p:cTn id="316" dur="700" fill="hold"/>
+                              <p:tgtEl>
+                                <p:spTgt spid="315"/>
+                              </p:tgtEl>
+                            </p:cBhvr>
+                          </p:animEffect>
+                        </p:childTnLst>
+                      </p:cTn>
+                    </p:par>
+                    <p:par>
+                      <p:cTn id="317" presetID="10" presetClass="entr" presetSubtype="0" fill="hold" grpId="0" nodeType="clickEffect">
                         <p:stCondLst>
                           <p:cond delay="900"/>
                         </p:stCondLst>
                         <p:childTnLst>
                           <p:animEffect transition="in" filter="fade">
                             <p:cBhvr>
-                              <p:cTn id="316" dur="700" fill="hold"/>
-                              <p:tgtEl>
-                                <p:spTgt spid="315"/>
-                              </p:tgtEl>
-                            </p:cBhvr>
-                          </p:animEffect>
-                        </p:childTnLst>
-                      </p:cTn>
-                    </p:par>
-                    <p:par>
-                      <p:cTn id="317" presetID="10" presetClass="entr" presetSubtype="0" fill="hold" grpId="0" nodeType="clickEffect">
+                              <p:cTn id="318" dur="700" fill="hold"/>
+                              <p:tgtEl>
+                                <p:spTgt spid="317"/>
+                              </p:tgtEl>
+                            </p:cBhvr>
+                          </p:animEffect>
+                        </p:childTnLst>
+                      </p:cTn>
+                    </p:par>
+                    <p:par>
+                      <p:cTn id="319" presetID="10" presetClass="entr" presetSubtype="0" fill="hold" grpId="0" nodeType="clickEffect">
                         <p:stCondLst>
                           <p:cond delay="1000"/>
                         </p:stCondLst>
                         <p:childTnLst>
                           <p:animEffect transition="in" filter="fade">
                             <p:cBhvr>
-                              <p:cTn id="318" dur="700" fill="hold"/>
-                              <p:tgtEl>
-                                <p:spTgt spid="317"/>
-                              </p:tgtEl>
-                            </p:cBhvr>
-                          </p:animEffect>
-                        </p:childTnLst>
-                      </p:cTn>
-                    </p:par>
-                    <p:par>
-                      <p:cTn id="319" presetID="22" presetClass="entr" presetSubtype="0" fill="hold" grpId="0" nodeType="clickEffect">
+                              <p:cTn id="320" dur="700" fill="hold"/>
+                              <p:tgtEl>
+                                <p:spTgt spid="319"/>
+                              </p:tgtEl>
+                            </p:cBhvr>
+                          </p:animEffect>
+                        </p:childTnLst>
+                      </p:cTn>
+                    </p:par>
+                    <p:par>
+                      <p:cTn id="321" presetID="22" presetClass="entr" presetSubtype="0" fill="hold" grpId="0" nodeType="clickEffect">
                         <p:stCondLst>
                           <p:cond delay="950"/>
                         </p:stCondLst>
                         <p:childTnLst>
                           <p:animEffect transition="in" filter="zoom">
                             <p:cBhvr>
-                              <p:cTn id="320" dur="500" fill="hold"/>
-                              <p:tgtEl>
-                                <p:spTgt spid="319"/>
-                              </p:tgtEl>
-                            </p:cBhvr>
-                          </p:animEffect>
-                        </p:childTnLst>
-                      </p:cTn>
-                    </p:par>
-                    <p:par>
-                      <p:cTn id="321" presetID="10" presetClass="entr" presetSubtype="0" fill="hold" grpId="0" nodeType="clickEffect">
+                              <p:cTn id="322" dur="500" fill="hold"/>
+                              <p:tgtEl>
+                                <p:spTgt spid="321"/>
+                              </p:tgtEl>
+                            </p:cBhvr>
+                          </p:animEffect>
+                        </p:childTnLst>
+                      </p:cTn>
+                    </p:par>
+                    <p:par>
+                      <p:cTn id="323" presetID="10" presetClass="entr" presetSubtype="0" fill="hold" grpId="0" nodeType="clickEffect">
                         <p:stCondLst>
                           <p:cond delay="1050"/>
                         </p:stCondLst>
                         <p:childTnLst>
                           <p:animEffect transition="in" filter="fade">
                             <p:cBhvr>
-                              <p:cTn id="322" dur="700" fill="hold"/>
-                              <p:tgtEl>
-                                <p:spTgt spid="321"/>
-                              </p:tgtEl>
-                            </p:cBhvr>
-                          </p:animEffect>
-                        </p:childTnLst>
-                      </p:cTn>
-                    </p:par>
-                    <p:par>
-                      <p:cTn id="323" presetID="10" presetClass="entr" presetSubtype="0" fill="hold" grpId="0" nodeType="clickEffect">
+                              <p:cTn id="324" dur="700" fill="hold"/>
+                              <p:tgtEl>
+                                <p:spTgt spid="323"/>
+                              </p:tgtEl>
+                            </p:cBhvr>
+                          </p:animEffect>
+                        </p:childTnLst>
+                      </p:cTn>
+                    </p:par>
+                    <p:par>
+                      <p:cTn id="325" presetID="10" presetClass="entr" presetSubtype="0" fill="hold" grpId="0" nodeType="clickEffect">
                         <p:stCondLst>
                           <p:cond delay="1150"/>
                         </p:stCondLst>
                         <p:childTnLst>
                           <p:animEffect transition="in" filter="fade">
                             <p:cBhvr>
-                              <p:cTn id="324" dur="700" fill="hold"/>
-                              <p:tgtEl>
-                                <p:spTgt spid="323"/>
-                              </p:tgtEl>
-                            </p:cBhvr>
-                          </p:animEffect>
-                        </p:childTnLst>
-                      </p:cTn>
-                    </p:par>
-                    <p:par>
-                      <p:cTn id="325" presetID="10" presetClass="entr" presetSubtype="0" fill="hold" grpId="0" nodeType="clickEffect">
+                              <p:cTn id="326" dur="700" fill="hold"/>
+                              <p:tgtEl>
+                                <p:spTgt spid="325"/>
+                              </p:tgtEl>
+                            </p:cBhvr>
+                          </p:animEffect>
+                        </p:childTnLst>
+                      </p:cTn>
+                    </p:par>
+                    <p:par>
+                      <p:cTn id="327" presetID="10" presetClass="entr" presetSubtype="0" fill="hold" grpId="0" nodeType="clickEffect">
                         <p:stCondLst>
                           <p:cond delay="1250"/>
                         </p:stCondLst>
                         <p:childTnLst>
                           <p:animEffect transition="in" filter="fade">
                             <p:cBhvr>
-                              <p:cTn id="326" dur="700" fill="hold"/>
-                              <p:tgtEl>
-                                <p:spTgt spid="325"/>
-                              </p:tgtEl>
-                            </p:cBhvr>
-                          </p:animEffect>
-                        </p:childTnLst>
-                      </p:cTn>
-                    </p:par>
-                    <p:par>
-                      <p:cTn id="327" presetID="22" presetClass="entr" presetSubtype="0" fill="hold" grpId="0" nodeType="clickEffect">
+                              <p:cTn id="328" dur="700" fill="hold"/>
+                              <p:tgtEl>
+                                <p:spTgt spid="327"/>
+                              </p:tgtEl>
+                            </p:cBhvr>
+                          </p:animEffect>
+                        </p:childTnLst>
+                      </p:cTn>
+                    </p:par>
+                    <p:par>
+                      <p:cTn id="329" presetID="22" presetClass="entr" presetSubtype="0" fill="hold" grpId="0" nodeType="clickEffect">
                         <p:stCondLst>
                           <p:cond delay="1200"/>
                         </p:stCondLst>
                         <p:childTnLst>
                           <p:animEffect transition="in" filter="zoom">
                             <p:cBhvr>
-                              <p:cTn id="328" dur="500" fill="hold"/>
-                              <p:tgtEl>
-                                <p:spTgt spid="327"/>
-                              </p:tgtEl>
-                            </p:cBhvr>
-                          </p:animEffect>
-                        </p:childTnLst>
-                      </p:cTn>
-                    </p:par>
-                    <p:par>
-                      <p:cTn id="329" presetID="10" presetClass="entr" presetSubtype="0" fill="hold" grpId="0" nodeType="clickEffect">
+                              <p:cTn id="330" dur="500" fill="hold"/>
+                              <p:tgtEl>
+                                <p:spTgt spid="329"/>
+                              </p:tgtEl>
+                            </p:cBhvr>
+                          </p:animEffect>
+                        </p:childTnLst>
+                      </p:cTn>
+                    </p:par>
+                    <p:par>
+                      <p:cTn id="331" presetID="10" presetClass="entr" presetSubtype="0" fill="hold" grpId="0" nodeType="clickEffect">
                         <p:stCondLst>
                           <p:cond delay="1300"/>
                         </p:stCondLst>
                         <p:childTnLst>
                           <p:animEffect transition="in" filter="fade">
                             <p:cBhvr>
-                              <p:cTn id="330" dur="700" fill="hold"/>
-                              <p:tgtEl>
-                                <p:spTgt spid="329"/>
-                              </p:tgtEl>
-                            </p:cBhvr>
-                          </p:animEffect>
-                        </p:childTnLst>
-                      </p:cTn>
-                    </p:par>
-                    <p:par>
-                      <p:cTn id="331" presetID="10" presetClass="entr" presetSubtype="0" fill="hold" grpId="0" nodeType="clickEffect">
+                              <p:cTn id="332" dur="700" fill="hold"/>
+                              <p:tgtEl>
+                                <p:spTgt spid="331"/>
+                              </p:tgtEl>
+                            </p:cBhvr>
+                          </p:animEffect>
+                        </p:childTnLst>
+                      </p:cTn>
+                    </p:par>
+                    <p:par>
+                      <p:cTn id="333" presetID="10" presetClass="entr" presetSubtype="0" fill="hold" grpId="0" nodeType="clickEffect">
                         <p:stCondLst>
                           <p:cond delay="1400"/>
                         </p:stCondLst>
                         <p:childTnLst>
                           <p:animEffect transition="in" filter="fade">
                             <p:cBhvr>
-                              <p:cTn id="332" dur="700" fill="hold"/>
-                              <p:tgtEl>
-                                <p:spTgt spid="331"/>
-                              </p:tgtEl>
-                            </p:cBhvr>
-                          </p:animEffect>
-                        </p:childTnLst>
-                      </p:cTn>
-                    </p:par>
-                    <p:par>
-                      <p:cTn id="333" presetID="10" presetClass="entr" presetSubtype="0" fill="hold" grpId="0" nodeType="clickEffect">
+                              <p:cTn id="334" dur="700" fill="hold"/>
+                              <p:tgtEl>
+                                <p:spTgt spid="333"/>
+                              </p:tgtEl>
+                            </p:cBhvr>
+                          </p:animEffect>
+                        </p:childTnLst>
+                      </p:cTn>
+                    </p:par>
+                    <p:par>
+                      <p:cTn id="335" presetID="10" presetClass="entr" presetSubtype="0" fill="hold" grpId="0" nodeType="clickEffect">
                         <p:stCondLst>
                           <p:cond delay="1500"/>
                         </p:stCondLst>
                         <p:childTnLst>
                           <p:animEffect transition="in" filter="fade">
                             <p:cBhvr>
-                              <p:cTn id="334" dur="700" fill="hold"/>
-                              <p:tgtEl>
-                                <p:spTgt spid="333"/>
-                              </p:tgtEl>
-                            </p:cBhvr>
-                          </p:animEffect>
-                        </p:childTnLst>
-                      </p:cTn>
-                    </p:par>
-                    <p:par>
-                      <p:cTn id="335" presetID="22" presetClass="entr" presetSubtype="0" fill="hold" grpId="0" nodeType="clickEffect">
+                              <p:cTn id="336" dur="700" fill="hold"/>
+                              <p:tgtEl>
+                                <p:spTgt spid="335"/>
+                              </p:tgtEl>
+                            </p:cBhvr>
+                          </p:animEffect>
+                        </p:childTnLst>
+                      </p:cTn>
+                    </p:par>
+                    <p:par>
+                      <p:cTn id="337" presetID="22" presetClass="entr" presetSubtype="0" fill="hold" grpId="0" nodeType="clickEffect">
                         <p:stCondLst>
                           <p:cond delay="1450"/>
                         </p:stCondLst>
                         <p:childTnLst>
                           <p:animEffect transition="in" filter="zoom">
                             <p:cBhvr>
-                              <p:cTn id="336" dur="500" fill="hold"/>
-                              <p:tgtEl>
-                                <p:spTgt spid="335"/>
-                              </p:tgtEl>
-                            </p:cBhvr>
-                          </p:animEffect>
-                        </p:childTnLst>
-                      </p:cTn>
-                    </p:par>
-                    <p:par>
-                      <p:cTn id="337" presetID="10" presetClass="entr" presetSubtype="0" fill="hold" grpId="0" nodeType="clickEffect">
+                              <p:cTn id="338" dur="500" fill="hold"/>
+                              <p:tgtEl>
+                                <p:spTgt spid="337"/>
+                              </p:tgtEl>
+                            </p:cBhvr>
+                          </p:animEffect>
+                        </p:childTnLst>
+                      </p:cTn>
+                    </p:par>
+                    <p:par>
+                      <p:cTn id="339" presetID="10" presetClass="entr" presetSubtype="0" fill="hold" grpId="0" nodeType="clickEffect">
                         <p:stCondLst>
                           <p:cond delay="1550"/>
                         </p:stCondLst>
                         <p:childTnLst>
                           <p:animEffect transition="in" filter="fade">
                             <p:cBhvr>
-                              <p:cTn id="338" dur="700" fill="hold"/>
-                              <p:tgtEl>
-                                <p:spTgt spid="337"/>
-                              </p:tgtEl>
-                            </p:cBhvr>
-                          </p:animEffect>
-                        </p:childTnLst>
-                      </p:cTn>
-                    </p:par>
-                    <p:par>
-                      <p:cTn id="339" presetID="10" presetClass="entr" presetSubtype="0" fill="hold" grpId="0" nodeType="clickEffect">
+                              <p:cTn id="340" dur="700" fill="hold"/>
+                              <p:tgtEl>
+                                <p:spTgt spid="339"/>
+                              </p:tgtEl>
+                            </p:cBhvr>
+                          </p:animEffect>
+                        </p:childTnLst>
+                      </p:cTn>
+                    </p:par>
+                    <p:par>
+                      <p:cTn id="341" presetID="10" presetClass="entr" presetSubtype="0" fill="hold" grpId="0" nodeType="clickEffect">
                         <p:stCondLst>
                           <p:cond delay="1650"/>
                         </p:stCondLst>
                         <p:childTnLst>
                           <p:animEffect transition="in" filter="fade">
                             <p:cBhvr>
-                              <p:cTn id="340" dur="700" fill="hold"/>
-                              <p:tgtEl>
-                                <p:spTgt spid="339"/>
-                              </p:tgtEl>
-                            </p:cBhvr>
-                          </p:animEffect>
-                        </p:childTnLst>
-                      </p:cTn>
-                    </p:par>
-                    <p:par>
-                      <p:cTn id="341" presetID="10" presetClass="entr" presetSubtype="0" fill="hold" grpId="0" nodeType="clickEffect">
+                              <p:cTn id="342" dur="700" fill="hold"/>
+                              <p:tgtEl>
+                                <p:spTgt spid="341"/>
+                              </p:tgtEl>
+                            </p:cBhvr>
+                          </p:animEffect>
+                        </p:childTnLst>
+                      </p:cTn>
+                    </p:par>
+                    <p:par>
+                      <p:cTn id="343" presetID="10" presetClass="entr" presetSubtype="0" fill="hold" grpId="0" nodeType="clickEffect">
                         <p:stCondLst>
                           <p:cond delay="1800"/>
                         </p:stCondLst>
                         <p:childTnLst>
                           <p:animEffect transition="in" filter="fade">
                             <p:cBhvr>
-                              <p:cTn id="342" dur="700" fill="hold"/>
-                              <p:tgtEl>
-                                <p:spTgt spid="341"/>
+                              <p:cTn id="344" dur="700" fill="hold"/>
+                              <p:tgtEl>
+                                <p:spTgt spid="343"/>
                               </p:tgtEl>
                             </p:cBhvr>
                           </p:animEffect>
@@ -5800,7 +5852,7 @@
       </p:sp>
       <p:sp>
         <p:nvSpPr>
-          <p:cNvPr id="345" name="TextBox 344"/>
+          <p:cNvPr id="347" name="TextBox 346"/>
           <p:cNvSpPr txBox="1"/>
           <p:nvPr/>
         </p:nvSpPr>
@@ -5835,7 +5887,7 @@
       </p:sp>
       <p:sp>
         <p:nvSpPr>
-          <p:cNvPr id="347" name="Rectangle 346"/>
+          <p:cNvPr id="349" name="Rectangle 348"/>
           <p:cNvSpPr/>
           <p:nvPr/>
         </p:nvSpPr>
@@ -5880,7 +5932,7 @@
       </p:sp>
       <p:sp>
         <p:nvSpPr>
-          <p:cNvPr id="349" name="TextBox 348"/>
+          <p:cNvPr id="351" name="TextBox 350"/>
           <p:cNvSpPr txBox="1"/>
           <p:nvPr/>
         </p:nvSpPr>
@@ -5915,7 +5967,7 @@
       </p:sp>
       <p:sp>
         <p:nvSpPr>
-          <p:cNvPr id="351" name="TextBox 350"/>
+          <p:cNvPr id="353" name="TextBox 352"/>
           <p:cNvSpPr txBox="1"/>
           <p:nvPr/>
         </p:nvSpPr>
@@ -5950,7 +6002,7 @@
       </p:sp>
       <p:sp>
         <p:nvSpPr>
-          <p:cNvPr id="353" name="TextBox 352"/>
+          <p:cNvPr id="355" name="TextBox 354"/>
           <p:cNvSpPr txBox="1"/>
           <p:nvPr/>
         </p:nvSpPr>
@@ -5985,7 +6037,7 @@
       </p:sp>
       <p:sp>
         <p:nvSpPr>
-          <p:cNvPr id="355" name="Rectangle 354"/>
+          <p:cNvPr id="357" name="Rectangle 356"/>
           <p:cNvSpPr/>
           <p:nvPr/>
         </p:nvSpPr>
@@ -6030,7 +6082,7 @@
       </p:sp>
       <p:sp>
         <p:nvSpPr>
-          <p:cNvPr id="357" name="TextBox 356"/>
+          <p:cNvPr id="359" name="TextBox 358"/>
           <p:cNvSpPr txBox="1"/>
           <p:nvPr/>
         </p:nvSpPr>
@@ -6065,7 +6117,7 @@
       </p:sp>
       <p:sp>
         <p:nvSpPr>
-          <p:cNvPr id="359" name="TextBox 358"/>
+          <p:cNvPr id="361" name="TextBox 360"/>
           <p:cNvSpPr txBox="1"/>
           <p:nvPr/>
         </p:nvSpPr>
@@ -6100,7 +6152,7 @@
       </p:sp>
       <p:sp>
         <p:nvSpPr>
-          <p:cNvPr id="361" name="TextBox 360"/>
+          <p:cNvPr id="363" name="TextBox 362"/>
           <p:cNvSpPr txBox="1"/>
           <p:nvPr/>
         </p:nvSpPr>
@@ -6135,7 +6187,7 @@
       </p:sp>
       <p:sp>
         <p:nvSpPr>
-          <p:cNvPr id="363" name="Rectangle 362"/>
+          <p:cNvPr id="365" name="Rectangle 364"/>
           <p:cNvSpPr/>
           <p:nvPr/>
         </p:nvSpPr>
@@ -6180,7 +6232,7 @@
       </p:sp>
       <p:sp>
         <p:nvSpPr>
-          <p:cNvPr id="365" name="TextBox 364"/>
+          <p:cNvPr id="367" name="TextBox 366"/>
           <p:cNvSpPr txBox="1"/>
           <p:nvPr/>
         </p:nvSpPr>
@@ -6215,7 +6267,7 @@
       </p:sp>
       <p:sp>
         <p:nvSpPr>
-          <p:cNvPr id="367" name="TextBox 366"/>
+          <p:cNvPr id="369" name="TextBox 368"/>
           <p:cNvSpPr txBox="1"/>
           <p:nvPr/>
         </p:nvSpPr>
@@ -6250,7 +6302,7 @@
       </p:sp>
       <p:sp>
         <p:nvSpPr>
-          <p:cNvPr id="369" name="TextBox 368"/>
+          <p:cNvPr id="371" name="TextBox 370"/>
           <p:cNvSpPr txBox="1"/>
           <p:nvPr/>
         </p:nvSpPr>
@@ -6285,7 +6337,7 @@
       </p:sp>
       <p:sp>
         <p:nvSpPr>
-          <p:cNvPr id="371" name="Rectangle 370"/>
+          <p:cNvPr id="373" name="Rectangle 372"/>
           <p:cNvSpPr/>
           <p:nvPr/>
         </p:nvSpPr>
@@ -6330,7 +6382,7 @@
       </p:sp>
       <p:sp>
         <p:nvSpPr>
-          <p:cNvPr id="373" name="TextBox 372"/>
+          <p:cNvPr id="375" name="TextBox 374"/>
           <p:cNvSpPr txBox="1"/>
           <p:nvPr/>
         </p:nvSpPr>
@@ -6365,7 +6417,7 @@
       </p:sp>
       <p:sp>
         <p:nvSpPr>
-          <p:cNvPr id="375" name="TextBox 374"/>
+          <p:cNvPr id="377" name="TextBox 376"/>
           <p:cNvSpPr txBox="1"/>
           <p:nvPr/>
         </p:nvSpPr>
@@ -6400,7 +6452,7 @@
       </p:sp>
       <p:sp>
         <p:nvSpPr>
-          <p:cNvPr id="377" name="TextBox 376"/>
+          <p:cNvPr id="379" name="TextBox 378"/>
           <p:cNvSpPr txBox="1"/>
           <p:nvPr/>
         </p:nvSpPr>
@@ -6435,7 +6487,7 @@
       </p:sp>
       <p:sp>
         <p:nvSpPr>
-          <p:cNvPr id="379" name="Rectangle 378"/>
+          <p:cNvPr id="381" name="Rectangle 380"/>
           <p:cNvSpPr/>
           <p:nvPr/>
         </p:nvSpPr>
@@ -6480,7 +6532,7 @@
       </p:sp>
       <p:sp>
         <p:nvSpPr>
-          <p:cNvPr id="381" name="TextBox 380"/>
+          <p:cNvPr id="383" name="TextBox 382"/>
           <p:cNvSpPr txBox="1"/>
           <p:nvPr/>
         </p:nvSpPr>
@@ -6515,7 +6567,7 @@
       </p:sp>
       <p:sp>
         <p:nvSpPr>
-          <p:cNvPr id="383" name="TextBox 382"/>
+          <p:cNvPr id="385" name="TextBox 384"/>
           <p:cNvSpPr txBox="1"/>
           <p:nvPr/>
         </p:nvSpPr>
@@ -6550,7 +6602,7 @@
       </p:sp>
       <p:sp>
         <p:nvSpPr>
-          <p:cNvPr id="385" name="TextBox 384"/>
+          <p:cNvPr id="387" name="TextBox 386"/>
           <p:cNvSpPr txBox="1"/>
           <p:nvPr/>
         </p:nvSpPr>
@@ -6593,14 +6645,14 @@
                 <p:cTn id="2" dur="indefinite" nodeType="mainSeq">
                   <p:childTnLst>
                     <p:par>
-                      <p:cTn id="343" presetID="2" presetClass="entr" presetSubtype="8" fill="hold" grpId="0" nodeType="clickEffect">
+                      <p:cTn id="345" presetID="2" presetClass="entr" presetSubtype="8" fill="hold" grpId="0" nodeType="clickEffect">
                         <p:stCondLst>
                           <p:cond delay="0"/>
                         </p:stCondLst>
                         <p:childTnLst>
                           <p:animEffect transition="in" filter="fly">
                             <p:cBhvr>
-                              <p:cTn id="344" dur="600" fill="hold"/>
+                              <p:cTn id="346" dur="600" fill="hold"/>
                               <p:tgtEl>
                                 <p:spTgt spid="4"/>
                               </p:tgtEl>
@@ -6610,356 +6662,356 @@
                       </p:cTn>
                     </p:par>
                     <p:par>
-                      <p:cTn id="345" presetID="10" presetClass="entr" presetSubtype="0" fill="hold" grpId="0" nodeType="clickEffect">
+                      <p:cTn id="347" presetID="10" presetClass="entr" presetSubtype="0" fill="hold" grpId="0" nodeType="clickEffect">
                         <p:stCondLst>
                           <p:cond delay="200"/>
                         </p:stCondLst>
                         <p:childTnLst>
                           <p:animEffect transition="in" filter="fade">
                             <p:cBhvr>
-                              <p:cTn id="346" dur="700" fill="hold"/>
-                              <p:tgtEl>
-                                <p:spTgt spid="345"/>
-                              </p:tgtEl>
-                            </p:cBhvr>
-                          </p:animEffect>
-                        </p:childTnLst>
-                      </p:cTn>
-                    </p:par>
-                    <p:par>
-                      <p:cTn id="347" presetID="2" presetClass="entr" presetSubtype="8" fill="hold" grpId="0" nodeType="clickEffect">
+                              <p:cTn id="348" dur="700" fill="hold"/>
+                              <p:tgtEl>
+                                <p:spTgt spid="347"/>
+                              </p:tgtEl>
+                            </p:cBhvr>
+                          </p:animEffect>
+                        </p:childTnLst>
+                      </p:cTn>
+                    </p:par>
+                    <p:par>
+                      <p:cTn id="349" presetID="2" presetClass="entr" presetSubtype="8" fill="hold" grpId="0" nodeType="clickEffect">
                         <p:stCondLst>
                           <p:cond delay="300"/>
                         </p:stCondLst>
                         <p:childTnLst>
                           <p:animEffect transition="in" filter="fly">
                             <p:cBhvr>
-                              <p:cTn id="348" dur="600" fill="hold"/>
-                              <p:tgtEl>
-                                <p:spTgt spid="347"/>
-                              </p:tgtEl>
-                            </p:cBhvr>
-                          </p:animEffect>
-                        </p:childTnLst>
-                      </p:cTn>
-                    </p:par>
-                    <p:par>
-                      <p:cTn id="349" presetID="10" presetClass="entr" presetSubtype="0" fill="hold" grpId="0" nodeType="clickEffect">
+                              <p:cTn id="350" dur="600" fill="hold"/>
+                              <p:tgtEl>
+                                <p:spTgt spid="349"/>
+                              </p:tgtEl>
+                            </p:cBhvr>
+                          </p:animEffect>
+                        </p:childTnLst>
+                      </p:cTn>
+                    </p:par>
+                    <p:par>
+                      <p:cTn id="351" presetID="10" presetClass="entr" presetSubtype="0" fill="hold" grpId="0" nodeType="clickEffect">
                         <p:stCondLst>
                           <p:cond delay="400"/>
                         </p:stCondLst>
                         <p:childTnLst>
                           <p:animEffect transition="in" filter="fade">
                             <p:cBhvr>
-                              <p:cTn id="350" dur="700" fill="hold"/>
-                              <p:tgtEl>
-                                <p:spTgt spid="349"/>
-                              </p:tgtEl>
-                            </p:cBhvr>
-                          </p:animEffect>
-                        </p:childTnLst>
-                      </p:cTn>
-                    </p:par>
-                    <p:par>
-                      <p:cTn id="351" presetID="10" presetClass="entr" presetSubtype="0" fill="hold" grpId="0" nodeType="clickEffect">
+                              <p:cTn id="352" dur="700" fill="hold"/>
+                              <p:tgtEl>
+                                <p:spTgt spid="351"/>
+                              </p:tgtEl>
+                            </p:cBhvr>
+                          </p:animEffect>
+                        </p:childTnLst>
+                      </p:cTn>
+                    </p:par>
+                    <p:par>
+                      <p:cTn id="353" presetID="10" presetClass="entr" presetSubtype="0" fill="hold" grpId="0" nodeType="clickEffect">
                         <p:stCondLst>
                           <p:cond delay="500"/>
                         </p:stCondLst>
                         <p:childTnLst>
                           <p:animEffect transition="in" filter="fade">
                             <p:cBhvr>
-                              <p:cTn id="352" dur="700" fill="hold"/>
-                              <p:tgtEl>
-                                <p:spTgt spid="351"/>
-                              </p:tgtEl>
-                            </p:cBhvr>
-                          </p:animEffect>
-                        </p:childTnLst>
-                      </p:cTn>
-                    </p:par>
-                    <p:par>
-                      <p:cTn id="353" presetID="10" presetClass="entr" presetSubtype="0" fill="hold" grpId="0" nodeType="clickEffect">
+                              <p:cTn id="354" dur="700" fill="hold"/>
+                              <p:tgtEl>
+                                <p:spTgt spid="353"/>
+                              </p:tgtEl>
+                            </p:cBhvr>
+                          </p:animEffect>
+                        </p:childTnLst>
+                      </p:cTn>
+                    </p:par>
+                    <p:par>
+                      <p:cTn id="355" presetID="10" presetClass="entr" presetSubtype="0" fill="hold" grpId="0" nodeType="clickEffect">
                         <p:stCondLst>
                           <p:cond delay="600"/>
                         </p:stCondLst>
                         <p:childTnLst>
                           <p:animEffect transition="in" filter="fade">
                             <p:cBhvr>
-                              <p:cTn id="354" dur="700" fill="hold"/>
-                              <p:tgtEl>
-                                <p:spTgt spid="353"/>
-                              </p:tgtEl>
-                            </p:cBhvr>
-                          </p:animEffect>
-                        </p:childTnLst>
-                      </p:cTn>
-                    </p:par>
-                    <p:par>
-                      <p:cTn id="355" presetID="2" presetClass="entr" presetSubtype="8" fill="hold" grpId="0" nodeType="clickEffect">
+                              <p:cTn id="356" dur="700" fill="hold"/>
+                              <p:tgtEl>
+                                <p:spTgt spid="355"/>
+                              </p:tgtEl>
+                            </p:cBhvr>
+                          </p:animEffect>
+                        </p:childTnLst>
+                      </p:cTn>
+                    </p:par>
+                    <p:par>
+                      <p:cTn id="357" presetID="2" presetClass="entr" presetSubtype="8" fill="hold" grpId="0" nodeType="clickEffect">
                         <p:stCondLst>
                           <p:cond delay="500"/>
                         </p:stCondLst>
                         <p:childTnLst>
                           <p:animEffect transition="in" filter="fly">
                             <p:cBhvr>
-                              <p:cTn id="356" dur="600" fill="hold"/>
-                              <p:tgtEl>
-                                <p:spTgt spid="355"/>
-                              </p:tgtEl>
-                            </p:cBhvr>
-                          </p:animEffect>
-                        </p:childTnLst>
-                      </p:cTn>
-                    </p:par>
-                    <p:par>
-                      <p:cTn id="357" presetID="10" presetClass="entr" presetSubtype="0" fill="hold" grpId="0" nodeType="clickEffect">
+                              <p:cTn id="358" dur="600" fill="hold"/>
+                              <p:tgtEl>
+                                <p:spTgt spid="357"/>
+                              </p:tgtEl>
+                            </p:cBhvr>
+                          </p:animEffect>
+                        </p:childTnLst>
+                      </p:cTn>
+                    </p:par>
+                    <p:par>
+                      <p:cTn id="359" presetID="10" presetClass="entr" presetSubtype="0" fill="hold" grpId="0" nodeType="clickEffect">
                         <p:stCondLst>
                           <p:cond delay="600"/>
                         </p:stCondLst>
                         <p:childTnLst>
                           <p:animEffect transition="in" filter="fade">
                             <p:cBhvr>
-                              <p:cTn id="358" dur="700" fill="hold"/>
-                              <p:tgtEl>
-                                <p:spTgt spid="357"/>
-                              </p:tgtEl>
-                            </p:cBhvr>
-                          </p:animEffect>
-                        </p:childTnLst>
-                      </p:cTn>
-                    </p:par>
-                    <p:par>
-                      <p:cTn id="359" presetID="10" presetClass="entr" presetSubtype="0" fill="hold" grpId="0" nodeType="clickEffect">
+                              <p:cTn id="360" dur="700" fill="hold"/>
+                              <p:tgtEl>
+                                <p:spTgt spid="359"/>
+                              </p:tgtEl>
+                            </p:cBhvr>
+                          </p:animEffect>
+                        </p:childTnLst>
+                      </p:cTn>
+                    </p:par>
+                    <p:par>
+                      <p:cTn id="361" presetID="10" presetClass="entr" presetSubtype="0" fill="hold" grpId="0" nodeType="clickEffect">
                         <p:stCondLst>
                           <p:cond delay="700"/>
                         </p:stCondLst>
                         <p:childTnLst>
                           <p:animEffect transition="in" filter="fade">
                             <p:cBhvr>
-                              <p:cTn id="360" dur="700" fill="hold"/>
-                              <p:tgtEl>
-                                <p:spTgt spid="359"/>
-                              </p:tgtEl>
-                            </p:cBhvr>
-                          </p:animEffect>
-                        </p:childTnLst>
-                      </p:cTn>
-                    </p:par>
-                    <p:par>
-                      <p:cTn id="361" presetID="10" presetClass="entr" presetSubtype="0" fill="hold" grpId="0" nodeType="clickEffect">
+                              <p:cTn id="362" dur="700" fill="hold"/>
+                              <p:tgtEl>
+                                <p:spTgt spid="361"/>
+                              </p:tgtEl>
+                            </p:cBhvr>
+                          </p:animEffect>
+                        </p:childTnLst>
+                      </p:cTn>
+                    </p:par>
+                    <p:par>
+                      <p:cTn id="363" presetID="10" presetClass="entr" presetSubtype="0" fill="hold" grpId="0" nodeType="clickEffect">
                         <p:stCondLst>
                           <p:cond delay="800"/>
                         </p:stCondLst>
                         <p:childTnLst>
                           <p:animEffect transition="in" filter="fade">
                             <p:cBhvr>
-                              <p:cTn id="362" dur="700" fill="hold"/>
-                              <p:tgtEl>
-                                <p:spTgt spid="361"/>
-                              </p:tgtEl>
-                            </p:cBhvr>
-                          </p:animEffect>
-                        </p:childTnLst>
-                      </p:cTn>
-                    </p:par>
-                    <p:par>
-                      <p:cTn id="363" presetID="2" presetClass="entr" presetSubtype="8" fill="hold" grpId="0" nodeType="clickEffect">
+                              <p:cTn id="364" dur="700" fill="hold"/>
+                              <p:tgtEl>
+                                <p:spTgt spid="363"/>
+                              </p:tgtEl>
+                            </p:cBhvr>
+                          </p:animEffect>
+                        </p:childTnLst>
+                      </p:cTn>
+                    </p:par>
+                    <p:par>
+                      <p:cTn id="365" presetID="2" presetClass="entr" presetSubtype="8" fill="hold" grpId="0" nodeType="clickEffect">
                         <p:stCondLst>
                           <p:cond delay="700"/>
                         </p:stCondLst>
                         <p:childTnLst>
                           <p:animEffect transition="in" filter="fly">
                             <p:cBhvr>
-                              <p:cTn id="364" dur="600" fill="hold"/>
-                              <p:tgtEl>
-                                <p:spTgt spid="363"/>
-                              </p:tgtEl>
-                            </p:cBhvr>
-                          </p:animEffect>
-                        </p:childTnLst>
-                      </p:cTn>
-                    </p:par>
-                    <p:par>
-                      <p:cTn id="365" presetID="10" presetClass="entr" presetSubtype="0" fill="hold" grpId="0" nodeType="clickEffect">
+                              <p:cTn id="366" dur="600" fill="hold"/>
+                              <p:tgtEl>
+                                <p:spTgt spid="365"/>
+                              </p:tgtEl>
+                            </p:cBhvr>
+                          </p:animEffect>
+                        </p:childTnLst>
+                      </p:cTn>
+                    </p:par>
+                    <p:par>
+                      <p:cTn id="367" presetID="10" presetClass="entr" presetSubtype="0" fill="hold" grpId="0" nodeType="clickEffect">
                         <p:stCondLst>
                           <p:cond delay="800"/>
                         </p:stCondLst>
                         <p:childTnLst>
                           <p:animEffect transition="in" filter="fade">
                             <p:cBhvr>
-                              <p:cTn id="366" dur="700" fill="hold"/>
-                              <p:tgtEl>
-                                <p:spTgt spid="365"/>
-                              </p:tgtEl>
-                            </p:cBhvr>
-                          </p:animEffect>
-                        </p:childTnLst>
-                      </p:cTn>
-                    </p:par>
-                    <p:par>
-                      <p:cTn id="367" presetID="10" presetClass="entr" presetSubtype="0" fill="hold" grpId="0" nodeType="clickEffect">
+                              <p:cTn id="368" dur="700" fill="hold"/>
+                              <p:tgtEl>
+                                <p:spTgt spid="367"/>
+                              </p:tgtEl>
+                            </p:cBhvr>
+                          </p:animEffect>
+                        </p:childTnLst>
+                      </p:cTn>
+                    </p:par>
+                    <p:par>
+                      <p:cTn id="369" presetID="10" presetClass="entr" presetSubtype="0" fill="hold" grpId="0" nodeType="clickEffect">
                         <p:stCondLst>
                           <p:cond delay="900"/>
                         </p:stCondLst>
                         <p:childTnLst>
                           <p:animEffect transition="in" filter="fade">
                             <p:cBhvr>
-                              <p:cTn id="368" dur="700" fill="hold"/>
-                              <p:tgtEl>
-                                <p:spTgt spid="367"/>
-                              </p:tgtEl>
-                            </p:cBhvr>
-                          </p:animEffect>
-                        </p:childTnLst>
-                      </p:cTn>
-                    </p:par>
-                    <p:par>
-                      <p:cTn id="369" presetID="10" presetClass="entr" presetSubtype="0" fill="hold" grpId="0" nodeType="clickEffect">
+                              <p:cTn id="370" dur="700" fill="hold"/>
+                              <p:tgtEl>
+                                <p:spTgt spid="369"/>
+                              </p:tgtEl>
+                            </p:cBhvr>
+                          </p:animEffect>
+                        </p:childTnLst>
+                      </p:cTn>
+                    </p:par>
+                    <p:par>
+                      <p:cTn id="371" presetID="10" presetClass="entr" presetSubtype="0" fill="hold" grpId="0" nodeType="clickEffect">
                         <p:stCondLst>
                           <p:cond delay="1000"/>
                         </p:stCondLst>
                         <p:childTnLst>
                           <p:animEffect transition="in" filter="fade">
                             <p:cBhvr>
-                              <p:cTn id="370" dur="700" fill="hold"/>
-                              <p:tgtEl>
-                                <p:spTgt spid="369"/>
-                              </p:tgtEl>
-                            </p:cBhvr>
-                          </p:animEffect>
-                        </p:childTnLst>
-                      </p:cTn>
-                    </p:par>
-                    <p:par>
-                      <p:cTn id="371" presetID="2" presetClass="entr" presetSubtype="8" fill="hold" grpId="0" nodeType="clickEffect">
+                              <p:cTn id="372" dur="700" fill="hold"/>
+                              <p:tgtEl>
+                                <p:spTgt spid="371"/>
+                              </p:tgtEl>
+                            </p:cBhvr>
+                          </p:animEffect>
+                        </p:childTnLst>
+                      </p:cTn>
+                    </p:par>
+                    <p:par>
+                      <p:cTn id="373" presetID="2" presetClass="entr" presetSubtype="8" fill="hold" grpId="0" nodeType="clickEffect">
                         <p:stCondLst>
                           <p:cond delay="900"/>
                         </p:stCondLst>
                         <p:childTnLst>
                           <p:animEffect transition="in" filter="fly">
                             <p:cBhvr>
-                              <p:cTn id="372" dur="600" fill="hold"/>
-                              <p:tgtEl>
-                                <p:spTgt spid="371"/>
-                              </p:tgtEl>
-                            </p:cBhvr>
-                          </p:animEffect>
-                        </p:childTnLst>
-                      </p:cTn>
-                    </p:par>
-                    <p:par>
-                      <p:cTn id="373" presetID="10" presetClass="entr" presetSubtype="0" fill="hold" grpId="0" nodeType="clickEffect">
+                              <p:cTn id="374" dur="600" fill="hold"/>
+                              <p:tgtEl>
+                                <p:spTgt spid="373"/>
+                              </p:tgtEl>
+                            </p:cBhvr>
+                          </p:animEffect>
+                        </p:childTnLst>
+                      </p:cTn>
+                    </p:par>
+                    <p:par>
+                      <p:cTn id="375" presetID="10" presetClass="entr" presetSubtype="0" fill="hold" grpId="0" nodeType="clickEffect">
                         <p:stCondLst>
                           <p:cond delay="1000"/>
                         </p:stCondLst>
                         <p:childTnLst>
                           <p:animEffect transition="in" filter="fade">
                             <p:cBhvr>
-                              <p:cTn id="374" dur="700" fill="hold"/>
-                              <p:tgtEl>
-                                <p:spTgt spid="373"/>
-                              </p:tgtEl>
-                            </p:cBhvr>
-                          </p:animEffect>
-                        </p:childTnLst>
-                      </p:cTn>
-                    </p:par>
-                    <p:par>
-                      <p:cTn id="375" presetID="10" presetClass="entr" presetSubtype="0" fill="hold" grpId="0" nodeType="clickEffect">
+                              <p:cTn id="376" dur="700" fill="hold"/>
+                              <p:tgtEl>
+                                <p:spTgt spid="375"/>
+                              </p:tgtEl>
+                            </p:cBhvr>
+                          </p:animEffect>
+                        </p:childTnLst>
+                      </p:cTn>
+                    </p:par>
+                    <p:par>
+                      <p:cTn id="377" presetID="10" presetClass="entr" presetSubtype="0" fill="hold" grpId="0" nodeType="clickEffect">
                         <p:stCondLst>
                           <p:cond delay="1100"/>
                         </p:stCondLst>
                         <p:childTnLst>
                           <p:animEffect transition="in" filter="fade">
                             <p:cBhvr>
-                              <p:cTn id="376" dur="700" fill="hold"/>
-                              <p:tgtEl>
-                                <p:spTgt spid="375"/>
-                              </p:tgtEl>
-                            </p:cBhvr>
-                          </p:animEffect>
-                        </p:childTnLst>
-                      </p:cTn>
-                    </p:par>
-                    <p:par>
-                      <p:cTn id="377" presetID="10" presetClass="entr" presetSubtype="0" fill="hold" grpId="0" nodeType="clickEffect">
+                              <p:cTn id="378" dur="700" fill="hold"/>
+                              <p:tgtEl>
+                                <p:spTgt spid="377"/>
+                              </p:tgtEl>
+                            </p:cBhvr>
+                          </p:animEffect>
+                        </p:childTnLst>
+                      </p:cTn>
+                    </p:par>
+                    <p:par>
+                      <p:cTn id="379" presetID="10" presetClass="entr" presetSubtype="0" fill="hold" grpId="0" nodeType="clickEffect">
                         <p:stCondLst>
                           <p:cond delay="1200"/>
                         </p:stCondLst>
                         <p:childTnLst>
                           <p:animEffect transition="in" filter="fade">
                             <p:cBhvr>
-                              <p:cTn id="378" dur="700" fill="hold"/>
-                              <p:tgtEl>
-                                <p:spTgt spid="377"/>
-                              </p:tgtEl>
-                            </p:cBhvr>
-                          </p:animEffect>
-                        </p:childTnLst>
-                      </p:cTn>
-                    </p:par>
-                    <p:par>
-                      <p:cTn id="379" presetID="2" presetClass="entr" presetSubtype="8" fill="hold" grpId="0" nodeType="clickEffect">
+                              <p:cTn id="380" dur="700" fill="hold"/>
+                              <p:tgtEl>
+                                <p:spTgt spid="379"/>
+                              </p:tgtEl>
+                            </p:cBhvr>
+                          </p:animEffect>
+                        </p:childTnLst>
+                      </p:cTn>
+                    </p:par>
+                    <p:par>
+                      <p:cTn id="381" presetID="2" presetClass="entr" presetSubtype="8" fill="hold" grpId="0" nodeType="clickEffect">
                         <p:stCondLst>
                           <p:cond delay="1100"/>
                         </p:stCondLst>
                         <p:childTnLst>
                           <p:animEffect transition="in" filter="fly">
                             <p:cBhvr>
-                              <p:cTn id="380" dur="600" fill="hold"/>
-                              <p:tgtEl>
-                                <p:spTgt spid="379"/>
-                              </p:tgtEl>
-                            </p:cBhvr>
-                          </p:animEffect>
-                        </p:childTnLst>
-                      </p:cTn>
-                    </p:par>
-                    <p:par>
-                      <p:cTn id="381" presetID="10" presetClass="entr" presetSubtype="0" fill="hold" grpId="0" nodeType="clickEffect">
+                              <p:cTn id="382" dur="600" fill="hold"/>
+                              <p:tgtEl>
+                                <p:spTgt spid="381"/>
+                              </p:tgtEl>
+                            </p:cBhvr>
+                          </p:animEffect>
+                        </p:childTnLst>
+                      </p:cTn>
+                    </p:par>
+                    <p:par>
+                      <p:cTn id="383" presetID="10" presetClass="entr" presetSubtype="0" fill="hold" grpId="0" nodeType="clickEffect">
                         <p:stCondLst>
                           <p:cond delay="1200"/>
                         </p:stCondLst>
                         <p:childTnLst>
                           <p:animEffect transition="in" filter="fade">
                             <p:cBhvr>
-                              <p:cTn id="382" dur="700" fill="hold"/>
-                              <p:tgtEl>
-                                <p:spTgt spid="381"/>
-                              </p:tgtEl>
-                            </p:cBhvr>
-                          </p:animEffect>
-                        </p:childTnLst>
-                      </p:cTn>
-                    </p:par>
-                    <p:par>
-                      <p:cTn id="383" presetID="10" presetClass="entr" presetSubtype="0" fill="hold" grpId="0" nodeType="clickEffect">
+                              <p:cTn id="384" dur="700" fill="hold"/>
+                              <p:tgtEl>
+                                <p:spTgt spid="383"/>
+                              </p:tgtEl>
+                            </p:cBhvr>
+                          </p:animEffect>
+                        </p:childTnLst>
+                      </p:cTn>
+                    </p:par>
+                    <p:par>
+                      <p:cTn id="385" presetID="10" presetClass="entr" presetSubtype="0" fill="hold" grpId="0" nodeType="clickEffect">
                         <p:stCondLst>
                           <p:cond delay="1300"/>
                         </p:stCondLst>
                         <p:childTnLst>
                           <p:animEffect transition="in" filter="fade">
                             <p:cBhvr>
-                              <p:cTn id="384" dur="700" fill="hold"/>
-                              <p:tgtEl>
-                                <p:spTgt spid="383"/>
-                              </p:tgtEl>
-                            </p:cBhvr>
-                          </p:animEffect>
-                        </p:childTnLst>
-                      </p:cTn>
-                    </p:par>
-                    <p:par>
-                      <p:cTn id="385" presetID="10" presetClass="entr" presetSubtype="0" fill="hold" grpId="0" nodeType="clickEffect">
+                              <p:cTn id="386" dur="700" fill="hold"/>
+                              <p:tgtEl>
+                                <p:spTgt spid="385"/>
+                              </p:tgtEl>
+                            </p:cBhvr>
+                          </p:animEffect>
+                        </p:childTnLst>
+                      </p:cTn>
+                    </p:par>
+                    <p:par>
+                      <p:cTn id="387" presetID="10" presetClass="entr" presetSubtype="0" fill="hold" grpId="0" nodeType="clickEffect">
                         <p:stCondLst>
                           <p:cond delay="1400"/>
                         </p:stCondLst>
                         <p:childTnLst>
                           <p:animEffect transition="in" filter="fade">
                             <p:cBhvr>
-                              <p:cTn id="386" dur="700" fill="hold"/>
-                              <p:tgtEl>
-                                <p:spTgt spid="385"/>
+                              <p:cTn id="388" dur="700" fill="hold"/>
+                              <p:tgtEl>
+                                <p:spTgt spid="387"/>
                               </p:tgtEl>
                             </p:cBhvr>
                           </p:animEffect>
@@ -7101,7 +7153,7 @@
       </p:sp>
       <p:sp>
         <p:nvSpPr>
-          <p:cNvPr id="389" name="Rectangle 388"/>
+          <p:cNvPr id="391" name="Rectangle 390"/>
           <p:cNvSpPr/>
           <p:nvPr/>
         </p:nvSpPr>
@@ -7144,7 +7196,7 @@
       </p:sp>
       <p:sp>
         <p:nvSpPr>
-          <p:cNvPr id="391" name="Rectangle 390"/>
+          <p:cNvPr id="393" name="Rectangle 392"/>
           <p:cNvSpPr/>
           <p:nvPr/>
         </p:nvSpPr>
@@ -7187,7 +7239,7 @@
       </p:sp>
       <p:sp>
         <p:nvSpPr>
-          <p:cNvPr id="393" name="TextBox 392"/>
+          <p:cNvPr id="395" name="TextBox 394"/>
           <p:cNvSpPr txBox="1"/>
           <p:nvPr/>
         </p:nvSpPr>
@@ -7222,7 +7274,7 @@
       </p:sp>
       <p:sp>
         <p:nvSpPr>
-          <p:cNvPr id="395" name="TextBox 394"/>
+          <p:cNvPr id="397" name="TextBox 396"/>
           <p:cNvSpPr txBox="1"/>
           <p:nvPr/>
         </p:nvSpPr>
@@ -7265,14 +7317,14 @@
                 <p:cTn id="2" dur="indefinite" nodeType="mainSeq">
                   <p:childTnLst>
                     <p:par>
-                      <p:cTn id="387" presetID="10" presetClass="entr" presetSubtype="0" fill="hold" grpId="0" nodeType="clickEffect">
+                      <p:cTn id="389" presetID="10" presetClass="entr" presetSubtype="0" fill="hold" grpId="0" nodeType="clickEffect">
                         <p:stCondLst>
                           <p:cond delay="0"/>
                         </p:stCondLst>
                         <p:childTnLst>
                           <p:animEffect transition="in" filter="fade">
                             <p:cBhvr>
-                              <p:cTn id="388" dur="700" fill="hold"/>
+                              <p:cTn id="390" dur="700" fill="hold"/>
                               <p:tgtEl>
                                 <p:spTgt spid="3"/>
                               </p:tgtEl>
@@ -7282,67 +7334,67 @@
                       </p:cTn>
                     </p:par>
                     <p:par>
-                      <p:cTn id="389" presetID="10" presetClass="entr" presetSubtype="0" fill="hold" grpId="0" nodeType="clickEffect">
+                      <p:cTn id="391" presetID="10" presetClass="entr" presetSubtype="0" fill="hold" grpId="0" nodeType="clickEffect">
                         <p:stCondLst>
                           <p:cond delay="0"/>
                         </p:stCondLst>
                         <p:childTnLst>
                           <p:animEffect transition="in" filter="fade">
                             <p:cBhvr>
-                              <p:cTn id="390" dur="700" fill="hold"/>
-                              <p:tgtEl>
-                                <p:spTgt spid="389"/>
-                              </p:tgtEl>
-                            </p:cBhvr>
-                          </p:animEffect>
-                        </p:childTnLst>
-                      </p:cTn>
-                    </p:par>
-                    <p:par>
-                      <p:cTn id="391" presetID="10" presetClass="entr" presetSubtype="0" fill="hold" grpId="0" nodeType="clickEffect">
+                              <p:cTn id="392" dur="700" fill="hold"/>
+                              <p:tgtEl>
+                                <p:spTgt spid="391"/>
+                              </p:tgtEl>
+                            </p:cBhvr>
+                          </p:animEffect>
+                        </p:childTnLst>
+                      </p:cTn>
+                    </p:par>
+                    <p:par>
+                      <p:cTn id="393" presetID="10" presetClass="entr" presetSubtype="0" fill="hold" grpId="0" nodeType="clickEffect">
                         <p:stCondLst>
                           <p:cond delay="300"/>
                         </p:stCondLst>
                         <p:childTnLst>
                           <p:animEffect transition="in" filter="fade">
                             <p:cBhvr>
-                              <p:cTn id="392" dur="700" fill="hold"/>
-                              <p:tgtEl>
-                                <p:spTgt spid="391"/>
-                              </p:tgtEl>
-                            </p:cBhvr>
-                          </p:animEffect>
-                        </p:childTnLst>
-                      </p:cTn>
-                    </p:par>
-                    <p:par>
-                      <p:cTn id="393" presetID="22" presetClass="entr" presetSubtype="0" fill="hold" grpId="0" nodeType="clickEffect">
+                              <p:cTn id="394" dur="700" fill="hold"/>
+                              <p:tgtEl>
+                                <p:spTgt spid="393"/>
+                              </p:tgtEl>
+                            </p:cBhvr>
+                          </p:animEffect>
+                        </p:childTnLst>
+                      </p:cTn>
+                    </p:par>
+                    <p:par>
+                      <p:cTn id="395" presetID="22" presetClass="entr" presetSubtype="0" fill="hold" grpId="0" nodeType="clickEffect">
                         <p:stCondLst>
                           <p:cond delay="100"/>
                         </p:stCondLst>
                         <p:childTnLst>
                           <p:animEffect transition="in" filter="zoom">
                             <p:cBhvr>
-                              <p:cTn id="394" dur="500" fill="hold"/>
-                              <p:tgtEl>
-                                <p:spTgt spid="393"/>
-                              </p:tgtEl>
-                            </p:cBhvr>
-                          </p:animEffect>
-                        </p:childTnLst>
-                      </p:cTn>
-                    </p:par>
-                    <p:par>
-                      <p:cTn id="395" presetID="10" presetClass="entr" presetSubtype="0" fill="hold" grpId="0" nodeType="clickEffect">
+                              <p:cTn id="396" dur="500" fill="hold"/>
+                              <p:tgtEl>
+                                <p:spTgt spid="395"/>
+                              </p:tgtEl>
+                            </p:cBhvr>
+                          </p:animEffect>
+                        </p:childTnLst>
+                      </p:cTn>
+                    </p:par>
+                    <p:par>
+                      <p:cTn id="397" presetID="10" presetClass="entr" presetSubtype="0" fill="hold" grpId="0" nodeType="clickEffect">
                         <p:stCondLst>
                           <p:cond delay="400"/>
                         </p:stCondLst>
                         <p:childTnLst>
                           <p:animEffect transition="in" filter="fade">
                             <p:cBhvr>
-                              <p:cTn id="396" dur="700" fill="hold"/>
-                              <p:tgtEl>
-                                <p:spTgt spid="395"/>
+                              <p:cTn id="398" dur="700" fill="hold"/>
+                              <p:tgtEl>
+                                <p:spTgt spid="397"/>
                               </p:tgtEl>
                             </p:cBhvr>
                           </p:animEffect>
@@ -7511,7 +7563,7 @@
       </p:sp>
       <p:sp>
         <p:nvSpPr>
-          <p:cNvPr id="399" name="Rectangle 398"/>
+          <p:cNvPr id="401" name="Rectangle 400"/>
           <p:cNvSpPr/>
           <p:nvPr/>
         </p:nvSpPr>
@@ -7556,7 +7608,7 @@
       </p:sp>
       <p:sp>
         <p:nvSpPr>
-          <p:cNvPr id="401" name="Rectangle 400"/>
+          <p:cNvPr id="403" name="Rectangle 402"/>
           <p:cNvSpPr/>
           <p:nvPr/>
         </p:nvSpPr>
@@ -7599,7 +7651,7 @@
       </p:sp>
       <p:sp>
         <p:nvSpPr>
-          <p:cNvPr id="403" name="TextBox 402"/>
+          <p:cNvPr id="405" name="TextBox 404"/>
           <p:cNvSpPr txBox="1"/>
           <p:nvPr/>
         </p:nvSpPr>
@@ -7634,7 +7686,7 @@
       </p:sp>
       <p:sp>
         <p:nvSpPr>
-          <p:cNvPr id="405" name="TextBox 404"/>
+          <p:cNvPr id="407" name="TextBox 406"/>
           <p:cNvSpPr txBox="1"/>
           <p:nvPr/>
         </p:nvSpPr>
@@ -7669,7 +7721,7 @@
       </p:sp>
       <p:sp>
         <p:nvSpPr>
-          <p:cNvPr id="407" name="TextBox 406"/>
+          <p:cNvPr id="409" name="TextBox 408"/>
           <p:cNvSpPr txBox="1"/>
           <p:nvPr/>
         </p:nvSpPr>
@@ -7704,7 +7756,7 @@
       </p:sp>
       <p:sp>
         <p:nvSpPr>
-          <p:cNvPr id="409" name="TextBox 408"/>
+          <p:cNvPr id="411" name="TextBox 410"/>
           <p:cNvSpPr txBox="1"/>
           <p:nvPr/>
         </p:nvSpPr>
@@ -7739,7 +7791,7 @@
       </p:sp>
       <p:sp>
         <p:nvSpPr>
-          <p:cNvPr id="411" name="Rectangle 410"/>
+          <p:cNvPr id="413" name="Rectangle 412"/>
           <p:cNvSpPr/>
           <p:nvPr/>
         </p:nvSpPr>
@@ -7784,7 +7836,7 @@
       </p:sp>
       <p:sp>
         <p:nvSpPr>
-          <p:cNvPr id="413" name="Rectangle 412"/>
+          <p:cNvPr id="415" name="Rectangle 414"/>
           <p:cNvSpPr/>
           <p:nvPr/>
         </p:nvSpPr>
@@ -7827,7 +7879,7 @@
       </p:sp>
       <p:sp>
         <p:nvSpPr>
-          <p:cNvPr id="415" name="TextBox 414"/>
+          <p:cNvPr id="417" name="TextBox 416"/>
           <p:cNvSpPr txBox="1"/>
           <p:nvPr/>
         </p:nvSpPr>
@@ -7862,7 +7914,7 @@
       </p:sp>
       <p:sp>
         <p:nvSpPr>
-          <p:cNvPr id="417" name="TextBox 416"/>
+          <p:cNvPr id="419" name="TextBox 418"/>
           <p:cNvSpPr txBox="1"/>
           <p:nvPr/>
         </p:nvSpPr>
@@ -7897,7 +7949,7 @@
       </p:sp>
       <p:sp>
         <p:nvSpPr>
-          <p:cNvPr id="419" name="TextBox 418"/>
+          <p:cNvPr id="421" name="TextBox 420"/>
           <p:cNvSpPr txBox="1"/>
           <p:nvPr/>
         </p:nvSpPr>
@@ -7932,7 +7984,7 @@
       </p:sp>
       <p:sp>
         <p:nvSpPr>
-          <p:cNvPr id="421" name="TextBox 420"/>
+          <p:cNvPr id="423" name="TextBox 422"/>
           <p:cNvSpPr txBox="1"/>
           <p:nvPr/>
         </p:nvSpPr>
@@ -7967,7 +8019,7 @@
       </p:sp>
       <p:sp>
         <p:nvSpPr>
-          <p:cNvPr id="423" name="Rectangle 422"/>
+          <p:cNvPr id="425" name="Rectangle 424"/>
           <p:cNvSpPr/>
           <p:nvPr/>
         </p:nvSpPr>
@@ -8012,7 +8064,7 @@
       </p:sp>
       <p:sp>
         <p:nvSpPr>
-          <p:cNvPr id="425" name="Rectangle 424"/>
+          <p:cNvPr id="427" name="Rectangle 426"/>
           <p:cNvSpPr/>
           <p:nvPr/>
         </p:nvSpPr>
@@ -8055,7 +8107,7 @@
       </p:sp>
       <p:sp>
         <p:nvSpPr>
-          <p:cNvPr id="427" name="TextBox 426"/>
+          <p:cNvPr id="429" name="TextBox 428"/>
           <p:cNvSpPr txBox="1"/>
           <p:nvPr/>
         </p:nvSpPr>
@@ -8090,7 +8142,7 @@
       </p:sp>
       <p:sp>
         <p:nvSpPr>
-          <p:cNvPr id="429" name="TextBox 428"/>
+          <p:cNvPr id="431" name="TextBox 430"/>
           <p:cNvSpPr txBox="1"/>
           <p:nvPr/>
         </p:nvSpPr>
@@ -8125,7 +8177,7 @@
       </p:sp>
       <p:sp>
         <p:nvSpPr>
-          <p:cNvPr id="431" name="TextBox 430"/>
+          <p:cNvPr id="433" name="TextBox 432"/>
           <p:cNvSpPr txBox="1"/>
           <p:nvPr/>
         </p:nvSpPr>
@@ -8160,7 +8212,7 @@
       </p:sp>
       <p:sp>
         <p:nvSpPr>
-          <p:cNvPr id="433" name="TextBox 432"/>
+          <p:cNvPr id="435" name="TextBox 434"/>
           <p:cNvSpPr txBox="1"/>
           <p:nvPr/>
         </p:nvSpPr>
@@ -8195,7 +8247,7 @@
       </p:sp>
       <p:sp>
         <p:nvSpPr>
-          <p:cNvPr id="435" name="Rectangle 434"/>
+          <p:cNvPr id="437" name="Rectangle 436"/>
           <p:cNvSpPr/>
           <p:nvPr/>
         </p:nvSpPr>
@@ -8240,7 +8292,7 @@
       </p:sp>
       <p:sp>
         <p:nvSpPr>
-          <p:cNvPr id="437" name="Rectangle 436"/>
+          <p:cNvPr id="439" name="Rectangle 438"/>
           <p:cNvSpPr/>
           <p:nvPr/>
         </p:nvSpPr>
@@ -8283,7 +8335,7 @@
       </p:sp>
       <p:sp>
         <p:nvSpPr>
-          <p:cNvPr id="439" name="TextBox 438"/>
+          <p:cNvPr id="441" name="TextBox 440"/>
           <p:cNvSpPr txBox="1"/>
           <p:nvPr/>
         </p:nvSpPr>
@@ -8318,7 +8370,7 @@
       </p:sp>
       <p:sp>
         <p:nvSpPr>
-          <p:cNvPr id="441" name="TextBox 440"/>
+          <p:cNvPr id="443" name="TextBox 442"/>
           <p:cNvSpPr txBox="1"/>
           <p:nvPr/>
         </p:nvSpPr>
@@ -8353,7 +8405,7 @@
       </p:sp>
       <p:sp>
         <p:nvSpPr>
-          <p:cNvPr id="443" name="TextBox 442"/>
+          <p:cNvPr id="445" name="TextBox 444"/>
           <p:cNvSpPr txBox="1"/>
           <p:nvPr/>
         </p:nvSpPr>
@@ -8388,7 +8440,7 @@
       </p:sp>
       <p:sp>
         <p:nvSpPr>
-          <p:cNvPr id="445" name="TextBox 444"/>
+          <p:cNvPr id="447" name="TextBox 446"/>
           <p:cNvSpPr txBox="1"/>
           <p:nvPr/>
         </p:nvSpPr>
@@ -8423,7 +8475,7 @@
       </p:sp>
       <p:sp>
         <p:nvSpPr>
-          <p:cNvPr id="447" name="Rectangle 446"/>
+          <p:cNvPr id="449" name="Rectangle 448"/>
           <p:cNvSpPr/>
           <p:nvPr/>
         </p:nvSpPr>
@@ -8468,7 +8520,7 @@
       </p:sp>
       <p:sp>
         <p:nvSpPr>
-          <p:cNvPr id="449" name="Rectangle 448"/>
+          <p:cNvPr id="451" name="Rectangle 450"/>
           <p:cNvSpPr/>
           <p:nvPr/>
         </p:nvSpPr>
@@ -8511,7 +8563,7 @@
       </p:sp>
       <p:sp>
         <p:nvSpPr>
-          <p:cNvPr id="451" name="TextBox 450"/>
+          <p:cNvPr id="453" name="TextBox 452"/>
           <p:cNvSpPr txBox="1"/>
           <p:nvPr/>
         </p:nvSpPr>
@@ -8546,7 +8598,7 @@
       </p:sp>
       <p:sp>
         <p:nvSpPr>
-          <p:cNvPr id="453" name="TextBox 452"/>
+          <p:cNvPr id="455" name="TextBox 454"/>
           <p:cNvSpPr txBox="1"/>
           <p:nvPr/>
         </p:nvSpPr>
@@ -8581,7 +8633,7 @@
       </p:sp>
       <p:sp>
         <p:nvSpPr>
-          <p:cNvPr id="455" name="TextBox 454"/>
+          <p:cNvPr id="457" name="TextBox 456"/>
           <p:cNvSpPr txBox="1"/>
           <p:nvPr/>
         </p:nvSpPr>
@@ -8616,7 +8668,7 @@
       </p:sp>
       <p:sp>
         <p:nvSpPr>
-          <p:cNvPr id="457" name="TextBox 456"/>
+          <p:cNvPr id="459" name="TextBox 458"/>
           <p:cNvSpPr txBox="1"/>
           <p:nvPr/>
         </p:nvSpPr>
@@ -8659,14 +8711,14 @@
                 <p:cTn id="2" dur="indefinite" nodeType="mainSeq">
                   <p:childTnLst>
                     <p:par>
-                      <p:cTn id="397" presetID="2" presetClass="entr" presetSubtype="8" fill="hold" grpId="0" nodeType="clickEffect">
+                      <p:cTn id="399" presetID="2" presetClass="entr" presetSubtype="8" fill="hold" grpId="0" nodeType="clickEffect">
                         <p:stCondLst>
                           <p:cond delay="0"/>
                         </p:stCondLst>
                         <p:childTnLst>
                           <p:animEffect transition="in" filter="fly">
                             <p:cBhvr>
-                              <p:cTn id="398" dur="600" fill="hold"/>
+                              <p:cTn id="400" dur="600" fill="hold"/>
                               <p:tgtEl>
                                 <p:spTgt spid="4"/>
                               </p:tgtEl>
@@ -8676,509 +8728,509 @@
                       </p:cTn>
                     </p:par>
                     <p:par>
-                      <p:cTn id="399" presetID="2" presetClass="entr" presetSubtype="8" fill="hold" grpId="0" nodeType="clickEffect">
+                      <p:cTn id="401" presetID="2" presetClass="entr" presetSubtype="8" fill="hold" grpId="0" nodeType="clickEffect">
                         <p:stCondLst>
                           <p:cond delay="200"/>
                         </p:stCondLst>
                         <p:childTnLst>
                           <p:animEffect transition="in" filter="fly">
                             <p:cBhvr>
-                              <p:cTn id="400" dur="600" fill="hold"/>
-                              <p:tgtEl>
-                                <p:spTgt spid="399"/>
-                              </p:tgtEl>
-                            </p:cBhvr>
-                          </p:animEffect>
-                        </p:childTnLst>
-                      </p:cTn>
-                    </p:par>
-                    <p:par>
-                      <p:cTn id="401" presetID="22" presetClass="entr" presetSubtype="0" fill="hold" grpId="0" nodeType="clickEffect">
+                              <p:cTn id="402" dur="600" fill="hold"/>
+                              <p:tgtEl>
+                                <p:spTgt spid="401"/>
+                              </p:tgtEl>
+                            </p:cBhvr>
+                          </p:animEffect>
+                        </p:childTnLst>
+                      </p:cTn>
+                    </p:par>
+                    <p:par>
+                      <p:cTn id="403" presetID="22" presetClass="entr" presetSubtype="0" fill="hold" grpId="0" nodeType="clickEffect">
                         <p:stCondLst>
                           <p:cond delay="300"/>
                         </p:stCondLst>
                         <p:childTnLst>
                           <p:animEffect transition="in" filter="zoom">
                             <p:cBhvr>
-                              <p:cTn id="402" dur="500" fill="hold"/>
-                              <p:tgtEl>
-                                <p:spTgt spid="401"/>
-                              </p:tgtEl>
-                            </p:cBhvr>
-                          </p:animEffect>
-                        </p:childTnLst>
-                      </p:cTn>
-                    </p:par>
-                    <p:par>
-                      <p:cTn id="403" presetID="22" presetClass="entr" presetSubtype="0" fill="hold" grpId="0" nodeType="clickEffect">
+                              <p:cTn id="404" dur="500" fill="hold"/>
+                              <p:tgtEl>
+                                <p:spTgt spid="403"/>
+                              </p:tgtEl>
+                            </p:cBhvr>
+                          </p:animEffect>
+                        </p:childTnLst>
+                      </p:cTn>
+                    </p:par>
+                    <p:par>
+                      <p:cTn id="405" presetID="22" presetClass="entr" presetSubtype="0" fill="hold" grpId="0" nodeType="clickEffect">
                         <p:stCondLst>
                           <p:cond delay="300"/>
                         </p:stCondLst>
                         <p:childTnLst>
                           <p:animEffect transition="in" filter="zoom">
                             <p:cBhvr>
-                              <p:cTn id="404" dur="500" fill="hold"/>
-                              <p:tgtEl>
-                                <p:spTgt spid="403"/>
-                              </p:tgtEl>
-                            </p:cBhvr>
-                          </p:animEffect>
-                        </p:childTnLst>
-                      </p:cTn>
-                    </p:par>
-                    <p:par>
-                      <p:cTn id="405" presetID="10" presetClass="entr" presetSubtype="0" fill="hold" grpId="0" nodeType="clickEffect">
+                              <p:cTn id="406" dur="500" fill="hold"/>
+                              <p:tgtEl>
+                                <p:spTgt spid="405"/>
+                              </p:tgtEl>
+                            </p:cBhvr>
+                          </p:animEffect>
+                        </p:childTnLst>
+                      </p:cTn>
+                    </p:par>
+                    <p:par>
+                      <p:cTn id="407" presetID="10" presetClass="entr" presetSubtype="0" fill="hold" grpId="0" nodeType="clickEffect">
                         <p:stCondLst>
                           <p:cond delay="400"/>
                         </p:stCondLst>
                         <p:childTnLst>
                           <p:animEffect transition="in" filter="fade">
                             <p:cBhvr>
-                              <p:cTn id="406" dur="700" fill="hold"/>
-                              <p:tgtEl>
-                                <p:spTgt spid="405"/>
-                              </p:tgtEl>
-                            </p:cBhvr>
-                          </p:animEffect>
-                        </p:childTnLst>
-                      </p:cTn>
-                    </p:par>
-                    <p:par>
-                      <p:cTn id="407" presetID="10" presetClass="entr" presetSubtype="0" fill="hold" grpId="0" nodeType="clickEffect">
+                              <p:cTn id="408" dur="700" fill="hold"/>
+                              <p:tgtEl>
+                                <p:spTgt spid="407"/>
+                              </p:tgtEl>
+                            </p:cBhvr>
+                          </p:animEffect>
+                        </p:childTnLst>
+                      </p:cTn>
+                    </p:par>
+                    <p:par>
+                      <p:cTn id="409" presetID="10" presetClass="entr" presetSubtype="0" fill="hold" grpId="0" nodeType="clickEffect">
                         <p:stCondLst>
                           <p:cond delay="500"/>
                         </p:stCondLst>
                         <p:childTnLst>
                           <p:animEffect transition="in" filter="fade">
                             <p:cBhvr>
-                              <p:cTn id="408" dur="700" fill="hold"/>
-                              <p:tgtEl>
-                                <p:spTgt spid="407"/>
-                              </p:tgtEl>
-                            </p:cBhvr>
-                          </p:animEffect>
-                        </p:childTnLst>
-                      </p:cTn>
-                    </p:par>
-                    <p:par>
-                      <p:cTn id="409" presetID="10" presetClass="entr" presetSubtype="0" fill="hold" grpId="0" nodeType="clickEffect">
+                              <p:cTn id="410" dur="700" fill="hold"/>
+                              <p:tgtEl>
+                                <p:spTgt spid="409"/>
+                              </p:tgtEl>
+                            </p:cBhvr>
+                          </p:animEffect>
+                        </p:childTnLst>
+                      </p:cTn>
+                    </p:par>
+                    <p:par>
+                      <p:cTn id="411" presetID="10" presetClass="entr" presetSubtype="0" fill="hold" grpId="0" nodeType="clickEffect">
                         <p:stCondLst>
                           <p:cond delay="600"/>
                         </p:stCondLst>
                         <p:childTnLst>
                           <p:animEffect transition="in" filter="fade">
                             <p:cBhvr>
-                              <p:cTn id="410" dur="700" fill="hold"/>
-                              <p:tgtEl>
-                                <p:spTgt spid="409"/>
-                              </p:tgtEl>
-                            </p:cBhvr>
-                          </p:animEffect>
-                        </p:childTnLst>
-                      </p:cTn>
-                    </p:par>
-                    <p:par>
-                      <p:cTn id="411" presetID="2" presetClass="entr" presetSubtype="8" fill="hold" grpId="0" nodeType="clickEffect">
+                              <p:cTn id="412" dur="700" fill="hold"/>
+                              <p:tgtEl>
+                                <p:spTgt spid="411"/>
+                              </p:tgtEl>
+                            </p:cBhvr>
+                          </p:animEffect>
+                        </p:childTnLst>
+                      </p:cTn>
+                    </p:par>
+                    <p:par>
+                      <p:cTn id="413" presetID="2" presetClass="entr" presetSubtype="8" fill="hold" grpId="0" nodeType="clickEffect">
                         <p:stCondLst>
                           <p:cond delay="400"/>
                         </p:stCondLst>
                         <p:childTnLst>
                           <p:animEffect transition="in" filter="fly">
                             <p:cBhvr>
-                              <p:cTn id="412" dur="600" fill="hold"/>
-                              <p:tgtEl>
-                                <p:spTgt spid="411"/>
-                              </p:tgtEl>
-                            </p:cBhvr>
-                          </p:animEffect>
-                        </p:childTnLst>
-                      </p:cTn>
-                    </p:par>
-                    <p:par>
-                      <p:cTn id="413" presetID="22" presetClass="entr" presetSubtype="0" fill="hold" grpId="0" nodeType="clickEffect">
+                              <p:cTn id="414" dur="600" fill="hold"/>
+                              <p:tgtEl>
+                                <p:spTgt spid="413"/>
+                              </p:tgtEl>
+                            </p:cBhvr>
+                          </p:animEffect>
+                        </p:childTnLst>
+                      </p:cTn>
+                    </p:par>
+                    <p:par>
+                      <p:cTn id="415" presetID="22" presetClass="entr" presetSubtype="0" fill="hold" grpId="0" nodeType="clickEffect">
                         <p:stCondLst>
                           <p:cond delay="500"/>
                         </p:stCondLst>
                         <p:childTnLst>
                           <p:animEffect transition="in" filter="zoom">
                             <p:cBhvr>
-                              <p:cTn id="414" dur="500" fill="hold"/>
-                              <p:tgtEl>
-                                <p:spTgt spid="413"/>
-                              </p:tgtEl>
-                            </p:cBhvr>
-                          </p:animEffect>
-                        </p:childTnLst>
-                      </p:cTn>
-                    </p:par>
-                    <p:par>
-                      <p:cTn id="415" presetID="22" presetClass="entr" presetSubtype="0" fill="hold" grpId="0" nodeType="clickEffect">
+                              <p:cTn id="416" dur="500" fill="hold"/>
+                              <p:tgtEl>
+                                <p:spTgt spid="415"/>
+                              </p:tgtEl>
+                            </p:cBhvr>
+                          </p:animEffect>
+                        </p:childTnLst>
+                      </p:cTn>
+                    </p:par>
+                    <p:par>
+                      <p:cTn id="417" presetID="22" presetClass="entr" presetSubtype="0" fill="hold" grpId="0" nodeType="clickEffect">
                         <p:stCondLst>
                           <p:cond delay="500"/>
                         </p:stCondLst>
                         <p:childTnLst>
                           <p:animEffect transition="in" filter="zoom">
                             <p:cBhvr>
-                              <p:cTn id="416" dur="500" fill="hold"/>
-                              <p:tgtEl>
-                                <p:spTgt spid="415"/>
-                              </p:tgtEl>
-                            </p:cBhvr>
-                          </p:animEffect>
-                        </p:childTnLst>
-                      </p:cTn>
-                    </p:par>
-                    <p:par>
-                      <p:cTn id="417" presetID="10" presetClass="entr" presetSubtype="0" fill="hold" grpId="0" nodeType="clickEffect">
+                              <p:cTn id="418" dur="500" fill="hold"/>
+                              <p:tgtEl>
+                                <p:spTgt spid="417"/>
+                              </p:tgtEl>
+                            </p:cBhvr>
+                          </p:animEffect>
+                        </p:childTnLst>
+                      </p:cTn>
+                    </p:par>
+                    <p:par>
+                      <p:cTn id="419" presetID="10" presetClass="entr" presetSubtype="0" fill="hold" grpId="0" nodeType="clickEffect">
                         <p:stCondLst>
                           <p:cond delay="600"/>
                         </p:stCondLst>
                         <p:childTnLst>
                           <p:animEffect transition="in" filter="fade">
                             <p:cBhvr>
-                              <p:cTn id="418" dur="700" fill="hold"/>
-                              <p:tgtEl>
-                                <p:spTgt spid="417"/>
-                              </p:tgtEl>
-                            </p:cBhvr>
-                          </p:animEffect>
-                        </p:childTnLst>
-                      </p:cTn>
-                    </p:par>
-                    <p:par>
-                      <p:cTn id="419" presetID="10" presetClass="entr" presetSubtype="0" fill="hold" grpId="0" nodeType="clickEffect">
+                              <p:cTn id="420" dur="700" fill="hold"/>
+                              <p:tgtEl>
+                                <p:spTgt spid="419"/>
+                              </p:tgtEl>
+                            </p:cBhvr>
+                          </p:animEffect>
+                        </p:childTnLst>
+                      </p:cTn>
+                    </p:par>
+                    <p:par>
+                      <p:cTn id="421" presetID="10" presetClass="entr" presetSubtype="0" fill="hold" grpId="0" nodeType="clickEffect">
                         <p:stCondLst>
                           <p:cond delay="700"/>
                         </p:stCondLst>
                         <p:childTnLst>
                           <p:animEffect transition="in" filter="fade">
                             <p:cBhvr>
-                              <p:cTn id="420" dur="700" fill="hold"/>
-                              <p:tgtEl>
-                                <p:spTgt spid="419"/>
-                              </p:tgtEl>
-                            </p:cBhvr>
-                          </p:animEffect>
-                        </p:childTnLst>
-                      </p:cTn>
-                    </p:par>
-                    <p:par>
-                      <p:cTn id="421" presetID="10" presetClass="entr" presetSubtype="0" fill="hold" grpId="0" nodeType="clickEffect">
+                              <p:cTn id="422" dur="700" fill="hold"/>
+                              <p:tgtEl>
+                                <p:spTgt spid="421"/>
+                              </p:tgtEl>
+                            </p:cBhvr>
+                          </p:animEffect>
+                        </p:childTnLst>
+                      </p:cTn>
+                    </p:par>
+                    <p:par>
+                      <p:cTn id="423" presetID="10" presetClass="entr" presetSubtype="0" fill="hold" grpId="0" nodeType="clickEffect">
                         <p:stCondLst>
                           <p:cond delay="800"/>
                         </p:stCondLst>
                         <p:childTnLst>
                           <p:animEffect transition="in" filter="fade">
                             <p:cBhvr>
-                              <p:cTn id="422" dur="700" fill="hold"/>
-                              <p:tgtEl>
-                                <p:spTgt spid="421"/>
-                              </p:tgtEl>
-                            </p:cBhvr>
-                          </p:animEffect>
-                        </p:childTnLst>
-                      </p:cTn>
-                    </p:par>
-                    <p:par>
-                      <p:cTn id="423" presetID="2" presetClass="entr" presetSubtype="8" fill="hold" grpId="0" nodeType="clickEffect">
+                              <p:cTn id="424" dur="700" fill="hold"/>
+                              <p:tgtEl>
+                                <p:spTgt spid="423"/>
+                              </p:tgtEl>
+                            </p:cBhvr>
+                          </p:animEffect>
+                        </p:childTnLst>
+                      </p:cTn>
+                    </p:par>
+                    <p:par>
+                      <p:cTn id="425" presetID="2" presetClass="entr" presetSubtype="8" fill="hold" grpId="0" nodeType="clickEffect">
                         <p:stCondLst>
                           <p:cond delay="600"/>
                         </p:stCondLst>
                         <p:childTnLst>
                           <p:animEffect transition="in" filter="fly">
                             <p:cBhvr>
-                              <p:cTn id="424" dur="600" fill="hold"/>
-                              <p:tgtEl>
-                                <p:spTgt spid="423"/>
-                              </p:tgtEl>
-                            </p:cBhvr>
-                          </p:animEffect>
-                        </p:childTnLst>
-                      </p:cTn>
-                    </p:par>
-                    <p:par>
-                      <p:cTn id="425" presetID="22" presetClass="entr" presetSubtype="0" fill="hold" grpId="0" nodeType="clickEffect">
+                              <p:cTn id="426" dur="600" fill="hold"/>
+                              <p:tgtEl>
+                                <p:spTgt spid="425"/>
+                              </p:tgtEl>
+                            </p:cBhvr>
+                          </p:animEffect>
+                        </p:childTnLst>
+                      </p:cTn>
+                    </p:par>
+                    <p:par>
+                      <p:cTn id="427" presetID="22" presetClass="entr" presetSubtype="0" fill="hold" grpId="0" nodeType="clickEffect">
                         <p:stCondLst>
                           <p:cond delay="700"/>
                         </p:stCondLst>
                         <p:childTnLst>
                           <p:animEffect transition="in" filter="zoom">
                             <p:cBhvr>
-                              <p:cTn id="426" dur="500" fill="hold"/>
-                              <p:tgtEl>
-                                <p:spTgt spid="425"/>
-                              </p:tgtEl>
-                            </p:cBhvr>
-                          </p:animEffect>
-                        </p:childTnLst>
-                      </p:cTn>
-                    </p:par>
-                    <p:par>
-                      <p:cTn id="427" presetID="22" presetClass="entr" presetSubtype="0" fill="hold" grpId="0" nodeType="clickEffect">
+                              <p:cTn id="428" dur="500" fill="hold"/>
+                              <p:tgtEl>
+                                <p:spTgt spid="427"/>
+                              </p:tgtEl>
+                            </p:cBhvr>
+                          </p:animEffect>
+                        </p:childTnLst>
+                      </p:cTn>
+                    </p:par>
+                    <p:par>
+                      <p:cTn id="429" presetID="22" presetClass="entr" presetSubtype="0" fill="hold" grpId="0" nodeType="clickEffect">
                         <p:stCondLst>
                           <p:cond delay="700"/>
                         </p:stCondLst>
                         <p:childTnLst>
                           <p:animEffect transition="in" filter="zoom">
                             <p:cBhvr>
-                              <p:cTn id="428" dur="500" fill="hold"/>
-                              <p:tgtEl>
-                                <p:spTgt spid="427"/>
-                              </p:tgtEl>
-                            </p:cBhvr>
-                          </p:animEffect>
-                        </p:childTnLst>
-                      </p:cTn>
-                    </p:par>
-                    <p:par>
-                      <p:cTn id="429" presetID="10" presetClass="entr" presetSubtype="0" fill="hold" grpId="0" nodeType="clickEffect">
+                              <p:cTn id="430" dur="500" fill="hold"/>
+                              <p:tgtEl>
+                                <p:spTgt spid="429"/>
+                              </p:tgtEl>
+                            </p:cBhvr>
+                          </p:animEffect>
+                        </p:childTnLst>
+                      </p:cTn>
+                    </p:par>
+                    <p:par>
+                      <p:cTn id="431" presetID="10" presetClass="entr" presetSubtype="0" fill="hold" grpId="0" nodeType="clickEffect">
                         <p:stCondLst>
                           <p:cond delay="800"/>
                         </p:stCondLst>
                         <p:childTnLst>
                           <p:animEffect transition="in" filter="fade">
                             <p:cBhvr>
-                              <p:cTn id="430" dur="700" fill="hold"/>
-                              <p:tgtEl>
-                                <p:spTgt spid="429"/>
-                              </p:tgtEl>
-                            </p:cBhvr>
-                          </p:animEffect>
-                        </p:childTnLst>
-                      </p:cTn>
-                    </p:par>
-                    <p:par>
-                      <p:cTn id="431" presetID="10" presetClass="entr" presetSubtype="0" fill="hold" grpId="0" nodeType="clickEffect">
+                              <p:cTn id="432" dur="700" fill="hold"/>
+                              <p:tgtEl>
+                                <p:spTgt spid="431"/>
+                              </p:tgtEl>
+                            </p:cBhvr>
+                          </p:animEffect>
+                        </p:childTnLst>
+                      </p:cTn>
+                    </p:par>
+                    <p:par>
+                      <p:cTn id="433" presetID="10" presetClass="entr" presetSubtype="0" fill="hold" grpId="0" nodeType="clickEffect">
                         <p:stCondLst>
                           <p:cond delay="900"/>
                         </p:stCondLst>
                         <p:childTnLst>
                           <p:animEffect transition="in" filter="fade">
                             <p:cBhvr>
-                              <p:cTn id="432" dur="700" fill="hold"/>
-                              <p:tgtEl>
-                                <p:spTgt spid="431"/>
-                              </p:tgtEl>
-                            </p:cBhvr>
-                          </p:animEffect>
-                        </p:childTnLst>
-                      </p:cTn>
-                    </p:par>
-                    <p:par>
-                      <p:cTn id="433" presetID="10" presetClass="entr" presetSubtype="0" fill="hold" grpId="0" nodeType="clickEffect">
+                              <p:cTn id="434" dur="700" fill="hold"/>
+                              <p:tgtEl>
+                                <p:spTgt spid="433"/>
+                              </p:tgtEl>
+                            </p:cBhvr>
+                          </p:animEffect>
+                        </p:childTnLst>
+                      </p:cTn>
+                    </p:par>
+                    <p:par>
+                      <p:cTn id="435" presetID="10" presetClass="entr" presetSubtype="0" fill="hold" grpId="0" nodeType="clickEffect">
                         <p:stCondLst>
                           <p:cond delay="1000"/>
                         </p:stCondLst>
                         <p:childTnLst>
                           <p:animEffect transition="in" filter="fade">
                             <p:cBhvr>
-                              <p:cTn id="434" dur="700" fill="hold"/>
-                              <p:tgtEl>
-                                <p:spTgt spid="433"/>
-                              </p:tgtEl>
-                            </p:cBhvr>
-                          </p:animEffect>
-                        </p:childTnLst>
-                      </p:cTn>
-                    </p:par>
-                    <p:par>
-                      <p:cTn id="435" presetID="2" presetClass="entr" presetSubtype="8" fill="hold" grpId="0" nodeType="clickEffect">
+                              <p:cTn id="436" dur="700" fill="hold"/>
+                              <p:tgtEl>
+                                <p:spTgt spid="435"/>
+                              </p:tgtEl>
+                            </p:cBhvr>
+                          </p:animEffect>
+                        </p:childTnLst>
+                      </p:cTn>
+                    </p:par>
+                    <p:par>
+                      <p:cTn id="437" presetID="2" presetClass="entr" presetSubtype="8" fill="hold" grpId="0" nodeType="clickEffect">
                         <p:stCondLst>
                           <p:cond delay="800"/>
                         </p:stCondLst>
                         <p:childTnLst>
                           <p:animEffect transition="in" filter="fly">
                             <p:cBhvr>
-                              <p:cTn id="436" dur="600" fill="hold"/>
-                              <p:tgtEl>
-                                <p:spTgt spid="435"/>
-                              </p:tgtEl>
-                            </p:cBhvr>
-                          </p:animEffect>
-                        </p:childTnLst>
-                      </p:cTn>
-                    </p:par>
-                    <p:par>
-                      <p:cTn id="437" presetID="22" presetClass="entr" presetSubtype="0" fill="hold" grpId="0" nodeType="clickEffect">
+                              <p:cTn id="438" dur="600" fill="hold"/>
+                              <p:tgtEl>
+                                <p:spTgt spid="437"/>
+                              </p:tgtEl>
+                            </p:cBhvr>
+                          </p:animEffect>
+                        </p:childTnLst>
+                      </p:cTn>
+                    </p:par>
+                    <p:par>
+                      <p:cTn id="439" presetID="22" presetClass="entr" presetSubtype="0" fill="hold" grpId="0" nodeType="clickEffect">
                         <p:stCondLst>
                           <p:cond delay="900"/>
                         </p:stCondLst>
                         <p:childTnLst>
                           <p:animEffect transition="in" filter="zoom">
                             <p:cBhvr>
-                              <p:cTn id="438" dur="500" fill="hold"/>
-                              <p:tgtEl>
-                                <p:spTgt spid="437"/>
-                              </p:tgtEl>
-                            </p:cBhvr>
-                          </p:animEffect>
-                        </p:childTnLst>
-                      </p:cTn>
-                    </p:par>
-                    <p:par>
-                      <p:cTn id="439" presetID="22" presetClass="entr" presetSubtype="0" fill="hold" grpId="0" nodeType="clickEffect">
+                              <p:cTn id="440" dur="500" fill="hold"/>
+                              <p:tgtEl>
+                                <p:spTgt spid="439"/>
+                              </p:tgtEl>
+                            </p:cBhvr>
+                          </p:animEffect>
+                        </p:childTnLst>
+                      </p:cTn>
+                    </p:par>
+                    <p:par>
+                      <p:cTn id="441" presetID="22" presetClass="entr" presetSubtype="0" fill="hold" grpId="0" nodeType="clickEffect">
                         <p:stCondLst>
                           <p:cond delay="900"/>
                         </p:stCondLst>
                         <p:childTnLst>
                           <p:animEffect transition="in" filter="zoom">
                             <p:cBhvr>
-                              <p:cTn id="440" dur="500" fill="hold"/>
-                              <p:tgtEl>
-                                <p:spTgt spid="439"/>
-                              </p:tgtEl>
-                            </p:cBhvr>
-                          </p:animEffect>
-                        </p:childTnLst>
-                      </p:cTn>
-                    </p:par>
-                    <p:par>
-                      <p:cTn id="441" presetID="10" presetClass="entr" presetSubtype="0" fill="hold" grpId="0" nodeType="clickEffect">
+                              <p:cTn id="442" dur="500" fill="hold"/>
+                              <p:tgtEl>
+                                <p:spTgt spid="441"/>
+                              </p:tgtEl>
+                            </p:cBhvr>
+                          </p:animEffect>
+                        </p:childTnLst>
+                      </p:cTn>
+                    </p:par>
+                    <p:par>
+                      <p:cTn id="443" presetID="10" presetClass="entr" presetSubtype="0" fill="hold" grpId="0" nodeType="clickEffect">
                         <p:stCondLst>
                           <p:cond delay="1000"/>
                         </p:stCondLst>
                         <p:childTnLst>
                           <p:animEffect transition="in" filter="fade">
                             <p:cBhvr>
-                              <p:cTn id="442" dur="700" fill="hold"/>
-                              <p:tgtEl>
-                                <p:spTgt spid="441"/>
-                              </p:tgtEl>
-                            </p:cBhvr>
-                          </p:animEffect>
-                        </p:childTnLst>
-                      </p:cTn>
-                    </p:par>
-                    <p:par>
-                      <p:cTn id="443" presetID="10" presetClass="entr" presetSubtype="0" fill="hold" grpId="0" nodeType="clickEffect">
+                              <p:cTn id="444" dur="700" fill="hold"/>
+                              <p:tgtEl>
+                                <p:spTgt spid="443"/>
+                              </p:tgtEl>
+                            </p:cBhvr>
+                          </p:animEffect>
+                        </p:childTnLst>
+                      </p:cTn>
+                    </p:par>
+                    <p:par>
+                      <p:cTn id="445" presetID="10" presetClass="entr" presetSubtype="0" fill="hold" grpId="0" nodeType="clickEffect">
                         <p:stCondLst>
                           <p:cond delay="1100"/>
                         </p:stCondLst>
                         <p:childTnLst>
                           <p:animEffect transition="in" filter="fade">
                             <p:cBhvr>
-                              <p:cTn id="444" dur="700" fill="hold"/>
-                              <p:tgtEl>
-                                <p:spTgt spid="443"/>
-                              </p:tgtEl>
-                            </p:cBhvr>
-                          </p:animEffect>
-                        </p:childTnLst>
-                      </p:cTn>
-                    </p:par>
-                    <p:par>
-                      <p:cTn id="445" presetID="10" presetClass="entr" presetSubtype="0" fill="hold" grpId="0" nodeType="clickEffect">
+                              <p:cTn id="446" dur="700" fill="hold"/>
+                              <p:tgtEl>
+                                <p:spTgt spid="445"/>
+                              </p:tgtEl>
+                            </p:cBhvr>
+                          </p:animEffect>
+                        </p:childTnLst>
+                      </p:cTn>
+                    </p:par>
+                    <p:par>
+                      <p:cTn id="447" presetID="10" presetClass="entr" presetSubtype="0" fill="hold" grpId="0" nodeType="clickEffect">
                         <p:stCondLst>
                           <p:cond delay="1200"/>
                         </p:stCondLst>
                         <p:childTnLst>
                           <p:animEffect transition="in" filter="fade">
                             <p:cBhvr>
-                              <p:cTn id="446" dur="700" fill="hold"/>
-                              <p:tgtEl>
-                                <p:spTgt spid="445"/>
-                              </p:tgtEl>
-                            </p:cBhvr>
-                          </p:animEffect>
-                        </p:childTnLst>
-                      </p:cTn>
-                    </p:par>
-                    <p:par>
-                      <p:cTn id="447" presetID="2" presetClass="entr" presetSubtype="8" fill="hold" grpId="0" nodeType="clickEffect">
+                              <p:cTn id="448" dur="700" fill="hold"/>
+                              <p:tgtEl>
+                                <p:spTgt spid="447"/>
+                              </p:tgtEl>
+                            </p:cBhvr>
+                          </p:animEffect>
+                        </p:childTnLst>
+                      </p:cTn>
+                    </p:par>
+                    <p:par>
+                      <p:cTn id="449" presetID="2" presetClass="entr" presetSubtype="8" fill="hold" grpId="0" nodeType="clickEffect">
                         <p:stCondLst>
                           <p:cond delay="1000"/>
                         </p:stCondLst>
                         <p:childTnLst>
                           <p:animEffect transition="in" filter="fly">
                             <p:cBhvr>
-                              <p:cTn id="448" dur="600" fill="hold"/>
-                              <p:tgtEl>
-                                <p:spTgt spid="447"/>
-                              </p:tgtEl>
-                            </p:cBhvr>
-                          </p:animEffect>
-                        </p:childTnLst>
-                      </p:cTn>
-                    </p:par>
-                    <p:par>
-                      <p:cTn id="449" presetID="22" presetClass="entr" presetSubtype="0" fill="hold" grpId="0" nodeType="clickEffect">
+                              <p:cTn id="450" dur="600" fill="hold"/>
+                              <p:tgtEl>
+                                <p:spTgt spid="449"/>
+                              </p:tgtEl>
+                            </p:cBhvr>
+                          </p:animEffect>
+                        </p:childTnLst>
+                      </p:cTn>
+                    </p:par>
+                    <p:par>
+                      <p:cTn id="451" presetID="22" presetClass="entr" presetSubtype="0" fill="hold" grpId="0" nodeType="clickEffect">
                         <p:stCondLst>
                           <p:cond delay="1100"/>
                         </p:stCondLst>
                         <p:childTnLst>
                           <p:animEffect transition="in" filter="zoom">
                             <p:cBhvr>
-                              <p:cTn id="450" dur="500" fill="hold"/>
-                              <p:tgtEl>
-                                <p:spTgt spid="449"/>
-                              </p:tgtEl>
-                            </p:cBhvr>
-                          </p:animEffect>
-                        </p:childTnLst>
-                      </p:cTn>
-                    </p:par>
-                    <p:par>
-                      <p:cTn id="451" presetID="22" presetClass="entr" presetSubtype="0" fill="hold" grpId="0" nodeType="clickEffect">
+                              <p:cTn id="452" dur="500" fill="hold"/>
+                              <p:tgtEl>
+                                <p:spTgt spid="451"/>
+                              </p:tgtEl>
+                            </p:cBhvr>
+                          </p:animEffect>
+                        </p:childTnLst>
+                      </p:cTn>
+                    </p:par>
+                    <p:par>
+                      <p:cTn id="453" presetID="22" presetClass="entr" presetSubtype="0" fill="hold" grpId="0" nodeType="clickEffect">
                         <p:stCondLst>
                           <p:cond delay="1100"/>
                         </p:stCondLst>
                         <p:childTnLst>
                           <p:animEffect transition="in" filter="zoom">
                             <p:cBhvr>
-                              <p:cTn id="452" dur="500" fill="hold"/>
-                              <p:tgtEl>
-                                <p:spTgt spid="451"/>
-                              </p:tgtEl>
-                            </p:cBhvr>
-                          </p:animEffect>
-                        </p:childTnLst>
-                      </p:cTn>
-                    </p:par>
-                    <p:par>
-                      <p:cTn id="453" presetID="10" presetClass="entr" presetSubtype="0" fill="hold" grpId="0" nodeType="clickEffect">
+                              <p:cTn id="454" dur="500" fill="hold"/>
+                              <p:tgtEl>
+                                <p:spTgt spid="453"/>
+                              </p:tgtEl>
+                            </p:cBhvr>
+                          </p:animEffect>
+                        </p:childTnLst>
+                      </p:cTn>
+                    </p:par>
+                    <p:par>
+                      <p:cTn id="455" presetID="10" presetClass="entr" presetSubtype="0" fill="hold" grpId="0" nodeType="clickEffect">
                         <p:stCondLst>
                           <p:cond delay="1200"/>
                         </p:stCondLst>
                         <p:childTnLst>
                           <p:animEffect transition="in" filter="fade">
                             <p:cBhvr>
-                              <p:cTn id="454" dur="700" fill="hold"/>
-                              <p:tgtEl>
-                                <p:spTgt spid="453"/>
-                              </p:tgtEl>
-                            </p:cBhvr>
-                          </p:animEffect>
-                        </p:childTnLst>
-                      </p:cTn>
-                    </p:par>
-                    <p:par>
-                      <p:cTn id="455" presetID="10" presetClass="entr" presetSubtype="0" fill="hold" grpId="0" nodeType="clickEffect">
+                              <p:cTn id="456" dur="700" fill="hold"/>
+                              <p:tgtEl>
+                                <p:spTgt spid="455"/>
+                              </p:tgtEl>
+                            </p:cBhvr>
+                          </p:animEffect>
+                        </p:childTnLst>
+                      </p:cTn>
+                    </p:par>
+                    <p:par>
+                      <p:cTn id="457" presetID="10" presetClass="entr" presetSubtype="0" fill="hold" grpId="0" nodeType="clickEffect">
                         <p:stCondLst>
                           <p:cond delay="1300"/>
                         </p:stCondLst>
                         <p:childTnLst>
                           <p:animEffect transition="in" filter="fade">
                             <p:cBhvr>
-                              <p:cTn id="456" dur="700" fill="hold"/>
-                              <p:tgtEl>
-                                <p:spTgt spid="455"/>
-                              </p:tgtEl>
-                            </p:cBhvr>
-                          </p:animEffect>
-                        </p:childTnLst>
-                      </p:cTn>
-                    </p:par>
-                    <p:par>
-                      <p:cTn id="457" presetID="10" presetClass="entr" presetSubtype="0" fill="hold" grpId="0" nodeType="clickEffect">
+                              <p:cTn id="458" dur="700" fill="hold"/>
+                              <p:tgtEl>
+                                <p:spTgt spid="457"/>
+                              </p:tgtEl>
+                            </p:cBhvr>
+                          </p:animEffect>
+                        </p:childTnLst>
+                      </p:cTn>
+                    </p:par>
+                    <p:par>
+                      <p:cTn id="459" presetID="10" presetClass="entr" presetSubtype="0" fill="hold" grpId="0" nodeType="clickEffect">
                         <p:stCondLst>
                           <p:cond delay="1400"/>
                         </p:stCondLst>
                         <p:childTnLst>
                           <p:animEffect transition="in" filter="fade">
                             <p:cBhvr>
-                              <p:cTn id="458" dur="700" fill="hold"/>
-                              <p:tgtEl>
-                                <p:spTgt spid="457"/>
+                              <p:cTn id="460" dur="700" fill="hold"/>
+                              <p:tgtEl>
+                                <p:spTgt spid="459"/>
                               </p:tgtEl>
                             </p:cBhvr>
                           </p:animEffect>
@@ -9406,7 +9458,7 @@
       </p:sp>
       <p:sp>
         <p:nvSpPr>
-          <p:cNvPr id="461" name="Rectangle 460"/>
+          <p:cNvPr id="463" name="Rectangle 462"/>
           <p:cNvSpPr/>
           <p:nvPr/>
         </p:nvSpPr>
@@ -9449,7 +9501,7 @@
       </p:sp>
       <p:sp>
         <p:nvSpPr>
-          <p:cNvPr id="463" name="TextBox 462"/>
+          <p:cNvPr id="465" name="TextBox 464"/>
           <p:cNvSpPr txBox="1"/>
           <p:nvPr/>
         </p:nvSpPr>
@@ -9484,7 +9536,7 @@
       </p:sp>
       <p:sp>
         <p:nvSpPr>
-          <p:cNvPr id="465" name="TextBox 464"/>
+          <p:cNvPr id="467" name="TextBox 466"/>
           <p:cNvSpPr txBox="1"/>
           <p:nvPr/>
         </p:nvSpPr>
@@ -9519,7 +9571,7 @@
       </p:sp>
       <p:sp>
         <p:nvSpPr>
-          <p:cNvPr id="467" name="TextBox 466"/>
+          <p:cNvPr id="469" name="TextBox 468"/>
           <p:cNvSpPr txBox="1"/>
           <p:nvPr/>
         </p:nvSpPr>
@@ -9554,7 +9606,7 @@
       </p:sp>
       <p:sp>
         <p:nvSpPr>
-          <p:cNvPr id="469" name="Rectangle 468"/>
+          <p:cNvPr id="471" name="Rectangle 470"/>
           <p:cNvSpPr/>
           <p:nvPr/>
         </p:nvSpPr>
@@ -9597,7 +9649,7 @@
       </p:sp>
       <p:sp>
         <p:nvSpPr>
-          <p:cNvPr id="471" name="TextBox 470"/>
+          <p:cNvPr id="473" name="TextBox 472"/>
           <p:cNvSpPr txBox="1"/>
           <p:nvPr/>
         </p:nvSpPr>
@@ -9632,7 +9684,7 @@
       </p:sp>
       <p:sp>
         <p:nvSpPr>
-          <p:cNvPr id="473" name="TextBox 472"/>
+          <p:cNvPr id="475" name="TextBox 474"/>
           <p:cNvSpPr txBox="1"/>
           <p:nvPr/>
         </p:nvSpPr>
@@ -9667,7 +9719,7 @@
       </p:sp>
       <p:sp>
         <p:nvSpPr>
-          <p:cNvPr id="475" name="TextBox 474"/>
+          <p:cNvPr id="477" name="TextBox 476"/>
           <p:cNvSpPr txBox="1"/>
           <p:nvPr/>
         </p:nvSpPr>
@@ -9702,7 +9754,7 @@
       </p:sp>
       <p:sp>
         <p:nvSpPr>
-          <p:cNvPr id="477" name="TextBox 476"/>
+          <p:cNvPr id="479" name="TextBox 478"/>
           <p:cNvSpPr txBox="1"/>
           <p:nvPr/>
         </p:nvSpPr>
@@ -9737,7 +9789,7 @@
       </p:sp>
       <p:sp>
         <p:nvSpPr>
-          <p:cNvPr id="479" name="TextBox 478"/>
+          <p:cNvPr id="481" name="TextBox 480"/>
           <p:cNvSpPr txBox="1"/>
           <p:nvPr/>
         </p:nvSpPr>
@@ -9772,7 +9824,7 @@
       </p:sp>
       <p:sp>
         <p:nvSpPr>
-          <p:cNvPr id="481" name="TextBox 480"/>
+          <p:cNvPr id="483" name="TextBox 482"/>
           <p:cNvSpPr txBox="1"/>
           <p:nvPr/>
         </p:nvSpPr>
@@ -9815,14 +9867,14 @@
                 <p:cTn id="2" dur="indefinite" nodeType="mainSeq">
                   <p:childTnLst>
                     <p:par>
-                      <p:cTn id="459" presetID="10" presetClass="entr" presetSubtype="0" fill="hold" grpId="0" nodeType="clickEffect">
+                      <p:cTn id="461" presetID="10" presetClass="entr" presetSubtype="0" fill="hold" grpId="0" nodeType="clickEffect">
                         <p:stCondLst>
                           <p:cond delay="0"/>
                         </p:stCondLst>
                         <p:childTnLst>
                           <p:animEffect transition="in" filter="fade">
                             <p:cBhvr>
-                              <p:cTn id="460" dur="700" fill="hold"/>
+                              <p:cTn id="462" dur="700" fill="hold"/>
                               <p:tgtEl>
                                 <p:spTgt spid="5"/>
                               </p:tgtEl>
@@ -9832,186 +9884,186 @@
                       </p:cTn>
                     </p:par>
                     <p:par>
-                      <p:cTn id="461" presetID="10" presetClass="entr" presetSubtype="0" fill="hold" grpId="0" nodeType="clickEffect">
+                      <p:cTn id="463" presetID="10" presetClass="entr" presetSubtype="0" fill="hold" grpId="0" nodeType="clickEffect">
                         <p:stCondLst>
                           <p:cond delay="0"/>
                         </p:stCondLst>
                         <p:childTnLst>
                           <p:animEffect transition="in" filter="fade">
                             <p:cBhvr>
-                              <p:cTn id="462" dur="700" fill="hold"/>
-                              <p:tgtEl>
-                                <p:spTgt spid="461"/>
-                              </p:tgtEl>
-                            </p:cBhvr>
-                          </p:animEffect>
-                        </p:childTnLst>
-                      </p:cTn>
-                    </p:par>
-                    <p:par>
-                      <p:cTn id="463" presetID="22" presetClass="entr" presetSubtype="0" fill="hold" grpId="0" nodeType="clickEffect">
+                              <p:cTn id="464" dur="700" fill="hold"/>
+                              <p:tgtEl>
+                                <p:spTgt spid="463"/>
+                              </p:tgtEl>
+                            </p:cBhvr>
+                          </p:animEffect>
+                        </p:childTnLst>
+                      </p:cTn>
+                    </p:par>
+                    <p:par>
+                      <p:cTn id="465" presetID="22" presetClass="entr" presetSubtype="0" fill="hold" grpId="0" nodeType="clickEffect">
                         <p:stCondLst>
                           <p:cond delay="100"/>
                         </p:stCondLst>
                         <p:childTnLst>
                           <p:animEffect transition="in" filter="zoom">
                             <p:cBhvr>
-                              <p:cTn id="464" dur="500" fill="hold"/>
-                              <p:tgtEl>
-                                <p:spTgt spid="463"/>
-                              </p:tgtEl>
-                            </p:cBhvr>
-                          </p:animEffect>
-                        </p:childTnLst>
-                      </p:cTn>
-                    </p:par>
-                    <p:par>
-                      <p:cTn id="465" presetID="2" presetClass="entr" presetSubtype="8" fill="hold" grpId="0" nodeType="clickEffect">
+                              <p:cTn id="466" dur="500" fill="hold"/>
+                              <p:tgtEl>
+                                <p:spTgt spid="465"/>
+                              </p:tgtEl>
+                            </p:cBhvr>
+                          </p:animEffect>
+                        </p:childTnLst>
+                      </p:cTn>
+                    </p:par>
+                    <p:par>
+                      <p:cTn id="467" presetID="2" presetClass="entr" presetSubtype="8" fill="hold" grpId="0" nodeType="clickEffect">
                         <p:stCondLst>
                           <p:cond delay="300"/>
                         </p:stCondLst>
                         <p:childTnLst>
                           <p:animEffect transition="in" filter="fly">
                             <p:cBhvr>
-                              <p:cTn id="466" dur="600" fill="hold"/>
-                              <p:tgtEl>
-                                <p:spTgt spid="465"/>
-                              </p:tgtEl>
-                            </p:cBhvr>
-                          </p:animEffect>
-                        </p:childTnLst>
-                      </p:cTn>
-                    </p:par>
-                    <p:par>
-                      <p:cTn id="467" presetID="2" presetClass="entr" presetSubtype="8" fill="hold" grpId="0" nodeType="clickEffect">
+                              <p:cTn id="468" dur="600" fill="hold"/>
+                              <p:tgtEl>
+                                <p:spTgt spid="467"/>
+                              </p:tgtEl>
+                            </p:cBhvr>
+                          </p:animEffect>
+                        </p:childTnLst>
+                      </p:cTn>
+                    </p:par>
+                    <p:par>
+                      <p:cTn id="469" presetID="2" presetClass="entr" presetSubtype="8" fill="hold" grpId="0" nodeType="clickEffect">
                         <p:stCondLst>
                           <p:cond delay="600"/>
                         </p:stCondLst>
                         <p:childTnLst>
                           <p:animEffect transition="in" filter="fly">
                             <p:cBhvr>
-                              <p:cTn id="468" dur="600" fill="hold"/>
-                              <p:tgtEl>
-                                <p:spTgt spid="467"/>
-                              </p:tgtEl>
-                            </p:cBhvr>
-                          </p:animEffect>
-                        </p:childTnLst>
-                      </p:cTn>
-                    </p:par>
-                    <p:par>
-                      <p:cTn id="469" presetID="10" presetClass="entr" presetSubtype="0" fill="hold" grpId="0" nodeType="clickEffect">
+                              <p:cTn id="470" dur="600" fill="hold"/>
+                              <p:tgtEl>
+                                <p:spTgt spid="469"/>
+                              </p:tgtEl>
+                            </p:cBhvr>
+                          </p:animEffect>
+                        </p:childTnLst>
+                      </p:cTn>
+                    </p:par>
+                    <p:par>
+                      <p:cTn id="471" presetID="10" presetClass="entr" presetSubtype="0" fill="hold" grpId="0" nodeType="clickEffect">
                         <p:stCondLst>
                           <p:cond delay="900"/>
                         </p:stCondLst>
                         <p:childTnLst>
                           <p:animEffect transition="in" filter="fade">
                             <p:cBhvr>
-                              <p:cTn id="470" dur="700" fill="hold"/>
-                              <p:tgtEl>
-                                <p:spTgt spid="469"/>
-                              </p:tgtEl>
-                            </p:cBhvr>
-                          </p:animEffect>
-                        </p:childTnLst>
-                      </p:cTn>
-                    </p:par>
-                    <p:par>
-                      <p:cTn id="471" presetID="10" presetClass="entr" presetSubtype="0" fill="hold" grpId="0" nodeType="clickEffect">
+                              <p:cTn id="472" dur="700" fill="hold"/>
+                              <p:tgtEl>
+                                <p:spTgt spid="471"/>
+                              </p:tgtEl>
+                            </p:cBhvr>
+                          </p:animEffect>
+                        </p:childTnLst>
+                      </p:cTn>
+                    </p:par>
+                    <p:par>
+                      <p:cTn id="473" presetID="10" presetClass="entr" presetSubtype="0" fill="hold" grpId="0" nodeType="clickEffect">
                         <p:stCondLst>
                           <p:cond delay="1000"/>
                         </p:stCondLst>
                         <p:childTnLst>
                           <p:animEffect transition="in" filter="fade">
                             <p:cBhvr>
-                              <p:cTn id="472" dur="700" fill="hold"/>
-                              <p:tgtEl>
-                                <p:spTgt spid="471"/>
-                              </p:tgtEl>
-                            </p:cBhvr>
-                          </p:animEffect>
-                        </p:childTnLst>
-                      </p:cTn>
-                    </p:par>
-                    <p:par>
-                      <p:cTn id="473" presetID="10" presetClass="entr" presetSubtype="0" fill="hold" grpId="0" nodeType="clickEffect">
+                              <p:cTn id="474" dur="700" fill="hold"/>
+                              <p:tgtEl>
+                                <p:spTgt spid="473"/>
+                              </p:tgtEl>
+                            </p:cBhvr>
+                          </p:animEffect>
+                        </p:childTnLst>
+                      </p:cTn>
+                    </p:par>
+                    <p:par>
+                      <p:cTn id="475" presetID="10" presetClass="entr" presetSubtype="0" fill="hold" grpId="0" nodeType="clickEffect">
                         <p:stCondLst>
                           <p:cond delay="1100"/>
                         </p:stCondLst>
                         <p:childTnLst>
                           <p:animEffect transition="in" filter="fade">
                             <p:cBhvr>
-                              <p:cTn id="474" dur="700" fill="hold"/>
-                              <p:tgtEl>
-                                <p:spTgt spid="473"/>
-                              </p:tgtEl>
-                            </p:cBhvr>
-                          </p:animEffect>
-                        </p:childTnLst>
-                      </p:cTn>
-                    </p:par>
-                    <p:par>
-                      <p:cTn id="475" presetID="10" presetClass="entr" presetSubtype="0" fill="hold" grpId="0" nodeType="clickEffect">
+                              <p:cTn id="476" dur="700" fill="hold"/>
+                              <p:tgtEl>
+                                <p:spTgt spid="475"/>
+                              </p:tgtEl>
+                            </p:cBhvr>
+                          </p:animEffect>
+                        </p:childTnLst>
+                      </p:cTn>
+                    </p:par>
+                    <p:par>
+                      <p:cTn id="477" presetID="10" presetClass="entr" presetSubtype="0" fill="hold" grpId="0" nodeType="clickEffect">
                         <p:stCondLst>
                           <p:cond delay="1300"/>
                         </p:stCondLst>
                         <p:childTnLst>
                           <p:animEffect transition="in" filter="fade">
                             <p:cBhvr>
-                              <p:cTn id="476" dur="700" fill="hold"/>
-                              <p:tgtEl>
-                                <p:spTgt spid="475"/>
-                              </p:tgtEl>
-                            </p:cBhvr>
-                          </p:animEffect>
-                        </p:childTnLst>
-                      </p:cTn>
-                    </p:par>
-                    <p:par>
-                      <p:cTn id="477" presetID="10" presetClass="entr" presetSubtype="0" fill="hold" grpId="0" nodeType="clickEffect">
+                              <p:cTn id="478" dur="700" fill="hold"/>
+                              <p:tgtEl>
+                                <p:spTgt spid="477"/>
+                              </p:tgtEl>
+                            </p:cBhvr>
+                          </p:animEffect>
+                        </p:childTnLst>
+                      </p:cTn>
+                    </p:par>
+                    <p:par>
+                      <p:cTn id="479" presetID="10" presetClass="entr" presetSubtype="0" fill="hold" grpId="0" nodeType="clickEffect">
                         <p:stCondLst>
                           <p:cond delay="1500"/>
                         </p:stCondLst>
                         <p:childTnLst>
                           <p:animEffect transition="in" filter="fade">
                             <p:cBhvr>
-                              <p:cTn id="478" dur="700" fill="hold"/>
-                              <p:tgtEl>
-                                <p:spTgt spid="477"/>
-                              </p:tgtEl>
-                            </p:cBhvr>
-                          </p:animEffect>
-                        </p:childTnLst>
-                      </p:cTn>
-                    </p:par>
-                    <p:par>
-                      <p:cTn id="479" presetID="22" presetClass="entr" presetSubtype="0" fill="hold" grpId="0" nodeType="clickEffect">
+                              <p:cTn id="480" dur="700" fill="hold"/>
+                              <p:tgtEl>
+                                <p:spTgt spid="479"/>
+                              </p:tgtEl>
+                            </p:cBhvr>
+                          </p:animEffect>
+                        </p:childTnLst>
+                      </p:cTn>
+                    </p:par>
+                    <p:par>
+                      <p:cTn id="481" presetID="22" presetClass="entr" presetSubtype="0" fill="hold" grpId="0" nodeType="clickEffect">
                         <p:stCondLst>
                           <p:cond delay="1700"/>
                         </p:stCondLst>
                         <p:childTnLst>
                           <p:animEffect transition="in" filter="zoom">
                             <p:cBhvr>
-                              <p:cTn id="480" dur="500" fill="hold"/>
-                              <p:tgtEl>
-                                <p:spTgt spid="479"/>
-                              </p:tgtEl>
-                            </p:cBhvr>
-                          </p:animEffect>
-                        </p:childTnLst>
-                      </p:cTn>
-                    </p:par>
-                    <p:par>
-                      <p:cTn id="481" presetID="10" presetClass="entr" presetSubtype="0" fill="hold" grpId="0" nodeType="clickEffect">
+                              <p:cTn id="482" dur="500" fill="hold"/>
+                              <p:tgtEl>
+                                <p:spTgt spid="481"/>
+                              </p:tgtEl>
+                            </p:cBhvr>
+                          </p:animEffect>
+                        </p:childTnLst>
+                      </p:cTn>
+                    </p:par>
+                    <p:par>
+                      <p:cTn id="483" presetID="10" presetClass="entr" presetSubtype="0" fill="hold" grpId="0" nodeType="clickEffect">
                         <p:stCondLst>
                           <p:cond delay="0"/>
                         </p:stCondLst>
                         <p:childTnLst>
                           <p:animEffect transition="in" filter="fade">
                             <p:cBhvr>
-                              <p:cTn id="482" dur="700" fill="hold"/>
-                              <p:tgtEl>
-                                <p:spTgt spid="481"/>
+                              <p:cTn id="484" dur="700" fill="hold"/>
+                              <p:tgtEl>
+                                <p:spTgt spid="483"/>
                               </p:tgtEl>
                             </p:cBhvr>
                           </p:animEffect>
@@ -10153,7 +10205,7 @@
       </p:sp>
       <p:sp>
         <p:nvSpPr>
-          <p:cNvPr id="41" name="TextBox 40"/>
+          <p:cNvPr id="43" name="TextBox 42"/>
           <p:cNvSpPr txBox="1"/>
           <p:nvPr/>
         </p:nvSpPr>
@@ -10188,7 +10240,7 @@
       </p:sp>
       <p:sp>
         <p:nvSpPr>
-          <p:cNvPr id="43" name="TextBox 42"/>
+          <p:cNvPr id="45" name="TextBox 44"/>
           <p:cNvSpPr txBox="1"/>
           <p:nvPr/>
         </p:nvSpPr>
@@ -10223,7 +10275,7 @@
       </p:sp>
       <p:sp>
         <p:nvSpPr>
-          <p:cNvPr id="44" name="TextBox 43"/>
+          <p:cNvPr id="46" name="TextBox 45"/>
           <p:cNvSpPr txBox="1"/>
           <p:nvPr/>
         </p:nvSpPr>
@@ -10258,7 +10310,7 @@
       </p:sp>
       <p:sp>
         <p:nvSpPr>
-          <p:cNvPr id="45" name="TextBox 44"/>
+          <p:cNvPr id="47" name="TextBox 46"/>
           <p:cNvSpPr txBox="1"/>
           <p:nvPr/>
         </p:nvSpPr>
@@ -10293,7 +10345,7 @@
       </p:sp>
       <p:sp>
         <p:nvSpPr>
-          <p:cNvPr id="47" name="TextBox 46"/>
+          <p:cNvPr id="49" name="TextBox 48"/>
           <p:cNvSpPr txBox="1"/>
           <p:nvPr/>
         </p:nvSpPr>
@@ -10328,7 +10380,7 @@
       </p:sp>
       <p:sp>
         <p:nvSpPr>
-          <p:cNvPr id="49" name="Rectangle 48"/>
+          <p:cNvPr id="51" name="Rectangle 50"/>
           <p:cNvSpPr/>
           <p:nvPr/>
         </p:nvSpPr>
@@ -10371,7 +10423,7 @@
       </p:sp>
       <p:sp>
         <p:nvSpPr>
-          <p:cNvPr id="51" name="Rectangle 50"/>
+          <p:cNvPr id="53" name="Rectangle 52"/>
           <p:cNvSpPr/>
           <p:nvPr/>
         </p:nvSpPr>
@@ -10416,7 +10468,7 @@
       </p:sp>
       <p:sp>
         <p:nvSpPr>
-          <p:cNvPr id="53" name="TextBox 52"/>
+          <p:cNvPr id="55" name="TextBox 54"/>
           <p:cNvSpPr txBox="1"/>
           <p:nvPr/>
         </p:nvSpPr>
@@ -10451,7 +10503,7 @@
       </p:sp>
       <p:sp>
         <p:nvSpPr>
-          <p:cNvPr id="54" name="TextBox 53"/>
+          <p:cNvPr id="56" name="TextBox 55"/>
           <p:cNvSpPr txBox="1"/>
           <p:nvPr/>
         </p:nvSpPr>
@@ -10486,7 +10538,7 @@
       </p:sp>
       <p:sp>
         <p:nvSpPr>
-          <p:cNvPr id="55" name="TextBox 54"/>
+          <p:cNvPr id="57" name="TextBox 56"/>
           <p:cNvSpPr txBox="1"/>
           <p:nvPr/>
         </p:nvSpPr>
@@ -10521,7 +10573,7 @@
       </p:sp>
       <p:sp>
         <p:nvSpPr>
-          <p:cNvPr id="57" name="TextBox 56"/>
+          <p:cNvPr id="59" name="TextBox 58"/>
           <p:cNvSpPr txBox="1"/>
           <p:nvPr/>
         </p:nvSpPr>
@@ -10556,7 +10608,7 @@
       </p:sp>
       <p:sp>
         <p:nvSpPr>
-          <p:cNvPr id="59" name="TextBox 58"/>
+          <p:cNvPr id="61" name="TextBox 60"/>
           <p:cNvSpPr txBox="1"/>
           <p:nvPr/>
         </p:nvSpPr>
@@ -10591,7 +10643,7 @@
       </p:sp>
       <p:sp>
         <p:nvSpPr>
-          <p:cNvPr id="61" name="TextBox 60"/>
+          <p:cNvPr id="63" name="TextBox 62"/>
           <p:cNvSpPr txBox="1"/>
           <p:nvPr/>
         </p:nvSpPr>
@@ -10626,7 +10678,7 @@
       </p:sp>
       <p:sp>
         <p:nvSpPr>
-          <p:cNvPr id="63" name="Rectangle 62"/>
+          <p:cNvPr id="65" name="Rectangle 64"/>
           <p:cNvSpPr/>
           <p:nvPr/>
         </p:nvSpPr>
@@ -10671,7 +10723,7 @@
       </p:sp>
       <p:sp>
         <p:nvSpPr>
-          <p:cNvPr id="65" name="TextBox 64"/>
+          <p:cNvPr id="67" name="TextBox 66"/>
           <p:cNvSpPr txBox="1"/>
           <p:nvPr/>
         </p:nvSpPr>
@@ -10706,7 +10758,7 @@
       </p:sp>
       <p:sp>
         <p:nvSpPr>
-          <p:cNvPr id="66" name="TextBox 65"/>
+          <p:cNvPr id="68" name="TextBox 67"/>
           <p:cNvSpPr txBox="1"/>
           <p:nvPr/>
         </p:nvSpPr>
@@ -10741,7 +10793,7 @@
       </p:sp>
       <p:sp>
         <p:nvSpPr>
-          <p:cNvPr id="67" name="TextBox 66"/>
+          <p:cNvPr id="69" name="TextBox 68"/>
           <p:cNvSpPr txBox="1"/>
           <p:nvPr/>
         </p:nvSpPr>
@@ -10776,7 +10828,7 @@
       </p:sp>
       <p:sp>
         <p:nvSpPr>
-          <p:cNvPr id="69" name="TextBox 68"/>
+          <p:cNvPr id="71" name="TextBox 70"/>
           <p:cNvSpPr txBox="1"/>
           <p:nvPr/>
         </p:nvSpPr>
@@ -10811,7 +10863,7 @@
       </p:sp>
       <p:sp>
         <p:nvSpPr>
-          <p:cNvPr id="71" name="TextBox 70"/>
+          <p:cNvPr id="73" name="TextBox 72"/>
           <p:cNvSpPr txBox="1"/>
           <p:nvPr/>
         </p:nvSpPr>
@@ -10846,7 +10898,7 @@
       </p:sp>
       <p:sp>
         <p:nvSpPr>
-          <p:cNvPr id="73" name="TextBox 72"/>
+          <p:cNvPr id="75" name="TextBox 74"/>
           <p:cNvSpPr txBox="1"/>
           <p:nvPr/>
         </p:nvSpPr>
@@ -10881,7 +10933,7 @@
       </p:sp>
       <p:sp>
         <p:nvSpPr>
-          <p:cNvPr id="75" name="Rectangle 74"/>
+          <p:cNvPr id="77" name="Rectangle 76"/>
           <p:cNvSpPr/>
           <p:nvPr/>
         </p:nvSpPr>
@@ -10924,7 +10976,7 @@
       </p:sp>
       <p:sp>
         <p:nvSpPr>
-          <p:cNvPr id="77" name="TextBox 76"/>
+          <p:cNvPr id="79" name="TextBox 78"/>
           <p:cNvSpPr txBox="1"/>
           <p:nvPr/>
         </p:nvSpPr>
@@ -10967,14 +11019,14 @@
                 <p:cTn id="2" dur="indefinite" nodeType="mainSeq">
                   <p:childTnLst>
                     <p:par>
-                      <p:cTn id="39" presetID="22" presetClass="entr" presetSubtype="0" fill="hold" grpId="0" nodeType="clickEffect">
+                      <p:cTn id="41" presetID="22" presetClass="entr" presetSubtype="0" fill="hold" grpId="0" nodeType="clickEffect">
                         <p:stCondLst>
                           <p:cond delay="0"/>
                         </p:stCondLst>
                         <p:childTnLst>
                           <p:animEffect transition="in" filter="zoom">
                             <p:cBhvr>
-                              <p:cTn id="40" dur="500" fill="hold"/>
+                              <p:cTn id="42" dur="500" fill="hold"/>
                               <p:tgtEl>
                                 <p:spTgt spid="3"/>
                               </p:tgtEl>
@@ -10984,322 +11036,322 @@
                       </p:cTn>
                     </p:par>
                     <p:par>
-                      <p:cTn id="41" presetID="22" presetClass="entr" presetSubtype="0" fill="hold" grpId="0" nodeType="clickEffect">
+                      <p:cTn id="43" presetID="22" presetClass="entr" presetSubtype="0" fill="hold" grpId="0" nodeType="clickEffect">
                         <p:stCondLst>
                           <p:cond delay="0"/>
                         </p:stCondLst>
                         <p:childTnLst>
                           <p:animEffect transition="in" filter="zoom">
                             <p:cBhvr>
-                              <p:cTn id="42" dur="500" fill="hold"/>
-                              <p:tgtEl>
-                                <p:spTgt spid="41"/>
-                              </p:tgtEl>
-                            </p:cBhvr>
-                          </p:animEffect>
-                        </p:childTnLst>
-                      </p:cTn>
-                    </p:par>
-                    <p:par>
-                      <p:cTn id="43" presetID="2" presetClass="entr" presetSubtype="8" fill="hold" grpId="0" nodeType="clickEffect">
+                              <p:cTn id="44" dur="500" fill="hold"/>
+                              <p:tgtEl>
+                                <p:spTgt spid="43"/>
+                              </p:tgtEl>
+                            </p:cBhvr>
+                          </p:animEffect>
+                        </p:childTnLst>
+                      </p:cTn>
+                    </p:par>
+                    <p:par>
+                      <p:cTn id="45" presetID="2" presetClass="entr" presetSubtype="8" fill="hold" grpId="0" nodeType="clickEffect">
                         <p:stCondLst>
                           <p:cond delay="200"/>
                         </p:stCondLst>
                         <p:childTnLst>
                           <p:animEffect transition="in" filter="fly">
                             <p:cBhvr>
-                              <p:cTn id="44" dur="600" fill="hold"/>
-                              <p:tgtEl>
-                                <p:spTgt spid="44"/>
-                              </p:tgtEl>
-                            </p:cBhvr>
-                          </p:animEffect>
-                        </p:childTnLst>
-                      </p:cTn>
-                    </p:par>
-                    <p:par>
-                      <p:cTn id="45" presetID="2" presetClass="entr" presetSubtype="8" fill="hold" grpId="0" nodeType="clickEffect">
+                              <p:cTn id="46" dur="600" fill="hold"/>
+                              <p:tgtEl>
+                                <p:spTgt spid="46"/>
+                              </p:tgtEl>
+                            </p:cBhvr>
+                          </p:animEffect>
+                        </p:childTnLst>
+                      </p:cTn>
+                    </p:par>
+                    <p:par>
+                      <p:cTn id="47" presetID="2" presetClass="entr" presetSubtype="8" fill="hold" grpId="0" nodeType="clickEffect">
                         <p:stCondLst>
                           <p:cond delay="400"/>
                         </p:stCondLst>
                         <p:childTnLst>
                           <p:animEffect transition="in" filter="fly">
                             <p:cBhvr>
-                              <p:cTn id="46" dur="600" fill="hold"/>
-                              <p:tgtEl>
-                                <p:spTgt spid="45"/>
-                              </p:tgtEl>
-                            </p:cBhvr>
-                          </p:animEffect>
-                        </p:childTnLst>
-                      </p:cTn>
-                    </p:par>
-                    <p:par>
-                      <p:cTn id="47" presetID="2" presetClass="entr" presetSubtype="8" fill="hold" grpId="0" nodeType="clickEffect">
+                              <p:cTn id="48" dur="600" fill="hold"/>
+                              <p:tgtEl>
+                                <p:spTgt spid="47"/>
+                              </p:tgtEl>
+                            </p:cBhvr>
+                          </p:animEffect>
+                        </p:childTnLst>
+                      </p:cTn>
+                    </p:par>
+                    <p:par>
+                      <p:cTn id="49" presetID="2" presetClass="entr" presetSubtype="8" fill="hold" grpId="0" nodeType="clickEffect">
                         <p:stCondLst>
                           <p:cond delay="600"/>
                         </p:stCondLst>
                         <p:childTnLst>
                           <p:animEffect transition="in" filter="fly">
                             <p:cBhvr>
-                              <p:cTn id="48" dur="600" fill="hold"/>
-                              <p:tgtEl>
-                                <p:spTgt spid="47"/>
-                              </p:tgtEl>
-                            </p:cBhvr>
-                          </p:animEffect>
-                        </p:childTnLst>
-                      </p:cTn>
-                    </p:par>
-                    <p:par>
-                      <p:cTn id="49" presetID="10" presetClass="entr" presetSubtype="0" fill="hold" grpId="0" nodeType="clickEffect">
+                              <p:cTn id="50" dur="600" fill="hold"/>
+                              <p:tgtEl>
+                                <p:spTgt spid="49"/>
+                              </p:tgtEl>
+                            </p:cBhvr>
+                          </p:animEffect>
+                        </p:childTnLst>
+                      </p:cTn>
+                    </p:par>
+                    <p:par>
+                      <p:cTn id="51" presetID="10" presetClass="entr" presetSubtype="0" fill="hold" grpId="0" nodeType="clickEffect">
                         <p:stCondLst>
                           <p:cond delay="700"/>
                         </p:stCondLst>
                         <p:childTnLst>
                           <p:animEffect transition="in" filter="fade">
                             <p:cBhvr>
-                              <p:cTn id="50" dur="700" fill="hold"/>
-                              <p:tgtEl>
-                                <p:spTgt spid="49"/>
-                              </p:tgtEl>
-                            </p:cBhvr>
-                          </p:animEffect>
-                        </p:childTnLst>
-                      </p:cTn>
-                    </p:par>
-                    <p:par>
-                      <p:cTn id="51" presetID="2" presetClass="entr" presetSubtype="8" fill="hold" grpId="0" nodeType="clickEffect">
+                              <p:cTn id="52" dur="700" fill="hold"/>
+                              <p:tgtEl>
+                                <p:spTgt spid="51"/>
+                              </p:tgtEl>
+                            </p:cBhvr>
+                          </p:animEffect>
+                        </p:childTnLst>
+                      </p:cTn>
+                    </p:par>
+                    <p:par>
+                      <p:cTn id="53" presetID="2" presetClass="entr" presetSubtype="8" fill="hold" grpId="0" nodeType="clickEffect">
                         <p:stCondLst>
                           <p:cond delay="800"/>
                         </p:stCondLst>
                         <p:childTnLst>
                           <p:animEffect transition="in" filter="fly">
                             <p:cBhvr>
-                              <p:cTn id="52" dur="600" fill="hold"/>
-                              <p:tgtEl>
-                                <p:spTgt spid="51"/>
-                              </p:tgtEl>
-                            </p:cBhvr>
-                          </p:animEffect>
-                        </p:childTnLst>
-                      </p:cTn>
-                    </p:par>
-                    <p:par>
-                      <p:cTn id="53" presetID="10" presetClass="entr" presetSubtype="0" fill="hold" grpId="0" nodeType="clickEffect">
+                              <p:cTn id="54" dur="600" fill="hold"/>
+                              <p:tgtEl>
+                                <p:spTgt spid="53"/>
+                              </p:tgtEl>
+                            </p:cBhvr>
+                          </p:animEffect>
+                        </p:childTnLst>
+                      </p:cTn>
+                    </p:par>
+                    <p:par>
+                      <p:cTn id="55" presetID="10" presetClass="entr" presetSubtype="0" fill="hold" grpId="0" nodeType="clickEffect">
                         <p:stCondLst>
                           <p:cond delay="900"/>
                         </p:stCondLst>
                         <p:childTnLst>
                           <p:animEffect transition="in" filter="fade">
                             <p:cBhvr>
-                              <p:cTn id="54" dur="700" fill="hold"/>
-                              <p:tgtEl>
-                                <p:spTgt spid="54"/>
-                              </p:tgtEl>
-                            </p:cBhvr>
-                          </p:animEffect>
-                        </p:childTnLst>
-                      </p:cTn>
-                    </p:par>
-                    <p:par>
-                      <p:cTn id="55" presetID="10" presetClass="entr" presetSubtype="0" fill="hold" grpId="0" nodeType="clickEffect">
+                              <p:cTn id="56" dur="700" fill="hold"/>
+                              <p:tgtEl>
+                                <p:spTgt spid="56"/>
+                              </p:tgtEl>
+                            </p:cBhvr>
+                          </p:animEffect>
+                        </p:childTnLst>
+                      </p:cTn>
+                    </p:par>
+                    <p:par>
+                      <p:cTn id="57" presetID="10" presetClass="entr" presetSubtype="0" fill="hold" grpId="0" nodeType="clickEffect">
                         <p:stCondLst>
                           <p:cond delay="1050"/>
                         </p:stCondLst>
                         <p:childTnLst>
                           <p:animEffect transition="in" filter="fade">
                             <p:cBhvr>
-                              <p:cTn id="56" dur="700" fill="hold"/>
-                              <p:tgtEl>
-                                <p:spTgt spid="55"/>
-                              </p:tgtEl>
-                            </p:cBhvr>
-                          </p:animEffect>
-                        </p:childTnLst>
-                      </p:cTn>
-                    </p:par>
-                    <p:par>
-                      <p:cTn id="57" presetID="10" presetClass="entr" presetSubtype="0" fill="hold" grpId="0" nodeType="clickEffect">
+                              <p:cTn id="58" dur="700" fill="hold"/>
+                              <p:tgtEl>
+                                <p:spTgt spid="57"/>
+                              </p:tgtEl>
+                            </p:cBhvr>
+                          </p:animEffect>
+                        </p:childTnLst>
+                      </p:cTn>
+                    </p:par>
+                    <p:par>
+                      <p:cTn id="59" presetID="10" presetClass="entr" presetSubtype="0" fill="hold" grpId="0" nodeType="clickEffect">
                         <p:stCondLst>
                           <p:cond delay="1200"/>
                         </p:stCondLst>
                         <p:childTnLst>
                           <p:animEffect transition="in" filter="fade">
                             <p:cBhvr>
-                              <p:cTn id="58" dur="700" fill="hold"/>
-                              <p:tgtEl>
-                                <p:spTgt spid="57"/>
-                              </p:tgtEl>
-                            </p:cBhvr>
-                          </p:animEffect>
-                        </p:childTnLst>
-                      </p:cTn>
-                    </p:par>
-                    <p:par>
-                      <p:cTn id="59" presetID="10" presetClass="entr" presetSubtype="0" fill="hold" grpId="0" nodeType="clickEffect">
+                              <p:cTn id="60" dur="700" fill="hold"/>
+                              <p:tgtEl>
+                                <p:spTgt spid="59"/>
+                              </p:tgtEl>
+                            </p:cBhvr>
+                          </p:animEffect>
+                        </p:childTnLst>
+                      </p:cTn>
+                    </p:par>
+                    <p:par>
+                      <p:cTn id="61" presetID="10" presetClass="entr" presetSubtype="0" fill="hold" grpId="0" nodeType="clickEffect">
                         <p:stCondLst>
                           <p:cond delay="1350"/>
                         </p:stCondLst>
                         <p:childTnLst>
                           <p:animEffect transition="in" filter="fade">
                             <p:cBhvr>
-                              <p:cTn id="60" dur="700" fill="hold"/>
-                              <p:tgtEl>
-                                <p:spTgt spid="59"/>
-                              </p:tgtEl>
-                            </p:cBhvr>
-                          </p:animEffect>
-                        </p:childTnLst>
-                      </p:cTn>
-                    </p:par>
-                    <p:par>
-                      <p:cTn id="61" presetID="10" presetClass="entr" presetSubtype="0" fill="hold" grpId="0" nodeType="clickEffect">
+                              <p:cTn id="62" dur="700" fill="hold"/>
+                              <p:tgtEl>
+                                <p:spTgt spid="61"/>
+                              </p:tgtEl>
+                            </p:cBhvr>
+                          </p:animEffect>
+                        </p:childTnLst>
+                      </p:cTn>
+                    </p:par>
+                    <p:par>
+                      <p:cTn id="63" presetID="10" presetClass="entr" presetSubtype="0" fill="hold" grpId="0" nodeType="clickEffect">
                         <p:stCondLst>
                           <p:cond delay="1500"/>
                         </p:stCondLst>
                         <p:childTnLst>
                           <p:animEffect transition="in" filter="fade">
                             <p:cBhvr>
-                              <p:cTn id="62" dur="700" fill="hold"/>
-                              <p:tgtEl>
-                                <p:spTgt spid="61"/>
-                              </p:tgtEl>
-                            </p:cBhvr>
-                          </p:animEffect>
-                        </p:childTnLst>
-                      </p:cTn>
-                    </p:par>
-                    <p:par>
-                      <p:cTn id="63" presetID="2" presetClass="entr" presetSubtype="8" fill="hold" grpId="0" nodeType="clickEffect">
+                              <p:cTn id="64" dur="700" fill="hold"/>
+                              <p:tgtEl>
+                                <p:spTgt spid="63"/>
+                              </p:tgtEl>
+                            </p:cBhvr>
+                          </p:animEffect>
+                        </p:childTnLst>
+                      </p:cTn>
+                    </p:par>
+                    <p:par>
+                      <p:cTn id="65" presetID="2" presetClass="entr" presetSubtype="8" fill="hold" grpId="0" nodeType="clickEffect">
                         <p:stCondLst>
                           <p:cond delay="800"/>
                         </p:stCondLst>
                         <p:childTnLst>
                           <p:animEffect transition="in" filter="fly">
                             <p:cBhvr>
-                              <p:cTn id="64" dur="600" fill="hold"/>
-                              <p:tgtEl>
-                                <p:spTgt spid="63"/>
-                              </p:tgtEl>
-                            </p:cBhvr>
-                          </p:animEffect>
-                        </p:childTnLst>
-                      </p:cTn>
-                    </p:par>
-                    <p:par>
-                      <p:cTn id="65" presetID="10" presetClass="entr" presetSubtype="0" fill="hold" grpId="0" nodeType="clickEffect">
+                              <p:cTn id="66" dur="600" fill="hold"/>
+                              <p:tgtEl>
+                                <p:spTgt spid="65"/>
+                              </p:tgtEl>
+                            </p:cBhvr>
+                          </p:animEffect>
+                        </p:childTnLst>
+                      </p:cTn>
+                    </p:par>
+                    <p:par>
+                      <p:cTn id="67" presetID="10" presetClass="entr" presetSubtype="0" fill="hold" grpId="0" nodeType="clickEffect">
                         <p:stCondLst>
                           <p:cond delay="900"/>
                         </p:stCondLst>
                         <p:childTnLst>
                           <p:animEffect transition="in" filter="fade">
                             <p:cBhvr>
-                              <p:cTn id="66" dur="700" fill="hold"/>
-                              <p:tgtEl>
-                                <p:spTgt spid="66"/>
-                              </p:tgtEl>
-                            </p:cBhvr>
-                          </p:animEffect>
-                        </p:childTnLst>
-                      </p:cTn>
-                    </p:par>
-                    <p:par>
-                      <p:cTn id="67" presetID="10" presetClass="entr" presetSubtype="0" fill="hold" grpId="0" nodeType="clickEffect">
+                              <p:cTn id="68" dur="700" fill="hold"/>
+                              <p:tgtEl>
+                                <p:spTgt spid="68"/>
+                              </p:tgtEl>
+                            </p:cBhvr>
+                          </p:animEffect>
+                        </p:childTnLst>
+                      </p:cTn>
+                    </p:par>
+                    <p:par>
+                      <p:cTn id="69" presetID="10" presetClass="entr" presetSubtype="0" fill="hold" grpId="0" nodeType="clickEffect">
                         <p:stCondLst>
                           <p:cond delay="1050"/>
                         </p:stCondLst>
                         <p:childTnLst>
                           <p:animEffect transition="in" filter="fade">
                             <p:cBhvr>
-                              <p:cTn id="68" dur="700" fill="hold"/>
-                              <p:tgtEl>
-                                <p:spTgt spid="67"/>
-                              </p:tgtEl>
-                            </p:cBhvr>
-                          </p:animEffect>
-                        </p:childTnLst>
-                      </p:cTn>
-                    </p:par>
-                    <p:par>
-                      <p:cTn id="69" presetID="10" presetClass="entr" presetSubtype="0" fill="hold" grpId="0" nodeType="clickEffect">
+                              <p:cTn id="70" dur="700" fill="hold"/>
+                              <p:tgtEl>
+                                <p:spTgt spid="69"/>
+                              </p:tgtEl>
+                            </p:cBhvr>
+                          </p:animEffect>
+                        </p:childTnLst>
+                      </p:cTn>
+                    </p:par>
+                    <p:par>
+                      <p:cTn id="71" presetID="10" presetClass="entr" presetSubtype="0" fill="hold" grpId="0" nodeType="clickEffect">
                         <p:stCondLst>
                           <p:cond delay="1200"/>
                         </p:stCondLst>
                         <p:childTnLst>
                           <p:animEffect transition="in" filter="fade">
                             <p:cBhvr>
-                              <p:cTn id="70" dur="700" fill="hold"/>
-                              <p:tgtEl>
-                                <p:spTgt spid="69"/>
-                              </p:tgtEl>
-                            </p:cBhvr>
-                          </p:animEffect>
-                        </p:childTnLst>
-                      </p:cTn>
-                    </p:par>
-                    <p:par>
-                      <p:cTn id="71" presetID="10" presetClass="entr" presetSubtype="0" fill="hold" grpId="0" nodeType="clickEffect">
+                              <p:cTn id="72" dur="700" fill="hold"/>
+                              <p:tgtEl>
+                                <p:spTgt spid="71"/>
+                              </p:tgtEl>
+                            </p:cBhvr>
+                          </p:animEffect>
+                        </p:childTnLst>
+                      </p:cTn>
+                    </p:par>
+                    <p:par>
+                      <p:cTn id="73" presetID="10" presetClass="entr" presetSubtype="0" fill="hold" grpId="0" nodeType="clickEffect">
                         <p:stCondLst>
                           <p:cond delay="1350"/>
                         </p:stCondLst>
                         <p:childTnLst>
                           <p:animEffect transition="in" filter="fade">
                             <p:cBhvr>
-                              <p:cTn id="72" dur="700" fill="hold"/>
-                              <p:tgtEl>
-                                <p:spTgt spid="71"/>
-                              </p:tgtEl>
-                            </p:cBhvr>
-                          </p:animEffect>
-                        </p:childTnLst>
-                      </p:cTn>
-                    </p:par>
-                    <p:par>
-                      <p:cTn id="73" presetID="10" presetClass="entr" presetSubtype="0" fill="hold" grpId="0" nodeType="clickEffect">
+                              <p:cTn id="74" dur="700" fill="hold"/>
+                              <p:tgtEl>
+                                <p:spTgt spid="73"/>
+                              </p:tgtEl>
+                            </p:cBhvr>
+                          </p:animEffect>
+                        </p:childTnLst>
+                      </p:cTn>
+                    </p:par>
+                    <p:par>
+                      <p:cTn id="75" presetID="10" presetClass="entr" presetSubtype="0" fill="hold" grpId="0" nodeType="clickEffect">
                         <p:stCondLst>
                           <p:cond delay="1500"/>
                         </p:stCondLst>
                         <p:childTnLst>
                           <p:animEffect transition="in" filter="fade">
                             <p:cBhvr>
-                              <p:cTn id="74" dur="700" fill="hold"/>
-                              <p:tgtEl>
-                                <p:spTgt spid="73"/>
-                              </p:tgtEl>
-                            </p:cBhvr>
-                          </p:animEffect>
-                        </p:childTnLst>
-                      </p:cTn>
-                    </p:par>
-                    <p:par>
-                      <p:cTn id="75" presetID="22" presetClass="entr" presetSubtype="0" fill="hold" grpId="0" nodeType="clickEffect">
+                              <p:cTn id="76" dur="700" fill="hold"/>
+                              <p:tgtEl>
+                                <p:spTgt spid="75"/>
+                              </p:tgtEl>
+                            </p:cBhvr>
+                          </p:animEffect>
+                        </p:childTnLst>
+                      </p:cTn>
+                    </p:par>
+                    <p:par>
+                      <p:cTn id="77" presetID="22" presetClass="entr" presetSubtype="0" fill="hold" grpId="0" nodeType="clickEffect">
                         <p:stCondLst>
                           <p:cond delay="850"/>
                         </p:stCondLst>
                         <p:childTnLst>
                           <p:animEffect transition="in" filter="zoom">
                             <p:cBhvr>
-                              <p:cTn id="76" dur="500" fill="hold"/>
-                              <p:tgtEl>
-                                <p:spTgt spid="75"/>
-                              </p:tgtEl>
-                            </p:cBhvr>
-                          </p:animEffect>
-                        </p:childTnLst>
-                      </p:cTn>
-                    </p:par>
-                    <p:par>
-                      <p:cTn id="77" presetID="22" presetClass="entr" presetSubtype="0" fill="hold" grpId="0" nodeType="clickEffect">
+                              <p:cTn id="78" dur="500" fill="hold"/>
+                              <p:tgtEl>
+                                <p:spTgt spid="77"/>
+                              </p:tgtEl>
+                            </p:cBhvr>
+                          </p:animEffect>
+                        </p:childTnLst>
+                      </p:cTn>
+                    </p:par>
+                    <p:par>
+                      <p:cTn id="79" presetID="22" presetClass="entr" presetSubtype="0" fill="hold" grpId="0" nodeType="clickEffect">
                         <p:stCondLst>
                           <p:cond delay="850"/>
                         </p:stCondLst>
                         <p:childTnLst>
                           <p:animEffect transition="in" filter="zoom">
                             <p:cBhvr>
-                              <p:cTn id="78" dur="500" fill="hold"/>
-                              <p:tgtEl>
-                                <p:spTgt spid="77"/>
+                              <p:cTn id="80" dur="500" fill="hold"/>
+                              <p:tgtEl>
+                                <p:spTgt spid="79"/>
                               </p:tgtEl>
                             </p:cBhvr>
                           </p:animEffect>
@@ -11441,7 +11493,7 @@
       </p:sp>
       <p:sp>
         <p:nvSpPr>
-          <p:cNvPr id="81" name="Rectangle 80"/>
+          <p:cNvPr id="83" name="Rectangle 82"/>
           <p:cNvSpPr/>
           <p:nvPr/>
         </p:nvSpPr>
@@ -11484,7 +11536,7 @@
       </p:sp>
       <p:sp>
         <p:nvSpPr>
-          <p:cNvPr id="83" name="Rectangle 82"/>
+          <p:cNvPr id="85" name="Rectangle 84"/>
           <p:cNvSpPr/>
           <p:nvPr/>
         </p:nvSpPr>
@@ -11527,7 +11579,7 @@
       </p:sp>
       <p:sp>
         <p:nvSpPr>
-          <p:cNvPr id="85" name="TextBox 84"/>
+          <p:cNvPr id="87" name="TextBox 86"/>
           <p:cNvSpPr txBox="1"/>
           <p:nvPr/>
         </p:nvSpPr>
@@ -11562,7 +11614,7 @@
       </p:sp>
       <p:sp>
         <p:nvSpPr>
-          <p:cNvPr id="87" name="TextBox 86"/>
+          <p:cNvPr id="89" name="TextBox 88"/>
           <p:cNvSpPr txBox="1"/>
           <p:nvPr/>
         </p:nvSpPr>
@@ -11605,14 +11657,14 @@
                 <p:cTn id="2" dur="indefinite" nodeType="mainSeq">
                   <p:childTnLst>
                     <p:par>
-                      <p:cTn id="79" presetID="10" presetClass="entr" presetSubtype="0" fill="hold" grpId="0" nodeType="clickEffect">
+                      <p:cTn id="81" presetID="10" presetClass="entr" presetSubtype="0" fill="hold" grpId="0" nodeType="clickEffect">
                         <p:stCondLst>
                           <p:cond delay="0"/>
                         </p:stCondLst>
                         <p:childTnLst>
                           <p:animEffect transition="in" filter="fade">
                             <p:cBhvr>
-                              <p:cTn id="80" dur="700" fill="hold"/>
+                              <p:cTn id="82" dur="700" fill="hold"/>
                               <p:tgtEl>
                                 <p:spTgt spid="3"/>
                               </p:tgtEl>
@@ -11622,67 +11674,67 @@
                       </p:cTn>
                     </p:par>
                     <p:par>
-                      <p:cTn id="81" presetID="10" presetClass="entr" presetSubtype="0" fill="hold" grpId="0" nodeType="clickEffect">
+                      <p:cTn id="83" presetID="10" presetClass="entr" presetSubtype="0" fill="hold" grpId="0" nodeType="clickEffect">
                         <p:stCondLst>
                           <p:cond delay="0"/>
                         </p:stCondLst>
                         <p:childTnLst>
                           <p:animEffect transition="in" filter="fade">
                             <p:cBhvr>
-                              <p:cTn id="82" dur="700" fill="hold"/>
-                              <p:tgtEl>
-                                <p:spTgt spid="81"/>
-                              </p:tgtEl>
-                            </p:cBhvr>
-                          </p:animEffect>
-                        </p:childTnLst>
-                      </p:cTn>
-                    </p:par>
-                    <p:par>
-                      <p:cTn id="83" presetID="10" presetClass="entr" presetSubtype="0" fill="hold" grpId="0" nodeType="clickEffect">
+                              <p:cTn id="84" dur="700" fill="hold"/>
+                              <p:tgtEl>
+                                <p:spTgt spid="83"/>
+                              </p:tgtEl>
+                            </p:cBhvr>
+                          </p:animEffect>
+                        </p:childTnLst>
+                      </p:cTn>
+                    </p:par>
+                    <p:par>
+                      <p:cTn id="85" presetID="10" presetClass="entr" presetSubtype="0" fill="hold" grpId="0" nodeType="clickEffect">
                         <p:stCondLst>
                           <p:cond delay="300"/>
                         </p:stCondLst>
                         <p:childTnLst>
                           <p:animEffect transition="in" filter="fade">
                             <p:cBhvr>
-                              <p:cTn id="84" dur="700" fill="hold"/>
-                              <p:tgtEl>
-                                <p:spTgt spid="83"/>
-                              </p:tgtEl>
-                            </p:cBhvr>
-                          </p:animEffect>
-                        </p:childTnLst>
-                      </p:cTn>
-                    </p:par>
-                    <p:par>
-                      <p:cTn id="85" presetID="22" presetClass="entr" presetSubtype="0" fill="hold" grpId="0" nodeType="clickEffect">
+                              <p:cTn id="86" dur="700" fill="hold"/>
+                              <p:tgtEl>
+                                <p:spTgt spid="85"/>
+                              </p:tgtEl>
+                            </p:cBhvr>
+                          </p:animEffect>
+                        </p:childTnLst>
+                      </p:cTn>
+                    </p:par>
+                    <p:par>
+                      <p:cTn id="87" presetID="22" presetClass="entr" presetSubtype="0" fill="hold" grpId="0" nodeType="clickEffect">
                         <p:stCondLst>
                           <p:cond delay="100"/>
                         </p:stCondLst>
                         <p:childTnLst>
                           <p:animEffect transition="in" filter="zoom">
                             <p:cBhvr>
-                              <p:cTn id="86" dur="500" fill="hold"/>
-                              <p:tgtEl>
-                                <p:spTgt spid="85"/>
-                              </p:tgtEl>
-                            </p:cBhvr>
-                          </p:animEffect>
-                        </p:childTnLst>
-                      </p:cTn>
-                    </p:par>
-                    <p:par>
-                      <p:cTn id="87" presetID="10" presetClass="entr" presetSubtype="0" fill="hold" grpId="0" nodeType="clickEffect">
+                              <p:cTn id="88" dur="500" fill="hold"/>
+                              <p:tgtEl>
+                                <p:spTgt spid="87"/>
+                              </p:tgtEl>
+                            </p:cBhvr>
+                          </p:animEffect>
+                        </p:childTnLst>
+                      </p:cTn>
+                    </p:par>
+                    <p:par>
+                      <p:cTn id="89" presetID="10" presetClass="entr" presetSubtype="0" fill="hold" grpId="0" nodeType="clickEffect">
                         <p:stCondLst>
                           <p:cond delay="400"/>
                         </p:stCondLst>
                         <p:childTnLst>
                           <p:animEffect transition="in" filter="fade">
                             <p:cBhvr>
-                              <p:cTn id="88" dur="700" fill="hold"/>
-                              <p:tgtEl>
-                                <p:spTgt spid="87"/>
+                              <p:cTn id="90" dur="700" fill="hold"/>
+                              <p:tgtEl>
+                                <p:spTgt spid="89"/>
                               </p:tgtEl>
                             </p:cBhvr>
                           </p:animEffect>
@@ -11851,7 +11903,7 @@
       </p:sp>
       <p:sp>
         <p:nvSpPr>
-          <p:cNvPr id="91" name="TextBox 90"/>
+          <p:cNvPr id="93" name="TextBox 92"/>
           <p:cNvSpPr txBox="1"/>
           <p:nvPr/>
         </p:nvSpPr>
@@ -11886,7 +11938,7 @@
       </p:sp>
       <p:sp>
         <p:nvSpPr>
-          <p:cNvPr id="93" name="Rectangle 92"/>
+          <p:cNvPr id="95" name="Rectangle 94"/>
           <p:cNvSpPr/>
           <p:nvPr/>
         </p:nvSpPr>
@@ -11931,7 +11983,7 @@
       </p:sp>
       <p:sp>
         <p:nvSpPr>
-          <p:cNvPr id="95" name="TextBox 94"/>
+          <p:cNvPr id="97" name="TextBox 96"/>
           <p:cNvSpPr txBox="1"/>
           <p:nvPr/>
         </p:nvSpPr>
@@ -11966,7 +12018,7 @@
       </p:sp>
       <p:sp>
         <p:nvSpPr>
-          <p:cNvPr id="97" name="TextBox 96"/>
+          <p:cNvPr id="99" name="TextBox 98"/>
           <p:cNvSpPr txBox="1"/>
           <p:nvPr/>
         </p:nvSpPr>
@@ -12001,7 +12053,7 @@
       </p:sp>
       <p:sp>
         <p:nvSpPr>
-          <p:cNvPr id="99" name="TextBox 98"/>
+          <p:cNvPr id="101" name="TextBox 100"/>
           <p:cNvSpPr txBox="1"/>
           <p:nvPr/>
         </p:nvSpPr>
@@ -12036,7 +12088,7 @@
       </p:sp>
       <p:sp>
         <p:nvSpPr>
-          <p:cNvPr id="101" name="Rectangle 100"/>
+          <p:cNvPr id="103" name="Rectangle 102"/>
           <p:cNvSpPr/>
           <p:nvPr/>
         </p:nvSpPr>
@@ -12081,7 +12133,7 @@
       </p:sp>
       <p:sp>
         <p:nvSpPr>
-          <p:cNvPr id="103" name="TextBox 102"/>
+          <p:cNvPr id="105" name="TextBox 104"/>
           <p:cNvSpPr txBox="1"/>
           <p:nvPr/>
         </p:nvSpPr>
@@ -12116,7 +12168,7 @@
       </p:sp>
       <p:sp>
         <p:nvSpPr>
-          <p:cNvPr id="105" name="TextBox 104"/>
+          <p:cNvPr id="107" name="TextBox 106"/>
           <p:cNvSpPr txBox="1"/>
           <p:nvPr/>
         </p:nvSpPr>
@@ -12151,7 +12203,7 @@
       </p:sp>
       <p:sp>
         <p:nvSpPr>
-          <p:cNvPr id="107" name="TextBox 106"/>
+          <p:cNvPr id="109" name="TextBox 108"/>
           <p:cNvSpPr txBox="1"/>
           <p:nvPr/>
         </p:nvSpPr>
@@ -12186,7 +12238,7 @@
       </p:sp>
       <p:sp>
         <p:nvSpPr>
-          <p:cNvPr id="109" name="Rectangle 108"/>
+          <p:cNvPr id="111" name="Rectangle 110"/>
           <p:cNvSpPr/>
           <p:nvPr/>
         </p:nvSpPr>
@@ -12231,7 +12283,7 @@
       </p:sp>
       <p:sp>
         <p:nvSpPr>
-          <p:cNvPr id="111" name="TextBox 110"/>
+          <p:cNvPr id="113" name="TextBox 112"/>
           <p:cNvSpPr txBox="1"/>
           <p:nvPr/>
         </p:nvSpPr>
@@ -12266,7 +12318,7 @@
       </p:sp>
       <p:sp>
         <p:nvSpPr>
-          <p:cNvPr id="113" name="TextBox 112"/>
+          <p:cNvPr id="115" name="TextBox 114"/>
           <p:cNvSpPr txBox="1"/>
           <p:nvPr/>
         </p:nvSpPr>
@@ -12301,7 +12353,7 @@
       </p:sp>
       <p:sp>
         <p:nvSpPr>
-          <p:cNvPr id="115" name="TextBox 114"/>
+          <p:cNvPr id="117" name="TextBox 116"/>
           <p:cNvSpPr txBox="1"/>
           <p:nvPr/>
         </p:nvSpPr>
@@ -12336,7 +12388,7 @@
       </p:sp>
       <p:sp>
         <p:nvSpPr>
-          <p:cNvPr id="117" name="Rectangle 116"/>
+          <p:cNvPr id="119" name="Rectangle 118"/>
           <p:cNvSpPr/>
           <p:nvPr/>
         </p:nvSpPr>
@@ -12381,7 +12433,7 @@
       </p:sp>
       <p:sp>
         <p:nvSpPr>
-          <p:cNvPr id="119" name="TextBox 118"/>
+          <p:cNvPr id="121" name="TextBox 120"/>
           <p:cNvSpPr txBox="1"/>
           <p:nvPr/>
         </p:nvSpPr>
@@ -12416,7 +12468,7 @@
       </p:sp>
       <p:sp>
         <p:nvSpPr>
-          <p:cNvPr id="121" name="TextBox 120"/>
+          <p:cNvPr id="123" name="TextBox 122"/>
           <p:cNvSpPr txBox="1"/>
           <p:nvPr/>
         </p:nvSpPr>
@@ -12451,7 +12503,7 @@
       </p:sp>
       <p:sp>
         <p:nvSpPr>
-          <p:cNvPr id="123" name="TextBox 122"/>
+          <p:cNvPr id="125" name="TextBox 124"/>
           <p:cNvSpPr txBox="1"/>
           <p:nvPr/>
         </p:nvSpPr>
@@ -12486,7 +12538,7 @@
       </p:sp>
       <p:sp>
         <p:nvSpPr>
-          <p:cNvPr id="125" name="Rectangle 124"/>
+          <p:cNvPr id="127" name="Rectangle 126"/>
           <p:cNvSpPr/>
           <p:nvPr/>
         </p:nvSpPr>
@@ -12531,7 +12583,7 @@
       </p:sp>
       <p:sp>
         <p:nvSpPr>
-          <p:cNvPr id="127" name="TextBox 126"/>
+          <p:cNvPr id="129" name="TextBox 128"/>
           <p:cNvSpPr txBox="1"/>
           <p:nvPr/>
         </p:nvSpPr>
@@ -12566,7 +12618,7 @@
       </p:sp>
       <p:sp>
         <p:nvSpPr>
-          <p:cNvPr id="129" name="TextBox 128"/>
+          <p:cNvPr id="131" name="TextBox 130"/>
           <p:cNvSpPr txBox="1"/>
           <p:nvPr/>
         </p:nvSpPr>
@@ -12601,7 +12653,7 @@
       </p:sp>
       <p:sp>
         <p:nvSpPr>
-          <p:cNvPr id="131" name="TextBox 130"/>
+          <p:cNvPr id="133" name="TextBox 132"/>
           <p:cNvSpPr txBox="1"/>
           <p:nvPr/>
         </p:nvSpPr>
@@ -12644,14 +12696,14 @@
                 <p:cTn id="2" dur="indefinite" nodeType="mainSeq">
                   <p:childTnLst>
                     <p:par>
-                      <p:cTn id="89" presetID="2" presetClass="entr" presetSubtype="8" fill="hold" grpId="0" nodeType="clickEffect">
+                      <p:cTn id="91" presetID="2" presetClass="entr" presetSubtype="8" fill="hold" grpId="0" nodeType="clickEffect">
                         <p:stCondLst>
                           <p:cond delay="0"/>
                         </p:stCondLst>
                         <p:childTnLst>
                           <p:animEffect transition="in" filter="fly">
                             <p:cBhvr>
-                              <p:cTn id="90" dur="600" fill="hold"/>
+                              <p:cTn id="92" dur="600" fill="hold"/>
                               <p:tgtEl>
                                 <p:spTgt spid="4"/>
                               </p:tgtEl>
@@ -12661,356 +12713,356 @@
                       </p:cTn>
                     </p:par>
                     <p:par>
-                      <p:cTn id="91" presetID="10" presetClass="entr" presetSubtype="0" fill="hold" grpId="0" nodeType="clickEffect">
+                      <p:cTn id="93" presetID="10" presetClass="entr" presetSubtype="0" fill="hold" grpId="0" nodeType="clickEffect">
                         <p:stCondLst>
                           <p:cond delay="200"/>
                         </p:stCondLst>
                         <p:childTnLst>
                           <p:animEffect transition="in" filter="fade">
                             <p:cBhvr>
-                              <p:cTn id="92" dur="700" fill="hold"/>
-                              <p:tgtEl>
-                                <p:spTgt spid="91"/>
-                              </p:tgtEl>
-                            </p:cBhvr>
-                          </p:animEffect>
-                        </p:childTnLst>
-                      </p:cTn>
-                    </p:par>
-                    <p:par>
-                      <p:cTn id="93" presetID="2" presetClass="entr" presetSubtype="8" fill="hold" grpId="0" nodeType="clickEffect">
+                              <p:cTn id="94" dur="700" fill="hold"/>
+                              <p:tgtEl>
+                                <p:spTgt spid="93"/>
+                              </p:tgtEl>
+                            </p:cBhvr>
+                          </p:animEffect>
+                        </p:childTnLst>
+                      </p:cTn>
+                    </p:par>
+                    <p:par>
+                      <p:cTn id="95" presetID="2" presetClass="entr" presetSubtype="8" fill="hold" grpId="0" nodeType="clickEffect">
                         <p:stCondLst>
                           <p:cond delay="300"/>
                         </p:stCondLst>
                         <p:childTnLst>
                           <p:animEffect transition="in" filter="fly">
                             <p:cBhvr>
-                              <p:cTn id="94" dur="600" fill="hold"/>
-                              <p:tgtEl>
-                                <p:spTgt spid="93"/>
-                              </p:tgtEl>
-                            </p:cBhvr>
-                          </p:animEffect>
-                        </p:childTnLst>
-                      </p:cTn>
-                    </p:par>
-                    <p:par>
-                      <p:cTn id="95" presetID="10" presetClass="entr" presetSubtype="0" fill="hold" grpId="0" nodeType="clickEffect">
+                              <p:cTn id="96" dur="600" fill="hold"/>
+                              <p:tgtEl>
+                                <p:spTgt spid="95"/>
+                              </p:tgtEl>
+                            </p:cBhvr>
+                          </p:animEffect>
+                        </p:childTnLst>
+                      </p:cTn>
+                    </p:par>
+                    <p:par>
+                      <p:cTn id="97" presetID="10" presetClass="entr" presetSubtype="0" fill="hold" grpId="0" nodeType="clickEffect">
                         <p:stCondLst>
                           <p:cond delay="400"/>
                         </p:stCondLst>
                         <p:childTnLst>
                           <p:animEffect transition="in" filter="fade">
                             <p:cBhvr>
-                              <p:cTn id="96" dur="700" fill="hold"/>
-                              <p:tgtEl>
-                                <p:spTgt spid="95"/>
-                              </p:tgtEl>
-                            </p:cBhvr>
-                          </p:animEffect>
-                        </p:childTnLst>
-                      </p:cTn>
-                    </p:par>
-                    <p:par>
-                      <p:cTn id="97" presetID="10" presetClass="entr" presetSubtype="0" fill="hold" grpId="0" nodeType="clickEffect">
+                              <p:cTn id="98" dur="700" fill="hold"/>
+                              <p:tgtEl>
+                                <p:spTgt spid="97"/>
+                              </p:tgtEl>
+                            </p:cBhvr>
+                          </p:animEffect>
+                        </p:childTnLst>
+                      </p:cTn>
+                    </p:par>
+                    <p:par>
+                      <p:cTn id="99" presetID="10" presetClass="entr" presetSubtype="0" fill="hold" grpId="0" nodeType="clickEffect">
                         <p:stCondLst>
                           <p:cond delay="500"/>
                         </p:stCondLst>
                         <p:childTnLst>
                           <p:animEffect transition="in" filter="fade">
                             <p:cBhvr>
-                              <p:cTn id="98" dur="700" fill="hold"/>
-                              <p:tgtEl>
-                                <p:spTgt spid="97"/>
-                              </p:tgtEl>
-                            </p:cBhvr>
-                          </p:animEffect>
-                        </p:childTnLst>
-                      </p:cTn>
-                    </p:par>
-                    <p:par>
-                      <p:cTn id="99" presetID="10" presetClass="entr" presetSubtype="0" fill="hold" grpId="0" nodeType="clickEffect">
+                              <p:cTn id="100" dur="700" fill="hold"/>
+                              <p:tgtEl>
+                                <p:spTgt spid="99"/>
+                              </p:tgtEl>
+                            </p:cBhvr>
+                          </p:animEffect>
+                        </p:childTnLst>
+                      </p:cTn>
+                    </p:par>
+                    <p:par>
+                      <p:cTn id="101" presetID="10" presetClass="entr" presetSubtype="0" fill="hold" grpId="0" nodeType="clickEffect">
                         <p:stCondLst>
                           <p:cond delay="600"/>
                         </p:stCondLst>
                         <p:childTnLst>
                           <p:animEffect transition="in" filter="fade">
                             <p:cBhvr>
-                              <p:cTn id="100" dur="700" fill="hold"/>
-                              <p:tgtEl>
-                                <p:spTgt spid="99"/>
-                              </p:tgtEl>
-                            </p:cBhvr>
-                          </p:animEffect>
-                        </p:childTnLst>
-                      </p:cTn>
-                    </p:par>
-                    <p:par>
-                      <p:cTn id="101" presetID="2" presetClass="entr" presetSubtype="8" fill="hold" grpId="0" nodeType="clickEffect">
+                              <p:cTn id="102" dur="700" fill="hold"/>
+                              <p:tgtEl>
+                                <p:spTgt spid="101"/>
+                              </p:tgtEl>
+                            </p:cBhvr>
+                          </p:animEffect>
+                        </p:childTnLst>
+                      </p:cTn>
+                    </p:par>
+                    <p:par>
+                      <p:cTn id="103" presetID="2" presetClass="entr" presetSubtype="8" fill="hold" grpId="0" nodeType="clickEffect">
                         <p:stCondLst>
                           <p:cond delay="500"/>
                         </p:stCondLst>
                         <p:childTnLst>
                           <p:animEffect transition="in" filter="fly">
                             <p:cBhvr>
-                              <p:cTn id="102" dur="600" fill="hold"/>
-                              <p:tgtEl>
-                                <p:spTgt spid="101"/>
-                              </p:tgtEl>
-                            </p:cBhvr>
-                          </p:animEffect>
-                        </p:childTnLst>
-                      </p:cTn>
-                    </p:par>
-                    <p:par>
-                      <p:cTn id="103" presetID="10" presetClass="entr" presetSubtype="0" fill="hold" grpId="0" nodeType="clickEffect">
+                              <p:cTn id="104" dur="600" fill="hold"/>
+                              <p:tgtEl>
+                                <p:spTgt spid="103"/>
+                              </p:tgtEl>
+                            </p:cBhvr>
+                          </p:animEffect>
+                        </p:childTnLst>
+                      </p:cTn>
+                    </p:par>
+                    <p:par>
+                      <p:cTn id="105" presetID="10" presetClass="entr" presetSubtype="0" fill="hold" grpId="0" nodeType="clickEffect">
                         <p:stCondLst>
                           <p:cond delay="600"/>
                         </p:stCondLst>
                         <p:childTnLst>
                           <p:animEffect transition="in" filter="fade">
                             <p:cBhvr>
-                              <p:cTn id="104" dur="700" fill="hold"/>
-                              <p:tgtEl>
-                                <p:spTgt spid="103"/>
-                              </p:tgtEl>
-                            </p:cBhvr>
-                          </p:animEffect>
-                        </p:childTnLst>
-                      </p:cTn>
-                    </p:par>
-                    <p:par>
-                      <p:cTn id="105" presetID="10" presetClass="entr" presetSubtype="0" fill="hold" grpId="0" nodeType="clickEffect">
+                              <p:cTn id="106" dur="700" fill="hold"/>
+                              <p:tgtEl>
+                                <p:spTgt spid="105"/>
+                              </p:tgtEl>
+                            </p:cBhvr>
+                          </p:animEffect>
+                        </p:childTnLst>
+                      </p:cTn>
+                    </p:par>
+                    <p:par>
+                      <p:cTn id="107" presetID="10" presetClass="entr" presetSubtype="0" fill="hold" grpId="0" nodeType="clickEffect">
                         <p:stCondLst>
                           <p:cond delay="700"/>
                         </p:stCondLst>
                         <p:childTnLst>
                           <p:animEffect transition="in" filter="fade">
                             <p:cBhvr>
-                              <p:cTn id="106" dur="700" fill="hold"/>
-                              <p:tgtEl>
-                                <p:spTgt spid="105"/>
-                              </p:tgtEl>
-                            </p:cBhvr>
-                          </p:animEffect>
-                        </p:childTnLst>
-                      </p:cTn>
-                    </p:par>
-                    <p:par>
-                      <p:cTn id="107" presetID="10" presetClass="entr" presetSubtype="0" fill="hold" grpId="0" nodeType="clickEffect">
+                              <p:cTn id="108" dur="700" fill="hold"/>
+                              <p:tgtEl>
+                                <p:spTgt spid="107"/>
+                              </p:tgtEl>
+                            </p:cBhvr>
+                          </p:animEffect>
+                        </p:childTnLst>
+                      </p:cTn>
+                    </p:par>
+                    <p:par>
+                      <p:cTn id="109" presetID="10" presetClass="entr" presetSubtype="0" fill="hold" grpId="0" nodeType="clickEffect">
                         <p:stCondLst>
                           <p:cond delay="800"/>
                         </p:stCondLst>
                         <p:childTnLst>
                           <p:animEffect transition="in" filter="fade">
                             <p:cBhvr>
-                              <p:cTn id="108" dur="700" fill="hold"/>
-                              <p:tgtEl>
-                                <p:spTgt spid="107"/>
-                              </p:tgtEl>
-                            </p:cBhvr>
-                          </p:animEffect>
-                        </p:childTnLst>
-                      </p:cTn>
-                    </p:par>
-                    <p:par>
-                      <p:cTn id="109" presetID="2" presetClass="entr" presetSubtype="8" fill="hold" grpId="0" nodeType="clickEffect">
+                              <p:cTn id="110" dur="700" fill="hold"/>
+                              <p:tgtEl>
+                                <p:spTgt spid="109"/>
+                              </p:tgtEl>
+                            </p:cBhvr>
+                          </p:animEffect>
+                        </p:childTnLst>
+                      </p:cTn>
+                    </p:par>
+                    <p:par>
+                      <p:cTn id="111" presetID="2" presetClass="entr" presetSubtype="8" fill="hold" grpId="0" nodeType="clickEffect">
                         <p:stCondLst>
                           <p:cond delay="700"/>
                         </p:stCondLst>
                         <p:childTnLst>
                           <p:animEffect transition="in" filter="fly">
                             <p:cBhvr>
-                              <p:cTn id="110" dur="600" fill="hold"/>
-                              <p:tgtEl>
-                                <p:spTgt spid="109"/>
-                              </p:tgtEl>
-                            </p:cBhvr>
-                          </p:animEffect>
-                        </p:childTnLst>
-                      </p:cTn>
-                    </p:par>
-                    <p:par>
-                      <p:cTn id="111" presetID="10" presetClass="entr" presetSubtype="0" fill="hold" grpId="0" nodeType="clickEffect">
+                              <p:cTn id="112" dur="600" fill="hold"/>
+                              <p:tgtEl>
+                                <p:spTgt spid="111"/>
+                              </p:tgtEl>
+                            </p:cBhvr>
+                          </p:animEffect>
+                        </p:childTnLst>
+                      </p:cTn>
+                    </p:par>
+                    <p:par>
+                      <p:cTn id="113" presetID="10" presetClass="entr" presetSubtype="0" fill="hold" grpId="0" nodeType="clickEffect">
                         <p:stCondLst>
                           <p:cond delay="800"/>
                         </p:stCondLst>
                         <p:childTnLst>
                           <p:animEffect transition="in" filter="fade">
                             <p:cBhvr>
-                              <p:cTn id="112" dur="700" fill="hold"/>
-                              <p:tgtEl>
-                                <p:spTgt spid="111"/>
-                              </p:tgtEl>
-                            </p:cBhvr>
-                          </p:animEffect>
-                        </p:childTnLst>
-                      </p:cTn>
-                    </p:par>
-                    <p:par>
-                      <p:cTn id="113" presetID="10" presetClass="entr" presetSubtype="0" fill="hold" grpId="0" nodeType="clickEffect">
+                              <p:cTn id="114" dur="700" fill="hold"/>
+                              <p:tgtEl>
+                                <p:spTgt spid="113"/>
+                              </p:tgtEl>
+                            </p:cBhvr>
+                          </p:animEffect>
+                        </p:childTnLst>
+                      </p:cTn>
+                    </p:par>
+                    <p:par>
+                      <p:cTn id="115" presetID="10" presetClass="entr" presetSubtype="0" fill="hold" grpId="0" nodeType="clickEffect">
                         <p:stCondLst>
                           <p:cond delay="900"/>
                         </p:stCondLst>
                         <p:childTnLst>
                           <p:animEffect transition="in" filter="fade">
                             <p:cBhvr>
-                              <p:cTn id="114" dur="700" fill="hold"/>
-                              <p:tgtEl>
-                                <p:spTgt spid="113"/>
-                              </p:tgtEl>
-                            </p:cBhvr>
-                          </p:animEffect>
-                        </p:childTnLst>
-                      </p:cTn>
-                    </p:par>
-                    <p:par>
-                      <p:cTn id="115" presetID="10" presetClass="entr" presetSubtype="0" fill="hold" grpId="0" nodeType="clickEffect">
+                              <p:cTn id="116" dur="700" fill="hold"/>
+                              <p:tgtEl>
+                                <p:spTgt spid="115"/>
+                              </p:tgtEl>
+                            </p:cBhvr>
+                          </p:animEffect>
+                        </p:childTnLst>
+                      </p:cTn>
+                    </p:par>
+                    <p:par>
+                      <p:cTn id="117" presetID="10" presetClass="entr" presetSubtype="0" fill="hold" grpId="0" nodeType="clickEffect">
                         <p:stCondLst>
                           <p:cond delay="1000"/>
                         </p:stCondLst>
                         <p:childTnLst>
                           <p:animEffect transition="in" filter="fade">
                             <p:cBhvr>
-                              <p:cTn id="116" dur="700" fill="hold"/>
-                              <p:tgtEl>
-                                <p:spTgt spid="115"/>
-                              </p:tgtEl>
-                            </p:cBhvr>
-                          </p:animEffect>
-                        </p:childTnLst>
-                      </p:cTn>
-                    </p:par>
-                    <p:par>
-                      <p:cTn id="117" presetID="2" presetClass="entr" presetSubtype="8" fill="hold" grpId="0" nodeType="clickEffect">
+                              <p:cTn id="118" dur="700" fill="hold"/>
+                              <p:tgtEl>
+                                <p:spTgt spid="117"/>
+                              </p:tgtEl>
+                            </p:cBhvr>
+                          </p:animEffect>
+                        </p:childTnLst>
+                      </p:cTn>
+                    </p:par>
+                    <p:par>
+                      <p:cTn id="119" presetID="2" presetClass="entr" presetSubtype="8" fill="hold" grpId="0" nodeType="clickEffect">
                         <p:stCondLst>
                           <p:cond delay="900"/>
                         </p:stCondLst>
                         <p:childTnLst>
                           <p:animEffect transition="in" filter="fly">
                             <p:cBhvr>
-                              <p:cTn id="118" dur="600" fill="hold"/>
-                              <p:tgtEl>
-                                <p:spTgt spid="117"/>
-                              </p:tgtEl>
-                            </p:cBhvr>
-                          </p:animEffect>
-                        </p:childTnLst>
-                      </p:cTn>
-                    </p:par>
-                    <p:par>
-                      <p:cTn id="119" presetID="10" presetClass="entr" presetSubtype="0" fill="hold" grpId="0" nodeType="clickEffect">
+                              <p:cTn id="120" dur="600" fill="hold"/>
+                              <p:tgtEl>
+                                <p:spTgt spid="119"/>
+                              </p:tgtEl>
+                            </p:cBhvr>
+                          </p:animEffect>
+                        </p:childTnLst>
+                      </p:cTn>
+                    </p:par>
+                    <p:par>
+                      <p:cTn id="121" presetID="10" presetClass="entr" presetSubtype="0" fill="hold" grpId="0" nodeType="clickEffect">
                         <p:stCondLst>
                           <p:cond delay="1000"/>
                         </p:stCondLst>
                         <p:childTnLst>
                           <p:animEffect transition="in" filter="fade">
                             <p:cBhvr>
-                              <p:cTn id="120" dur="700" fill="hold"/>
-                              <p:tgtEl>
-                                <p:spTgt spid="119"/>
-                              </p:tgtEl>
-                            </p:cBhvr>
-                          </p:animEffect>
-                        </p:childTnLst>
-                      </p:cTn>
-                    </p:par>
-                    <p:par>
-                      <p:cTn id="121" presetID="10" presetClass="entr" presetSubtype="0" fill="hold" grpId="0" nodeType="clickEffect">
+                              <p:cTn id="122" dur="700" fill="hold"/>
+                              <p:tgtEl>
+                                <p:spTgt spid="121"/>
+                              </p:tgtEl>
+                            </p:cBhvr>
+                          </p:animEffect>
+                        </p:childTnLst>
+                      </p:cTn>
+                    </p:par>
+                    <p:par>
+                      <p:cTn id="123" presetID="10" presetClass="entr" presetSubtype="0" fill="hold" grpId="0" nodeType="clickEffect">
                         <p:stCondLst>
                           <p:cond delay="1100"/>
                         </p:stCondLst>
                         <p:childTnLst>
                           <p:animEffect transition="in" filter="fade">
                             <p:cBhvr>
-                              <p:cTn id="122" dur="700" fill="hold"/>
-                              <p:tgtEl>
-                                <p:spTgt spid="121"/>
-                              </p:tgtEl>
-                            </p:cBhvr>
-                          </p:animEffect>
-                        </p:childTnLst>
-                      </p:cTn>
-                    </p:par>
-                    <p:par>
-                      <p:cTn id="123" presetID="10" presetClass="entr" presetSubtype="0" fill="hold" grpId="0" nodeType="clickEffect">
+                              <p:cTn id="124" dur="700" fill="hold"/>
+                              <p:tgtEl>
+                                <p:spTgt spid="123"/>
+                              </p:tgtEl>
+                            </p:cBhvr>
+                          </p:animEffect>
+                        </p:childTnLst>
+                      </p:cTn>
+                    </p:par>
+                    <p:par>
+                      <p:cTn id="125" presetID="10" presetClass="entr" presetSubtype="0" fill="hold" grpId="0" nodeType="clickEffect">
                         <p:stCondLst>
                           <p:cond delay="1200"/>
                         </p:stCondLst>
                         <p:childTnLst>
                           <p:animEffect transition="in" filter="fade">
                             <p:cBhvr>
-                              <p:cTn id="124" dur="700" fill="hold"/>
-                              <p:tgtEl>
-                                <p:spTgt spid="123"/>
-                              </p:tgtEl>
-                            </p:cBhvr>
-                          </p:animEffect>
-                        </p:childTnLst>
-                      </p:cTn>
-                    </p:par>
-                    <p:par>
-                      <p:cTn id="125" presetID="2" presetClass="entr" presetSubtype="8" fill="hold" grpId="0" nodeType="clickEffect">
+                              <p:cTn id="126" dur="700" fill="hold"/>
+                              <p:tgtEl>
+                                <p:spTgt spid="125"/>
+                              </p:tgtEl>
+                            </p:cBhvr>
+                          </p:animEffect>
+                        </p:childTnLst>
+                      </p:cTn>
+                    </p:par>
+                    <p:par>
+                      <p:cTn id="127" presetID="2" presetClass="entr" presetSubtype="8" fill="hold" grpId="0" nodeType="clickEffect">
                         <p:stCondLst>
                           <p:cond delay="1100"/>
                         </p:stCondLst>
                         <p:childTnLst>
                           <p:animEffect transition="in" filter="fly">
                             <p:cBhvr>
-                              <p:cTn id="126" dur="600" fill="hold"/>
-                              <p:tgtEl>
-                                <p:spTgt spid="125"/>
-                              </p:tgtEl>
-                            </p:cBhvr>
-                          </p:animEffect>
-                        </p:childTnLst>
-                      </p:cTn>
-                    </p:par>
-                    <p:par>
-                      <p:cTn id="127" presetID="10" presetClass="entr" presetSubtype="0" fill="hold" grpId="0" nodeType="clickEffect">
+                              <p:cTn id="128" dur="600" fill="hold"/>
+                              <p:tgtEl>
+                                <p:spTgt spid="127"/>
+                              </p:tgtEl>
+                            </p:cBhvr>
+                          </p:animEffect>
+                        </p:childTnLst>
+                      </p:cTn>
+                    </p:par>
+                    <p:par>
+                      <p:cTn id="129" presetID="10" presetClass="entr" presetSubtype="0" fill="hold" grpId="0" nodeType="clickEffect">
                         <p:stCondLst>
                           <p:cond delay="1200"/>
                         </p:stCondLst>
                         <p:childTnLst>
                           <p:animEffect transition="in" filter="fade">
                             <p:cBhvr>
-                              <p:cTn id="128" dur="700" fill="hold"/>
-                              <p:tgtEl>
-                                <p:spTgt spid="127"/>
-                              </p:tgtEl>
-                            </p:cBhvr>
-                          </p:animEffect>
-                        </p:childTnLst>
-                      </p:cTn>
-                    </p:par>
-                    <p:par>
-                      <p:cTn id="129" presetID="10" presetClass="entr" presetSubtype="0" fill="hold" grpId="0" nodeType="clickEffect">
+                              <p:cTn id="130" dur="700" fill="hold"/>
+                              <p:tgtEl>
+                                <p:spTgt spid="129"/>
+                              </p:tgtEl>
+                            </p:cBhvr>
+                          </p:animEffect>
+                        </p:childTnLst>
+                      </p:cTn>
+                    </p:par>
+                    <p:par>
+                      <p:cTn id="131" presetID="10" presetClass="entr" presetSubtype="0" fill="hold" grpId="0" nodeType="clickEffect">
                         <p:stCondLst>
                           <p:cond delay="1300"/>
                         </p:stCondLst>
                         <p:childTnLst>
                           <p:animEffect transition="in" filter="fade">
                             <p:cBhvr>
-                              <p:cTn id="130" dur="700" fill="hold"/>
-                              <p:tgtEl>
-                                <p:spTgt spid="129"/>
-                              </p:tgtEl>
-                            </p:cBhvr>
-                          </p:animEffect>
-                        </p:childTnLst>
-                      </p:cTn>
-                    </p:par>
-                    <p:par>
-                      <p:cTn id="131" presetID="10" presetClass="entr" presetSubtype="0" fill="hold" grpId="0" nodeType="clickEffect">
+                              <p:cTn id="132" dur="700" fill="hold"/>
+                              <p:tgtEl>
+                                <p:spTgt spid="131"/>
+                              </p:tgtEl>
+                            </p:cBhvr>
+                          </p:animEffect>
+                        </p:childTnLst>
+                      </p:cTn>
+                    </p:par>
+                    <p:par>
+                      <p:cTn id="133" presetID="10" presetClass="entr" presetSubtype="0" fill="hold" grpId="0" nodeType="clickEffect">
                         <p:stCondLst>
                           <p:cond delay="1400"/>
                         </p:stCondLst>
                         <p:childTnLst>
                           <p:animEffect transition="in" filter="fade">
                             <p:cBhvr>
-                              <p:cTn id="132" dur="700" fill="hold"/>
-                              <p:tgtEl>
-                                <p:spTgt spid="131"/>
+                              <p:cTn id="134" dur="700" fill="hold"/>
+                              <p:tgtEl>
+                                <p:spTgt spid="133"/>
                               </p:tgtEl>
                             </p:cBhvr>
                           </p:animEffect>
@@ -13179,7 +13231,7 @@
       </p:sp>
       <p:sp>
         <p:nvSpPr>
-          <p:cNvPr id="135" name="TextBox 134"/>
+          <p:cNvPr id="137" name="TextBox 136"/>
           <p:cNvSpPr txBox="1"/>
           <p:nvPr/>
         </p:nvSpPr>
@@ -13214,7 +13266,7 @@
       </p:sp>
       <p:sp>
         <p:nvSpPr>
-          <p:cNvPr id="137" name="Rectangle 136"/>
+          <p:cNvPr id="139" name="Rectangle 138"/>
           <p:cNvSpPr/>
           <p:nvPr/>
         </p:nvSpPr>
@@ -13259,7 +13311,7 @@
       </p:sp>
       <p:sp>
         <p:nvSpPr>
-          <p:cNvPr id="139" name="TextBox 138"/>
+          <p:cNvPr id="141" name="TextBox 140"/>
           <p:cNvSpPr txBox="1"/>
           <p:nvPr/>
         </p:nvSpPr>
@@ -13294,7 +13346,7 @@
       </p:sp>
       <p:sp>
         <p:nvSpPr>
-          <p:cNvPr id="141" name="TextBox 140"/>
+          <p:cNvPr id="143" name="TextBox 142"/>
           <p:cNvSpPr txBox="1"/>
           <p:nvPr/>
         </p:nvSpPr>
@@ -13329,7 +13381,7 @@
       </p:sp>
       <p:sp>
         <p:nvSpPr>
-          <p:cNvPr id="143" name="TextBox 142"/>
+          <p:cNvPr id="145" name="TextBox 144"/>
           <p:cNvSpPr txBox="1"/>
           <p:nvPr/>
         </p:nvSpPr>
@@ -13364,7 +13416,7 @@
       </p:sp>
       <p:sp>
         <p:nvSpPr>
-          <p:cNvPr id="145" name="Rectangle 144"/>
+          <p:cNvPr id="147" name="Rectangle 146"/>
           <p:cNvSpPr/>
           <p:nvPr/>
         </p:nvSpPr>
@@ -13409,7 +13461,7 @@
       </p:sp>
       <p:sp>
         <p:nvSpPr>
-          <p:cNvPr id="147" name="TextBox 146"/>
+          <p:cNvPr id="149" name="TextBox 148"/>
           <p:cNvSpPr txBox="1"/>
           <p:nvPr/>
         </p:nvSpPr>
@@ -13444,7 +13496,7 @@
       </p:sp>
       <p:sp>
         <p:nvSpPr>
-          <p:cNvPr id="149" name="TextBox 148"/>
+          <p:cNvPr id="151" name="TextBox 150"/>
           <p:cNvSpPr txBox="1"/>
           <p:nvPr/>
         </p:nvSpPr>
@@ -13479,7 +13531,7 @@
       </p:sp>
       <p:sp>
         <p:nvSpPr>
-          <p:cNvPr id="151" name="TextBox 150"/>
+          <p:cNvPr id="153" name="TextBox 152"/>
           <p:cNvSpPr txBox="1"/>
           <p:nvPr/>
         </p:nvSpPr>
@@ -13514,7 +13566,7 @@
       </p:sp>
       <p:sp>
         <p:nvSpPr>
-          <p:cNvPr id="153" name="Rectangle 152"/>
+          <p:cNvPr id="155" name="Rectangle 154"/>
           <p:cNvSpPr/>
           <p:nvPr/>
         </p:nvSpPr>
@@ -13559,7 +13611,7 @@
       </p:sp>
       <p:sp>
         <p:nvSpPr>
-          <p:cNvPr id="155" name="TextBox 154"/>
+          <p:cNvPr id="157" name="TextBox 156"/>
           <p:cNvSpPr txBox="1"/>
           <p:nvPr/>
         </p:nvSpPr>
@@ -13594,7 +13646,7 @@
       </p:sp>
       <p:sp>
         <p:nvSpPr>
-          <p:cNvPr id="157" name="TextBox 156"/>
+          <p:cNvPr id="159" name="TextBox 158"/>
           <p:cNvSpPr txBox="1"/>
           <p:nvPr/>
         </p:nvSpPr>
@@ -13629,7 +13681,7 @@
       </p:sp>
       <p:sp>
         <p:nvSpPr>
-          <p:cNvPr id="159" name="TextBox 158"/>
+          <p:cNvPr id="161" name="TextBox 160"/>
           <p:cNvSpPr txBox="1"/>
           <p:nvPr/>
         </p:nvSpPr>
@@ -13664,7 +13716,7 @@
       </p:sp>
       <p:sp>
         <p:nvSpPr>
-          <p:cNvPr id="161" name="Rectangle 160"/>
+          <p:cNvPr id="163" name="Rectangle 162"/>
           <p:cNvSpPr/>
           <p:nvPr/>
         </p:nvSpPr>
@@ -13709,7 +13761,7 @@
       </p:sp>
       <p:sp>
         <p:nvSpPr>
-          <p:cNvPr id="163" name="TextBox 162"/>
+          <p:cNvPr id="165" name="TextBox 164"/>
           <p:cNvSpPr txBox="1"/>
           <p:nvPr/>
         </p:nvSpPr>
@@ -13744,7 +13796,7 @@
       </p:sp>
       <p:sp>
         <p:nvSpPr>
-          <p:cNvPr id="165" name="TextBox 164"/>
+          <p:cNvPr id="167" name="TextBox 166"/>
           <p:cNvSpPr txBox="1"/>
           <p:nvPr/>
         </p:nvSpPr>
@@ -13779,7 +13831,7 @@
       </p:sp>
       <p:sp>
         <p:nvSpPr>
-          <p:cNvPr id="167" name="TextBox 166"/>
+          <p:cNvPr id="169" name="TextBox 168"/>
           <p:cNvSpPr txBox="1"/>
           <p:nvPr/>
         </p:nvSpPr>
@@ -13814,7 +13866,7 @@
       </p:sp>
       <p:sp>
         <p:nvSpPr>
-          <p:cNvPr id="169" name="Rectangle 168"/>
+          <p:cNvPr id="171" name="Rectangle 170"/>
           <p:cNvSpPr/>
           <p:nvPr/>
         </p:nvSpPr>
@@ -13859,7 +13911,7 @@
       </p:sp>
       <p:sp>
         <p:nvSpPr>
-          <p:cNvPr id="171" name="TextBox 170"/>
+          <p:cNvPr id="173" name="TextBox 172"/>
           <p:cNvSpPr txBox="1"/>
           <p:nvPr/>
         </p:nvSpPr>
@@ -13894,7 +13946,7 @@
       </p:sp>
       <p:sp>
         <p:nvSpPr>
-          <p:cNvPr id="173" name="TextBox 172"/>
+          <p:cNvPr id="175" name="TextBox 174"/>
           <p:cNvSpPr txBox="1"/>
           <p:nvPr/>
         </p:nvSpPr>
@@ -13929,7 +13981,7 @@
       </p:sp>
       <p:sp>
         <p:nvSpPr>
-          <p:cNvPr id="175" name="TextBox 174"/>
+          <p:cNvPr id="177" name="TextBox 176"/>
           <p:cNvSpPr txBox="1"/>
           <p:nvPr/>
         </p:nvSpPr>
@@ -13972,14 +14024,14 @@
                 <p:cTn id="2" dur="indefinite" nodeType="mainSeq">
                   <p:childTnLst>
                     <p:par>
-                      <p:cTn id="133" presetID="2" presetClass="entr" presetSubtype="8" fill="hold" grpId="0" nodeType="clickEffect">
+                      <p:cTn id="135" presetID="2" presetClass="entr" presetSubtype="8" fill="hold" grpId="0" nodeType="clickEffect">
                         <p:stCondLst>
                           <p:cond delay="0"/>
                         </p:stCondLst>
                         <p:childTnLst>
                           <p:animEffect transition="in" filter="fly">
                             <p:cBhvr>
-                              <p:cTn id="134" dur="600" fill="hold"/>
+                              <p:cTn id="136" dur="600" fill="hold"/>
                               <p:tgtEl>
                                 <p:spTgt spid="4"/>
                               </p:tgtEl>
@@ -13989,356 +14041,356 @@
                       </p:cTn>
                     </p:par>
                     <p:par>
-                      <p:cTn id="135" presetID="10" presetClass="entr" presetSubtype="0" fill="hold" grpId="0" nodeType="clickEffect">
+                      <p:cTn id="137" presetID="10" presetClass="entr" presetSubtype="0" fill="hold" grpId="0" nodeType="clickEffect">
                         <p:stCondLst>
                           <p:cond delay="200"/>
                         </p:stCondLst>
                         <p:childTnLst>
                           <p:animEffect transition="in" filter="fade">
                             <p:cBhvr>
-                              <p:cTn id="136" dur="700" fill="hold"/>
-                              <p:tgtEl>
-                                <p:spTgt spid="135"/>
-                              </p:tgtEl>
-                            </p:cBhvr>
-                          </p:animEffect>
-                        </p:childTnLst>
-                      </p:cTn>
-                    </p:par>
-                    <p:par>
-                      <p:cTn id="137" presetID="2" presetClass="entr" presetSubtype="8" fill="hold" grpId="0" nodeType="clickEffect">
+                              <p:cTn id="138" dur="700" fill="hold"/>
+                              <p:tgtEl>
+                                <p:spTgt spid="137"/>
+                              </p:tgtEl>
+                            </p:cBhvr>
+                          </p:animEffect>
+                        </p:childTnLst>
+                      </p:cTn>
+                    </p:par>
+                    <p:par>
+                      <p:cTn id="139" presetID="2" presetClass="entr" presetSubtype="8" fill="hold" grpId="0" nodeType="clickEffect">
                         <p:stCondLst>
                           <p:cond delay="300"/>
                         </p:stCondLst>
                         <p:childTnLst>
                           <p:animEffect transition="in" filter="fly">
                             <p:cBhvr>
-                              <p:cTn id="138" dur="600" fill="hold"/>
-                              <p:tgtEl>
-                                <p:spTgt spid="137"/>
-                              </p:tgtEl>
-                            </p:cBhvr>
-                          </p:animEffect>
-                        </p:childTnLst>
-                      </p:cTn>
-                    </p:par>
-                    <p:par>
-                      <p:cTn id="139" presetID="10" presetClass="entr" presetSubtype="0" fill="hold" grpId="0" nodeType="clickEffect">
+                              <p:cTn id="140" dur="600" fill="hold"/>
+                              <p:tgtEl>
+                                <p:spTgt spid="139"/>
+                              </p:tgtEl>
+                            </p:cBhvr>
+                          </p:animEffect>
+                        </p:childTnLst>
+                      </p:cTn>
+                    </p:par>
+                    <p:par>
+                      <p:cTn id="141" presetID="10" presetClass="entr" presetSubtype="0" fill="hold" grpId="0" nodeType="clickEffect">
                         <p:stCondLst>
                           <p:cond delay="400"/>
                         </p:stCondLst>
                         <p:childTnLst>
                           <p:animEffect transition="in" filter="fade">
                             <p:cBhvr>
-                              <p:cTn id="140" dur="700" fill="hold"/>
-                              <p:tgtEl>
-                                <p:spTgt spid="139"/>
-                              </p:tgtEl>
-                            </p:cBhvr>
-                          </p:animEffect>
-                        </p:childTnLst>
-                      </p:cTn>
-                    </p:par>
-                    <p:par>
-                      <p:cTn id="141" presetID="10" presetClass="entr" presetSubtype="0" fill="hold" grpId="0" nodeType="clickEffect">
+                              <p:cTn id="142" dur="700" fill="hold"/>
+                              <p:tgtEl>
+                                <p:spTgt spid="141"/>
+                              </p:tgtEl>
+                            </p:cBhvr>
+                          </p:animEffect>
+                        </p:childTnLst>
+                      </p:cTn>
+                    </p:par>
+                    <p:par>
+                      <p:cTn id="143" presetID="10" presetClass="entr" presetSubtype="0" fill="hold" grpId="0" nodeType="clickEffect">
                         <p:stCondLst>
                           <p:cond delay="500"/>
                         </p:stCondLst>
                         <p:childTnLst>
                           <p:animEffect transition="in" filter="fade">
                             <p:cBhvr>
-                              <p:cTn id="142" dur="700" fill="hold"/>
-                              <p:tgtEl>
-                                <p:spTgt spid="141"/>
-                              </p:tgtEl>
-                            </p:cBhvr>
-                          </p:animEffect>
-                        </p:childTnLst>
-                      </p:cTn>
-                    </p:par>
-                    <p:par>
-                      <p:cTn id="143" presetID="10" presetClass="entr" presetSubtype="0" fill="hold" grpId="0" nodeType="clickEffect">
+                              <p:cTn id="144" dur="700" fill="hold"/>
+                              <p:tgtEl>
+                                <p:spTgt spid="143"/>
+                              </p:tgtEl>
+                            </p:cBhvr>
+                          </p:animEffect>
+                        </p:childTnLst>
+                      </p:cTn>
+                    </p:par>
+                    <p:par>
+                      <p:cTn id="145" presetID="10" presetClass="entr" presetSubtype="0" fill="hold" grpId="0" nodeType="clickEffect">
                         <p:stCondLst>
                           <p:cond delay="600"/>
                         </p:stCondLst>
                         <p:childTnLst>
                           <p:animEffect transition="in" filter="fade">
                             <p:cBhvr>
-                              <p:cTn id="144" dur="700" fill="hold"/>
-                              <p:tgtEl>
-                                <p:spTgt spid="143"/>
-                              </p:tgtEl>
-                            </p:cBhvr>
-                          </p:animEffect>
-                        </p:childTnLst>
-                      </p:cTn>
-                    </p:par>
-                    <p:par>
-                      <p:cTn id="145" presetID="2" presetClass="entr" presetSubtype="8" fill="hold" grpId="0" nodeType="clickEffect">
+                              <p:cTn id="146" dur="700" fill="hold"/>
+                              <p:tgtEl>
+                                <p:spTgt spid="145"/>
+                              </p:tgtEl>
+                            </p:cBhvr>
+                          </p:animEffect>
+                        </p:childTnLst>
+                      </p:cTn>
+                    </p:par>
+                    <p:par>
+                      <p:cTn id="147" presetID="2" presetClass="entr" presetSubtype="8" fill="hold" grpId="0" nodeType="clickEffect">
                         <p:stCondLst>
                           <p:cond delay="500"/>
                         </p:stCondLst>
                         <p:childTnLst>
                           <p:animEffect transition="in" filter="fly">
                             <p:cBhvr>
-                              <p:cTn id="146" dur="600" fill="hold"/>
-                              <p:tgtEl>
-                                <p:spTgt spid="145"/>
-                              </p:tgtEl>
-                            </p:cBhvr>
-                          </p:animEffect>
-                        </p:childTnLst>
-                      </p:cTn>
-                    </p:par>
-                    <p:par>
-                      <p:cTn id="147" presetID="10" presetClass="entr" presetSubtype="0" fill="hold" grpId="0" nodeType="clickEffect">
+                              <p:cTn id="148" dur="600" fill="hold"/>
+                              <p:tgtEl>
+                                <p:spTgt spid="147"/>
+                              </p:tgtEl>
+                            </p:cBhvr>
+                          </p:animEffect>
+                        </p:childTnLst>
+                      </p:cTn>
+                    </p:par>
+                    <p:par>
+                      <p:cTn id="149" presetID="10" presetClass="entr" presetSubtype="0" fill="hold" grpId="0" nodeType="clickEffect">
                         <p:stCondLst>
                           <p:cond delay="600"/>
                         </p:stCondLst>
                         <p:childTnLst>
                           <p:animEffect transition="in" filter="fade">
                             <p:cBhvr>
-                              <p:cTn id="148" dur="700" fill="hold"/>
-                              <p:tgtEl>
-                                <p:spTgt spid="147"/>
-                              </p:tgtEl>
-                            </p:cBhvr>
-                          </p:animEffect>
-                        </p:childTnLst>
-                      </p:cTn>
-                    </p:par>
-                    <p:par>
-                      <p:cTn id="149" presetID="10" presetClass="entr" presetSubtype="0" fill="hold" grpId="0" nodeType="clickEffect">
+                              <p:cTn id="150" dur="700" fill="hold"/>
+                              <p:tgtEl>
+                                <p:spTgt spid="149"/>
+                              </p:tgtEl>
+                            </p:cBhvr>
+                          </p:animEffect>
+                        </p:childTnLst>
+                      </p:cTn>
+                    </p:par>
+                    <p:par>
+                      <p:cTn id="151" presetID="10" presetClass="entr" presetSubtype="0" fill="hold" grpId="0" nodeType="clickEffect">
                         <p:stCondLst>
                           <p:cond delay="700"/>
                         </p:stCondLst>
                         <p:childTnLst>
                           <p:animEffect transition="in" filter="fade">
                             <p:cBhvr>
-                              <p:cTn id="150" dur="700" fill="hold"/>
-                              <p:tgtEl>
-                                <p:spTgt spid="149"/>
-                              </p:tgtEl>
-                            </p:cBhvr>
-                          </p:animEffect>
-                        </p:childTnLst>
-                      </p:cTn>
-                    </p:par>
-                    <p:par>
-                      <p:cTn id="151" presetID="10" presetClass="entr" presetSubtype="0" fill="hold" grpId="0" nodeType="clickEffect">
+                              <p:cTn id="152" dur="700" fill="hold"/>
+                              <p:tgtEl>
+                                <p:spTgt spid="151"/>
+                              </p:tgtEl>
+                            </p:cBhvr>
+                          </p:animEffect>
+                        </p:childTnLst>
+                      </p:cTn>
+                    </p:par>
+                    <p:par>
+                      <p:cTn id="153" presetID="10" presetClass="entr" presetSubtype="0" fill="hold" grpId="0" nodeType="clickEffect">
                         <p:stCondLst>
                           <p:cond delay="800"/>
                         </p:stCondLst>
                         <p:childTnLst>
                           <p:animEffect transition="in" filter="fade">
                             <p:cBhvr>
-                              <p:cTn id="152" dur="700" fill="hold"/>
-                              <p:tgtEl>
-                                <p:spTgt spid="151"/>
-                              </p:tgtEl>
-                            </p:cBhvr>
-                          </p:animEffect>
-                        </p:childTnLst>
-                      </p:cTn>
-                    </p:par>
-                    <p:par>
-                      <p:cTn id="153" presetID="2" presetClass="entr" presetSubtype="8" fill="hold" grpId="0" nodeType="clickEffect">
+                              <p:cTn id="154" dur="700" fill="hold"/>
+                              <p:tgtEl>
+                                <p:spTgt spid="153"/>
+                              </p:tgtEl>
+                            </p:cBhvr>
+                          </p:animEffect>
+                        </p:childTnLst>
+                      </p:cTn>
+                    </p:par>
+                    <p:par>
+                      <p:cTn id="155" presetID="2" presetClass="entr" presetSubtype="8" fill="hold" grpId="0" nodeType="clickEffect">
                         <p:stCondLst>
                           <p:cond delay="700"/>
                         </p:stCondLst>
                         <p:childTnLst>
                           <p:animEffect transition="in" filter="fly">
                             <p:cBhvr>
-                              <p:cTn id="154" dur="600" fill="hold"/>
-                              <p:tgtEl>
-                                <p:spTgt spid="153"/>
-                              </p:tgtEl>
-                            </p:cBhvr>
-                          </p:animEffect>
-                        </p:childTnLst>
-                      </p:cTn>
-                    </p:par>
-                    <p:par>
-                      <p:cTn id="155" presetID="10" presetClass="entr" presetSubtype="0" fill="hold" grpId="0" nodeType="clickEffect">
+                              <p:cTn id="156" dur="600" fill="hold"/>
+                              <p:tgtEl>
+                                <p:spTgt spid="155"/>
+                              </p:tgtEl>
+                            </p:cBhvr>
+                          </p:animEffect>
+                        </p:childTnLst>
+                      </p:cTn>
+                    </p:par>
+                    <p:par>
+                      <p:cTn id="157" presetID="10" presetClass="entr" presetSubtype="0" fill="hold" grpId="0" nodeType="clickEffect">
                         <p:stCondLst>
                           <p:cond delay="800"/>
                         </p:stCondLst>
                         <p:childTnLst>
                           <p:animEffect transition="in" filter="fade">
                             <p:cBhvr>
-                              <p:cTn id="156" dur="700" fill="hold"/>
-                              <p:tgtEl>
-                                <p:spTgt spid="155"/>
-                              </p:tgtEl>
-                            </p:cBhvr>
-                          </p:animEffect>
-                        </p:childTnLst>
-                      </p:cTn>
-                    </p:par>
-                    <p:par>
-                      <p:cTn id="157" presetID="10" presetClass="entr" presetSubtype="0" fill="hold" grpId="0" nodeType="clickEffect">
+                              <p:cTn id="158" dur="700" fill="hold"/>
+                              <p:tgtEl>
+                                <p:spTgt spid="157"/>
+                              </p:tgtEl>
+                            </p:cBhvr>
+                          </p:animEffect>
+                        </p:childTnLst>
+                      </p:cTn>
+                    </p:par>
+                    <p:par>
+                      <p:cTn id="159" presetID="10" presetClass="entr" presetSubtype="0" fill="hold" grpId="0" nodeType="clickEffect">
                         <p:stCondLst>
                           <p:cond delay="900"/>
                         </p:stCondLst>
                         <p:childTnLst>
                           <p:animEffect transition="in" filter="fade">
                             <p:cBhvr>
-                              <p:cTn id="158" dur="700" fill="hold"/>
-                              <p:tgtEl>
-                                <p:spTgt spid="157"/>
-                              </p:tgtEl>
-                            </p:cBhvr>
-                          </p:animEffect>
-                        </p:childTnLst>
-                      </p:cTn>
-                    </p:par>
-                    <p:par>
-                      <p:cTn id="159" presetID="10" presetClass="entr" presetSubtype="0" fill="hold" grpId="0" nodeType="clickEffect">
+                              <p:cTn id="160" dur="700" fill="hold"/>
+                              <p:tgtEl>
+                                <p:spTgt spid="159"/>
+                              </p:tgtEl>
+                            </p:cBhvr>
+                          </p:animEffect>
+                        </p:childTnLst>
+                      </p:cTn>
+                    </p:par>
+                    <p:par>
+                      <p:cTn id="161" presetID="10" presetClass="entr" presetSubtype="0" fill="hold" grpId="0" nodeType="clickEffect">
                         <p:stCondLst>
                           <p:cond delay="1000"/>
                         </p:stCondLst>
                         <p:childTnLst>
                           <p:animEffect transition="in" filter="fade">
                             <p:cBhvr>
-                              <p:cTn id="160" dur="700" fill="hold"/>
-                              <p:tgtEl>
-                                <p:spTgt spid="159"/>
-                              </p:tgtEl>
-                            </p:cBhvr>
-                          </p:animEffect>
-                        </p:childTnLst>
-                      </p:cTn>
-                    </p:par>
-                    <p:par>
-                      <p:cTn id="161" presetID="2" presetClass="entr" presetSubtype="8" fill="hold" grpId="0" nodeType="clickEffect">
+                              <p:cTn id="162" dur="700" fill="hold"/>
+                              <p:tgtEl>
+                                <p:spTgt spid="161"/>
+                              </p:tgtEl>
+                            </p:cBhvr>
+                          </p:animEffect>
+                        </p:childTnLst>
+                      </p:cTn>
+                    </p:par>
+                    <p:par>
+                      <p:cTn id="163" presetID="2" presetClass="entr" presetSubtype="8" fill="hold" grpId="0" nodeType="clickEffect">
                         <p:stCondLst>
                           <p:cond delay="900"/>
                         </p:stCondLst>
                         <p:childTnLst>
                           <p:animEffect transition="in" filter="fly">
                             <p:cBhvr>
-                              <p:cTn id="162" dur="600" fill="hold"/>
-                              <p:tgtEl>
-                                <p:spTgt spid="161"/>
-                              </p:tgtEl>
-                            </p:cBhvr>
-                          </p:animEffect>
-                        </p:childTnLst>
-                      </p:cTn>
-                    </p:par>
-                    <p:par>
-                      <p:cTn id="163" presetID="10" presetClass="entr" presetSubtype="0" fill="hold" grpId="0" nodeType="clickEffect">
+                              <p:cTn id="164" dur="600" fill="hold"/>
+                              <p:tgtEl>
+                                <p:spTgt spid="163"/>
+                              </p:tgtEl>
+                            </p:cBhvr>
+                          </p:animEffect>
+                        </p:childTnLst>
+                      </p:cTn>
+                    </p:par>
+                    <p:par>
+                      <p:cTn id="165" presetID="10" presetClass="entr" presetSubtype="0" fill="hold" grpId="0" nodeType="clickEffect">
                         <p:stCondLst>
                           <p:cond delay="1000"/>
                         </p:stCondLst>
                         <p:childTnLst>
                           <p:animEffect transition="in" filter="fade">
                             <p:cBhvr>
-                              <p:cTn id="164" dur="700" fill="hold"/>
-                              <p:tgtEl>
-                                <p:spTgt spid="163"/>
-                              </p:tgtEl>
-                            </p:cBhvr>
-                          </p:animEffect>
-                        </p:childTnLst>
-                      </p:cTn>
-                    </p:par>
-                    <p:par>
-                      <p:cTn id="165" presetID="10" presetClass="entr" presetSubtype="0" fill="hold" grpId="0" nodeType="clickEffect">
+                              <p:cTn id="166" dur="700" fill="hold"/>
+                              <p:tgtEl>
+                                <p:spTgt spid="165"/>
+                              </p:tgtEl>
+                            </p:cBhvr>
+                          </p:animEffect>
+                        </p:childTnLst>
+                      </p:cTn>
+                    </p:par>
+                    <p:par>
+                      <p:cTn id="167" presetID="10" presetClass="entr" presetSubtype="0" fill="hold" grpId="0" nodeType="clickEffect">
                         <p:stCondLst>
                           <p:cond delay="1100"/>
                         </p:stCondLst>
                         <p:childTnLst>
                           <p:animEffect transition="in" filter="fade">
                             <p:cBhvr>
-                              <p:cTn id="166" dur="700" fill="hold"/>
-                              <p:tgtEl>
-                                <p:spTgt spid="165"/>
-                              </p:tgtEl>
-                            </p:cBhvr>
-                          </p:animEffect>
-                        </p:childTnLst>
-                      </p:cTn>
-                    </p:par>
-                    <p:par>
-                      <p:cTn id="167" presetID="10" presetClass="entr" presetSubtype="0" fill="hold" grpId="0" nodeType="clickEffect">
+                              <p:cTn id="168" dur="700" fill="hold"/>
+                              <p:tgtEl>
+                                <p:spTgt spid="167"/>
+                              </p:tgtEl>
+                            </p:cBhvr>
+                          </p:animEffect>
+                        </p:childTnLst>
+                      </p:cTn>
+                    </p:par>
+                    <p:par>
+                      <p:cTn id="169" presetID="10" presetClass="entr" presetSubtype="0" fill="hold" grpId="0" nodeType="clickEffect">
                         <p:stCondLst>
                           <p:cond delay="1200"/>
                         </p:stCondLst>
                         <p:childTnLst>
                           <p:animEffect transition="in" filter="fade">
                             <p:cBhvr>
-                              <p:cTn id="168" dur="700" fill="hold"/>
-                              <p:tgtEl>
-                                <p:spTgt spid="167"/>
-                              </p:tgtEl>
-                            </p:cBhvr>
-                          </p:animEffect>
-                        </p:childTnLst>
-                      </p:cTn>
-                    </p:par>
-                    <p:par>
-                      <p:cTn id="169" presetID="2" presetClass="entr" presetSubtype="8" fill="hold" grpId="0" nodeType="clickEffect">
+                              <p:cTn id="170" dur="700" fill="hold"/>
+                              <p:tgtEl>
+                                <p:spTgt spid="169"/>
+                              </p:tgtEl>
+                            </p:cBhvr>
+                          </p:animEffect>
+                        </p:childTnLst>
+                      </p:cTn>
+                    </p:par>
+                    <p:par>
+                      <p:cTn id="171" presetID="2" presetClass="entr" presetSubtype="8" fill="hold" grpId="0" nodeType="clickEffect">
                         <p:stCondLst>
                           <p:cond delay="1100"/>
                         </p:stCondLst>
                         <p:childTnLst>
                           <p:animEffect transition="in" filter="fly">
                             <p:cBhvr>
-                              <p:cTn id="170" dur="600" fill="hold"/>
-                              <p:tgtEl>
-                                <p:spTgt spid="169"/>
-                              </p:tgtEl>
-                            </p:cBhvr>
-                          </p:animEffect>
-                        </p:childTnLst>
-                      </p:cTn>
-                    </p:par>
-                    <p:par>
-                      <p:cTn id="171" presetID="10" presetClass="entr" presetSubtype="0" fill="hold" grpId="0" nodeType="clickEffect">
+                              <p:cTn id="172" dur="600" fill="hold"/>
+                              <p:tgtEl>
+                                <p:spTgt spid="171"/>
+                              </p:tgtEl>
+                            </p:cBhvr>
+                          </p:animEffect>
+                        </p:childTnLst>
+                      </p:cTn>
+                    </p:par>
+                    <p:par>
+                      <p:cTn id="173" presetID="10" presetClass="entr" presetSubtype="0" fill="hold" grpId="0" nodeType="clickEffect">
                         <p:stCondLst>
                           <p:cond delay="1200"/>
                         </p:stCondLst>
                         <p:childTnLst>
                           <p:animEffect transition="in" filter="fade">
                             <p:cBhvr>
-                              <p:cTn id="172" dur="700" fill="hold"/>
-                              <p:tgtEl>
-                                <p:spTgt spid="171"/>
-                              </p:tgtEl>
-                            </p:cBhvr>
-                          </p:animEffect>
-                        </p:childTnLst>
-                      </p:cTn>
-                    </p:par>
-                    <p:par>
-                      <p:cTn id="173" presetID="10" presetClass="entr" presetSubtype="0" fill="hold" grpId="0" nodeType="clickEffect">
+                              <p:cTn id="174" dur="700" fill="hold"/>
+                              <p:tgtEl>
+                                <p:spTgt spid="173"/>
+                              </p:tgtEl>
+                            </p:cBhvr>
+                          </p:animEffect>
+                        </p:childTnLst>
+                      </p:cTn>
+                    </p:par>
+                    <p:par>
+                      <p:cTn id="175" presetID="10" presetClass="entr" presetSubtype="0" fill="hold" grpId="0" nodeType="clickEffect">
                         <p:stCondLst>
                           <p:cond delay="1300"/>
                         </p:stCondLst>
                         <p:childTnLst>
                           <p:animEffect transition="in" filter="fade">
                             <p:cBhvr>
-                              <p:cTn id="174" dur="700" fill="hold"/>
-                              <p:tgtEl>
-                                <p:spTgt spid="173"/>
-                              </p:tgtEl>
-                            </p:cBhvr>
-                          </p:animEffect>
-                        </p:childTnLst>
-                      </p:cTn>
-                    </p:par>
-                    <p:par>
-                      <p:cTn id="175" presetID="10" presetClass="entr" presetSubtype="0" fill="hold" grpId="0" nodeType="clickEffect">
+                              <p:cTn id="176" dur="700" fill="hold"/>
+                              <p:tgtEl>
+                                <p:spTgt spid="175"/>
+                              </p:tgtEl>
+                            </p:cBhvr>
+                          </p:animEffect>
+                        </p:childTnLst>
+                      </p:cTn>
+                    </p:par>
+                    <p:par>
+                      <p:cTn id="177" presetID="10" presetClass="entr" presetSubtype="0" fill="hold" grpId="0" nodeType="clickEffect">
                         <p:stCondLst>
                           <p:cond delay="1400"/>
                         </p:stCondLst>
                         <p:childTnLst>
                           <p:animEffect transition="in" filter="fade">
                             <p:cBhvr>
-                              <p:cTn id="176" dur="700" fill="hold"/>
-                              <p:tgtEl>
-                                <p:spTgt spid="175"/>
+                              <p:cTn id="178" dur="700" fill="hold"/>
+                              <p:tgtEl>
+                                <p:spTgt spid="177"/>
                               </p:tgtEl>
                             </p:cBhvr>
                           </p:animEffect>
@@ -14480,7 +14532,7 @@
       </p:sp>
       <p:sp>
         <p:nvSpPr>
-          <p:cNvPr id="179" name="Rectangle 178"/>
+          <p:cNvPr id="181" name="Rectangle 180"/>
           <p:cNvSpPr/>
           <p:nvPr/>
         </p:nvSpPr>
@@ -14523,7 +14575,7 @@
       </p:sp>
       <p:sp>
         <p:nvSpPr>
-          <p:cNvPr id="181" name="Rectangle 180"/>
+          <p:cNvPr id="183" name="Rectangle 182"/>
           <p:cNvSpPr/>
           <p:nvPr/>
         </p:nvSpPr>
@@ -14566,7 +14618,7 @@
       </p:sp>
       <p:sp>
         <p:nvSpPr>
-          <p:cNvPr id="183" name="TextBox 182"/>
+          <p:cNvPr id="185" name="TextBox 184"/>
           <p:cNvSpPr txBox="1"/>
           <p:nvPr/>
         </p:nvSpPr>
@@ -14601,7 +14653,7 @@
       </p:sp>
       <p:sp>
         <p:nvSpPr>
-          <p:cNvPr id="185" name="TextBox 184"/>
+          <p:cNvPr id="187" name="TextBox 186"/>
           <p:cNvSpPr txBox="1"/>
           <p:nvPr/>
         </p:nvSpPr>
@@ -14644,14 +14696,14 @@
                 <p:cTn id="2" dur="indefinite" nodeType="mainSeq">
                   <p:childTnLst>
                     <p:par>
-                      <p:cTn id="177" presetID="10" presetClass="entr" presetSubtype="0" fill="hold" grpId="0" nodeType="clickEffect">
+                      <p:cTn id="179" presetID="10" presetClass="entr" presetSubtype="0" fill="hold" grpId="0" nodeType="clickEffect">
                         <p:stCondLst>
                           <p:cond delay="0"/>
                         </p:stCondLst>
                         <p:childTnLst>
                           <p:animEffect transition="in" filter="fade">
                             <p:cBhvr>
-                              <p:cTn id="178" dur="700" fill="hold"/>
+                              <p:cTn id="180" dur="700" fill="hold"/>
                               <p:tgtEl>
                                 <p:spTgt spid="3"/>
                               </p:tgtEl>
@@ -14661,67 +14713,67 @@
                       </p:cTn>
                     </p:par>
                     <p:par>
-                      <p:cTn id="179" presetID="10" presetClass="entr" presetSubtype="0" fill="hold" grpId="0" nodeType="clickEffect">
+                      <p:cTn id="181" presetID="10" presetClass="entr" presetSubtype="0" fill="hold" grpId="0" nodeType="clickEffect">
                         <p:stCondLst>
                           <p:cond delay="0"/>
                         </p:stCondLst>
                         <p:childTnLst>
                           <p:animEffect transition="in" filter="fade">
                             <p:cBhvr>
-                              <p:cTn id="180" dur="700" fill="hold"/>
-                              <p:tgtEl>
-                                <p:spTgt spid="179"/>
-                              </p:tgtEl>
-                            </p:cBhvr>
-                          </p:animEffect>
-                        </p:childTnLst>
-                      </p:cTn>
-                    </p:par>
-                    <p:par>
-                      <p:cTn id="181" presetID="10" presetClass="entr" presetSubtype="0" fill="hold" grpId="0" nodeType="clickEffect">
+                              <p:cTn id="182" dur="700" fill="hold"/>
+                              <p:tgtEl>
+                                <p:spTgt spid="181"/>
+                              </p:tgtEl>
+                            </p:cBhvr>
+                          </p:animEffect>
+                        </p:childTnLst>
+                      </p:cTn>
+                    </p:par>
+                    <p:par>
+                      <p:cTn id="183" presetID="10" presetClass="entr" presetSubtype="0" fill="hold" grpId="0" nodeType="clickEffect">
                         <p:stCondLst>
                           <p:cond delay="300"/>
                         </p:stCondLst>
                         <p:childTnLst>
                           <p:animEffect transition="in" filter="fade">
                             <p:cBhvr>
-                              <p:cTn id="182" dur="700" fill="hold"/>
-                              <p:tgtEl>
-                                <p:spTgt spid="181"/>
-                              </p:tgtEl>
-                            </p:cBhvr>
-                          </p:animEffect>
-                        </p:childTnLst>
-                      </p:cTn>
-                    </p:par>
-                    <p:par>
-                      <p:cTn id="183" presetID="22" presetClass="entr" presetSubtype="0" fill="hold" grpId="0" nodeType="clickEffect">
+                              <p:cTn id="184" dur="700" fill="hold"/>
+                              <p:tgtEl>
+                                <p:spTgt spid="183"/>
+                              </p:tgtEl>
+                            </p:cBhvr>
+                          </p:animEffect>
+                        </p:childTnLst>
+                      </p:cTn>
+                    </p:par>
+                    <p:par>
+                      <p:cTn id="185" presetID="22" presetClass="entr" presetSubtype="0" fill="hold" grpId="0" nodeType="clickEffect">
                         <p:stCondLst>
                           <p:cond delay="100"/>
                         </p:stCondLst>
                         <p:childTnLst>
                           <p:animEffect transition="in" filter="zoom">
                             <p:cBhvr>
-                              <p:cTn id="184" dur="500" fill="hold"/>
-                              <p:tgtEl>
-                                <p:spTgt spid="183"/>
-                              </p:tgtEl>
-                            </p:cBhvr>
-                          </p:animEffect>
-                        </p:childTnLst>
-                      </p:cTn>
-                    </p:par>
-                    <p:par>
-                      <p:cTn id="185" presetID="10" presetClass="entr" presetSubtype="0" fill="hold" grpId="0" nodeType="clickEffect">
+                              <p:cTn id="186" dur="500" fill="hold"/>
+                              <p:tgtEl>
+                                <p:spTgt spid="185"/>
+                              </p:tgtEl>
+                            </p:cBhvr>
+                          </p:animEffect>
+                        </p:childTnLst>
+                      </p:cTn>
+                    </p:par>
+                    <p:par>
+                      <p:cTn id="187" presetID="10" presetClass="entr" presetSubtype="0" fill="hold" grpId="0" nodeType="clickEffect">
                         <p:stCondLst>
                           <p:cond delay="400"/>
                         </p:stCondLst>
                         <p:childTnLst>
                           <p:animEffect transition="in" filter="fade">
                             <p:cBhvr>
-                              <p:cTn id="186" dur="700" fill="hold"/>
-                              <p:tgtEl>
-                                <p:spTgt spid="185"/>
+                              <p:cTn id="188" dur="700" fill="hold"/>
+                              <p:tgtEl>
+                                <p:spTgt spid="187"/>
                               </p:tgtEl>
                             </p:cBhvr>
                           </p:animEffect>
@@ -14890,7 +14942,7 @@
       </p:sp>
       <p:sp>
         <p:nvSpPr>
-          <p:cNvPr id="189" name="Rectangle 188"/>
+          <p:cNvPr id="191" name="Rectangle 190"/>
           <p:cNvSpPr/>
           <p:nvPr/>
         </p:nvSpPr>
@@ -14935,7 +14987,7 @@
       </p:sp>
       <p:sp>
         <p:nvSpPr>
-          <p:cNvPr id="191" name="TextBox 190"/>
+          <p:cNvPr id="193" name="TextBox 192"/>
           <p:cNvSpPr txBox="1"/>
           <p:nvPr/>
         </p:nvSpPr>
@@ -14970,7 +15022,7 @@
       </p:sp>
       <p:sp>
         <p:nvSpPr>
-          <p:cNvPr id="193" name="TextBox 192"/>
+          <p:cNvPr id="195" name="TextBox 194"/>
           <p:cNvSpPr txBox="1"/>
           <p:nvPr/>
         </p:nvSpPr>
@@ -15005,7 +15057,7 @@
       </p:sp>
       <p:sp>
         <p:nvSpPr>
-          <p:cNvPr id="195" name="Rectangle 194"/>
+          <p:cNvPr id="197" name="Rectangle 196"/>
           <p:cNvSpPr/>
           <p:nvPr/>
         </p:nvSpPr>
@@ -15050,7 +15102,7 @@
       </p:sp>
       <p:sp>
         <p:nvSpPr>
-          <p:cNvPr id="197" name="TextBox 196"/>
+          <p:cNvPr id="199" name="TextBox 198"/>
           <p:cNvSpPr txBox="1"/>
           <p:nvPr/>
         </p:nvSpPr>
@@ -15085,7 +15137,7 @@
       </p:sp>
       <p:sp>
         <p:nvSpPr>
-          <p:cNvPr id="199" name="TextBox 198"/>
+          <p:cNvPr id="201" name="TextBox 200"/>
           <p:cNvSpPr txBox="1"/>
           <p:nvPr/>
         </p:nvSpPr>
@@ -15120,7 +15172,7 @@
       </p:sp>
       <p:sp>
         <p:nvSpPr>
-          <p:cNvPr id="201" name="Rectangle 200"/>
+          <p:cNvPr id="203" name="Rectangle 202"/>
           <p:cNvSpPr/>
           <p:nvPr/>
         </p:nvSpPr>
@@ -15165,7 +15217,7 @@
       </p:sp>
       <p:sp>
         <p:nvSpPr>
-          <p:cNvPr id="203" name="TextBox 202"/>
+          <p:cNvPr id="205" name="TextBox 204"/>
           <p:cNvSpPr txBox="1"/>
           <p:nvPr/>
         </p:nvSpPr>
@@ -15200,7 +15252,7 @@
       </p:sp>
       <p:sp>
         <p:nvSpPr>
-          <p:cNvPr id="205" name="TextBox 204"/>
+          <p:cNvPr id="207" name="TextBox 206"/>
           <p:cNvSpPr txBox="1"/>
           <p:nvPr/>
         </p:nvSpPr>
@@ -15235,7 +15287,7 @@
       </p:sp>
       <p:sp>
         <p:nvSpPr>
-          <p:cNvPr id="207" name="Rectangle 206"/>
+          <p:cNvPr id="209" name="Rectangle 208"/>
           <p:cNvSpPr/>
           <p:nvPr/>
         </p:nvSpPr>
@@ -15280,7 +15332,7 @@
       </p:sp>
       <p:sp>
         <p:nvSpPr>
-          <p:cNvPr id="209" name="TextBox 208"/>
+          <p:cNvPr id="211" name="TextBox 210"/>
           <p:cNvSpPr txBox="1"/>
           <p:nvPr/>
         </p:nvSpPr>
@@ -15315,7 +15367,7 @@
       </p:sp>
       <p:sp>
         <p:nvSpPr>
-          <p:cNvPr id="211" name="TextBox 210"/>
+          <p:cNvPr id="213" name="TextBox 212"/>
           <p:cNvSpPr txBox="1"/>
           <p:nvPr/>
         </p:nvSpPr>
@@ -15350,7 +15402,7 @@
       </p:sp>
       <p:sp>
         <p:nvSpPr>
-          <p:cNvPr id="213" name="Rectangle 212"/>
+          <p:cNvPr id="215" name="Rectangle 214"/>
           <p:cNvSpPr/>
           <p:nvPr/>
         </p:nvSpPr>
@@ -15395,7 +15447,7 @@
       </p:sp>
       <p:sp>
         <p:nvSpPr>
-          <p:cNvPr id="215" name="TextBox 214"/>
+          <p:cNvPr id="217" name="TextBox 216"/>
           <p:cNvSpPr txBox="1"/>
           <p:nvPr/>
         </p:nvSpPr>
@@ -15430,7 +15482,7 @@
       </p:sp>
       <p:sp>
         <p:nvSpPr>
-          <p:cNvPr id="217" name="TextBox 216"/>
+          <p:cNvPr id="219" name="TextBox 218"/>
           <p:cNvSpPr txBox="1"/>
           <p:nvPr/>
         </p:nvSpPr>
@@ -15465,7 +15517,7 @@
       </p:sp>
       <p:sp>
         <p:nvSpPr>
-          <p:cNvPr id="219" name="Rectangle 218"/>
+          <p:cNvPr id="221" name="Rectangle 220"/>
           <p:cNvSpPr/>
           <p:nvPr/>
         </p:nvSpPr>
@@ -15508,7 +15560,7 @@
       </p:sp>
       <p:sp>
         <p:nvSpPr>
-          <p:cNvPr id="221" name="TextBox 220"/>
+          <p:cNvPr id="223" name="TextBox 222"/>
           <p:cNvSpPr txBox="1"/>
           <p:nvPr/>
         </p:nvSpPr>
@@ -15543,7 +15595,7 @@
       </p:sp>
       <p:sp>
         <p:nvSpPr>
-          <p:cNvPr id="223" name="TextBox 222"/>
+          <p:cNvPr id="225" name="TextBox 224"/>
           <p:cNvSpPr txBox="1"/>
           <p:nvPr/>
         </p:nvSpPr>
@@ -15578,7 +15630,7 @@
       </p:sp>
       <p:sp>
         <p:nvSpPr>
-          <p:cNvPr id="225" name="TextBox 224"/>
+          <p:cNvPr id="227" name="TextBox 226"/>
           <p:cNvSpPr txBox="1"/>
           <p:nvPr/>
         </p:nvSpPr>
@@ -15613,7 +15665,7 @@
       </p:sp>
       <p:sp>
         <p:nvSpPr>
-          <p:cNvPr id="227" name="TextBox 226"/>
+          <p:cNvPr id="229" name="TextBox 228"/>
           <p:cNvSpPr txBox="1"/>
           <p:nvPr/>
         </p:nvSpPr>
@@ -15648,7 +15700,7 @@
       </p:sp>
       <p:sp>
         <p:nvSpPr>
-          <p:cNvPr id="229" name="TextBox 228"/>
+          <p:cNvPr id="231" name="TextBox 230"/>
           <p:cNvSpPr txBox="1"/>
           <p:nvPr/>
         </p:nvSpPr>
@@ -15683,7 +15735,7 @@
       </p:sp>
       <p:sp>
         <p:nvSpPr>
-          <p:cNvPr id="231" name="TextBox 230"/>
+          <p:cNvPr id="233" name="TextBox 232"/>
           <p:cNvSpPr txBox="1"/>
           <p:nvPr/>
         </p:nvSpPr>
@@ -15718,7 +15770,7 @@
       </p:sp>
       <p:sp>
         <p:nvSpPr>
-          <p:cNvPr id="233" name="TextBox 232"/>
+          <p:cNvPr id="235" name="TextBox 234"/>
           <p:cNvSpPr txBox="1"/>
           <p:nvPr/>
         </p:nvSpPr>
@@ -15753,7 +15805,7 @@
       </p:sp>
       <p:sp>
         <p:nvSpPr>
-          <p:cNvPr id="235" name="TextBox 234"/>
+          <p:cNvPr id="237" name="TextBox 236"/>
           <p:cNvSpPr txBox="1"/>
           <p:nvPr/>
         </p:nvSpPr>
@@ -15788,7 +15840,7 @@
       </p:sp>
       <p:sp>
         <p:nvSpPr>
-          <p:cNvPr id="237" name="TextBox 236"/>
+          <p:cNvPr id="239" name="TextBox 238"/>
           <p:cNvSpPr txBox="1"/>
           <p:nvPr/>
         </p:nvSpPr>
@@ -15823,7 +15875,7 @@
       </p:sp>
       <p:sp>
         <p:nvSpPr>
-          <p:cNvPr id="239" name="TextBox 238"/>
+          <p:cNvPr id="241" name="TextBox 240"/>
           <p:cNvSpPr txBox="1"/>
           <p:nvPr/>
         </p:nvSpPr>
@@ -15858,7 +15910,7 @@
       </p:sp>
       <p:sp>
         <p:nvSpPr>
-          <p:cNvPr id="241" name="TextBox 240"/>
+          <p:cNvPr id="243" name="TextBox 242"/>
           <p:cNvSpPr txBox="1"/>
           <p:nvPr/>
         </p:nvSpPr>
@@ -15893,7 +15945,7 @@
       </p:sp>
       <p:sp>
         <p:nvSpPr>
-          <p:cNvPr id="243" name="TextBox 242"/>
+          <p:cNvPr id="245" name="TextBox 244"/>
           <p:cNvSpPr txBox="1"/>
           <p:nvPr/>
         </p:nvSpPr>
@@ -15928,7 +15980,7 @@
       </p:sp>
       <p:sp>
         <p:nvSpPr>
-          <p:cNvPr id="245" name="Rectangle 244"/>
+          <p:cNvPr id="247" name="Rectangle 246"/>
           <p:cNvSpPr/>
           <p:nvPr/>
         </p:nvSpPr>
@@ -15971,7 +16023,7 @@
       </p:sp>
       <p:sp>
         <p:nvSpPr>
-          <p:cNvPr id="247" name="TextBox 246"/>
+          <p:cNvPr id="249" name="TextBox 248"/>
           <p:cNvSpPr txBox="1"/>
           <p:nvPr/>
         </p:nvSpPr>
@@ -16014,14 +16066,14 @@
                 <p:cTn id="2" dur="indefinite" nodeType="mainSeq">
                   <p:childTnLst>
                     <p:par>
-                      <p:cTn id="187" presetID="2" presetClass="entr" presetSubtype="8" fill="hold" grpId="0" nodeType="clickEffect">
+                      <p:cTn id="189" presetID="2" presetClass="entr" presetSubtype="8" fill="hold" grpId="0" nodeType="clickEffect">
                         <p:stCondLst>
                           <p:cond delay="0"/>
                         </p:stCondLst>
                         <p:childTnLst>
                           <p:animEffect transition="in" filter="fly">
                             <p:cBhvr>
-                              <p:cTn id="188" dur="600" fill="hold"/>
+                              <p:cTn id="190" dur="600" fill="hold"/>
                               <p:tgtEl>
                                 <p:spTgt spid="4"/>
                               </p:tgtEl>
@@ -16031,492 +16083,492 @@
                       </p:cTn>
                     </p:par>
                     <p:par>
-                      <p:cTn id="189" presetID="22" presetClass="entr" presetSubtype="0" fill="hold" grpId="0" nodeType="clickEffect">
+                      <p:cTn id="191" presetID="22" presetClass="entr" presetSubtype="0" fill="hold" grpId="0" nodeType="clickEffect">
                         <p:stCondLst>
                           <p:cond delay="200"/>
                         </p:stCondLst>
                         <p:childTnLst>
                           <p:animEffect transition="in" filter="zoom">
                             <p:cBhvr>
-                              <p:cTn id="190" dur="500" fill="hold"/>
-                              <p:tgtEl>
-                                <p:spTgt spid="189"/>
-                              </p:tgtEl>
-                            </p:cBhvr>
-                          </p:animEffect>
-                        </p:childTnLst>
-                      </p:cTn>
-                    </p:par>
-                    <p:par>
-                      <p:cTn id="191" presetID="22" presetClass="entr" presetSubtype="0" fill="hold" grpId="0" nodeType="clickEffect">
+                              <p:cTn id="192" dur="500" fill="hold"/>
+                              <p:tgtEl>
+                                <p:spTgt spid="191"/>
+                              </p:tgtEl>
+                            </p:cBhvr>
+                          </p:animEffect>
+                        </p:childTnLst>
+                      </p:cTn>
+                    </p:par>
+                    <p:par>
+                      <p:cTn id="193" presetID="22" presetClass="entr" presetSubtype="0" fill="hold" grpId="0" nodeType="clickEffect">
                         <p:stCondLst>
                           <p:cond delay="200"/>
                         </p:stCondLst>
                         <p:childTnLst>
                           <p:animEffect transition="in" filter="zoom">
                             <p:cBhvr>
-                              <p:cTn id="192" dur="500" fill="hold"/>
-                              <p:tgtEl>
-                                <p:spTgt spid="191"/>
-                              </p:tgtEl>
-                            </p:cBhvr>
-                          </p:animEffect>
-                        </p:childTnLst>
-                      </p:cTn>
-                    </p:par>
-                    <p:par>
-                      <p:cTn id="193" presetID="10" presetClass="entr" presetSubtype="0" fill="hold" grpId="0" nodeType="clickEffect">
+                              <p:cTn id="194" dur="500" fill="hold"/>
+                              <p:tgtEl>
+                                <p:spTgt spid="193"/>
+                              </p:tgtEl>
+                            </p:cBhvr>
+                          </p:animEffect>
+                        </p:childTnLst>
+                      </p:cTn>
+                    </p:par>
+                    <p:par>
+                      <p:cTn id="195" presetID="10" presetClass="entr" presetSubtype="0" fill="hold" grpId="0" nodeType="clickEffect">
                         <p:stCondLst>
                           <p:cond delay="350"/>
                         </p:stCondLst>
                         <p:childTnLst>
                           <p:animEffect transition="in" filter="fade">
                             <p:cBhvr>
-                              <p:cTn id="194" dur="700" fill="hold"/>
-                              <p:tgtEl>
-                                <p:spTgt spid="193"/>
-                              </p:tgtEl>
-                            </p:cBhvr>
-                          </p:animEffect>
-                        </p:childTnLst>
-                      </p:cTn>
-                    </p:par>
-                    <p:par>
-                      <p:cTn id="195" presetID="22" presetClass="entr" presetSubtype="0" fill="hold" grpId="0" nodeType="clickEffect">
+                              <p:cTn id="196" dur="700" fill="hold"/>
+                              <p:tgtEl>
+                                <p:spTgt spid="195"/>
+                              </p:tgtEl>
+                            </p:cBhvr>
+                          </p:animEffect>
+                        </p:childTnLst>
+                      </p:cTn>
+                    </p:par>
+                    <p:par>
+                      <p:cTn id="197" presetID="22" presetClass="entr" presetSubtype="0" fill="hold" grpId="0" nodeType="clickEffect">
                         <p:stCondLst>
                           <p:cond delay="350"/>
                         </p:stCondLst>
                         <p:childTnLst>
                           <p:animEffect transition="in" filter="zoom">
                             <p:cBhvr>
-                              <p:cTn id="196" dur="500" fill="hold"/>
-                              <p:tgtEl>
-                                <p:spTgt spid="195"/>
-                              </p:tgtEl>
-                            </p:cBhvr>
-                          </p:animEffect>
-                        </p:childTnLst>
-                      </p:cTn>
-                    </p:par>
-                    <p:par>
-                      <p:cTn id="197" presetID="22" presetClass="entr" presetSubtype="0" fill="hold" grpId="0" nodeType="clickEffect">
+                              <p:cTn id="198" dur="500" fill="hold"/>
+                              <p:tgtEl>
+                                <p:spTgt spid="197"/>
+                              </p:tgtEl>
+                            </p:cBhvr>
+                          </p:animEffect>
+                        </p:childTnLst>
+                      </p:cTn>
+                    </p:par>
+                    <p:par>
+                      <p:cTn id="199" presetID="22" presetClass="entr" presetSubtype="0" fill="hold" grpId="0" nodeType="clickEffect">
                         <p:stCondLst>
                           <p:cond delay="350"/>
                         </p:stCondLst>
                         <p:childTnLst>
                           <p:animEffect transition="in" filter="zoom">
                             <p:cBhvr>
-                              <p:cTn id="198" dur="500" fill="hold"/>
-                              <p:tgtEl>
-                                <p:spTgt spid="197"/>
-                              </p:tgtEl>
-                            </p:cBhvr>
-                          </p:animEffect>
-                        </p:childTnLst>
-                      </p:cTn>
-                    </p:par>
-                    <p:par>
-                      <p:cTn id="199" presetID="10" presetClass="entr" presetSubtype="0" fill="hold" grpId="0" nodeType="clickEffect">
+                              <p:cTn id="200" dur="500" fill="hold"/>
+                              <p:tgtEl>
+                                <p:spTgt spid="199"/>
+                              </p:tgtEl>
+                            </p:cBhvr>
+                          </p:animEffect>
+                        </p:childTnLst>
+                      </p:cTn>
+                    </p:par>
+                    <p:par>
+                      <p:cTn id="201" presetID="10" presetClass="entr" presetSubtype="0" fill="hold" grpId="0" nodeType="clickEffect">
                         <p:stCondLst>
                           <p:cond delay="500"/>
                         </p:stCondLst>
                         <p:childTnLst>
                           <p:animEffect transition="in" filter="fade">
                             <p:cBhvr>
-                              <p:cTn id="200" dur="700" fill="hold"/>
-                              <p:tgtEl>
-                                <p:spTgt spid="199"/>
-                              </p:tgtEl>
-                            </p:cBhvr>
-                          </p:animEffect>
-                        </p:childTnLst>
-                      </p:cTn>
-                    </p:par>
-                    <p:par>
-                      <p:cTn id="201" presetID="22" presetClass="entr" presetSubtype="0" fill="hold" grpId="0" nodeType="clickEffect">
+                              <p:cTn id="202" dur="700" fill="hold"/>
+                              <p:tgtEl>
+                                <p:spTgt spid="201"/>
+                              </p:tgtEl>
+                            </p:cBhvr>
+                          </p:animEffect>
+                        </p:childTnLst>
+                      </p:cTn>
+                    </p:par>
+                    <p:par>
+                      <p:cTn id="203" presetID="22" presetClass="entr" presetSubtype="0" fill="hold" grpId="0" nodeType="clickEffect">
                         <p:stCondLst>
                           <p:cond delay="500"/>
                         </p:stCondLst>
                         <p:childTnLst>
                           <p:animEffect transition="in" filter="zoom">
                             <p:cBhvr>
-                              <p:cTn id="202" dur="500" fill="hold"/>
-                              <p:tgtEl>
-                                <p:spTgt spid="201"/>
-                              </p:tgtEl>
-                            </p:cBhvr>
-                          </p:animEffect>
-                        </p:childTnLst>
-                      </p:cTn>
-                    </p:par>
-                    <p:par>
-                      <p:cTn id="203" presetID="22" presetClass="entr" presetSubtype="0" fill="hold" grpId="0" nodeType="clickEffect">
+                              <p:cTn id="204" dur="500" fill="hold"/>
+                              <p:tgtEl>
+                                <p:spTgt spid="203"/>
+                              </p:tgtEl>
+                            </p:cBhvr>
+                          </p:animEffect>
+                        </p:childTnLst>
+                      </p:cTn>
+                    </p:par>
+                    <p:par>
+                      <p:cTn id="205" presetID="22" presetClass="entr" presetSubtype="0" fill="hold" grpId="0" nodeType="clickEffect">
                         <p:stCondLst>
                           <p:cond delay="500"/>
                         </p:stCondLst>
                         <p:childTnLst>
                           <p:animEffect transition="in" filter="zoom">
                             <p:cBhvr>
-                              <p:cTn id="204" dur="500" fill="hold"/>
-                              <p:tgtEl>
-                                <p:spTgt spid="203"/>
-                              </p:tgtEl>
-                            </p:cBhvr>
-                          </p:animEffect>
-                        </p:childTnLst>
-                      </p:cTn>
-                    </p:par>
-                    <p:par>
-                      <p:cTn id="205" presetID="10" presetClass="entr" presetSubtype="0" fill="hold" grpId="0" nodeType="clickEffect">
+                              <p:cTn id="206" dur="500" fill="hold"/>
+                              <p:tgtEl>
+                                <p:spTgt spid="205"/>
+                              </p:tgtEl>
+                            </p:cBhvr>
+                          </p:animEffect>
+                        </p:childTnLst>
+                      </p:cTn>
+                    </p:par>
+                    <p:par>
+                      <p:cTn id="207" presetID="10" presetClass="entr" presetSubtype="0" fill="hold" grpId="0" nodeType="clickEffect">
                         <p:stCondLst>
                           <p:cond delay="650"/>
                         </p:stCondLst>
                         <p:childTnLst>
                           <p:animEffect transition="in" filter="fade">
                             <p:cBhvr>
-                              <p:cTn id="206" dur="700" fill="hold"/>
-                              <p:tgtEl>
-                                <p:spTgt spid="205"/>
-                              </p:tgtEl>
-                            </p:cBhvr>
-                          </p:animEffect>
-                        </p:childTnLst>
-                      </p:cTn>
-                    </p:par>
-                    <p:par>
-                      <p:cTn id="207" presetID="22" presetClass="entr" presetSubtype="0" fill="hold" grpId="0" nodeType="clickEffect">
+                              <p:cTn id="208" dur="700" fill="hold"/>
+                              <p:tgtEl>
+                                <p:spTgt spid="207"/>
+                              </p:tgtEl>
+                            </p:cBhvr>
+                          </p:animEffect>
+                        </p:childTnLst>
+                      </p:cTn>
+                    </p:par>
+                    <p:par>
+                      <p:cTn id="209" presetID="22" presetClass="entr" presetSubtype="0" fill="hold" grpId="0" nodeType="clickEffect">
                         <p:stCondLst>
                           <p:cond delay="650"/>
                         </p:stCondLst>
                         <p:childTnLst>
                           <p:animEffect transition="in" filter="zoom">
                             <p:cBhvr>
-                              <p:cTn id="208" dur="500" fill="hold"/>
-                              <p:tgtEl>
-                                <p:spTgt spid="207"/>
-                              </p:tgtEl>
-                            </p:cBhvr>
-                          </p:animEffect>
-                        </p:childTnLst>
-                      </p:cTn>
-                    </p:par>
-                    <p:par>
-                      <p:cTn id="209" presetID="22" presetClass="entr" presetSubtype="0" fill="hold" grpId="0" nodeType="clickEffect">
+                              <p:cTn id="210" dur="500" fill="hold"/>
+                              <p:tgtEl>
+                                <p:spTgt spid="209"/>
+                              </p:tgtEl>
+                            </p:cBhvr>
+                          </p:animEffect>
+                        </p:childTnLst>
+                      </p:cTn>
+                    </p:par>
+                    <p:par>
+                      <p:cTn id="211" presetID="22" presetClass="entr" presetSubtype="0" fill="hold" grpId="0" nodeType="clickEffect">
                         <p:stCondLst>
                           <p:cond delay="650"/>
                         </p:stCondLst>
                         <p:childTnLst>
                           <p:animEffect transition="in" filter="zoom">
                             <p:cBhvr>
-                              <p:cTn id="210" dur="500" fill="hold"/>
-                              <p:tgtEl>
-                                <p:spTgt spid="209"/>
-                              </p:tgtEl>
-                            </p:cBhvr>
-                          </p:animEffect>
-                        </p:childTnLst>
-                      </p:cTn>
-                    </p:par>
-                    <p:par>
-                      <p:cTn id="211" presetID="10" presetClass="entr" presetSubtype="0" fill="hold" grpId="0" nodeType="clickEffect">
+                              <p:cTn id="212" dur="500" fill="hold"/>
+                              <p:tgtEl>
+                                <p:spTgt spid="211"/>
+                              </p:tgtEl>
+                            </p:cBhvr>
+                          </p:animEffect>
+                        </p:childTnLst>
+                      </p:cTn>
+                    </p:par>
+                    <p:par>
+                      <p:cTn id="213" presetID="10" presetClass="entr" presetSubtype="0" fill="hold" grpId="0" nodeType="clickEffect">
                         <p:stCondLst>
                           <p:cond delay="800"/>
                         </p:stCondLst>
                         <p:childTnLst>
                           <p:animEffect transition="in" filter="fade">
                             <p:cBhvr>
-                              <p:cTn id="212" dur="700" fill="hold"/>
-                              <p:tgtEl>
-                                <p:spTgt spid="211"/>
-                              </p:tgtEl>
-                            </p:cBhvr>
-                          </p:animEffect>
-                        </p:childTnLst>
-                      </p:cTn>
-                    </p:par>
-                    <p:par>
-                      <p:cTn id="213" presetID="22" presetClass="entr" presetSubtype="0" fill="hold" grpId="0" nodeType="clickEffect">
+                              <p:cTn id="214" dur="700" fill="hold"/>
+                              <p:tgtEl>
+                                <p:spTgt spid="213"/>
+                              </p:tgtEl>
+                            </p:cBhvr>
+                          </p:animEffect>
+                        </p:childTnLst>
+                      </p:cTn>
+                    </p:par>
+                    <p:par>
+                      <p:cTn id="215" presetID="22" presetClass="entr" presetSubtype="0" fill="hold" grpId="0" nodeType="clickEffect">
                         <p:stCondLst>
                           <p:cond delay="800"/>
                         </p:stCondLst>
                         <p:childTnLst>
                           <p:animEffect transition="in" filter="zoom">
                             <p:cBhvr>
-                              <p:cTn id="214" dur="500" fill="hold"/>
-                              <p:tgtEl>
-                                <p:spTgt spid="213"/>
-                              </p:tgtEl>
-                            </p:cBhvr>
-                          </p:animEffect>
-                        </p:childTnLst>
-                      </p:cTn>
-                    </p:par>
-                    <p:par>
-                      <p:cTn id="215" presetID="22" presetClass="entr" presetSubtype="0" fill="hold" grpId="0" nodeType="clickEffect">
+                              <p:cTn id="216" dur="500" fill="hold"/>
+                              <p:tgtEl>
+                                <p:spTgt spid="215"/>
+                              </p:tgtEl>
+                            </p:cBhvr>
+                          </p:animEffect>
+                        </p:childTnLst>
+                      </p:cTn>
+                    </p:par>
+                    <p:par>
+                      <p:cTn id="217" presetID="22" presetClass="entr" presetSubtype="0" fill="hold" grpId="0" nodeType="clickEffect">
                         <p:stCondLst>
                           <p:cond delay="800"/>
                         </p:stCondLst>
                         <p:childTnLst>
                           <p:animEffect transition="in" filter="zoom">
                             <p:cBhvr>
-                              <p:cTn id="216" dur="500" fill="hold"/>
-                              <p:tgtEl>
-                                <p:spTgt spid="215"/>
-                              </p:tgtEl>
-                            </p:cBhvr>
-                          </p:animEffect>
-                        </p:childTnLst>
-                      </p:cTn>
-                    </p:par>
-                    <p:par>
-                      <p:cTn id="217" presetID="10" presetClass="entr" presetSubtype="0" fill="hold" grpId="0" nodeType="clickEffect">
+                              <p:cTn id="218" dur="500" fill="hold"/>
+                              <p:tgtEl>
+                                <p:spTgt spid="217"/>
+                              </p:tgtEl>
+                            </p:cBhvr>
+                          </p:animEffect>
+                        </p:childTnLst>
+                      </p:cTn>
+                    </p:par>
+                    <p:par>
+                      <p:cTn id="219" presetID="10" presetClass="entr" presetSubtype="0" fill="hold" grpId="0" nodeType="clickEffect">
                         <p:stCondLst>
                           <p:cond delay="950"/>
                         </p:stCondLst>
                         <p:childTnLst>
                           <p:animEffect transition="in" filter="fade">
                             <p:cBhvr>
-                              <p:cTn id="218" dur="700" fill="hold"/>
-                              <p:tgtEl>
-                                <p:spTgt spid="217"/>
-                              </p:tgtEl>
-                            </p:cBhvr>
-                          </p:animEffect>
-                        </p:childTnLst>
-                      </p:cTn>
-                    </p:par>
-                    <p:par>
-                      <p:cTn id="219" presetID="10" presetClass="entr" presetSubtype="0" fill="hold" grpId="0" nodeType="clickEffect">
+                              <p:cTn id="220" dur="700" fill="hold"/>
+                              <p:tgtEl>
+                                <p:spTgt spid="219"/>
+                              </p:tgtEl>
+                            </p:cBhvr>
+                          </p:animEffect>
+                        </p:childTnLst>
+                      </p:cTn>
+                    </p:par>
+                    <p:par>
+                      <p:cTn id="221" presetID="10" presetClass="entr" presetSubtype="0" fill="hold" grpId="0" nodeType="clickEffect">
                         <p:stCondLst>
                           <p:cond delay="1000"/>
                         </p:stCondLst>
                         <p:childTnLst>
                           <p:animEffect transition="in" filter="fade">
                             <p:cBhvr>
-                              <p:cTn id="220" dur="700" fill="hold"/>
-                              <p:tgtEl>
-                                <p:spTgt spid="219"/>
-                              </p:tgtEl>
-                            </p:cBhvr>
-                          </p:animEffect>
-                        </p:childTnLst>
-                      </p:cTn>
-                    </p:par>
-                    <p:par>
-                      <p:cTn id="221" presetID="2" presetClass="entr" presetSubtype="8" fill="hold" grpId="0" nodeType="clickEffect">
+                              <p:cTn id="222" dur="700" fill="hold"/>
+                              <p:tgtEl>
+                                <p:spTgt spid="221"/>
+                              </p:tgtEl>
+                            </p:cBhvr>
+                          </p:animEffect>
+                        </p:childTnLst>
+                      </p:cTn>
+                    </p:par>
+                    <p:par>
+                      <p:cTn id="223" presetID="2" presetClass="entr" presetSubtype="8" fill="hold" grpId="0" nodeType="clickEffect">
                         <p:stCondLst>
                           <p:cond delay="1100"/>
                         </p:stCondLst>
                         <p:childTnLst>
                           <p:animEffect transition="in" filter="fly">
                             <p:cBhvr>
-                              <p:cTn id="222" dur="600" fill="hold"/>
-                              <p:tgtEl>
-                                <p:spTgt spid="221"/>
-                              </p:tgtEl>
-                            </p:cBhvr>
-                          </p:animEffect>
-                        </p:childTnLst>
-                      </p:cTn>
-                    </p:par>
-                    <p:par>
-                      <p:cTn id="223" presetID="10" presetClass="entr" presetSubtype="0" fill="hold" grpId="0" nodeType="clickEffect">
+                              <p:cTn id="224" dur="600" fill="hold"/>
+                              <p:tgtEl>
+                                <p:spTgt spid="223"/>
+                              </p:tgtEl>
+                            </p:cBhvr>
+                          </p:animEffect>
+                        </p:childTnLst>
+                      </p:cTn>
+                    </p:par>
+                    <p:par>
+                      <p:cTn id="225" presetID="10" presetClass="entr" presetSubtype="0" fill="hold" grpId="0" nodeType="clickEffect">
                         <p:stCondLst>
                           <p:cond delay="1200"/>
                         </p:stCondLst>
                         <p:childTnLst>
                           <p:animEffect transition="in" filter="fade">
                             <p:cBhvr>
-                              <p:cTn id="224" dur="700" fill="hold"/>
-                              <p:tgtEl>
-                                <p:spTgt spid="223"/>
-                              </p:tgtEl>
-                            </p:cBhvr>
-                          </p:animEffect>
-                        </p:childTnLst>
-                      </p:cTn>
-                    </p:par>
-                    <p:par>
-                      <p:cTn id="225" presetID="10" presetClass="entr" presetSubtype="0" fill="hold" grpId="0" nodeType="clickEffect">
+                              <p:cTn id="226" dur="700" fill="hold"/>
+                              <p:tgtEl>
+                                <p:spTgt spid="225"/>
+                              </p:tgtEl>
+                            </p:cBhvr>
+                          </p:animEffect>
+                        </p:childTnLst>
+                      </p:cTn>
+                    </p:par>
+                    <p:par>
+                      <p:cTn id="227" presetID="10" presetClass="entr" presetSubtype="0" fill="hold" grpId="0" nodeType="clickEffect">
                         <p:stCondLst>
                           <p:cond delay="1300"/>
                         </p:stCondLst>
                         <p:childTnLst>
                           <p:animEffect transition="in" filter="fade">
                             <p:cBhvr>
-                              <p:cTn id="226" dur="700" fill="hold"/>
-                              <p:tgtEl>
-                                <p:spTgt spid="225"/>
-                              </p:tgtEl>
-                            </p:cBhvr>
-                          </p:animEffect>
-                        </p:childTnLst>
-                      </p:cTn>
-                    </p:par>
-                    <p:par>
-                      <p:cTn id="227" presetID="10" presetClass="entr" presetSubtype="0" fill="hold" grpId="0" nodeType="clickEffect">
+                              <p:cTn id="228" dur="700" fill="hold"/>
+                              <p:tgtEl>
+                                <p:spTgt spid="227"/>
+                              </p:tgtEl>
+                            </p:cBhvr>
+                          </p:animEffect>
+                        </p:childTnLst>
+                      </p:cTn>
+                    </p:par>
+                    <p:par>
+                      <p:cTn id="229" presetID="10" presetClass="entr" presetSubtype="0" fill="hold" grpId="0" nodeType="clickEffect">
                         <p:stCondLst>
                           <p:cond delay="1400"/>
                         </p:stCondLst>
                         <p:childTnLst>
                           <p:animEffect transition="in" filter="fade">
                             <p:cBhvr>
-                              <p:cTn id="228" dur="700" fill="hold"/>
-                              <p:tgtEl>
-                                <p:spTgt spid="227"/>
-                              </p:tgtEl>
-                            </p:cBhvr>
-                          </p:animEffect>
-                        </p:childTnLst>
-                      </p:cTn>
-                    </p:par>
-                    <p:par>
-                      <p:cTn id="229" presetID="10" presetClass="entr" presetSubtype="0" fill="hold" grpId="0" nodeType="clickEffect">
+                              <p:cTn id="230" dur="700" fill="hold"/>
+                              <p:tgtEl>
+                                <p:spTgt spid="229"/>
+                              </p:tgtEl>
+                            </p:cBhvr>
+                          </p:animEffect>
+                        </p:childTnLst>
+                      </p:cTn>
+                    </p:par>
+                    <p:par>
+                      <p:cTn id="231" presetID="10" presetClass="entr" presetSubtype="0" fill="hold" grpId="0" nodeType="clickEffect">
                         <p:stCondLst>
                           <p:cond delay="1500"/>
                         </p:stCondLst>
                         <p:childTnLst>
                           <p:animEffect transition="in" filter="fade">
                             <p:cBhvr>
-                              <p:cTn id="230" dur="700" fill="hold"/>
-                              <p:tgtEl>
-                                <p:spTgt spid="229"/>
-                              </p:tgtEl>
-                            </p:cBhvr>
-                          </p:animEffect>
-                        </p:childTnLst>
-                      </p:cTn>
-                    </p:par>
-                    <p:par>
-                      <p:cTn id="231" presetID="10" presetClass="entr" presetSubtype="0" fill="hold" grpId="0" nodeType="clickEffect">
+                              <p:cTn id="232" dur="700" fill="hold"/>
+                              <p:tgtEl>
+                                <p:spTgt spid="231"/>
+                              </p:tgtEl>
+                            </p:cBhvr>
+                          </p:animEffect>
+                        </p:childTnLst>
+                      </p:cTn>
+                    </p:par>
+                    <p:par>
+                      <p:cTn id="233" presetID="10" presetClass="entr" presetSubtype="0" fill="hold" grpId="0" nodeType="clickEffect">
                         <p:stCondLst>
                           <p:cond delay="1600"/>
                         </p:stCondLst>
                         <p:childTnLst>
                           <p:animEffect transition="in" filter="fade">
                             <p:cBhvr>
-                              <p:cTn id="232" dur="700" fill="hold"/>
-                              <p:tgtEl>
-                                <p:spTgt spid="231"/>
-                              </p:tgtEl>
-                            </p:cBhvr>
-                          </p:animEffect>
-                        </p:childTnLst>
-                      </p:cTn>
-                    </p:par>
-                    <p:par>
-                      <p:cTn id="233" presetID="2" presetClass="entr" presetSubtype="8" fill="hold" grpId="0" nodeType="clickEffect">
+                              <p:cTn id="234" dur="700" fill="hold"/>
+                              <p:tgtEl>
+                                <p:spTgt spid="233"/>
+                              </p:tgtEl>
+                            </p:cBhvr>
+                          </p:animEffect>
+                        </p:childTnLst>
+                      </p:cTn>
+                    </p:par>
+                    <p:par>
+                      <p:cTn id="235" presetID="2" presetClass="entr" presetSubtype="8" fill="hold" grpId="0" nodeType="clickEffect">
                         <p:stCondLst>
                           <p:cond delay="1100"/>
                         </p:stCondLst>
                         <p:childTnLst>
                           <p:animEffect transition="in" filter="fly">
                             <p:cBhvr>
-                              <p:cTn id="234" dur="600" fill="hold"/>
-                              <p:tgtEl>
-                                <p:spTgt spid="233"/>
-                              </p:tgtEl>
-                            </p:cBhvr>
-                          </p:animEffect>
-                        </p:childTnLst>
-                      </p:cTn>
-                    </p:par>
-                    <p:par>
-                      <p:cTn id="235" presetID="10" presetClass="entr" presetSubtype="0" fill="hold" grpId="0" nodeType="clickEffect">
+                              <p:cTn id="236" dur="600" fill="hold"/>
+                              <p:tgtEl>
+                                <p:spTgt spid="235"/>
+                              </p:tgtEl>
+                            </p:cBhvr>
+                          </p:animEffect>
+                        </p:childTnLst>
+                      </p:cTn>
+                    </p:par>
+                    <p:par>
+                      <p:cTn id="237" presetID="10" presetClass="entr" presetSubtype="0" fill="hold" grpId="0" nodeType="clickEffect">
                         <p:stCondLst>
                           <p:cond delay="1200"/>
                         </p:stCondLst>
                         <p:childTnLst>
                           <p:animEffect transition="in" filter="fade">
                             <p:cBhvr>
-                              <p:cTn id="236" dur="700" fill="hold"/>
-                              <p:tgtEl>
-                                <p:spTgt spid="235"/>
-                              </p:tgtEl>
-                            </p:cBhvr>
-                          </p:animEffect>
-                        </p:childTnLst>
-                      </p:cTn>
-                    </p:par>
-                    <p:par>
-                      <p:cTn id="237" presetID="10" presetClass="entr" presetSubtype="0" fill="hold" grpId="0" nodeType="clickEffect">
+                              <p:cTn id="238" dur="700" fill="hold"/>
+                              <p:tgtEl>
+                                <p:spTgt spid="237"/>
+                              </p:tgtEl>
+                            </p:cBhvr>
+                          </p:animEffect>
+                        </p:childTnLst>
+                      </p:cTn>
+                    </p:par>
+                    <p:par>
+                      <p:cTn id="239" presetID="10" presetClass="entr" presetSubtype="0" fill="hold" grpId="0" nodeType="clickEffect">
                         <p:stCondLst>
                           <p:cond delay="1300"/>
                         </p:stCondLst>
                         <p:childTnLst>
                           <p:animEffect transition="in" filter="fade">
                             <p:cBhvr>
-                              <p:cTn id="238" dur="700" fill="hold"/>
-                              <p:tgtEl>
-                                <p:spTgt spid="237"/>
-                              </p:tgtEl>
-                            </p:cBhvr>
-                          </p:animEffect>
-                        </p:childTnLst>
-                      </p:cTn>
-                    </p:par>
-                    <p:par>
-                      <p:cTn id="239" presetID="10" presetClass="entr" presetSubtype="0" fill="hold" grpId="0" nodeType="clickEffect">
+                              <p:cTn id="240" dur="700" fill="hold"/>
+                              <p:tgtEl>
+                                <p:spTgt spid="239"/>
+                              </p:tgtEl>
+                            </p:cBhvr>
+                          </p:animEffect>
+                        </p:childTnLst>
+                      </p:cTn>
+                    </p:par>
+                    <p:par>
+                      <p:cTn id="241" presetID="10" presetClass="entr" presetSubtype="0" fill="hold" grpId="0" nodeType="clickEffect">
                         <p:stCondLst>
                           <p:cond delay="1400"/>
                         </p:stCondLst>
                         <p:childTnLst>
                           <p:animEffect transition="in" filter="fade">
                             <p:cBhvr>
-                              <p:cTn id="240" dur="700" fill="hold"/>
-                              <p:tgtEl>
-                                <p:spTgt spid="239"/>
-                              </p:tgtEl>
-                            </p:cBhvr>
-                          </p:animEffect>
-                        </p:childTnLst>
-                      </p:cTn>
-                    </p:par>
-                    <p:par>
-                      <p:cTn id="241" presetID="10" presetClass="entr" presetSubtype="0" fill="hold" grpId="0" nodeType="clickEffect">
+                              <p:cTn id="242" dur="700" fill="hold"/>
+                              <p:tgtEl>
+                                <p:spTgt spid="241"/>
+                              </p:tgtEl>
+                            </p:cBhvr>
+                          </p:animEffect>
+                        </p:childTnLst>
+                      </p:cTn>
+                    </p:par>
+                    <p:par>
+                      <p:cTn id="243" presetID="10" presetClass="entr" presetSubtype="0" fill="hold" grpId="0" nodeType="clickEffect">
                         <p:stCondLst>
                           <p:cond delay="1500"/>
                         </p:stCondLst>
                         <p:childTnLst>
                           <p:animEffect transition="in" filter="fade">
                             <p:cBhvr>
-                              <p:cTn id="242" dur="700" fill="hold"/>
-                              <p:tgtEl>
-                                <p:spTgt spid="241"/>
-                              </p:tgtEl>
-                            </p:cBhvr>
-                          </p:animEffect>
-                        </p:childTnLst>
-                      </p:cTn>
-                    </p:par>
-                    <p:par>
-                      <p:cTn id="243" presetID="10" presetClass="entr" presetSubtype="0" fill="hold" grpId="0" nodeType="clickEffect">
+                              <p:cTn id="244" dur="700" fill="hold"/>
+                              <p:tgtEl>
+                                <p:spTgt spid="243"/>
+                              </p:tgtEl>
+                            </p:cBhvr>
+                          </p:animEffect>
+                        </p:childTnLst>
+                      </p:cTn>
+                    </p:par>
+                    <p:par>
+                      <p:cTn id="245" presetID="10" presetClass="entr" presetSubtype="0" fill="hold" grpId="0" nodeType="clickEffect">
                         <p:stCondLst>
                           <p:cond delay="1600"/>
                         </p:stCondLst>
                         <p:childTnLst>
                           <p:animEffect transition="in" filter="fade">
                             <p:cBhvr>
-                              <p:cTn id="244" dur="700" fill="hold"/>
-                              <p:tgtEl>
-                                <p:spTgt spid="243"/>
-                              </p:tgtEl>
-                            </p:cBhvr>
-                          </p:animEffect>
-                        </p:childTnLst>
-                      </p:cTn>
-                    </p:par>
-                    <p:par>
-                      <p:cTn id="245" presetID="22" presetClass="entr" presetSubtype="0" fill="hold" grpId="0" nodeType="clickEffect">
+                              <p:cTn id="246" dur="700" fill="hold"/>
+                              <p:tgtEl>
+                                <p:spTgt spid="245"/>
+                              </p:tgtEl>
+                            </p:cBhvr>
+                          </p:animEffect>
+                        </p:childTnLst>
+                      </p:cTn>
+                    </p:par>
+                    <p:par>
+                      <p:cTn id="247" presetID="22" presetClass="entr" presetSubtype="0" fill="hold" grpId="0" nodeType="clickEffect">
                         <p:stCondLst>
                           <p:cond delay="1150"/>
                         </p:stCondLst>
                         <p:childTnLst>
                           <p:animEffect transition="in" filter="zoom">
                             <p:cBhvr>
-                              <p:cTn id="246" dur="500" fill="hold"/>
-                              <p:tgtEl>
-                                <p:spTgt spid="245"/>
+                              <p:cTn id="248" dur="500" fill="hold"/>
+                              <p:tgtEl>
+                                <p:spTgt spid="247"/>
                               </p:tgtEl>
                             </p:cBhvr>
                           </p:animEffect>
@@ -16685,7 +16737,7 @@
       </p:sp>
       <p:sp>
         <p:nvSpPr>
-          <p:cNvPr id="249" name="TextBox 248"/>
+          <p:cNvPr id="251" name="TextBox 250"/>
           <p:cNvSpPr txBox="1"/>
           <p:nvPr/>
         </p:nvSpPr>
@@ -16720,7 +16772,7 @@
       </p:sp>
       <p:sp>
         <p:nvSpPr>
-          <p:cNvPr id="251" name="Rectangle 250"/>
+          <p:cNvPr id="253" name="Rectangle 252"/>
           <p:cNvSpPr/>
           <p:nvPr/>
         </p:nvSpPr>
@@ -16765,7 +16817,7 @@
       </p:sp>
       <p:sp>
         <p:nvSpPr>
-          <p:cNvPr id="253" name="TextBox 252"/>
+          <p:cNvPr id="255" name="TextBox 254"/>
           <p:cNvSpPr txBox="1"/>
           <p:nvPr/>
         </p:nvSpPr>
@@ -16800,7 +16852,7 @@
       </p:sp>
       <p:sp>
         <p:nvSpPr>
-          <p:cNvPr id="255" name="TextBox 254"/>
+          <p:cNvPr id="257" name="TextBox 256"/>
           <p:cNvSpPr txBox="1"/>
           <p:nvPr/>
         </p:nvSpPr>
@@ -16835,7 +16887,7 @@
       </p:sp>
       <p:sp>
         <p:nvSpPr>
-          <p:cNvPr id="257" name="TextBox 256"/>
+          <p:cNvPr id="259" name="TextBox 258"/>
           <p:cNvSpPr txBox="1"/>
           <p:nvPr/>
         </p:nvSpPr>
@@ -16871,7 +16923,7 @@
       </p:sp>
       <p:sp>
         <p:nvSpPr>
-          <p:cNvPr id="259" name="Rectangle 258"/>
+          <p:cNvPr id="261" name="Rectangle 260"/>
           <p:cNvSpPr/>
           <p:nvPr/>
         </p:nvSpPr>
@@ -16916,7 +16968,7 @@
       </p:sp>
       <p:sp>
         <p:nvSpPr>
-          <p:cNvPr id="261" name="TextBox 260"/>
+          <p:cNvPr id="263" name="TextBox 262"/>
           <p:cNvSpPr txBox="1"/>
           <p:nvPr/>
         </p:nvSpPr>
@@ -16951,7 +17003,7 @@
       </p:sp>
       <p:sp>
         <p:nvSpPr>
-          <p:cNvPr id="263" name="TextBox 262"/>
+          <p:cNvPr id="265" name="TextBox 264"/>
           <p:cNvSpPr txBox="1"/>
           <p:nvPr/>
         </p:nvSpPr>
@@ -16986,7 +17038,7 @@
       </p:sp>
       <p:sp>
         <p:nvSpPr>
-          <p:cNvPr id="265" name="TextBox 264"/>
+          <p:cNvPr id="267" name="TextBox 266"/>
           <p:cNvSpPr txBox="1"/>
           <p:nvPr/>
         </p:nvSpPr>
@@ -17022,7 +17074,7 @@
       </p:sp>
       <p:sp>
         <p:nvSpPr>
-          <p:cNvPr id="267" name="Rectangle 266"/>
+          <p:cNvPr id="269" name="Rectangle 268"/>
           <p:cNvSpPr/>
           <p:nvPr/>
         </p:nvSpPr>
@@ -17067,7 +17119,7 @@
       </p:sp>
       <p:sp>
         <p:nvSpPr>
-          <p:cNvPr id="269" name="TextBox 268"/>
+          <p:cNvPr id="271" name="TextBox 270"/>
           <p:cNvSpPr txBox="1"/>
           <p:nvPr/>
         </p:nvSpPr>
@@ -17102,7 +17154,7 @@
       </p:sp>
       <p:sp>
         <p:nvSpPr>
-          <p:cNvPr id="271" name="TextBox 270"/>
+          <p:cNvPr id="273" name="TextBox 272"/>
           <p:cNvSpPr txBox="1"/>
           <p:nvPr/>
         </p:nvSpPr>
@@ -17137,7 +17189,7 @@
       </p:sp>
       <p:sp>
         <p:nvSpPr>
-          <p:cNvPr id="273" name="TextBox 272"/>
+          <p:cNvPr id="275" name="TextBox 274"/>
           <p:cNvSpPr txBox="1"/>
           <p:nvPr/>
         </p:nvSpPr>
@@ -17173,7 +17225,7 @@
       </p:sp>
       <p:sp>
         <p:nvSpPr>
-          <p:cNvPr id="275" name="Rectangle 274"/>
+          <p:cNvPr id="277" name="Rectangle 276"/>
           <p:cNvSpPr/>
           <p:nvPr/>
         </p:nvSpPr>
@@ -17218,7 +17270,7 @@
       </p:sp>
       <p:sp>
         <p:nvSpPr>
-          <p:cNvPr id="277" name="TextBox 276"/>
+          <p:cNvPr id="279" name="TextBox 278"/>
           <p:cNvSpPr txBox="1"/>
           <p:nvPr/>
         </p:nvSpPr>
@@ -17253,7 +17305,7 @@
       </p:sp>
       <p:sp>
         <p:nvSpPr>
-          <p:cNvPr id="279" name="TextBox 278"/>
+          <p:cNvPr id="281" name="TextBox 280"/>
           <p:cNvSpPr txBox="1"/>
           <p:nvPr/>
         </p:nvSpPr>
@@ -17288,7 +17340,7 @@
       </p:sp>
       <p:sp>
         <p:nvSpPr>
-          <p:cNvPr id="281" name="TextBox 280"/>
+          <p:cNvPr id="283" name="TextBox 282"/>
           <p:cNvSpPr txBox="1"/>
           <p:nvPr/>
         </p:nvSpPr>
@@ -17332,14 +17384,14 @@
                 <p:cTn id="2" dur="indefinite" nodeType="mainSeq">
                   <p:childTnLst>
                     <p:par>
-                      <p:cTn id="247" presetID="2" presetClass="entr" presetSubtype="8" fill="hold" grpId="0" nodeType="clickEffect">
+                      <p:cTn id="249" presetID="2" presetClass="entr" presetSubtype="8" fill="hold" grpId="0" nodeType="clickEffect">
                         <p:stCondLst>
                           <p:cond delay="0"/>
                         </p:stCondLst>
                         <p:childTnLst>
                           <p:animEffect transition="in" filter="fly">
                             <p:cBhvr>
-                              <p:cTn id="248" dur="600" fill="hold"/>
+                              <p:cTn id="250" dur="600" fill="hold"/>
                               <p:tgtEl>
                                 <p:spTgt spid="4"/>
                               </p:tgtEl>
@@ -17349,288 +17401,288 @@
                       </p:cTn>
                     </p:par>
                     <p:par>
-                      <p:cTn id="249" presetID="10" presetClass="entr" presetSubtype="0" fill="hold" grpId="0" nodeType="clickEffect">
+                      <p:cTn id="251" presetID="10" presetClass="entr" presetSubtype="0" fill="hold" grpId="0" nodeType="clickEffect">
                         <p:stCondLst>
                           <p:cond delay="200"/>
                         </p:stCondLst>
                         <p:childTnLst>
                           <p:animEffect transition="in" filter="fade">
                             <p:cBhvr>
-                              <p:cTn id="250" dur="700" fill="hold"/>
-                              <p:tgtEl>
-                                <p:spTgt spid="249"/>
-                              </p:tgtEl>
-                            </p:cBhvr>
-                          </p:animEffect>
-                        </p:childTnLst>
-                      </p:cTn>
-                    </p:par>
-                    <p:par>
-                      <p:cTn id="251" presetID="2" presetClass="entr" presetSubtype="8" fill="hold" grpId="0" nodeType="clickEffect">
+                              <p:cTn id="252" dur="700" fill="hold"/>
+                              <p:tgtEl>
+                                <p:spTgt spid="251"/>
+                              </p:tgtEl>
+                            </p:cBhvr>
+                          </p:animEffect>
+                        </p:childTnLst>
+                      </p:cTn>
+                    </p:par>
+                    <p:par>
+                      <p:cTn id="253" presetID="2" presetClass="entr" presetSubtype="8" fill="hold" grpId="0" nodeType="clickEffect">
                         <p:stCondLst>
                           <p:cond delay="300"/>
                         </p:stCondLst>
                         <p:childTnLst>
                           <p:animEffect transition="in" filter="fly">
                             <p:cBhvr>
-                              <p:cTn id="252" dur="600" fill="hold"/>
-                              <p:tgtEl>
-                                <p:spTgt spid="251"/>
-                              </p:tgtEl>
-                            </p:cBhvr>
-                          </p:animEffect>
-                        </p:childTnLst>
-                      </p:cTn>
-                    </p:par>
-                    <p:par>
-                      <p:cTn id="253" presetID="22" presetClass="entr" presetSubtype="0" fill="hold" grpId="0" nodeType="clickEffect">
+                              <p:cTn id="254" dur="600" fill="hold"/>
+                              <p:tgtEl>
+                                <p:spTgt spid="253"/>
+                              </p:tgtEl>
+                            </p:cBhvr>
+                          </p:animEffect>
+                        </p:childTnLst>
+                      </p:cTn>
+                    </p:par>
+                    <p:par>
+                      <p:cTn id="255" presetID="22" presetClass="entr" presetSubtype="0" fill="hold" grpId="0" nodeType="clickEffect">
                         <p:stCondLst>
                           <p:cond delay="400"/>
                         </p:stCondLst>
                         <p:childTnLst>
                           <p:animEffect transition="in" filter="zoom">
                             <p:cBhvr>
-                              <p:cTn id="254" dur="500" fill="hold"/>
-                              <p:tgtEl>
-                                <p:spTgt spid="253"/>
-                              </p:tgtEl>
-                            </p:cBhvr>
-                          </p:animEffect>
-                        </p:childTnLst>
-                      </p:cTn>
-                    </p:par>
-                    <p:par>
-                      <p:cTn id="255" presetID="10" presetClass="entr" presetSubtype="0" fill="hold" grpId="0" nodeType="clickEffect">
+                              <p:cTn id="256" dur="500" fill="hold"/>
+                              <p:tgtEl>
+                                <p:spTgt spid="255"/>
+                              </p:tgtEl>
+                            </p:cBhvr>
+                          </p:animEffect>
+                        </p:childTnLst>
+                      </p:cTn>
+                    </p:par>
+                    <p:par>
+                      <p:cTn id="257" presetID="10" presetClass="entr" presetSubtype="0" fill="hold" grpId="0" nodeType="clickEffect">
                         <p:stCondLst>
                           <p:cond delay="500"/>
                         </p:stCondLst>
                         <p:childTnLst>
                           <p:animEffect transition="in" filter="fade">
                             <p:cBhvr>
-                              <p:cTn id="256" dur="700" fill="hold"/>
-                              <p:tgtEl>
-                                <p:spTgt spid="255"/>
-                              </p:tgtEl>
-                            </p:cBhvr>
-                          </p:animEffect>
-                        </p:childTnLst>
-                      </p:cTn>
-                    </p:par>
-                    <p:par>
-                      <p:cTn id="257" presetID="10" presetClass="entr" presetSubtype="0" fill="hold" grpId="0" nodeType="clickEffect">
+                              <p:cTn id="258" dur="700" fill="hold"/>
+                              <p:tgtEl>
+                                <p:spTgt spid="257"/>
+                              </p:tgtEl>
+                            </p:cBhvr>
+                          </p:animEffect>
+                        </p:childTnLst>
+                      </p:cTn>
+                    </p:par>
+                    <p:par>
+                      <p:cTn id="259" presetID="10" presetClass="entr" presetSubtype="0" fill="hold" grpId="0" nodeType="clickEffect">
                         <p:stCondLst>
                           <p:cond delay="600"/>
                         </p:stCondLst>
                         <p:childTnLst>
                           <p:animEffect transition="in" filter="fade">
                             <p:cBhvr>
-                              <p:cTn id="258" dur="700" fill="hold"/>
-                              <p:tgtEl>
-                                <p:spTgt spid="257"/>
-                              </p:tgtEl>
-                            </p:cBhvr>
-                          </p:animEffect>
-                        </p:childTnLst>
-                      </p:cTn>
-                    </p:par>
-                    <p:par>
-                      <p:cTn id="259" presetID="2" presetClass="entr" presetSubtype="8" fill="hold" grpId="0" nodeType="clickEffect">
+                              <p:cTn id="260" dur="700" fill="hold"/>
+                              <p:tgtEl>
+                                <p:spTgt spid="259"/>
+                              </p:tgtEl>
+                            </p:cBhvr>
+                          </p:animEffect>
+                        </p:childTnLst>
+                      </p:cTn>
+                    </p:par>
+                    <p:par>
+                      <p:cTn id="261" presetID="2" presetClass="entr" presetSubtype="8" fill="hold" grpId="0" nodeType="clickEffect">
                         <p:stCondLst>
                           <p:cond delay="300"/>
                         </p:stCondLst>
                         <p:childTnLst>
                           <p:animEffect transition="in" filter="fly">
                             <p:cBhvr>
-                              <p:cTn id="260" dur="600" fill="hold"/>
-                              <p:tgtEl>
-                                <p:spTgt spid="259"/>
-                              </p:tgtEl>
-                            </p:cBhvr>
-                          </p:animEffect>
-                        </p:childTnLst>
-                      </p:cTn>
-                    </p:par>
-                    <p:par>
-                      <p:cTn id="261" presetID="22" presetClass="entr" presetSubtype="0" fill="hold" grpId="0" nodeType="clickEffect">
+                              <p:cTn id="262" dur="600" fill="hold"/>
+                              <p:tgtEl>
+                                <p:spTgt spid="261"/>
+                              </p:tgtEl>
+                            </p:cBhvr>
+                          </p:animEffect>
+                        </p:childTnLst>
+                      </p:cTn>
+                    </p:par>
+                    <p:par>
+                      <p:cTn id="263" presetID="22" presetClass="entr" presetSubtype="0" fill="hold" grpId="0" nodeType="clickEffect">
                         <p:stCondLst>
                           <p:cond delay="400"/>
                         </p:stCondLst>
                         <p:childTnLst>
                           <p:animEffect transition="in" filter="zoom">
                             <p:cBhvr>
-                              <p:cTn id="262" dur="500" fill="hold"/>
-                              <p:tgtEl>
-                                <p:spTgt spid="261"/>
-                              </p:tgtEl>
-                            </p:cBhvr>
-                          </p:animEffect>
-                        </p:childTnLst>
-                      </p:cTn>
-                    </p:par>
-                    <p:par>
-                      <p:cTn id="263" presetID="10" presetClass="entr" presetSubtype="0" fill="hold" grpId="0" nodeType="clickEffect">
+                              <p:cTn id="264" dur="500" fill="hold"/>
+                              <p:tgtEl>
+                                <p:spTgt spid="263"/>
+                              </p:tgtEl>
+                            </p:cBhvr>
+                          </p:animEffect>
+                        </p:childTnLst>
+                      </p:cTn>
+                    </p:par>
+                    <p:par>
+                      <p:cTn id="265" presetID="10" presetClass="entr" presetSubtype="0" fill="hold" grpId="0" nodeType="clickEffect">
                         <p:stCondLst>
                           <p:cond delay="500"/>
                         </p:stCondLst>
                         <p:childTnLst>
                           <p:animEffect transition="in" filter="fade">
                             <p:cBhvr>
-                              <p:cTn id="264" dur="700" fill="hold"/>
-                              <p:tgtEl>
-                                <p:spTgt spid="263"/>
-                              </p:tgtEl>
-                            </p:cBhvr>
-                          </p:animEffect>
-                        </p:childTnLst>
-                      </p:cTn>
-                    </p:par>
-                    <p:par>
-                      <p:cTn id="265" presetID="10" presetClass="entr" presetSubtype="0" fill="hold" grpId="0" nodeType="clickEffect">
+                              <p:cTn id="266" dur="700" fill="hold"/>
+                              <p:tgtEl>
+                                <p:spTgt spid="265"/>
+                              </p:tgtEl>
+                            </p:cBhvr>
+                          </p:animEffect>
+                        </p:childTnLst>
+                      </p:cTn>
+                    </p:par>
+                    <p:par>
+                      <p:cTn id="267" presetID="10" presetClass="entr" presetSubtype="0" fill="hold" grpId="0" nodeType="clickEffect">
                         <p:stCondLst>
                           <p:cond delay="600"/>
                         </p:stCondLst>
                         <p:childTnLst>
                           <p:animEffect transition="in" filter="fade">
                             <p:cBhvr>
-                              <p:cTn id="266" dur="700" fill="hold"/>
-                              <p:tgtEl>
-                                <p:spTgt spid="265"/>
-                              </p:tgtEl>
-                            </p:cBhvr>
-                          </p:animEffect>
-                        </p:childTnLst>
-                      </p:cTn>
-                    </p:par>
-                    <p:par>
-                      <p:cTn id="267" presetID="2" presetClass="entr" presetSubtype="8" fill="hold" grpId="0" nodeType="clickEffect">
+                              <p:cTn id="268" dur="700" fill="hold"/>
+                              <p:tgtEl>
+                                <p:spTgt spid="267"/>
+                              </p:tgtEl>
+                            </p:cBhvr>
+                          </p:animEffect>
+                        </p:childTnLst>
+                      </p:cTn>
+                    </p:par>
+                    <p:par>
+                      <p:cTn id="269" presetID="2" presetClass="entr" presetSubtype="8" fill="hold" grpId="0" nodeType="clickEffect">
                         <p:stCondLst>
                           <p:cond delay="300"/>
                         </p:stCondLst>
                         <p:childTnLst>
                           <p:animEffect transition="in" filter="fly">
                             <p:cBhvr>
-                              <p:cTn id="268" dur="600" fill="hold"/>
-                              <p:tgtEl>
-                                <p:spTgt spid="267"/>
-                              </p:tgtEl>
-                            </p:cBhvr>
-                          </p:animEffect>
-                        </p:childTnLst>
-                      </p:cTn>
-                    </p:par>
-                    <p:par>
-                      <p:cTn id="269" presetID="22" presetClass="entr" presetSubtype="0" fill="hold" grpId="0" nodeType="clickEffect">
+                              <p:cTn id="270" dur="600" fill="hold"/>
+                              <p:tgtEl>
+                                <p:spTgt spid="269"/>
+                              </p:tgtEl>
+                            </p:cBhvr>
+                          </p:animEffect>
+                        </p:childTnLst>
+                      </p:cTn>
+                    </p:par>
+                    <p:par>
+                      <p:cTn id="271" presetID="22" presetClass="entr" presetSubtype="0" fill="hold" grpId="0" nodeType="clickEffect">
                         <p:stCondLst>
                           <p:cond delay="400"/>
                         </p:stCondLst>
                         <p:childTnLst>
                           <p:animEffect transition="in" filter="zoom">
                             <p:cBhvr>
-                              <p:cTn id="270" dur="500" fill="hold"/>
-                              <p:tgtEl>
-                                <p:spTgt spid="269"/>
-                              </p:tgtEl>
-                            </p:cBhvr>
-                          </p:animEffect>
-                        </p:childTnLst>
-                      </p:cTn>
-                    </p:par>
-                    <p:par>
-                      <p:cTn id="271" presetID="10" presetClass="entr" presetSubtype="0" fill="hold" grpId="0" nodeType="clickEffect">
+                              <p:cTn id="272" dur="500" fill="hold"/>
+                              <p:tgtEl>
+                                <p:spTgt spid="271"/>
+                              </p:tgtEl>
+                            </p:cBhvr>
+                          </p:animEffect>
+                        </p:childTnLst>
+                      </p:cTn>
+                    </p:par>
+                    <p:par>
+                      <p:cTn id="273" presetID="10" presetClass="entr" presetSubtype="0" fill="hold" grpId="0" nodeType="clickEffect">
                         <p:stCondLst>
                           <p:cond delay="500"/>
                         </p:stCondLst>
                         <p:childTnLst>
                           <p:animEffect transition="in" filter="fade">
                             <p:cBhvr>
-                              <p:cTn id="272" dur="700" fill="hold"/>
-                              <p:tgtEl>
-                                <p:spTgt spid="271"/>
-                              </p:tgtEl>
-                            </p:cBhvr>
-                          </p:animEffect>
-                        </p:childTnLst>
-                      </p:cTn>
-                    </p:par>
-                    <p:par>
-                      <p:cTn id="273" presetID="10" presetClass="entr" presetSubtype="0" fill="hold" grpId="0" nodeType="clickEffect">
+                              <p:cTn id="274" dur="700" fill="hold"/>
+                              <p:tgtEl>
+                                <p:spTgt spid="273"/>
+                              </p:tgtEl>
+                            </p:cBhvr>
+                          </p:animEffect>
+                        </p:childTnLst>
+                      </p:cTn>
+                    </p:par>
+                    <p:par>
+                      <p:cTn id="275" presetID="10" presetClass="entr" presetSubtype="0" fill="hold" grpId="0" nodeType="clickEffect">
                         <p:stCondLst>
                           <p:cond delay="600"/>
                         </p:stCondLst>
                         <p:childTnLst>
                           <p:animEffect transition="in" filter="fade">
                             <p:cBhvr>
-                              <p:cTn id="274" dur="700" fill="hold"/>
-                              <p:tgtEl>
-                                <p:spTgt spid="273"/>
-                              </p:tgtEl>
-                            </p:cBhvr>
-                          </p:animEffect>
-                        </p:childTnLst>
-                      </p:cTn>
-                    </p:par>
-                    <p:par>
-                      <p:cTn id="275" presetID="2" presetClass="entr" presetSubtype="8" fill="hold" grpId="0" nodeType="clickEffect">
+                              <p:cTn id="276" dur="700" fill="hold"/>
+                              <p:tgtEl>
+                                <p:spTgt spid="275"/>
+                              </p:tgtEl>
+                            </p:cBhvr>
+                          </p:animEffect>
+                        </p:childTnLst>
+                      </p:cTn>
+                    </p:par>
+                    <p:par>
+                      <p:cTn id="277" presetID="2" presetClass="entr" presetSubtype="8" fill="hold" grpId="0" nodeType="clickEffect">
                         <p:stCondLst>
                           <p:cond delay="300"/>
                         </p:stCondLst>
                         <p:childTnLst>
                           <p:animEffect transition="in" filter="fly">
                             <p:cBhvr>
-                              <p:cTn id="276" dur="600" fill="hold"/>
-                              <p:tgtEl>
-                                <p:spTgt spid="275"/>
-                              </p:tgtEl>
-                            </p:cBhvr>
-                          </p:animEffect>
-                        </p:childTnLst>
-                      </p:cTn>
-                    </p:par>
-                    <p:par>
-                      <p:cTn id="277" presetID="22" presetClass="entr" presetSubtype="0" fill="hold" grpId="0" nodeType="clickEffect">
+                              <p:cTn id="278" dur="600" fill="hold"/>
+                              <p:tgtEl>
+                                <p:spTgt spid="277"/>
+                              </p:tgtEl>
+                            </p:cBhvr>
+                          </p:animEffect>
+                        </p:childTnLst>
+                      </p:cTn>
+                    </p:par>
+                    <p:par>
+                      <p:cTn id="279" presetID="22" presetClass="entr" presetSubtype="0" fill="hold" grpId="0" nodeType="clickEffect">
                         <p:stCondLst>
                           <p:cond delay="400"/>
                         </p:stCondLst>
                         <p:childTnLst>
                           <p:animEffect transition="in" filter="zoom">
                             <p:cBhvr>
-                              <p:cTn id="278" dur="500" fill="hold"/>
-                              <p:tgtEl>
-                                <p:spTgt spid="277"/>
-                              </p:tgtEl>
-                            </p:cBhvr>
-                          </p:animEffect>
-                        </p:childTnLst>
-                      </p:cTn>
-                    </p:par>
-                    <p:par>
-                      <p:cTn id="279" presetID="10" presetClass="entr" presetSubtype="0" fill="hold" grpId="0" nodeType="clickEffect">
+                              <p:cTn id="280" dur="500" fill="hold"/>
+                              <p:tgtEl>
+                                <p:spTgt spid="279"/>
+                              </p:tgtEl>
+                            </p:cBhvr>
+                          </p:animEffect>
+                        </p:childTnLst>
+                      </p:cTn>
+                    </p:par>
+                    <p:par>
+                      <p:cTn id="281" presetID="10" presetClass="entr" presetSubtype="0" fill="hold" grpId="0" nodeType="clickEffect">
                         <p:stCondLst>
                           <p:cond delay="500"/>
                         </p:stCondLst>
                         <p:childTnLst>
                           <p:animEffect transition="in" filter="fade">
                             <p:cBhvr>
-                              <p:cTn id="280" dur="700" fill="hold"/>
-                              <p:tgtEl>
-                                <p:spTgt spid="279"/>
-                              </p:tgtEl>
-                            </p:cBhvr>
-                          </p:animEffect>
-                        </p:childTnLst>
-                      </p:cTn>
-                    </p:par>
-                    <p:par>
-                      <p:cTn id="281" presetID="10" presetClass="entr" presetSubtype="0" fill="hold" grpId="0" nodeType="clickEffect">
+                              <p:cTn id="282" dur="700" fill="hold"/>
+                              <p:tgtEl>
+                                <p:spTgt spid="281"/>
+                              </p:tgtEl>
+                            </p:cBhvr>
+                          </p:animEffect>
+                        </p:childTnLst>
+                      </p:cTn>
+                    </p:par>
+                    <p:par>
+                      <p:cTn id="283" presetID="10" presetClass="entr" presetSubtype="0" fill="hold" grpId="0" nodeType="clickEffect">
                         <p:stCondLst>
                           <p:cond delay="600"/>
                         </p:stCondLst>
                         <p:childTnLst>
                           <p:animEffect transition="in" filter="fade">
                             <p:cBhvr>
-                              <p:cTn id="282" dur="700" fill="hold"/>
-                              <p:tgtEl>
-                                <p:spTgt spid="281"/>
+                              <p:cTn id="284" dur="700" fill="hold"/>
+                              <p:tgtEl>
+                                <p:spTgt spid="283"/>
                               </p:tgtEl>
                             </p:cBhvr>
                           </p:animEffect>
@@ -17772,7 +17824,7 @@
       </p:sp>
       <p:sp>
         <p:nvSpPr>
-          <p:cNvPr id="285" name="Rectangle 284"/>
+          <p:cNvPr id="287" name="Rectangle 286"/>
           <p:cNvSpPr/>
           <p:nvPr/>
         </p:nvSpPr>
@@ -17815,7 +17867,7 @@
       </p:sp>
       <p:sp>
         <p:nvSpPr>
-          <p:cNvPr id="287" name="Rectangle 286"/>
+          <p:cNvPr id="289" name="Rectangle 288"/>
           <p:cNvSpPr/>
           <p:nvPr/>
         </p:nvSpPr>
@@ -17858,7 +17910,7 @@
       </p:sp>
       <p:sp>
         <p:nvSpPr>
-          <p:cNvPr id="289" name="TextBox 288"/>
+          <p:cNvPr id="291" name="TextBox 290"/>
           <p:cNvSpPr txBox="1"/>
           <p:nvPr/>
         </p:nvSpPr>
@@ -17893,7 +17945,7 @@
       </p:sp>
       <p:sp>
         <p:nvSpPr>
-          <p:cNvPr id="291" name="TextBox 290"/>
+          <p:cNvPr id="293" name="TextBox 292"/>
           <p:cNvSpPr txBox="1"/>
           <p:nvPr/>
         </p:nvSpPr>
@@ -17936,14 +17988,14 @@
                 <p:cTn id="2" dur="indefinite" nodeType="mainSeq">
                   <p:childTnLst>
                     <p:par>
-                      <p:cTn id="283" presetID="10" presetClass="entr" presetSubtype="0" fill="hold" grpId="0" nodeType="clickEffect">
+                      <p:cTn id="285" presetID="10" presetClass="entr" presetSubtype="0" fill="hold" grpId="0" nodeType="clickEffect">
                         <p:stCondLst>
                           <p:cond delay="0"/>
                         </p:stCondLst>
                         <p:childTnLst>
                           <p:animEffect transition="in" filter="fade">
                             <p:cBhvr>
-                              <p:cTn id="284" dur="700" fill="hold"/>
+                              <p:cTn id="286" dur="700" fill="hold"/>
                               <p:tgtEl>
                                 <p:spTgt spid="3"/>
                               </p:tgtEl>
@@ -17953,67 +18005,67 @@
                       </p:cTn>
                     </p:par>
                     <p:par>
-                      <p:cTn id="285" presetID="10" presetClass="entr" presetSubtype="0" fill="hold" grpId="0" nodeType="clickEffect">
+                      <p:cTn id="287" presetID="10" presetClass="entr" presetSubtype="0" fill="hold" grpId="0" nodeType="clickEffect">
                         <p:stCondLst>
                           <p:cond delay="0"/>
                         </p:stCondLst>
                         <p:childTnLst>
                           <p:animEffect transition="in" filter="fade">
                             <p:cBhvr>
-                              <p:cTn id="286" dur="700" fill="hold"/>
-                              <p:tgtEl>
-                                <p:spTgt spid="285"/>
-                              </p:tgtEl>
-                            </p:cBhvr>
-                          </p:animEffect>
-                        </p:childTnLst>
-                      </p:cTn>
-                    </p:par>
-                    <p:par>
-                      <p:cTn id="287" presetID="10" presetClass="entr" presetSubtype="0" fill="hold" grpId="0" nodeType="clickEffect">
+                              <p:cTn id="288" dur="700" fill="hold"/>
+                              <p:tgtEl>
+                                <p:spTgt spid="287"/>
+                              </p:tgtEl>
+                            </p:cBhvr>
+                          </p:animEffect>
+                        </p:childTnLst>
+                      </p:cTn>
+                    </p:par>
+                    <p:par>
+                      <p:cTn id="289" presetID="10" presetClass="entr" presetSubtype="0" fill="hold" grpId="0" nodeType="clickEffect">
                         <p:stCondLst>
                           <p:cond delay="300"/>
                         </p:stCondLst>
                         <p:childTnLst>
                           <p:animEffect transition="in" filter="fade">
                             <p:cBhvr>
-                              <p:cTn id="288" dur="700" fill="hold"/>
-                              <p:tgtEl>
-                                <p:spTgt spid="287"/>
-                              </p:tgtEl>
-                            </p:cBhvr>
-                          </p:animEffect>
-                        </p:childTnLst>
-                      </p:cTn>
-                    </p:par>
-                    <p:par>
-                      <p:cTn id="289" presetID="22" presetClass="entr" presetSubtype="0" fill="hold" grpId="0" nodeType="clickEffect">
+                              <p:cTn id="290" dur="700" fill="hold"/>
+                              <p:tgtEl>
+                                <p:spTgt spid="289"/>
+                              </p:tgtEl>
+                            </p:cBhvr>
+                          </p:animEffect>
+                        </p:childTnLst>
+                      </p:cTn>
+                    </p:par>
+                    <p:par>
+                      <p:cTn id="291" presetID="22" presetClass="entr" presetSubtype="0" fill="hold" grpId="0" nodeType="clickEffect">
                         <p:stCondLst>
                           <p:cond delay="100"/>
                         </p:stCondLst>
                         <p:childTnLst>
                           <p:animEffect transition="in" filter="zoom">
                             <p:cBhvr>
-                              <p:cTn id="290" dur="500" fill="hold"/>
-                              <p:tgtEl>
-                                <p:spTgt spid="289"/>
-                              </p:tgtEl>
-                            </p:cBhvr>
-                          </p:animEffect>
-                        </p:childTnLst>
-                      </p:cTn>
-                    </p:par>
-                    <p:par>
-                      <p:cTn id="291" presetID="10" presetClass="entr" presetSubtype="0" fill="hold" grpId="0" nodeType="clickEffect">
+                              <p:cTn id="292" dur="500" fill="hold"/>
+                              <p:tgtEl>
+                                <p:spTgt spid="291"/>
+                              </p:tgtEl>
+                            </p:cBhvr>
+                          </p:animEffect>
+                        </p:childTnLst>
+                      </p:cTn>
+                    </p:par>
+                    <p:par>
+                      <p:cTn id="293" presetID="10" presetClass="entr" presetSubtype="0" fill="hold" grpId="0" nodeType="clickEffect">
                         <p:stCondLst>
                           <p:cond delay="400"/>
                         </p:stCondLst>
                         <p:childTnLst>
                           <p:animEffect transition="in" filter="fade">
                             <p:cBhvr>
-                              <p:cTn id="292" dur="700" fill="hold"/>
-                              <p:tgtEl>
-                                <p:spTgt spid="291"/>
+                              <p:cTn id="294" dur="700" fill="hold"/>
+                              <p:tgtEl>
+                                <p:spTgt spid="293"/>
                               </p:tgtEl>
                             </p:cBhvr>
                           </p:animEffect>
